--- a/docs/test/golden-outputs/p4-jamwon-r3/jamwon_dev_r3_basic.pptx
+++ b/docs/test/golden-outputs/p4-jamwon-r3/jamwon_dev_r3_basic.pptx
@@ -1781,7 +1781,7 @@
         <p:spPr>
           <a:xfrm>
             <a:off x="502920" y="3273552"/>
-            <a:ext cx="7315200" cy="365760"/>
+            <a:ext cx="7315200" cy="329184"/>
           </a:xfrm>
           <a:prstGeom prst="rect">
             <a:avLst/>
@@ -1819,8 +1819,8 @@
         </p:nvSpPr>
         <p:spPr>
           <a:xfrm>
-            <a:off x="502920" y="3639312"/>
-            <a:ext cx="7315200" cy="292608"/>
+            <a:off x="502920" y="3657600"/>
+            <a:ext cx="7315200" cy="256032"/>
           </a:xfrm>
           <a:prstGeom prst="rect">
             <a:avLst/>
@@ -1858,7 +1858,7 @@
         </p:nvSpPr>
         <p:spPr>
           <a:xfrm>
-            <a:off x="502920" y="4160520"/>
+            <a:off x="502920" y="4078224"/>
             <a:ext cx="1243584" cy="292608"/>
           </a:xfrm>
           <a:prstGeom prst="roundRect">
@@ -1880,7 +1880,7 @@
         </p:nvSpPr>
         <p:spPr>
           <a:xfrm>
-            <a:off x="502920" y="4160520"/>
+            <a:off x="502920" y="4078224"/>
             <a:ext cx="1243584" cy="292608"/>
           </a:xfrm>
           <a:prstGeom prst="rect">
@@ -1919,7 +1919,7 @@
         </p:nvSpPr>
         <p:spPr>
           <a:xfrm>
-            <a:off x="1837944" y="4160520"/>
+            <a:off x="1837944" y="4078224"/>
             <a:ext cx="1005840" cy="292608"/>
           </a:xfrm>
           <a:prstGeom prst="roundRect">
@@ -1941,7 +1941,7 @@
         </p:nvSpPr>
         <p:spPr>
           <a:xfrm>
-            <a:off x="1837944" y="4160520"/>
+            <a:off x="1837944" y="4078224"/>
             <a:ext cx="1005840" cy="292608"/>
           </a:xfrm>
           <a:prstGeom prst="rect">
@@ -1980,7 +1980,7 @@
         </p:nvSpPr>
         <p:spPr>
           <a:xfrm>
-            <a:off x="502920" y="4663440"/>
+            <a:off x="502920" y="4517136"/>
             <a:ext cx="6858000" cy="1051560"/>
           </a:xfrm>
           <a:prstGeom prst="roundRect">
@@ -2007,7 +2007,7 @@
         </p:nvSpPr>
         <p:spPr>
           <a:xfrm>
-            <a:off x="758952" y="4773168"/>
+            <a:off x="758952" y="4626864"/>
             <a:ext cx="6345936" cy="832104"/>
           </a:xfrm>
           <a:prstGeom prst="rect">
@@ -2110,7 +2110,7 @@
                 <a:ea typeface="맑은 고딕" pitchFamily="34" charset="-122"/>
                 <a:cs typeface="맑은 고딕" pitchFamily="34" charset="-120"/>
               </a:rPr>
-              <a:t>2026.09.20  |  담당자  |  CREDEAL</a:t>
+              <a:t>2026.09.22  |  담당자  |  CREDEAL</a:t>
             </a:r>
             <a:endParaRPr lang="en-US" sz="900" dirty="0"/>
           </a:p>
@@ -2149,7 +2149,7 @@
                 <a:ea typeface="맑은 고딕" pitchFamily="34" charset="-122"/>
                 <a:cs typeface="맑은 고딕" pitchFamily="34" charset="-120"/>
               </a:rPr>
-              <a:t>CRE DEAL   |   </a:t>
+              <a:t>CRE DEAL</a:t>
             </a:r>
             <a:endParaRPr lang="en-US" sz="800" dirty="0"/>
           </a:p>
@@ -2453,10 +2453,13 @@
           <a:lstStyle/>
           <a:p>
             <a:pPr indent="0" marL="0">
+              <a:lnSpc>
+                <a:spcPct val="100000"/>
+              </a:lnSpc>
               <a:buNone/>
             </a:pPr>
             <a:r>
-              <a:rPr lang="en-US" sz="1700" b="1" dirty="0">
+              <a:rPr lang="en-US" sz="1800" b="1" dirty="0">
                 <a:solidFill>
                   <a:srgbClr val="132A3A"/>
                 </a:solidFill>
@@ -2466,7 +2469,7 @@
               </a:rPr>
               <a:t>242.268억 원</a:t>
             </a:r>
-            <a:endParaRPr lang="en-US" sz="1700" dirty="0"/>
+            <a:endParaRPr lang="en-US" sz="1800" dirty="0"/>
           </a:p>
         </p:txBody>
       </p:sp>
@@ -2560,10 +2563,13 @@
           <a:lstStyle/>
           <a:p>
             <a:pPr indent="0" marL="0">
+              <a:lnSpc>
+                <a:spcPct val="100000"/>
+              </a:lnSpc>
               <a:buNone/>
             </a:pPr>
             <a:r>
-              <a:rPr lang="en-US" sz="1700" b="1" dirty="0">
+              <a:rPr lang="en-US" sz="2200" b="1" dirty="0">
                 <a:solidFill>
                   <a:srgbClr val="132A3A"/>
                 </a:solidFill>
@@ -2573,7 +2579,7 @@
               </a:rPr>
               <a:t>186.4평</a:t>
             </a:r>
-            <a:endParaRPr lang="en-US" sz="1700" dirty="0"/>
+            <a:endParaRPr lang="en-US" sz="2200" dirty="0"/>
           </a:p>
         </p:txBody>
       </p:sp>
@@ -2667,10 +2673,13 @@
           <a:lstStyle/>
           <a:p>
             <a:pPr indent="0" marL="0">
+              <a:lnSpc>
+                <a:spcPct val="100000"/>
+              </a:lnSpc>
               <a:buNone/>
             </a:pPr>
             <a:r>
-              <a:rPr lang="en-US" sz="1700" b="1" dirty="0">
+              <a:rPr lang="en-US" sz="2200" b="1" dirty="0">
                 <a:solidFill>
                   <a:srgbClr val="132A3A"/>
                 </a:solidFill>
@@ -2680,7 +2689,7 @@
               </a:rPr>
               <a:t>614.9평</a:t>
             </a:r>
-            <a:endParaRPr lang="en-US" sz="1700" dirty="0"/>
+            <a:endParaRPr lang="en-US" sz="2200" dirty="0"/>
           </a:p>
         </p:txBody>
       </p:sp>
@@ -2774,10 +2783,13 @@
           <a:lstStyle/>
           <a:p>
             <a:pPr indent="0" marL="0">
+              <a:lnSpc>
+                <a:spcPct val="100000"/>
+              </a:lnSpc>
               <a:buNone/>
             </a:pPr>
             <a:r>
-              <a:rPr lang="en-US" sz="1700" b="1" dirty="0">
+              <a:rPr lang="en-US" sz="2200" b="1" dirty="0">
                 <a:solidFill>
                   <a:srgbClr val="132A3A"/>
                 </a:solidFill>
@@ -2787,7 +2799,7 @@
               </a:rPr>
               <a:t>B1/F5</a:t>
             </a:r>
-            <a:endParaRPr lang="en-US" sz="1700" dirty="0"/>
+            <a:endParaRPr lang="en-US" sz="2200" dirty="0"/>
           </a:p>
         </p:txBody>
       </p:sp>
@@ -2843,7 +2855,7 @@
               <a:buNone/>
             </a:pPr>
             <a:r>
-              <a:rPr lang="en-US" sz="950" dirty="0">
+              <a:rPr lang="en-US" sz="850" dirty="0">
                 <a:solidFill>
                   <a:srgbClr val="5B6B73"/>
                 </a:solidFill>
@@ -2853,7 +2865,7 @@
               </a:rPr>
               <a:t>연 수익률(Cap Rate)</a:t>
             </a:r>
-            <a:endParaRPr lang="en-US" sz="950" dirty="0"/>
+            <a:endParaRPr lang="en-US" sz="850" dirty="0"/>
           </a:p>
         </p:txBody>
       </p:sp>
@@ -2881,10 +2893,13 @@
           <a:lstStyle/>
           <a:p>
             <a:pPr indent="0" marL="0">
+              <a:lnSpc>
+                <a:spcPct val="100000"/>
+              </a:lnSpc>
               <a:buNone/>
             </a:pPr>
             <a:r>
-              <a:rPr lang="en-US" sz="1700" b="1" dirty="0">
+              <a:rPr lang="en-US" sz="2200" b="1" dirty="0">
                 <a:solidFill>
                   <a:srgbClr val="132A3A"/>
                 </a:solidFill>
@@ -2894,7 +2909,7 @@
               </a:rPr>
               <a:t>1.27%</a:t>
             </a:r>
-            <a:endParaRPr lang="en-US" sz="1700" dirty="0"/>
+            <a:endParaRPr lang="en-US" sz="2200" dirty="0"/>
           </a:p>
         </p:txBody>
       </p:sp>
@@ -2988,10 +3003,13 @@
           <a:lstStyle/>
           <a:p>
             <a:pPr indent="0" marL="0">
+              <a:lnSpc>
+                <a:spcPct val="100000"/>
+              </a:lnSpc>
               <a:buNone/>
             </a:pPr>
             <a:r>
-              <a:rPr lang="en-US" sz="1700" b="1" dirty="0">
+              <a:rPr lang="en-US" sz="1400" b="1" dirty="0">
                 <a:solidFill>
                   <a:srgbClr val="132A3A"/>
                 </a:solidFill>
@@ -3001,7 +3019,7 @@
               </a:rPr>
               <a:t>만실 운영 (공실 0%)</a:t>
             </a:r>
-            <a:endParaRPr lang="en-US" sz="1700" dirty="0"/>
+            <a:endParaRPr lang="en-US" sz="1400" dirty="0"/>
           </a:p>
         </p:txBody>
       </p:sp>
@@ -3473,7 +3491,7 @@
                 <a:ea typeface="맑은 고딕" pitchFamily="34" charset="-122"/>
                 <a:cs typeface="맑은 고딕" pitchFamily="34" charset="-120"/>
               </a:rPr>
-              <a:t>CRE DEAL   |   </a:t>
+              <a:t>CRE DEAL</a:t>
             </a:r>
             <a:endParaRPr lang="en-US" sz="800" dirty="0"/>
           </a:p>
@@ -3735,7 +3753,7 @@
         <p:spPr>
           <a:xfrm>
             <a:off x="502920" y="1645920"/>
-            <a:ext cx="1920240" cy="347472"/>
+            <a:ext cx="1920240" cy="329184"/>
           </a:xfrm>
           <a:prstGeom prst="rect">
             <a:avLst/>
@@ -3777,7 +3795,7 @@
         <p:spPr>
           <a:xfrm>
             <a:off x="2423160" y="1645920"/>
-            <a:ext cx="4937760" cy="347472"/>
+            <a:ext cx="4937760" cy="329184"/>
           </a:xfrm>
           <a:prstGeom prst="rect">
             <a:avLst/>
@@ -3818,7 +3836,7 @@
         </p:nvSpPr>
         <p:spPr>
           <a:xfrm>
-            <a:off x="502920" y="1993392"/>
+            <a:off x="502920" y="1975104"/>
             <a:ext cx="6858000" cy="0"/>
           </a:xfrm>
           <a:prstGeom prst="line">
@@ -3841,8 +3859,8 @@
         </p:nvSpPr>
         <p:spPr>
           <a:xfrm>
-            <a:off x="502920" y="1993392"/>
-            <a:ext cx="1920240" cy="347472"/>
+            <a:off x="502920" y="1975104"/>
+            <a:ext cx="1920240" cy="329184"/>
           </a:xfrm>
           <a:prstGeom prst="rect">
             <a:avLst/>
@@ -3883,8 +3901,8 @@
         </p:nvSpPr>
         <p:spPr>
           <a:xfrm>
-            <a:off x="2423160" y="1993392"/>
-            <a:ext cx="4937760" cy="347472"/>
+            <a:off x="2423160" y="1975104"/>
+            <a:ext cx="4937760" cy="329184"/>
           </a:xfrm>
           <a:prstGeom prst="rect">
             <a:avLst/>
@@ -3925,7 +3943,7 @@
         </p:nvSpPr>
         <p:spPr>
           <a:xfrm>
-            <a:off x="502920" y="2340864"/>
+            <a:off x="502920" y="2304288"/>
             <a:ext cx="6858000" cy="0"/>
           </a:xfrm>
           <a:prstGeom prst="line">
@@ -3948,8 +3966,8 @@
         </p:nvSpPr>
         <p:spPr>
           <a:xfrm>
-            <a:off x="502920" y="2340864"/>
-            <a:ext cx="1920240" cy="347472"/>
+            <a:off x="502920" y="2304288"/>
+            <a:ext cx="1920240" cy="329184"/>
           </a:xfrm>
           <a:prstGeom prst="rect">
             <a:avLst/>
@@ -3990,8 +4008,8 @@
         </p:nvSpPr>
         <p:spPr>
           <a:xfrm>
-            <a:off x="2423160" y="2340864"/>
-            <a:ext cx="4937760" cy="347472"/>
+            <a:off x="2423160" y="2304288"/>
+            <a:ext cx="4937760" cy="329184"/>
           </a:xfrm>
           <a:prstGeom prst="rect">
             <a:avLst/>
@@ -4032,7 +4050,7 @@
         </p:nvSpPr>
         <p:spPr>
           <a:xfrm>
-            <a:off x="502920" y="2688336"/>
+            <a:off x="502920" y="2633472"/>
             <a:ext cx="6858000" cy="0"/>
           </a:xfrm>
           <a:prstGeom prst="line">
@@ -4055,8 +4073,8 @@
         </p:nvSpPr>
         <p:spPr>
           <a:xfrm>
-            <a:off x="502920" y="2688336"/>
-            <a:ext cx="1920240" cy="347472"/>
+            <a:off x="502920" y="2633472"/>
+            <a:ext cx="1920240" cy="329184"/>
           </a:xfrm>
           <a:prstGeom prst="rect">
             <a:avLst/>
@@ -4097,8 +4115,8 @@
         </p:nvSpPr>
         <p:spPr>
           <a:xfrm>
-            <a:off x="2423160" y="2688336"/>
-            <a:ext cx="4937760" cy="347472"/>
+            <a:off x="2423160" y="2633472"/>
+            <a:ext cx="4937760" cy="329184"/>
           </a:xfrm>
           <a:prstGeom prst="rect">
             <a:avLst/>
@@ -4139,7 +4157,7 @@
         </p:nvSpPr>
         <p:spPr>
           <a:xfrm>
-            <a:off x="502920" y="3035808"/>
+            <a:off x="502920" y="2962656"/>
             <a:ext cx="6858000" cy="0"/>
           </a:xfrm>
           <a:prstGeom prst="line">
@@ -4162,8 +4180,8 @@
         </p:nvSpPr>
         <p:spPr>
           <a:xfrm>
-            <a:off x="502920" y="3035808"/>
-            <a:ext cx="1920240" cy="347472"/>
+            <a:off x="502920" y="2962656"/>
+            <a:ext cx="1920240" cy="329184"/>
           </a:xfrm>
           <a:prstGeom prst="rect">
             <a:avLst/>
@@ -4204,8 +4222,8 @@
         </p:nvSpPr>
         <p:spPr>
           <a:xfrm>
-            <a:off x="2423160" y="3035808"/>
-            <a:ext cx="4937760" cy="347472"/>
+            <a:off x="2423160" y="2962656"/>
+            <a:ext cx="4937760" cy="329184"/>
           </a:xfrm>
           <a:prstGeom prst="rect">
             <a:avLst/>
@@ -4246,7 +4264,7 @@
         </p:nvSpPr>
         <p:spPr>
           <a:xfrm>
-            <a:off x="502920" y="3383280"/>
+            <a:off x="502920" y="3291840"/>
             <a:ext cx="6858000" cy="0"/>
           </a:xfrm>
           <a:prstGeom prst="line">
@@ -4269,8 +4287,8 @@
         </p:nvSpPr>
         <p:spPr>
           <a:xfrm>
-            <a:off x="502920" y="3383280"/>
-            <a:ext cx="1920240" cy="347472"/>
+            <a:off x="502920" y="3291840"/>
+            <a:ext cx="1920240" cy="329184"/>
           </a:xfrm>
           <a:prstGeom prst="rect">
             <a:avLst/>
@@ -4311,8 +4329,8 @@
         </p:nvSpPr>
         <p:spPr>
           <a:xfrm>
-            <a:off x="2423160" y="3383280"/>
-            <a:ext cx="4937760" cy="347472"/>
+            <a:off x="2423160" y="3291840"/>
+            <a:ext cx="4937760" cy="329184"/>
           </a:xfrm>
           <a:prstGeom prst="rect">
             <a:avLst/>
@@ -4353,7 +4371,7 @@
         </p:nvSpPr>
         <p:spPr>
           <a:xfrm>
-            <a:off x="502920" y="3730752"/>
+            <a:off x="502920" y="3621024"/>
             <a:ext cx="6858000" cy="0"/>
           </a:xfrm>
           <a:prstGeom prst="line">
@@ -4376,8 +4394,8 @@
         </p:nvSpPr>
         <p:spPr>
           <a:xfrm>
-            <a:off x="502920" y="3730752"/>
-            <a:ext cx="1920240" cy="347472"/>
+            <a:off x="502920" y="3621024"/>
+            <a:ext cx="1920240" cy="329184"/>
           </a:xfrm>
           <a:prstGeom prst="rect">
             <a:avLst/>
@@ -4418,8 +4436,8 @@
         </p:nvSpPr>
         <p:spPr>
           <a:xfrm>
-            <a:off x="2423160" y="3730752"/>
-            <a:ext cx="4937760" cy="347472"/>
+            <a:off x="2423160" y="3621024"/>
+            <a:ext cx="4937760" cy="329184"/>
           </a:xfrm>
           <a:prstGeom prst="rect">
             <a:avLst/>
@@ -4460,7 +4478,7 @@
         </p:nvSpPr>
         <p:spPr>
           <a:xfrm>
-            <a:off x="502920" y="4078224"/>
+            <a:off x="502920" y="3950208"/>
             <a:ext cx="6858000" cy="0"/>
           </a:xfrm>
           <a:prstGeom prst="line">
@@ -4483,8 +4501,8 @@
         </p:nvSpPr>
         <p:spPr>
           <a:xfrm>
-            <a:off x="502920" y="4078224"/>
-            <a:ext cx="1920240" cy="347472"/>
+            <a:off x="502920" y="3950208"/>
+            <a:ext cx="1920240" cy="329184"/>
           </a:xfrm>
           <a:prstGeom prst="rect">
             <a:avLst/>
@@ -4525,8 +4543,8 @@
         </p:nvSpPr>
         <p:spPr>
           <a:xfrm>
-            <a:off x="2423160" y="4078224"/>
-            <a:ext cx="4937760" cy="347472"/>
+            <a:off x="2423160" y="3950208"/>
+            <a:ext cx="4937760" cy="329184"/>
           </a:xfrm>
           <a:prstGeom prst="rect">
             <a:avLst/>
@@ -4567,7 +4585,7 @@
         </p:nvSpPr>
         <p:spPr>
           <a:xfrm>
-            <a:off x="502920" y="4517136"/>
+            <a:off x="502920" y="4389120"/>
             <a:ext cx="6858000" cy="1005840"/>
           </a:xfrm>
           <a:prstGeom prst="rect">
@@ -4592,7 +4610,7 @@
         </p:nvSpPr>
         <p:spPr>
           <a:xfrm>
-            <a:off x="685800" y="4517136"/>
+            <a:off x="685800" y="4389120"/>
             <a:ext cx="2726741" cy="502920"/>
           </a:xfrm>
           <a:prstGeom prst="rect">
@@ -4631,7 +4649,7 @@
         </p:nvSpPr>
         <p:spPr>
           <a:xfrm>
-            <a:off x="3412541" y="4517136"/>
+            <a:off x="3412541" y="4389120"/>
             <a:ext cx="3765499" cy="502920"/>
           </a:xfrm>
           <a:prstGeom prst="rect">
@@ -4670,7 +4688,7 @@
         </p:nvSpPr>
         <p:spPr>
           <a:xfrm>
-            <a:off x="640080" y="5020056"/>
+            <a:off x="640080" y="4892040"/>
             <a:ext cx="6583680" cy="0"/>
           </a:xfrm>
           <a:prstGeom prst="line">
@@ -4693,7 +4711,7 @@
         </p:nvSpPr>
         <p:spPr>
           <a:xfrm>
-            <a:off x="685800" y="5020056"/>
+            <a:off x="685800" y="4892040"/>
             <a:ext cx="2726741" cy="457200"/>
           </a:xfrm>
           <a:prstGeom prst="rect">
@@ -4732,7 +4750,7 @@
         </p:nvSpPr>
         <p:spPr>
           <a:xfrm>
-            <a:off x="3412541" y="5020056"/>
+            <a:off x="3412541" y="4892040"/>
             <a:ext cx="3765499" cy="457200"/>
           </a:xfrm>
           <a:prstGeom prst="rect">
@@ -4904,7 +4922,55 @@
                 <a:ea typeface="맑은 고딕" pitchFamily="34" charset="-122"/>
                 <a:cs typeface="맑은 고딕" pitchFamily="34" charset="-120"/>
               </a:rPr>
-              <a:t>투자 검토 대상 상업용 자산\n• 권리관계 및 임대차 현황 실사 확인 필요\n• 상세 인접 인프라 및 입지 환경 분석 권장</a:t>
+              <a:t>투자 검토 대상 상업용 자산</a:t>
+            </a:r>
+            <a:endParaRPr lang="en-US" sz="980" dirty="0"/>
+          </a:p>
+          <a:p>
+            <a:pPr marL="342900" indent="-342900">
+              <a:lnSpc>
+                <a:spcPct val="108000"/>
+              </a:lnSpc>
+              <a:spcBef>
+                <a:spcPts val="300"/>
+              </a:spcBef>
+              <a:buSzPct val="100000"/>
+              <a:buChar char="•"/>
+            </a:pPr>
+            <a:r>
+              <a:rPr lang="en-US" sz="980" dirty="0">
+                <a:solidFill>
+                  <a:srgbClr val="2B2B2B"/>
+                </a:solidFill>
+                <a:latin typeface="맑은 고딕" pitchFamily="34" charset="0"/>
+                <a:ea typeface="맑은 고딕" pitchFamily="34" charset="-122"/>
+                <a:cs typeface="맑은 고딕" pitchFamily="34" charset="-120"/>
+              </a:rPr>
+              <a:t>권리관계 및 임대차 계약 구조 분석</a:t>
+            </a:r>
+            <a:endParaRPr lang="en-US" sz="980" dirty="0"/>
+          </a:p>
+          <a:p>
+            <a:pPr marL="342900" indent="-342900">
+              <a:lnSpc>
+                <a:spcPct val="108000"/>
+              </a:lnSpc>
+              <a:spcBef>
+                <a:spcPts val="300"/>
+              </a:spcBef>
+              <a:buSzPct val="100000"/>
+              <a:buChar char="•"/>
+            </a:pPr>
+            <a:r>
+              <a:rPr lang="en-US" sz="980" dirty="0">
+                <a:solidFill>
+                  <a:srgbClr val="2B2B2B"/>
+                </a:solidFill>
+                <a:latin typeface="맑은 고딕" pitchFamily="34" charset="0"/>
+                <a:ea typeface="맑은 고딕" pitchFamily="34" charset="-122"/>
+                <a:cs typeface="맑은 고딕" pitchFamily="34" charset="-120"/>
+              </a:rPr>
+              <a:t>상세 인접 인프라 및 입지 환경 분석</a:t>
             </a:r>
             <a:endParaRPr lang="en-US" sz="980" dirty="0"/>
           </a:p>
@@ -5028,46 +5094,94 @@
                 <a:ea typeface="맑은 고딕" pitchFamily="34" charset="-122"/>
                 <a:cs typeface="맑은 고딕" pitchFamily="34" charset="-120"/>
               </a:rPr>
-              <a:t>투자 검토 대상 자산\n• 임대차 계약 현황 및 운영비 실사 확인 필요\n• 매입 후 운용 계획에 따른 수익성 분석 권장</a:t>
+              <a:t>투자 검토 대상 자산</a:t>
             </a:r>
             <a:endParaRPr lang="en-US" sz="980" dirty="0"/>
           </a:p>
-        </p:txBody>
-      </p:sp>
-      <p:sp>
-        <p:nvSpPr>
-          <p:cNvPr id="45" name="Text 43"/>
-          <p:cNvSpPr/>
-          <p:nvPr/>
-        </p:nvSpPr>
-        <p:spPr>
-          <a:xfrm>
-            <a:off x="502920" y="6382512"/>
-            <a:ext cx="7315200" cy="219456"/>
-          </a:xfrm>
-          <a:prstGeom prst="rect">
-            <a:avLst/>
-          </a:prstGeom>
-          <a:noFill/>
-          <a:ln/>
-        </p:spPr>
-        <p:txBody>
-          <a:bodyPr wrap="square" lIns="0" tIns="0" rIns="0" bIns="0" rtlCol="0" anchor="ctr"/>
-          <a:lstStyle/>
-          <a:p>
-            <a:pPr indent="0" marL="0">
-              <a:buNone/>
-            </a:pPr>
-            <a:r>
-              <a:rPr lang="en-US" sz="800" dirty="0">
-                <a:solidFill>
-                  <a:srgbClr val="5B6B73"/>
+          <a:p>
+            <a:pPr marL="342900" indent="-342900">
+              <a:lnSpc>
+                <a:spcPct val="108000"/>
+              </a:lnSpc>
+              <a:spcBef>
+                <a:spcPts val="300"/>
+              </a:spcBef>
+              <a:buSzPct val="100000"/>
+              <a:buChar char="•"/>
+            </a:pPr>
+            <a:r>
+              <a:rPr lang="en-US" sz="980" dirty="0">
+                <a:solidFill>
+                  <a:srgbClr val="2B2B2B"/>
                 </a:solidFill>
                 <a:latin typeface="맑은 고딕" pitchFamily="34" charset="0"/>
                 <a:ea typeface="맑은 고딕" pitchFamily="34" charset="-122"/>
                 <a:cs typeface="맑은 고딕" pitchFamily="34" charset="-120"/>
               </a:rPr>
-              <a:t>CRE DEAL   |   </a:t>
+              <a:t>임대차 계약 조건 및 운영비 구조 분석</a:t>
+            </a:r>
+            <a:endParaRPr lang="en-US" sz="980" dirty="0"/>
+          </a:p>
+          <a:p>
+            <a:pPr marL="342900" indent="-342900">
+              <a:lnSpc>
+                <a:spcPct val="108000"/>
+              </a:lnSpc>
+              <a:spcBef>
+                <a:spcPts val="300"/>
+              </a:spcBef>
+              <a:buSzPct val="100000"/>
+              <a:buChar char="•"/>
+            </a:pPr>
+            <a:r>
+              <a:rPr lang="en-US" sz="980" dirty="0">
+                <a:solidFill>
+                  <a:srgbClr val="2B2B2B"/>
+                </a:solidFill>
+                <a:latin typeface="맑은 고딕" pitchFamily="34" charset="0"/>
+                <a:ea typeface="맑은 고딕" pitchFamily="34" charset="-122"/>
+                <a:cs typeface="맑은 고딕" pitchFamily="34" charset="-120"/>
+              </a:rPr>
+              <a:t>매입 후 운용 계획에 따른 수익성 분석</a:t>
+            </a:r>
+            <a:endParaRPr lang="en-US" sz="980" dirty="0"/>
+          </a:p>
+        </p:txBody>
+      </p:sp>
+      <p:sp>
+        <p:nvSpPr>
+          <p:cNvPr id="45" name="Text 43"/>
+          <p:cNvSpPr/>
+          <p:nvPr/>
+        </p:nvSpPr>
+        <p:spPr>
+          <a:xfrm>
+            <a:off x="502920" y="6382512"/>
+            <a:ext cx="7315200" cy="219456"/>
+          </a:xfrm>
+          <a:prstGeom prst="rect">
+            <a:avLst/>
+          </a:prstGeom>
+          <a:noFill/>
+          <a:ln/>
+        </p:spPr>
+        <p:txBody>
+          <a:bodyPr wrap="square" lIns="0" tIns="0" rIns="0" bIns="0" rtlCol="0" anchor="ctr"/>
+          <a:lstStyle/>
+          <a:p>
+            <a:pPr indent="0" marL="0">
+              <a:buNone/>
+            </a:pPr>
+            <a:r>
+              <a:rPr lang="en-US" sz="800" dirty="0">
+                <a:solidFill>
+                  <a:srgbClr val="5B6B73"/>
+                </a:solidFill>
+                <a:latin typeface="맑은 고딕" pitchFamily="34" charset="0"/>
+                <a:ea typeface="맑은 고딕" pitchFamily="34" charset="-122"/>
+                <a:cs typeface="맑은 고딕" pitchFamily="34" charset="-120"/>
+              </a:rPr>
+              <a:t>CRE DEAL</a:t>
             </a:r>
             <a:endParaRPr lang="en-US" sz="800" dirty="0"/>
           </a:p>
@@ -5353,7 +5467,7 @@
         <p:spPr>
           <a:xfrm>
             <a:off x="5989320" y="1801368"/>
-            <a:ext cx="1560003" cy="493776"/>
+            <a:ext cx="1560003" cy="457200"/>
           </a:xfrm>
           <a:prstGeom prst="rect">
             <a:avLst/>
@@ -5372,7 +5486,7 @@
               <a:buNone/>
             </a:pPr>
             <a:r>
-              <a:rPr lang="en-US" sz="1300" dirty="0">
+              <a:rPr lang="en-US" sz="1250" dirty="0">
                 <a:solidFill>
                   <a:srgbClr val="5B6B73"/>
                 </a:solidFill>
@@ -5380,9 +5494,9 @@
                 <a:ea typeface="맑은 고딕" pitchFamily="34" charset="-122"/>
                 <a:cs typeface="맑은 고딕" pitchFamily="34" charset="-120"/>
               </a:rPr>
-              <a:t>대중교통</a:t>
-            </a:r>
-            <a:endParaRPr lang="en-US" sz="1300" dirty="0"/>
+              <a:t>소재지</a:t>
+            </a:r>
+            <a:endParaRPr lang="en-US" sz="1250" dirty="0"/>
           </a:p>
         </p:txBody>
       </p:sp>
@@ -5395,7 +5509,7 @@
         <p:spPr>
           <a:xfrm>
             <a:off x="7549323" y="1801368"/>
-            <a:ext cx="4011436" cy="493776"/>
+            <a:ext cx="4011436" cy="457200"/>
           </a:xfrm>
           <a:prstGeom prst="rect">
             <a:avLst/>
@@ -5414,7 +5528,7 @@
               <a:buNone/>
             </a:pPr>
             <a:r>
-              <a:rPr lang="en-US" sz="1300" b="1" dirty="0">
+              <a:rPr lang="en-US" sz="1250" b="1" dirty="0">
                 <a:solidFill>
                   <a:srgbClr val="132A3A"/>
                 </a:solidFill>
@@ -5422,9 +5536,9 @@
                 <a:ea typeface="맑은 고딕" pitchFamily="34" charset="-122"/>
                 <a:cs typeface="맑은 고딕" pitchFamily="34" charset="-120"/>
               </a:rPr>
-              <a:t>인접 지하철역 역세권 (상세 확인 필요)</a:t>
-            </a:r>
-            <a:endParaRPr lang="en-US" sz="1300" dirty="0"/>
+              <a:t>서울특별시 서초구 잠원동 26-14, 16번지</a:t>
+            </a:r>
+            <a:endParaRPr lang="en-US" sz="1250" dirty="0"/>
           </a:p>
         </p:txBody>
       </p:sp>
@@ -5436,7 +5550,7 @@
         </p:nvSpPr>
         <p:spPr>
           <a:xfrm>
-            <a:off x="5989320" y="2295144"/>
+            <a:off x="5989320" y="2258568"/>
             <a:ext cx="5571439" cy="0"/>
           </a:xfrm>
           <a:prstGeom prst="line">
@@ -5459,8 +5573,8 @@
         </p:nvSpPr>
         <p:spPr>
           <a:xfrm>
-            <a:off x="5989320" y="2295144"/>
-            <a:ext cx="1560003" cy="493776"/>
+            <a:off x="5989320" y="2258568"/>
+            <a:ext cx="1560003" cy="457200"/>
           </a:xfrm>
           <a:prstGeom prst="rect">
             <a:avLst/>
@@ -5479,7 +5593,7 @@
               <a:buNone/>
             </a:pPr>
             <a:r>
-              <a:rPr lang="en-US" sz="1300" dirty="0">
+              <a:rPr lang="en-US" sz="1250" dirty="0">
                 <a:solidFill>
                   <a:srgbClr val="5B6B73"/>
                 </a:solidFill>
@@ -5487,9 +5601,9 @@
                 <a:ea typeface="맑은 고딕" pitchFamily="34" charset="-122"/>
                 <a:cs typeface="맑은 고딕" pitchFamily="34" charset="-120"/>
               </a:rPr>
-              <a:t>상권권역</a:t>
-            </a:r>
-            <a:endParaRPr lang="en-US" sz="1300" dirty="0"/>
+              <a:t>대중교통</a:t>
+            </a:r>
+            <a:endParaRPr lang="en-US" sz="1250" dirty="0"/>
           </a:p>
         </p:txBody>
       </p:sp>
@@ -5501,8 +5615,8 @@
         </p:nvSpPr>
         <p:spPr>
           <a:xfrm>
-            <a:off x="7549323" y="2295144"/>
-            <a:ext cx="4011436" cy="493776"/>
+            <a:off x="7549323" y="2258568"/>
+            <a:ext cx="4011436" cy="457200"/>
           </a:xfrm>
           <a:prstGeom prst="rect">
             <a:avLst/>
@@ -5521,7 +5635,7 @@
               <a:buNone/>
             </a:pPr>
             <a:r>
-              <a:rPr lang="en-US" sz="1300" b="1" dirty="0">
+              <a:rPr lang="en-US" sz="1250" b="1" dirty="0">
                 <a:solidFill>
                   <a:srgbClr val="132A3A"/>
                 </a:solidFill>
@@ -5529,9 +5643,9 @@
                 <a:ea typeface="맑은 고딕" pitchFamily="34" charset="-122"/>
                 <a:cs typeface="맑은 고딕" pitchFamily="34" charset="-120"/>
               </a:rPr>
-              <a:t>242억 주요 상업·업무 권역</a:t>
-            </a:r>
-            <a:endParaRPr lang="en-US" sz="1300" dirty="0"/>
+              <a:t>지하철 및 간선버스 인접</a:t>
+            </a:r>
+            <a:endParaRPr lang="en-US" sz="1250" dirty="0"/>
           </a:p>
         </p:txBody>
       </p:sp>
@@ -5543,7 +5657,114 @@
         </p:nvSpPr>
         <p:spPr>
           <a:xfrm>
-            <a:off x="5989320" y="2926080"/>
+            <a:off x="5989320" y="2715768"/>
+            <a:ext cx="5571439" cy="0"/>
+          </a:xfrm>
+          <a:prstGeom prst="line">
+            <a:avLst/>
+          </a:prstGeom>
+          <a:noFill/>
+          <a:ln w="3810">
+            <a:solidFill>
+              <a:srgbClr val="CBD5E0"/>
+            </a:solidFill>
+            <a:prstDash val="solid"/>
+          </a:ln>
+        </p:spPr>
+      </p:sp>
+      <p:sp>
+        <p:nvSpPr>
+          <p:cNvPr id="14" name="Text 11"/>
+          <p:cNvSpPr/>
+          <p:nvPr/>
+        </p:nvSpPr>
+        <p:spPr>
+          <a:xfrm>
+            <a:off x="5989320" y="2715768"/>
+            <a:ext cx="1560003" cy="457200"/>
+          </a:xfrm>
+          <a:prstGeom prst="rect">
+            <a:avLst/>
+          </a:prstGeom>
+          <a:noFill/>
+          <a:ln/>
+        </p:spPr>
+        <p:txBody>
+          <a:bodyPr wrap="square" lIns="0" tIns="0" rIns="0" bIns="0" rtlCol="0" anchor="ctr"/>
+          <a:lstStyle/>
+          <a:p>
+            <a:pPr indent="0" marL="0">
+              <a:lnSpc>
+                <a:spcPct val="115000"/>
+              </a:lnSpc>
+              <a:buNone/>
+            </a:pPr>
+            <a:r>
+              <a:rPr lang="en-US" sz="1250" dirty="0">
+                <a:solidFill>
+                  <a:srgbClr val="5B6B73"/>
+                </a:solidFill>
+                <a:latin typeface="맑은 고딕" pitchFamily="34" charset="0"/>
+                <a:ea typeface="맑은 고딕" pitchFamily="34" charset="-122"/>
+                <a:cs typeface="맑은 고딕" pitchFamily="34" charset="-120"/>
+              </a:rPr>
+              <a:t>상권권역</a:t>
+            </a:r>
+            <a:endParaRPr lang="en-US" sz="1250" dirty="0"/>
+          </a:p>
+        </p:txBody>
+      </p:sp>
+      <p:sp>
+        <p:nvSpPr>
+          <p:cNvPr id="15" name="Text 12"/>
+          <p:cNvSpPr/>
+          <p:nvPr/>
+        </p:nvSpPr>
+        <p:spPr>
+          <a:xfrm>
+            <a:off x="7549323" y="2715768"/>
+            <a:ext cx="4011436" cy="457200"/>
+          </a:xfrm>
+          <a:prstGeom prst="rect">
+            <a:avLst/>
+          </a:prstGeom>
+          <a:noFill/>
+          <a:ln/>
+        </p:spPr>
+        <p:txBody>
+          <a:bodyPr wrap="square" lIns="0" tIns="0" rIns="0" bIns="0" rtlCol="0" anchor="ctr"/>
+          <a:lstStyle/>
+          <a:p>
+            <a:pPr indent="0" marL="0">
+              <a:lnSpc>
+                <a:spcPct val="115000"/>
+              </a:lnSpc>
+              <a:buNone/>
+            </a:pPr>
+            <a:r>
+              <a:rPr lang="en-US" sz="1250" b="1" dirty="0">
+                <a:solidFill>
+                  <a:srgbClr val="132A3A"/>
+                </a:solidFill>
+                <a:latin typeface="맑은 고딕" pitchFamily="34" charset="0"/>
+                <a:ea typeface="맑은 고딕" pitchFamily="34" charset="-122"/>
+                <a:cs typeface="맑은 고딕" pitchFamily="34" charset="-120"/>
+              </a:rPr>
+              <a:t>GBD 주요 상업·업무 권역</a:t>
+            </a:r>
+            <a:endParaRPr lang="en-US" sz="1250" dirty="0"/>
+          </a:p>
+        </p:txBody>
+      </p:sp>
+      <p:sp>
+        <p:nvSpPr>
+          <p:cNvPr id="16" name="Shape 13"/>
+          <p:cNvSpPr/>
+          <p:nvPr/>
+        </p:nvSpPr>
+        <p:spPr>
+          <a:xfrm>
+            <a:off x="5989320" y="3282696"/>
             <a:ext cx="5571439" cy="658368"/>
           </a:xfrm>
           <a:prstGeom prst="roundRect">
@@ -5559,13 +5780,13 @@
       </p:sp>
       <p:sp>
         <p:nvSpPr>
-          <p:cNvPr id="14" name="Shape 11"/>
-          <p:cNvSpPr/>
-          <p:nvPr/>
-        </p:nvSpPr>
-        <p:spPr>
-          <a:xfrm>
-            <a:off x="5989320" y="2980944"/>
+          <p:cNvPr id="17" name="Shape 14"/>
+          <p:cNvSpPr/>
+          <p:nvPr/>
+        </p:nvSpPr>
+        <p:spPr>
+          <a:xfrm>
+            <a:off x="5989320" y="3337560"/>
             <a:ext cx="36576" cy="548640"/>
           </a:xfrm>
           <a:prstGeom prst="rect">
@@ -5579,13 +5800,13 @@
       </p:sp>
       <p:sp>
         <p:nvSpPr>
-          <p:cNvPr id="15" name="Text 12"/>
-          <p:cNvSpPr/>
-          <p:nvPr/>
-        </p:nvSpPr>
-        <p:spPr>
-          <a:xfrm>
-            <a:off x="6135624" y="3017520"/>
+          <p:cNvPr id="18" name="Text 15"/>
+          <p:cNvSpPr/>
+          <p:nvPr/>
+        </p:nvSpPr>
+        <p:spPr>
+          <a:xfrm>
+            <a:off x="6135624" y="3374136"/>
             <a:ext cx="5315407" cy="201168"/>
           </a:xfrm>
           <a:prstGeom prst="rect">
@@ -5618,13 +5839,13 @@
       </p:sp>
       <p:sp>
         <p:nvSpPr>
-          <p:cNvPr id="16" name="Text 13"/>
-          <p:cNvSpPr/>
-          <p:nvPr/>
-        </p:nvSpPr>
-        <p:spPr>
-          <a:xfrm>
-            <a:off x="6135624" y="3218688"/>
+          <p:cNvPr id="19" name="Text 16"/>
+          <p:cNvSpPr/>
+          <p:nvPr/>
+        </p:nvSpPr>
+        <p:spPr>
+          <a:xfrm>
+            <a:off x="6135624" y="3575304"/>
             <a:ext cx="5315407" cy="329184"/>
           </a:xfrm>
           <a:prstGeom prst="rect">
@@ -5653,7 +5874,7 @@
                 <a:ea typeface="맑은 고딕" pitchFamily="34" charset="-122"/>
                 <a:cs typeface="맑은 고딕" pitchFamily="34" charset="-120"/>
               </a:rPr>
-              <a:t>242억 배후 상권 기반 안정적 임대 수요</a:t>
+              <a:t>GBD 배후 상권 기반 안정적 임대 수요</a:t>
             </a:r>
             <a:endParaRPr lang="en-US" sz="980" dirty="0"/>
           </a:p>
@@ -5661,7 +5882,7 @@
       </p:sp>
       <p:sp>
         <p:nvSpPr>
-          <p:cNvPr id="17" name="Text 14"/>
+          <p:cNvPr id="20" name="Text 17"/>
           <p:cNvSpPr/>
           <p:nvPr/>
         </p:nvSpPr>
@@ -5692,7 +5913,7 @@
                 <a:ea typeface="맑은 고딕" pitchFamily="34" charset="-122"/>
                 <a:cs typeface="맑은 고딕" pitchFamily="34" charset="-120"/>
               </a:rPr>
-              <a:t>CRE DEAL   |   </a:t>
+              <a:t>CRE DEAL</a:t>
             </a:r>
             <a:endParaRPr lang="en-US" sz="800" dirty="0"/>
           </a:p>
@@ -5700,7 +5921,7 @@
       </p:sp>
       <p:sp>
         <p:nvSpPr>
-          <p:cNvPr id="18" name="Text 15"/>
+          <p:cNvPr id="21" name="Text 18"/>
           <p:cNvSpPr/>
           <p:nvPr/>
         </p:nvSpPr>
@@ -5954,7 +6175,7 @@
         <p:spPr>
           <a:xfrm>
             <a:off x="502920" y="1645920"/>
-            <a:ext cx="1920240" cy="420624"/>
+            <a:ext cx="1920240" cy="402336"/>
           </a:xfrm>
           <a:prstGeom prst="rect">
             <a:avLst/>
@@ -5996,7 +6217,7 @@
         <p:spPr>
           <a:xfrm>
             <a:off x="2423160" y="1645920"/>
-            <a:ext cx="4937760" cy="420624"/>
+            <a:ext cx="4937760" cy="402336"/>
           </a:xfrm>
           <a:prstGeom prst="rect">
             <a:avLst/>
@@ -6037,7 +6258,7 @@
         </p:nvSpPr>
         <p:spPr>
           <a:xfrm>
-            <a:off x="502920" y="2066544"/>
+            <a:off x="502920" y="2048256"/>
             <a:ext cx="6858000" cy="0"/>
           </a:xfrm>
           <a:prstGeom prst="line">
@@ -6060,8 +6281,8 @@
         </p:nvSpPr>
         <p:spPr>
           <a:xfrm>
-            <a:off x="502920" y="2066544"/>
-            <a:ext cx="1920240" cy="420624"/>
+            <a:off x="502920" y="2048256"/>
+            <a:ext cx="1920240" cy="402336"/>
           </a:xfrm>
           <a:prstGeom prst="rect">
             <a:avLst/>
@@ -6102,8 +6323,8 @@
         </p:nvSpPr>
         <p:spPr>
           <a:xfrm>
-            <a:off x="2423160" y="2066544"/>
-            <a:ext cx="4937760" cy="420624"/>
+            <a:off x="2423160" y="2048256"/>
+            <a:ext cx="4937760" cy="402336"/>
           </a:xfrm>
           <a:prstGeom prst="rect">
             <a:avLst/>
@@ -6144,7 +6365,7 @@
         </p:nvSpPr>
         <p:spPr>
           <a:xfrm>
-            <a:off x="502920" y="2487168"/>
+            <a:off x="502920" y="2450592"/>
             <a:ext cx="6858000" cy="0"/>
           </a:xfrm>
           <a:prstGeom prst="line">
@@ -6167,8 +6388,8 @@
         </p:nvSpPr>
         <p:spPr>
           <a:xfrm>
-            <a:off x="502920" y="2487168"/>
-            <a:ext cx="1920240" cy="420624"/>
+            <a:off x="502920" y="2450592"/>
+            <a:ext cx="1920240" cy="402336"/>
           </a:xfrm>
           <a:prstGeom prst="rect">
             <a:avLst/>
@@ -6209,8 +6430,8 @@
         </p:nvSpPr>
         <p:spPr>
           <a:xfrm>
-            <a:off x="2423160" y="2487168"/>
-            <a:ext cx="4937760" cy="420624"/>
+            <a:off x="2423160" y="2450592"/>
+            <a:ext cx="4937760" cy="402336"/>
           </a:xfrm>
           <a:prstGeom prst="rect">
             <a:avLst/>
@@ -6251,7 +6472,7 @@
         </p:nvSpPr>
         <p:spPr>
           <a:xfrm>
-            <a:off x="502920" y="2907792"/>
+            <a:off x="502920" y="2852928"/>
             <a:ext cx="6858000" cy="0"/>
           </a:xfrm>
           <a:prstGeom prst="line">
@@ -6274,8 +6495,8 @@
         </p:nvSpPr>
         <p:spPr>
           <a:xfrm>
-            <a:off x="502920" y="2907792"/>
-            <a:ext cx="1920240" cy="420624"/>
+            <a:off x="502920" y="2852928"/>
+            <a:ext cx="1920240" cy="402336"/>
           </a:xfrm>
           <a:prstGeom prst="rect">
             <a:avLst/>
@@ -6316,8 +6537,8 @@
         </p:nvSpPr>
         <p:spPr>
           <a:xfrm>
-            <a:off x="2423160" y="2907792"/>
-            <a:ext cx="4937760" cy="420624"/>
+            <a:off x="2423160" y="2852928"/>
+            <a:ext cx="4937760" cy="402336"/>
           </a:xfrm>
           <a:prstGeom prst="rect">
             <a:avLst/>
@@ -6358,7 +6579,7 @@
         </p:nvSpPr>
         <p:spPr>
           <a:xfrm>
-            <a:off x="502920" y="3328416"/>
+            <a:off x="502920" y="3255264"/>
             <a:ext cx="6858000" cy="0"/>
           </a:xfrm>
           <a:prstGeom prst="line">
@@ -6381,8 +6602,8 @@
         </p:nvSpPr>
         <p:spPr>
           <a:xfrm>
-            <a:off x="502920" y="3328416"/>
-            <a:ext cx="1920240" cy="420624"/>
+            <a:off x="502920" y="3255264"/>
+            <a:ext cx="1920240" cy="402336"/>
           </a:xfrm>
           <a:prstGeom prst="rect">
             <a:avLst/>
@@ -6409,7 +6630,7 @@
                 <a:ea typeface="맑은 고딕" pitchFamily="34" charset="-122"/>
                 <a:cs typeface="맑은 고딕" pitchFamily="34" charset="-120"/>
               </a:rPr>
-              <a:t>필지 형상</a:t>
+              <a:t>지목</a:t>
             </a:r>
             <a:endParaRPr lang="en-US" sz="1350" dirty="0"/>
           </a:p>
@@ -6423,8 +6644,8 @@
         </p:nvSpPr>
         <p:spPr>
           <a:xfrm>
-            <a:off x="2423160" y="3328416"/>
-            <a:ext cx="4937760" cy="420624"/>
+            <a:off x="2423160" y="3255264"/>
+            <a:ext cx="4937760" cy="402336"/>
           </a:xfrm>
           <a:prstGeom prst="rect">
             <a:avLst/>
@@ -6451,7 +6672,7 @@
                 <a:ea typeface="맑은 고딕" pitchFamily="34" charset="-122"/>
                 <a:cs typeface="맑은 고딕" pitchFamily="34" charset="-120"/>
               </a:rPr>
-              <a:t>[필지 형상 확인 필요]</a:t>
+              <a:t>대</a:t>
             </a:r>
             <a:endParaRPr lang="en-US" sz="1350" dirty="0"/>
           </a:p>
@@ -6465,7 +6686,7 @@
         </p:nvSpPr>
         <p:spPr>
           <a:xfrm>
-            <a:off x="502920" y="3749040"/>
+            <a:off x="502920" y="3657600"/>
             <a:ext cx="6858000" cy="0"/>
           </a:xfrm>
           <a:prstGeom prst="line">
@@ -6488,8 +6709,8 @@
         </p:nvSpPr>
         <p:spPr>
           <a:xfrm>
-            <a:off x="502920" y="3749040"/>
-            <a:ext cx="1920240" cy="420624"/>
+            <a:off x="502920" y="3657600"/>
+            <a:ext cx="1920240" cy="402336"/>
           </a:xfrm>
           <a:prstGeom prst="rect">
             <a:avLst/>
@@ -6516,7 +6737,7 @@
                 <a:ea typeface="맑은 고딕" pitchFamily="34" charset="-122"/>
                 <a:cs typeface="맑은 고딕" pitchFamily="34" charset="-120"/>
               </a:rPr>
-              <a:t>지목</a:t>
+              <a:t>토지평당가</a:t>
             </a:r>
             <a:endParaRPr lang="en-US" sz="1350" dirty="0"/>
           </a:p>
@@ -6530,8 +6751,8 @@
         </p:nvSpPr>
         <p:spPr>
           <a:xfrm>
-            <a:off x="2423160" y="3749040"/>
-            <a:ext cx="4937760" cy="420624"/>
+            <a:off x="2423160" y="3657600"/>
+            <a:ext cx="4937760" cy="402336"/>
           </a:xfrm>
           <a:prstGeom prst="rect">
             <a:avLst/>
@@ -6558,7 +6779,7 @@
                 <a:ea typeface="맑은 고딕" pitchFamily="34" charset="-122"/>
                 <a:cs typeface="맑은 고딕" pitchFamily="34" charset="-120"/>
               </a:rPr>
-              <a:t>대</a:t>
+              <a:t>약 12,999만 원/평</a:t>
             </a:r>
             <a:endParaRPr lang="en-US" sz="1350" dirty="0"/>
           </a:p>
@@ -6567,113 +6788,6 @@
       <p:sp>
         <p:nvSpPr>
           <p:cNvPr id="24" name="Shape 22"/>
-          <p:cNvSpPr/>
-          <p:nvPr/>
-        </p:nvSpPr>
-        <p:spPr>
-          <a:xfrm>
-            <a:off x="502920" y="4169664"/>
-            <a:ext cx="6858000" cy="0"/>
-          </a:xfrm>
-          <a:prstGeom prst="line">
-            <a:avLst/>
-          </a:prstGeom>
-          <a:noFill/>
-          <a:ln w="3810">
-            <a:solidFill>
-              <a:srgbClr val="CBD5E0"/>
-            </a:solidFill>
-            <a:prstDash val="solid"/>
-          </a:ln>
-        </p:spPr>
-      </p:sp>
-      <p:sp>
-        <p:nvSpPr>
-          <p:cNvPr id="25" name="Text 23"/>
-          <p:cNvSpPr/>
-          <p:nvPr/>
-        </p:nvSpPr>
-        <p:spPr>
-          <a:xfrm>
-            <a:off x="502920" y="4169664"/>
-            <a:ext cx="1920240" cy="420624"/>
-          </a:xfrm>
-          <a:prstGeom prst="rect">
-            <a:avLst/>
-          </a:prstGeom>
-          <a:noFill/>
-          <a:ln/>
-        </p:spPr>
-        <p:txBody>
-          <a:bodyPr wrap="square" lIns="0" tIns="0" rIns="0" bIns="0" rtlCol="0" anchor="ctr"/>
-          <a:lstStyle/>
-          <a:p>
-            <a:pPr indent="0" marL="0">
-              <a:lnSpc>
-                <a:spcPct val="115000"/>
-              </a:lnSpc>
-              <a:buNone/>
-            </a:pPr>
-            <a:r>
-              <a:rPr lang="en-US" sz="1350" dirty="0">
-                <a:solidFill>
-                  <a:srgbClr val="5B6B73"/>
-                </a:solidFill>
-                <a:latin typeface="맑은 고딕" pitchFamily="34" charset="0"/>
-                <a:ea typeface="맑은 고딕" pitchFamily="34" charset="-122"/>
-                <a:cs typeface="맑은 고딕" pitchFamily="34" charset="-120"/>
-              </a:rPr>
-              <a:t>토지평당가</a:t>
-            </a:r>
-            <a:endParaRPr lang="en-US" sz="1350" dirty="0"/>
-          </a:p>
-        </p:txBody>
-      </p:sp>
-      <p:sp>
-        <p:nvSpPr>
-          <p:cNvPr id="26" name="Text 24"/>
-          <p:cNvSpPr/>
-          <p:nvPr/>
-        </p:nvSpPr>
-        <p:spPr>
-          <a:xfrm>
-            <a:off x="2423160" y="4169664"/>
-            <a:ext cx="4937760" cy="420624"/>
-          </a:xfrm>
-          <a:prstGeom prst="rect">
-            <a:avLst/>
-          </a:prstGeom>
-          <a:noFill/>
-          <a:ln/>
-        </p:spPr>
-        <p:txBody>
-          <a:bodyPr wrap="square" lIns="0" tIns="0" rIns="0" bIns="0" rtlCol="0" anchor="ctr"/>
-          <a:lstStyle/>
-          <a:p>
-            <a:pPr indent="0" marL="0">
-              <a:lnSpc>
-                <a:spcPct val="115000"/>
-              </a:lnSpc>
-              <a:buNone/>
-            </a:pPr>
-            <a:r>
-              <a:rPr lang="en-US" sz="1350" b="1" dirty="0">
-                <a:solidFill>
-                  <a:srgbClr val="132A3A"/>
-                </a:solidFill>
-                <a:latin typeface="맑은 고딕" pitchFamily="34" charset="0"/>
-                <a:ea typeface="맑은 고딕" pitchFamily="34" charset="-122"/>
-                <a:cs typeface="맑은 고딕" pitchFamily="34" charset="-120"/>
-              </a:rPr>
-              <a:t>약 12,999만 원/평</a:t>
-            </a:r>
-            <a:endParaRPr lang="en-US" sz="1350" dirty="0"/>
-          </a:p>
-        </p:txBody>
-      </p:sp>
-      <p:sp>
-        <p:nvSpPr>
-          <p:cNvPr id="27" name="Shape 25"/>
           <p:cNvSpPr/>
           <p:nvPr/>
         </p:nvSpPr>
@@ -6696,7 +6810,7 @@
       </p:sp>
       <p:sp>
         <p:nvSpPr>
-          <p:cNvPr id="28" name="Shape 26"/>
+          <p:cNvPr id="25" name="Shape 23"/>
           <p:cNvSpPr/>
           <p:nvPr/>
         </p:nvSpPr>
@@ -6718,7 +6832,7 @@
       </p:sp>
       <p:sp>
         <p:nvSpPr>
-          <p:cNvPr id="29" name="Shape 27"/>
+          <p:cNvPr id="26" name="Shape 24"/>
           <p:cNvSpPr/>
           <p:nvPr/>
         </p:nvSpPr>
@@ -6738,7 +6852,7 @@
       </p:sp>
       <p:sp>
         <p:nvSpPr>
-          <p:cNvPr id="30" name="Text 28"/>
+          <p:cNvPr id="27" name="Text 25"/>
           <p:cNvSpPr/>
           <p:nvPr/>
         </p:nvSpPr>
@@ -6777,7 +6891,7 @@
       </p:sp>
       <p:sp>
         <p:nvSpPr>
-          <p:cNvPr id="31" name="Text 29"/>
+          <p:cNvPr id="28" name="Text 26"/>
           <p:cNvSpPr/>
           <p:nvPr/>
         </p:nvSpPr>
@@ -6868,7 +6982,7 @@
       </p:sp>
       <p:sp>
         <p:nvSpPr>
-          <p:cNvPr id="32" name="Text 30"/>
+          <p:cNvPr id="29" name="Text 27"/>
           <p:cNvSpPr/>
           <p:nvPr/>
         </p:nvSpPr>
@@ -6899,7 +7013,7 @@
                 <a:ea typeface="맑은 고딕" pitchFamily="34" charset="-122"/>
                 <a:cs typeface="맑은 고딕" pitchFamily="34" charset="-120"/>
               </a:rPr>
-              <a:t>CRE DEAL   |   </a:t>
+              <a:t>CRE DEAL</a:t>
             </a:r>
             <a:endParaRPr lang="en-US" sz="800" dirty="0"/>
           </a:p>
@@ -6907,7 +7021,7 @@
       </p:sp>
       <p:sp>
         <p:nvSpPr>
-          <p:cNvPr id="33" name="Text 31"/>
+          <p:cNvPr id="30" name="Text 28"/>
           <p:cNvSpPr/>
           <p:nvPr/>
         </p:nvSpPr>
@@ -7121,7 +7235,7 @@
         </p:nvSpPr>
         <p:spPr>
           <a:xfrm>
-            <a:off x="566928" y="1645920"/>
+            <a:off x="502920" y="1645920"/>
             <a:ext cx="137160" cy="137160"/>
           </a:xfrm>
           <a:prstGeom prst="rect">
@@ -7141,7 +7255,7 @@
         </p:nvSpPr>
         <p:spPr>
           <a:xfrm>
-            <a:off x="749808" y="1645920"/>
+            <a:off x="685800" y="1645920"/>
             <a:ext cx="548640" cy="137160"/>
           </a:xfrm>
           <a:prstGeom prst="rect">
@@ -7180,7 +7294,7 @@
         </p:nvSpPr>
         <p:spPr>
           <a:xfrm>
-            <a:off x="1298448" y="1645920"/>
+            <a:off x="1234440" y="1645920"/>
             <a:ext cx="137160" cy="137160"/>
           </a:xfrm>
           <a:prstGeom prst="rect">
@@ -7200,7 +7314,7 @@
         </p:nvSpPr>
         <p:spPr>
           <a:xfrm>
-            <a:off x="1481328" y="1645920"/>
+            <a:off x="1417320" y="1645920"/>
             <a:ext cx="548640" cy="137160"/>
           </a:xfrm>
           <a:prstGeom prst="rect">
@@ -7239,7 +7353,7 @@
         </p:nvSpPr>
         <p:spPr>
           <a:xfrm>
-            <a:off x="2029968" y="1645920"/>
+            <a:off x="1965960" y="1645920"/>
             <a:ext cx="137160" cy="137160"/>
           </a:xfrm>
           <a:prstGeom prst="rect">
@@ -7259,7 +7373,7 @@
         </p:nvSpPr>
         <p:spPr>
           <a:xfrm>
-            <a:off x="2212848" y="1645920"/>
+            <a:off x="2148840" y="1645920"/>
             <a:ext cx="548640" cy="137160"/>
           </a:xfrm>
           <a:prstGeom prst="rect">
@@ -7298,7 +7412,7 @@
         </p:nvSpPr>
         <p:spPr>
           <a:xfrm>
-            <a:off x="2761488" y="1645920"/>
+            <a:off x="2697480" y="1645920"/>
             <a:ext cx="137160" cy="137160"/>
           </a:xfrm>
           <a:prstGeom prst="rect">
@@ -7323,7 +7437,7 @@
         </p:nvSpPr>
         <p:spPr>
           <a:xfrm>
-            <a:off x="2944368" y="1645920"/>
+            <a:off x="2880360" y="1645920"/>
             <a:ext cx="548640" cy="137160"/>
           </a:xfrm>
           <a:prstGeom prst="rect">
@@ -7362,8 +7476,8 @@
         </p:nvSpPr>
         <p:spPr>
           <a:xfrm>
-            <a:off x="749808" y="5303520"/>
-            <a:ext cx="3703320" cy="0"/>
+            <a:off x="685800" y="5303520"/>
+            <a:ext cx="2560320" cy="0"/>
           </a:xfrm>
           <a:prstGeom prst="line">
             <a:avLst/>
@@ -7385,7 +7499,7 @@
         </p:nvSpPr>
         <p:spPr>
           <a:xfrm>
-            <a:off x="749808" y="5120640"/>
+            <a:off x="685800" y="5120640"/>
             <a:ext cx="1828800" cy="182880"/>
           </a:xfrm>
           <a:prstGeom prst="rect">
@@ -7424,7 +7538,7 @@
         </p:nvSpPr>
         <p:spPr>
           <a:xfrm>
-            <a:off x="566928" y="5669280"/>
+            <a:off x="502920" y="5669280"/>
             <a:ext cx="320040" cy="365760"/>
           </a:xfrm>
           <a:prstGeom prst="rect">
@@ -7463,8 +7577,8 @@
         </p:nvSpPr>
         <p:spPr>
           <a:xfrm>
-            <a:off x="932688" y="5696712"/>
-            <a:ext cx="3337560" cy="310896"/>
+            <a:off x="868680" y="5696712"/>
+            <a:ext cx="2194560" cy="310896"/>
           </a:xfrm>
           <a:prstGeom prst="rect">
             <a:avLst/>
@@ -7488,8 +7602,8 @@
         </p:nvSpPr>
         <p:spPr>
           <a:xfrm>
-            <a:off x="1005840" y="5696712"/>
-            <a:ext cx="2002536" cy="310896"/>
+            <a:off x="941832" y="5696712"/>
+            <a:ext cx="1316736" cy="310896"/>
           </a:xfrm>
           <a:prstGeom prst="rect">
             <a:avLst/>
@@ -7527,8 +7641,8 @@
         </p:nvSpPr>
         <p:spPr>
           <a:xfrm>
-            <a:off x="2935224" y="5696712"/>
-            <a:ext cx="1168146" cy="310896"/>
+            <a:off x="2185416" y="5696712"/>
+            <a:ext cx="768096" cy="310896"/>
           </a:xfrm>
           <a:prstGeom prst="rect">
             <a:avLst/>
@@ -7552,7 +7666,7 @@
                 <a:ea typeface="맑은 고딕" pitchFamily="34" charset="-122"/>
                 <a:cs typeface="맑은 고딕" pitchFamily="34" charset="-120"/>
               </a:rPr>
-              <a:t>96평</a:t>
+              <a:t>319평</a:t>
             </a:r>
             <a:endParaRPr lang="en-US" sz="700" dirty="0"/>
           </a:p>
@@ -7566,7 +7680,7 @@
         </p:nvSpPr>
         <p:spPr>
           <a:xfrm>
-            <a:off x="566928" y="5303520"/>
+            <a:off x="502920" y="5303520"/>
             <a:ext cx="320040" cy="365760"/>
           </a:xfrm>
           <a:prstGeom prst="rect">
@@ -7605,8 +7719,8 @@
         </p:nvSpPr>
         <p:spPr>
           <a:xfrm>
-            <a:off x="932688" y="5330952"/>
-            <a:ext cx="3337560" cy="310896"/>
+            <a:off x="868680" y="5330952"/>
+            <a:ext cx="2194560" cy="310896"/>
           </a:xfrm>
           <a:prstGeom prst="rect">
             <a:avLst/>
@@ -7630,8 +7744,8 @@
         </p:nvSpPr>
         <p:spPr>
           <a:xfrm>
-            <a:off x="1005840" y="5330952"/>
-            <a:ext cx="2002536" cy="310896"/>
+            <a:off x="941832" y="5330952"/>
+            <a:ext cx="1316736" cy="310896"/>
           </a:xfrm>
           <a:prstGeom prst="rect">
             <a:avLst/>
@@ -7669,8 +7783,8 @@
         </p:nvSpPr>
         <p:spPr>
           <a:xfrm>
-            <a:off x="2935224" y="5330952"/>
-            <a:ext cx="1168146" cy="310896"/>
+            <a:off x="2185416" y="5330952"/>
+            <a:ext cx="768096" cy="310896"/>
           </a:xfrm>
           <a:prstGeom prst="rect">
             <a:avLst/>
@@ -7694,7 +7808,7 @@
                 <a:ea typeface="맑은 고딕" pitchFamily="34" charset="-122"/>
                 <a:cs typeface="맑은 고딕" pitchFamily="34" charset="-120"/>
               </a:rPr>
-              <a:t>44평</a:t>
+              <a:t>146평</a:t>
             </a:r>
             <a:endParaRPr lang="en-US" sz="700" dirty="0"/>
           </a:p>
@@ -7708,7 +7822,7 @@
         </p:nvSpPr>
         <p:spPr>
           <a:xfrm>
-            <a:off x="566928" y="4937760"/>
+            <a:off x="502920" y="4937760"/>
             <a:ext cx="320040" cy="365760"/>
           </a:xfrm>
           <a:prstGeom prst="rect">
@@ -7747,8 +7861,8 @@
         </p:nvSpPr>
         <p:spPr>
           <a:xfrm>
-            <a:off x="1850517" y="4965192"/>
-            <a:ext cx="1501902" cy="310896"/>
+            <a:off x="1472184" y="4965192"/>
+            <a:ext cx="987552" cy="310896"/>
           </a:xfrm>
           <a:prstGeom prst="rect">
             <a:avLst/>
@@ -7772,8 +7886,8 @@
         </p:nvSpPr>
         <p:spPr>
           <a:xfrm>
-            <a:off x="1923669" y="4965192"/>
-            <a:ext cx="901141" cy="310896"/>
+            <a:off x="1517904" y="4965192"/>
+            <a:ext cx="896112" cy="310896"/>
           </a:xfrm>
           <a:prstGeom prst="rect">
             <a:avLst/>
@@ -7785,7 +7899,7 @@
           <a:bodyPr wrap="square" rtlCol="0" anchor="ctr"/>
           <a:lstStyle/>
           <a:p>
-            <a:pPr algn="l" indent="0" marL="0">
+            <a:pPr algn="ctr" indent="0" marL="0">
               <a:buNone/>
             </a:pPr>
             <a:r>
@@ -7811,8 +7925,8 @@
         </p:nvSpPr>
         <p:spPr>
           <a:xfrm>
-            <a:off x="2751658" y="4965192"/>
-            <a:ext cx="525666" cy="310896"/>
+            <a:off x="502920" y="4572000"/>
+            <a:ext cx="320040" cy="365760"/>
           </a:xfrm>
           <a:prstGeom prst="rect">
             <a:avLst/>
@@ -7828,53 +7942,14 @@
               <a:buNone/>
             </a:pPr>
             <a:r>
-              <a:rPr lang="en-US" sz="700" dirty="0">
-                <a:solidFill>
-                  <a:srgbClr val="8A9AA3"/>
+              <a:rPr lang="en-US" sz="900" b="1" dirty="0">
+                <a:solidFill>
+                  <a:srgbClr val="132A3A"/>
                 </a:solidFill>
                 <a:latin typeface="맑은 고딕" pitchFamily="34" charset="0"/>
                 <a:ea typeface="맑은 고딕" pitchFamily="34" charset="-122"/>
                 <a:cs typeface="맑은 고딕" pitchFamily="34" charset="-120"/>
               </a:rPr>
-              <a:t>31평</a:t>
-            </a:r>
-            <a:endParaRPr lang="en-US" sz="700" dirty="0"/>
-          </a:p>
-        </p:txBody>
-      </p:sp>
-      <p:sp>
-        <p:nvSpPr>
-          <p:cNvPr id="28" name="Text 26"/>
-          <p:cNvSpPr/>
-          <p:nvPr/>
-        </p:nvSpPr>
-        <p:spPr>
-          <a:xfrm>
-            <a:off x="566928" y="4572000"/>
-            <a:ext cx="320040" cy="365760"/>
-          </a:xfrm>
-          <a:prstGeom prst="rect">
-            <a:avLst/>
-          </a:prstGeom>
-          <a:noFill/>
-          <a:ln/>
-        </p:spPr>
-        <p:txBody>
-          <a:bodyPr wrap="square" rtlCol="0" anchor="ctr"/>
-          <a:lstStyle/>
-          <a:p>
-            <a:pPr algn="r" indent="0" marL="0">
-              <a:buNone/>
-            </a:pPr>
-            <a:r>
-              <a:rPr lang="en-US" sz="900" b="1" dirty="0">
-                <a:solidFill>
-                  <a:srgbClr val="132A3A"/>
-                </a:solidFill>
-                <a:latin typeface="맑은 고딕" pitchFamily="34" charset="0"/>
-                <a:ea typeface="맑은 고딕" pitchFamily="34" charset="-122"/>
-                <a:cs typeface="맑은 고딕" pitchFamily="34" charset="-120"/>
-              </a:rPr>
               <a:t>1F</a:t>
             </a:r>
             <a:endParaRPr lang="en-US" sz="900" dirty="0"/>
@@ -7883,14 +7958,14 @@
       </p:sp>
       <p:sp>
         <p:nvSpPr>
-          <p:cNvPr id="29" name="Shape 27"/>
-          <p:cNvSpPr/>
-          <p:nvPr/>
-        </p:nvSpPr>
-        <p:spPr>
-          <a:xfrm>
-            <a:off x="1850517" y="4599432"/>
-            <a:ext cx="1501902" cy="310896"/>
+          <p:cNvPr id="28" name="Shape 26"/>
+          <p:cNvSpPr/>
+          <p:nvPr/>
+        </p:nvSpPr>
+        <p:spPr>
+          <a:xfrm>
+            <a:off x="1472184" y="4599432"/>
+            <a:ext cx="987552" cy="310896"/>
           </a:xfrm>
           <a:prstGeom prst="rect">
             <a:avLst/>
@@ -7908,14 +7983,14 @@
       </p:sp>
       <p:sp>
         <p:nvSpPr>
-          <p:cNvPr id="30" name="Text 28"/>
-          <p:cNvSpPr/>
-          <p:nvPr/>
-        </p:nvSpPr>
-        <p:spPr>
-          <a:xfrm>
-            <a:off x="1923669" y="4599432"/>
-            <a:ext cx="901141" cy="310896"/>
+          <p:cNvPr id="29" name="Text 27"/>
+          <p:cNvSpPr/>
+          <p:nvPr/>
+        </p:nvSpPr>
+        <p:spPr>
+          <a:xfrm>
+            <a:off x="1517904" y="4599432"/>
+            <a:ext cx="896112" cy="310896"/>
           </a:xfrm>
           <a:prstGeom prst="rect">
             <a:avLst/>
@@ -7927,7 +8002,7 @@
           <a:bodyPr wrap="square" rtlCol="0" anchor="ctr"/>
           <a:lstStyle/>
           <a:p>
-            <a:pPr algn="l" indent="0" marL="0">
+            <a:pPr algn="ctr" indent="0" marL="0">
               <a:buNone/>
             </a:pPr>
             <a:r>
@@ -7947,14 +8022,14 @@
       </p:sp>
       <p:sp>
         <p:nvSpPr>
-          <p:cNvPr id="31" name="Text 29"/>
-          <p:cNvSpPr/>
-          <p:nvPr/>
-        </p:nvSpPr>
-        <p:spPr>
-          <a:xfrm>
-            <a:off x="2751658" y="4599432"/>
-            <a:ext cx="525666" cy="310896"/>
+          <p:cNvPr id="30" name="Text 28"/>
+          <p:cNvSpPr/>
+          <p:nvPr/>
+        </p:nvSpPr>
+        <p:spPr>
+          <a:xfrm>
+            <a:off x="502920" y="4206240"/>
+            <a:ext cx="320040" cy="365760"/>
           </a:xfrm>
           <a:prstGeom prst="rect">
             <a:avLst/>
@@ -7970,53 +8045,14 @@
               <a:buNone/>
             </a:pPr>
             <a:r>
-              <a:rPr lang="en-US" sz="700" dirty="0">
-                <a:solidFill>
-                  <a:srgbClr val="8A9AA3"/>
+              <a:rPr lang="en-US" sz="900" b="1" dirty="0">
+                <a:solidFill>
+                  <a:srgbClr val="132A3A"/>
                 </a:solidFill>
                 <a:latin typeface="맑은 고딕" pitchFamily="34" charset="0"/>
                 <a:ea typeface="맑은 고딕" pitchFamily="34" charset="-122"/>
                 <a:cs typeface="맑은 고딕" pitchFamily="34" charset="-120"/>
               </a:rPr>
-              <a:t>28평</a:t>
-            </a:r>
-            <a:endParaRPr lang="en-US" sz="700" dirty="0"/>
-          </a:p>
-        </p:txBody>
-      </p:sp>
-      <p:sp>
-        <p:nvSpPr>
-          <p:cNvPr id="32" name="Text 30"/>
-          <p:cNvSpPr/>
-          <p:nvPr/>
-        </p:nvSpPr>
-        <p:spPr>
-          <a:xfrm>
-            <a:off x="566928" y="4206240"/>
-            <a:ext cx="320040" cy="365760"/>
-          </a:xfrm>
-          <a:prstGeom prst="rect">
-            <a:avLst/>
-          </a:prstGeom>
-          <a:noFill/>
-          <a:ln/>
-        </p:spPr>
-        <p:txBody>
-          <a:bodyPr wrap="square" rtlCol="0" anchor="ctr"/>
-          <a:lstStyle/>
-          <a:p>
-            <a:pPr algn="r" indent="0" marL="0">
-              <a:buNone/>
-            </a:pPr>
-            <a:r>
-              <a:rPr lang="en-US" sz="900" b="1" dirty="0">
-                <a:solidFill>
-                  <a:srgbClr val="132A3A"/>
-                </a:solidFill>
-                <a:latin typeface="맑은 고딕" pitchFamily="34" charset="0"/>
-                <a:ea typeface="맑은 고딕" pitchFamily="34" charset="-122"/>
-                <a:cs typeface="맑은 고딕" pitchFamily="34" charset="-120"/>
-              </a:rPr>
               <a:t>1F</a:t>
             </a:r>
             <a:endParaRPr lang="en-US" sz="900" dirty="0"/>
@@ -8025,14 +8061,14 @@
       </p:sp>
       <p:sp>
         <p:nvSpPr>
-          <p:cNvPr id="33" name="Shape 31"/>
-          <p:cNvSpPr/>
-          <p:nvPr/>
-        </p:nvSpPr>
-        <p:spPr>
-          <a:xfrm>
-            <a:off x="1850517" y="4233672"/>
-            <a:ext cx="1501902" cy="310896"/>
+          <p:cNvPr id="31" name="Shape 29"/>
+          <p:cNvSpPr/>
+          <p:nvPr/>
+        </p:nvSpPr>
+        <p:spPr>
+          <a:xfrm>
+            <a:off x="1472184" y="4233672"/>
+            <a:ext cx="987552" cy="310896"/>
           </a:xfrm>
           <a:prstGeom prst="rect">
             <a:avLst/>
@@ -8050,14 +8086,14 @@
       </p:sp>
       <p:sp>
         <p:nvSpPr>
-          <p:cNvPr id="34" name="Text 32"/>
-          <p:cNvSpPr/>
-          <p:nvPr/>
-        </p:nvSpPr>
-        <p:spPr>
-          <a:xfrm>
-            <a:off x="1923669" y="4233672"/>
-            <a:ext cx="901141" cy="310896"/>
+          <p:cNvPr id="32" name="Text 30"/>
+          <p:cNvSpPr/>
+          <p:nvPr/>
+        </p:nvSpPr>
+        <p:spPr>
+          <a:xfrm>
+            <a:off x="1517904" y="4233672"/>
+            <a:ext cx="896112" cy="310896"/>
           </a:xfrm>
           <a:prstGeom prst="rect">
             <a:avLst/>
@@ -8069,7 +8105,7 @@
           <a:bodyPr wrap="square" rtlCol="0" anchor="ctr"/>
           <a:lstStyle/>
           <a:p>
-            <a:pPr algn="l" indent="0" marL="0">
+            <a:pPr algn="ctr" indent="0" marL="0">
               <a:buNone/>
             </a:pPr>
             <a:r>
@@ -8089,14 +8125,14 @@
       </p:sp>
       <p:sp>
         <p:nvSpPr>
-          <p:cNvPr id="35" name="Text 33"/>
-          <p:cNvSpPr/>
-          <p:nvPr/>
-        </p:nvSpPr>
-        <p:spPr>
-          <a:xfrm>
-            <a:off x="2751658" y="4233672"/>
-            <a:ext cx="525666" cy="310896"/>
+          <p:cNvPr id="33" name="Text 31"/>
+          <p:cNvSpPr/>
+          <p:nvPr/>
+        </p:nvSpPr>
+        <p:spPr>
+          <a:xfrm>
+            <a:off x="502920" y="3840480"/>
+            <a:ext cx="320040" cy="365760"/>
           </a:xfrm>
           <a:prstGeom prst="rect">
             <a:avLst/>
@@ -8112,53 +8148,14 @@
               <a:buNone/>
             </a:pPr>
             <a:r>
-              <a:rPr lang="en-US" sz="700" dirty="0">
-                <a:solidFill>
-                  <a:srgbClr val="8A9AA3"/>
+              <a:rPr lang="en-US" sz="900" b="1" dirty="0">
+                <a:solidFill>
+                  <a:srgbClr val="132A3A"/>
                 </a:solidFill>
                 <a:latin typeface="맑은 고딕" pitchFamily="34" charset="0"/>
                 <a:ea typeface="맑은 고딕" pitchFamily="34" charset="-122"/>
                 <a:cs typeface="맑은 고딕" pitchFamily="34" charset="-120"/>
               </a:rPr>
-              <a:t>10평</a:t>
-            </a:r>
-            <a:endParaRPr lang="en-US" sz="700" dirty="0"/>
-          </a:p>
-        </p:txBody>
-      </p:sp>
-      <p:sp>
-        <p:nvSpPr>
-          <p:cNvPr id="36" name="Text 34"/>
-          <p:cNvSpPr/>
-          <p:nvPr/>
-        </p:nvSpPr>
-        <p:spPr>
-          <a:xfrm>
-            <a:off x="566928" y="3840480"/>
-            <a:ext cx="320040" cy="365760"/>
-          </a:xfrm>
-          <a:prstGeom prst="rect">
-            <a:avLst/>
-          </a:prstGeom>
-          <a:noFill/>
-          <a:ln/>
-        </p:spPr>
-        <p:txBody>
-          <a:bodyPr wrap="square" rtlCol="0" anchor="ctr"/>
-          <a:lstStyle/>
-          <a:p>
-            <a:pPr algn="r" indent="0" marL="0">
-              <a:buNone/>
-            </a:pPr>
-            <a:r>
-              <a:rPr lang="en-US" sz="900" b="1" dirty="0">
-                <a:solidFill>
-                  <a:srgbClr val="132A3A"/>
-                </a:solidFill>
-                <a:latin typeface="맑은 고딕" pitchFamily="34" charset="0"/>
-                <a:ea typeface="맑은 고딕" pitchFamily="34" charset="-122"/>
-                <a:cs typeface="맑은 고딕" pitchFamily="34" charset="-120"/>
-              </a:rPr>
               <a:t>2F</a:t>
             </a:r>
             <a:endParaRPr lang="en-US" sz="900" dirty="0"/>
@@ -8167,14 +8164,14 @@
       </p:sp>
       <p:sp>
         <p:nvSpPr>
-          <p:cNvPr id="37" name="Shape 35"/>
-          <p:cNvSpPr/>
-          <p:nvPr/>
-        </p:nvSpPr>
-        <p:spPr>
-          <a:xfrm>
-            <a:off x="1199693" y="3867912"/>
-            <a:ext cx="2803550" cy="310896"/>
+          <p:cNvPr id="34" name="Shape 32"/>
+          <p:cNvSpPr/>
+          <p:nvPr/>
+        </p:nvSpPr>
+        <p:spPr>
+          <a:xfrm>
+            <a:off x="1044245" y="3867912"/>
+            <a:ext cx="1843430" cy="310896"/>
           </a:xfrm>
           <a:prstGeom prst="rect">
             <a:avLst/>
@@ -8192,14 +8189,14 @@
       </p:sp>
       <p:sp>
         <p:nvSpPr>
-          <p:cNvPr id="38" name="Text 36"/>
-          <p:cNvSpPr/>
-          <p:nvPr/>
-        </p:nvSpPr>
-        <p:spPr>
-          <a:xfrm>
-            <a:off x="1272845" y="3867912"/>
-            <a:ext cx="1682130" cy="310896"/>
+          <p:cNvPr id="35" name="Text 33"/>
+          <p:cNvSpPr/>
+          <p:nvPr/>
+        </p:nvSpPr>
+        <p:spPr>
+          <a:xfrm>
+            <a:off x="1117397" y="3867912"/>
+            <a:ext cx="1106058" cy="310896"/>
           </a:xfrm>
           <a:prstGeom prst="rect">
             <a:avLst/>
@@ -8231,14 +8228,14 @@
       </p:sp>
       <p:sp>
         <p:nvSpPr>
-          <p:cNvPr id="39" name="Text 37"/>
-          <p:cNvSpPr/>
-          <p:nvPr/>
-        </p:nvSpPr>
-        <p:spPr>
-          <a:xfrm>
-            <a:off x="2881823" y="3867912"/>
-            <a:ext cx="981243" cy="310896"/>
+          <p:cNvPr id="36" name="Text 34"/>
+          <p:cNvSpPr/>
+          <p:nvPr/>
+        </p:nvSpPr>
+        <p:spPr>
+          <a:xfrm>
+            <a:off x="2150303" y="3867912"/>
+            <a:ext cx="645201" cy="310896"/>
           </a:xfrm>
           <a:prstGeom prst="rect">
             <a:avLst/>
@@ -8262,7 +8259,7 @@
                 <a:ea typeface="맑은 고딕" pitchFamily="34" charset="-122"/>
                 <a:cs typeface="맑은 고딕" pitchFamily="34" charset="-120"/>
               </a:rPr>
-              <a:t>81평</a:t>
+              <a:t>266평</a:t>
             </a:r>
             <a:endParaRPr lang="en-US" sz="700" dirty="0"/>
           </a:p>
@@ -8270,13 +8267,13 @@
       </p:sp>
       <p:sp>
         <p:nvSpPr>
-          <p:cNvPr id="40" name="Text 38"/>
-          <p:cNvSpPr/>
-          <p:nvPr/>
-        </p:nvSpPr>
-        <p:spPr>
-          <a:xfrm>
-            <a:off x="566928" y="3474720"/>
+          <p:cNvPr id="37" name="Text 35"/>
+          <p:cNvSpPr/>
+          <p:nvPr/>
+        </p:nvSpPr>
+        <p:spPr>
+          <a:xfrm>
+            <a:off x="502920" y="3474720"/>
             <a:ext cx="320040" cy="365760"/>
           </a:xfrm>
           <a:prstGeom prst="rect">
@@ -8309,14 +8306,14 @@
       </p:sp>
       <p:sp>
         <p:nvSpPr>
-          <p:cNvPr id="41" name="Shape 39"/>
-          <p:cNvSpPr/>
-          <p:nvPr/>
-        </p:nvSpPr>
-        <p:spPr>
-          <a:xfrm>
-            <a:off x="1850517" y="3502152"/>
-            <a:ext cx="1501902" cy="310896"/>
+          <p:cNvPr id="38" name="Shape 36"/>
+          <p:cNvSpPr/>
+          <p:nvPr/>
+        </p:nvSpPr>
+        <p:spPr>
+          <a:xfrm>
+            <a:off x="1472184" y="3502152"/>
+            <a:ext cx="987552" cy="310896"/>
           </a:xfrm>
           <a:prstGeom prst="rect">
             <a:avLst/>
@@ -8334,14 +8331,14 @@
       </p:sp>
       <p:sp>
         <p:nvSpPr>
-          <p:cNvPr id="42" name="Text 40"/>
-          <p:cNvSpPr/>
-          <p:nvPr/>
-        </p:nvSpPr>
-        <p:spPr>
-          <a:xfrm>
-            <a:off x="1923669" y="3502152"/>
-            <a:ext cx="901141" cy="310896"/>
+          <p:cNvPr id="39" name="Text 37"/>
+          <p:cNvSpPr/>
+          <p:nvPr/>
+        </p:nvSpPr>
+        <p:spPr>
+          <a:xfrm>
+            <a:off x="1517904" y="3502152"/>
+            <a:ext cx="896112" cy="310896"/>
           </a:xfrm>
           <a:prstGeom prst="rect">
             <a:avLst/>
@@ -8353,7 +8350,7 @@
           <a:bodyPr wrap="square" rtlCol="0" anchor="ctr"/>
           <a:lstStyle/>
           <a:p>
-            <a:pPr algn="l" indent="0" marL="0">
+            <a:pPr algn="ctr" indent="0" marL="0">
               <a:buNone/>
             </a:pPr>
             <a:r>
@@ -8373,14 +8370,14 @@
       </p:sp>
       <p:sp>
         <p:nvSpPr>
-          <p:cNvPr id="43" name="Text 41"/>
-          <p:cNvSpPr/>
-          <p:nvPr/>
-        </p:nvSpPr>
-        <p:spPr>
-          <a:xfrm>
-            <a:off x="2751658" y="3502152"/>
-            <a:ext cx="525666" cy="310896"/>
+          <p:cNvPr id="40" name="Text 38"/>
+          <p:cNvSpPr/>
+          <p:nvPr/>
+        </p:nvSpPr>
+        <p:spPr>
+          <a:xfrm>
+            <a:off x="502920" y="3108960"/>
+            <a:ext cx="320040" cy="365760"/>
           </a:xfrm>
           <a:prstGeom prst="rect">
             <a:avLst/>
@@ -8396,53 +8393,14 @@
               <a:buNone/>
             </a:pPr>
             <a:r>
-              <a:rPr lang="en-US" sz="700" dirty="0">
-                <a:solidFill>
-                  <a:srgbClr val="8A9AA3"/>
+              <a:rPr lang="en-US" sz="900" b="1" dirty="0">
+                <a:solidFill>
+                  <a:srgbClr val="132A3A"/>
                 </a:solidFill>
                 <a:latin typeface="맑은 고딕" pitchFamily="34" charset="0"/>
                 <a:ea typeface="맑은 고딕" pitchFamily="34" charset="-122"/>
                 <a:cs typeface="맑은 고딕" pitchFamily="34" charset="-120"/>
               </a:rPr>
-              <a:t>41평</a:t>
-            </a:r>
-            <a:endParaRPr lang="en-US" sz="700" dirty="0"/>
-          </a:p>
-        </p:txBody>
-      </p:sp>
-      <p:sp>
-        <p:nvSpPr>
-          <p:cNvPr id="44" name="Text 42"/>
-          <p:cNvSpPr/>
-          <p:nvPr/>
-        </p:nvSpPr>
-        <p:spPr>
-          <a:xfrm>
-            <a:off x="566928" y="3108960"/>
-            <a:ext cx="320040" cy="365760"/>
-          </a:xfrm>
-          <a:prstGeom prst="rect">
-            <a:avLst/>
-          </a:prstGeom>
-          <a:noFill/>
-          <a:ln/>
-        </p:spPr>
-        <p:txBody>
-          <a:bodyPr wrap="square" rtlCol="0" anchor="ctr"/>
-          <a:lstStyle/>
-          <a:p>
-            <a:pPr algn="r" indent="0" marL="0">
-              <a:buNone/>
-            </a:pPr>
-            <a:r>
-              <a:rPr lang="en-US" sz="900" b="1" dirty="0">
-                <a:solidFill>
-                  <a:srgbClr val="132A3A"/>
-                </a:solidFill>
-                <a:latin typeface="맑은 고딕" pitchFamily="34" charset="0"/>
-                <a:ea typeface="맑은 고딕" pitchFamily="34" charset="-122"/>
-                <a:cs typeface="맑은 고딕" pitchFamily="34" charset="-120"/>
-              </a:rPr>
               <a:t>3F-2</a:t>
             </a:r>
             <a:endParaRPr lang="en-US" sz="900" dirty="0"/>
@@ -8451,14 +8409,14 @@
       </p:sp>
       <p:sp>
         <p:nvSpPr>
-          <p:cNvPr id="45" name="Shape 43"/>
-          <p:cNvSpPr/>
-          <p:nvPr/>
-        </p:nvSpPr>
-        <p:spPr>
-          <a:xfrm>
-            <a:off x="1850517" y="3136392"/>
-            <a:ext cx="1501902" cy="310896"/>
+          <p:cNvPr id="41" name="Shape 39"/>
+          <p:cNvSpPr/>
+          <p:nvPr/>
+        </p:nvSpPr>
+        <p:spPr>
+          <a:xfrm>
+            <a:off x="1472184" y="3136392"/>
+            <a:ext cx="987552" cy="310896"/>
           </a:xfrm>
           <a:prstGeom prst="rect">
             <a:avLst/>
@@ -8476,14 +8434,14 @@
       </p:sp>
       <p:sp>
         <p:nvSpPr>
-          <p:cNvPr id="46" name="Text 44"/>
-          <p:cNvSpPr/>
-          <p:nvPr/>
-        </p:nvSpPr>
-        <p:spPr>
-          <a:xfrm>
-            <a:off x="1923669" y="3136392"/>
-            <a:ext cx="901141" cy="310896"/>
+          <p:cNvPr id="42" name="Text 40"/>
+          <p:cNvSpPr/>
+          <p:nvPr/>
+        </p:nvSpPr>
+        <p:spPr>
+          <a:xfrm>
+            <a:off x="1517904" y="3136392"/>
+            <a:ext cx="896112" cy="310896"/>
           </a:xfrm>
           <a:prstGeom prst="rect">
             <a:avLst/>
@@ -8495,7 +8453,7 @@
           <a:bodyPr wrap="square" rtlCol="0" anchor="ctr"/>
           <a:lstStyle/>
           <a:p>
-            <a:pPr algn="l" indent="0" marL="0">
+            <a:pPr algn="ctr" indent="0" marL="0">
               <a:buNone/>
             </a:pPr>
             <a:r>
@@ -8515,14 +8473,14 @@
       </p:sp>
       <p:sp>
         <p:nvSpPr>
-          <p:cNvPr id="47" name="Text 45"/>
-          <p:cNvSpPr/>
-          <p:nvPr/>
-        </p:nvSpPr>
-        <p:spPr>
-          <a:xfrm>
-            <a:off x="2751658" y="3136392"/>
-            <a:ext cx="525666" cy="310896"/>
+          <p:cNvPr id="43" name="Text 41"/>
+          <p:cNvSpPr/>
+          <p:nvPr/>
+        </p:nvSpPr>
+        <p:spPr>
+          <a:xfrm>
+            <a:off x="502920" y="2743200"/>
+            <a:ext cx="320040" cy="365760"/>
           </a:xfrm>
           <a:prstGeom prst="rect">
             <a:avLst/>
@@ -8538,53 +8496,14 @@
               <a:buNone/>
             </a:pPr>
             <a:r>
-              <a:rPr lang="en-US" sz="700" dirty="0">
-                <a:solidFill>
-                  <a:srgbClr val="8A9AA3"/>
+              <a:rPr lang="en-US" sz="900" b="1" dirty="0">
+                <a:solidFill>
+                  <a:srgbClr val="132A3A"/>
                 </a:solidFill>
                 <a:latin typeface="맑은 고딕" pitchFamily="34" charset="0"/>
                 <a:ea typeface="맑은 고딕" pitchFamily="34" charset="-122"/>
                 <a:cs typeface="맑은 고딕" pitchFamily="34" charset="-120"/>
               </a:rPr>
-              <a:t>40평</a:t>
-            </a:r>
-            <a:endParaRPr lang="en-US" sz="700" dirty="0"/>
-          </a:p>
-        </p:txBody>
-      </p:sp>
-      <p:sp>
-        <p:nvSpPr>
-          <p:cNvPr id="48" name="Text 46"/>
-          <p:cNvSpPr/>
-          <p:nvPr/>
-        </p:nvSpPr>
-        <p:spPr>
-          <a:xfrm>
-            <a:off x="566928" y="2743200"/>
-            <a:ext cx="320040" cy="365760"/>
-          </a:xfrm>
-          <a:prstGeom prst="rect">
-            <a:avLst/>
-          </a:prstGeom>
-          <a:noFill/>
-          <a:ln/>
-        </p:spPr>
-        <p:txBody>
-          <a:bodyPr wrap="square" rtlCol="0" anchor="ctr"/>
-          <a:lstStyle/>
-          <a:p>
-            <a:pPr algn="r" indent="0" marL="0">
-              <a:buNone/>
-            </a:pPr>
-            <a:r>
-              <a:rPr lang="en-US" sz="900" b="1" dirty="0">
-                <a:solidFill>
-                  <a:srgbClr val="132A3A"/>
-                </a:solidFill>
-                <a:latin typeface="맑은 고딕" pitchFamily="34" charset="0"/>
-                <a:ea typeface="맑은 고딕" pitchFamily="34" charset="-122"/>
-                <a:cs typeface="맑은 고딕" pitchFamily="34" charset="-120"/>
-              </a:rPr>
               <a:t>4F</a:t>
             </a:r>
             <a:endParaRPr lang="en-US" sz="900" dirty="0"/>
@@ -8593,14 +8512,14 @@
       </p:sp>
       <p:sp>
         <p:nvSpPr>
-          <p:cNvPr id="49" name="Shape 47"/>
-          <p:cNvSpPr/>
-          <p:nvPr/>
-        </p:nvSpPr>
-        <p:spPr>
-          <a:xfrm>
-            <a:off x="1199693" y="2770632"/>
-            <a:ext cx="2803550" cy="310896"/>
+          <p:cNvPr id="44" name="Shape 42"/>
+          <p:cNvSpPr/>
+          <p:nvPr/>
+        </p:nvSpPr>
+        <p:spPr>
+          <a:xfrm>
+            <a:off x="1044245" y="2770632"/>
+            <a:ext cx="1843430" cy="310896"/>
           </a:xfrm>
           <a:prstGeom prst="rect">
             <a:avLst/>
@@ -8618,14 +8537,14 @@
       </p:sp>
       <p:sp>
         <p:nvSpPr>
-          <p:cNvPr id="50" name="Text 48"/>
-          <p:cNvSpPr/>
-          <p:nvPr/>
-        </p:nvSpPr>
-        <p:spPr>
-          <a:xfrm>
-            <a:off x="1272845" y="2770632"/>
-            <a:ext cx="1682130" cy="310896"/>
+          <p:cNvPr id="45" name="Text 43"/>
+          <p:cNvSpPr/>
+          <p:nvPr/>
+        </p:nvSpPr>
+        <p:spPr>
+          <a:xfrm>
+            <a:off x="1117397" y="2770632"/>
+            <a:ext cx="1106058" cy="310896"/>
           </a:xfrm>
           <a:prstGeom prst="rect">
             <a:avLst/>
@@ -8657,14 +8576,14 @@
       </p:sp>
       <p:sp>
         <p:nvSpPr>
-          <p:cNvPr id="51" name="Text 49"/>
-          <p:cNvSpPr/>
-          <p:nvPr/>
-        </p:nvSpPr>
-        <p:spPr>
-          <a:xfrm>
-            <a:off x="2881823" y="2770632"/>
-            <a:ext cx="981243" cy="310896"/>
+          <p:cNvPr id="46" name="Text 44"/>
+          <p:cNvSpPr/>
+          <p:nvPr/>
+        </p:nvSpPr>
+        <p:spPr>
+          <a:xfrm>
+            <a:off x="2150303" y="2770632"/>
+            <a:ext cx="645201" cy="310896"/>
           </a:xfrm>
           <a:prstGeom prst="rect">
             <a:avLst/>
@@ -8688,7 +8607,7 @@
                 <a:ea typeface="맑은 고딕" pitchFamily="34" charset="-122"/>
                 <a:cs typeface="맑은 고딕" pitchFamily="34" charset="-120"/>
               </a:rPr>
-              <a:t>81평</a:t>
+              <a:t>266평</a:t>
             </a:r>
             <a:endParaRPr lang="en-US" sz="700" dirty="0"/>
           </a:p>
@@ -8696,13 +8615,13 @@
       </p:sp>
       <p:sp>
         <p:nvSpPr>
-          <p:cNvPr id="52" name="Text 50"/>
-          <p:cNvSpPr/>
-          <p:nvPr/>
-        </p:nvSpPr>
-        <p:spPr>
-          <a:xfrm>
-            <a:off x="566928" y="2377440"/>
+          <p:cNvPr id="47" name="Text 45"/>
+          <p:cNvSpPr/>
+          <p:nvPr/>
+        </p:nvSpPr>
+        <p:spPr>
+          <a:xfrm>
+            <a:off x="502920" y="2377440"/>
             <a:ext cx="320040" cy="365760"/>
           </a:xfrm>
           <a:prstGeom prst="rect">
@@ -8735,14 +8654,14 @@
       </p:sp>
       <p:sp>
         <p:nvSpPr>
-          <p:cNvPr id="53" name="Shape 51"/>
-          <p:cNvSpPr/>
-          <p:nvPr/>
-        </p:nvSpPr>
-        <p:spPr>
-          <a:xfrm>
-            <a:off x="1850517" y="2404872"/>
-            <a:ext cx="1501902" cy="310896"/>
+          <p:cNvPr id="48" name="Shape 46"/>
+          <p:cNvSpPr/>
+          <p:nvPr/>
+        </p:nvSpPr>
+        <p:spPr>
+          <a:xfrm>
+            <a:off x="1472184" y="2404872"/>
+            <a:ext cx="987552" cy="310896"/>
           </a:xfrm>
           <a:prstGeom prst="rect">
             <a:avLst/>
@@ -8760,14 +8679,14 @@
       </p:sp>
       <p:sp>
         <p:nvSpPr>
-          <p:cNvPr id="54" name="Text 52"/>
-          <p:cNvSpPr/>
-          <p:nvPr/>
-        </p:nvSpPr>
-        <p:spPr>
-          <a:xfrm>
-            <a:off x="1923669" y="2404872"/>
-            <a:ext cx="901141" cy="310896"/>
+          <p:cNvPr id="49" name="Text 47"/>
+          <p:cNvSpPr/>
+          <p:nvPr/>
+        </p:nvSpPr>
+        <p:spPr>
+          <a:xfrm>
+            <a:off x="1517904" y="2404872"/>
+            <a:ext cx="896112" cy="310896"/>
           </a:xfrm>
           <a:prstGeom prst="rect">
             <a:avLst/>
@@ -8779,7 +8698,7 @@
           <a:bodyPr wrap="square" rtlCol="0" anchor="ctr"/>
           <a:lstStyle/>
           <a:p>
-            <a:pPr algn="l" indent="0" marL="0">
+            <a:pPr algn="ctr" indent="0" marL="0">
               <a:buNone/>
             </a:pPr>
             <a:r>
@@ -8799,14 +8718,14 @@
       </p:sp>
       <p:sp>
         <p:nvSpPr>
-          <p:cNvPr id="55" name="Text 53"/>
-          <p:cNvSpPr/>
-          <p:nvPr/>
-        </p:nvSpPr>
-        <p:spPr>
-          <a:xfrm>
-            <a:off x="2751658" y="2404872"/>
-            <a:ext cx="525666" cy="310896"/>
+          <p:cNvPr id="50" name="Text 48"/>
+          <p:cNvSpPr/>
+          <p:nvPr/>
+        </p:nvSpPr>
+        <p:spPr>
+          <a:xfrm>
+            <a:off x="502920" y="2011680"/>
+            <a:ext cx="320040" cy="365760"/>
           </a:xfrm>
           <a:prstGeom prst="rect">
             <a:avLst/>
@@ -8822,53 +8741,14 @@
               <a:buNone/>
             </a:pPr>
             <a:r>
-              <a:rPr lang="en-US" sz="700" dirty="0">
-                <a:solidFill>
-                  <a:srgbClr val="8A9AA3"/>
+              <a:rPr lang="en-US" sz="900" b="1" dirty="0">
+                <a:solidFill>
+                  <a:srgbClr val="132A3A"/>
                 </a:solidFill>
                 <a:latin typeface="맑은 고딕" pitchFamily="34" charset="0"/>
                 <a:ea typeface="맑은 고딕" pitchFamily="34" charset="-122"/>
                 <a:cs typeface="맑은 고딕" pitchFamily="34" charset="-120"/>
               </a:rPr>
-              <a:t>41평</a:t>
-            </a:r>
-            <a:endParaRPr lang="en-US" sz="700" dirty="0"/>
-          </a:p>
-        </p:txBody>
-      </p:sp>
-      <p:sp>
-        <p:nvSpPr>
-          <p:cNvPr id="56" name="Text 54"/>
-          <p:cNvSpPr/>
-          <p:nvPr/>
-        </p:nvSpPr>
-        <p:spPr>
-          <a:xfrm>
-            <a:off x="566928" y="2011680"/>
-            <a:ext cx="320040" cy="365760"/>
-          </a:xfrm>
-          <a:prstGeom prst="rect">
-            <a:avLst/>
-          </a:prstGeom>
-          <a:noFill/>
-          <a:ln/>
-        </p:spPr>
-        <p:txBody>
-          <a:bodyPr wrap="square" rtlCol="0" anchor="ctr"/>
-          <a:lstStyle/>
-          <a:p>
-            <a:pPr algn="r" indent="0" marL="0">
-              <a:buNone/>
-            </a:pPr>
-            <a:r>
-              <a:rPr lang="en-US" sz="900" b="1" dirty="0">
-                <a:solidFill>
-                  <a:srgbClr val="132A3A"/>
-                </a:solidFill>
-                <a:latin typeface="맑은 고딕" pitchFamily="34" charset="0"/>
-                <a:ea typeface="맑은 고딕" pitchFamily="34" charset="-122"/>
-                <a:cs typeface="맑은 고딕" pitchFamily="34" charset="-120"/>
-              </a:rPr>
               <a:t>5F-2</a:t>
             </a:r>
             <a:endParaRPr lang="en-US" sz="900" dirty="0"/>
@@ -8877,14 +8757,14 @@
       </p:sp>
       <p:sp>
         <p:nvSpPr>
-          <p:cNvPr id="57" name="Shape 55"/>
-          <p:cNvSpPr/>
-          <p:nvPr/>
-        </p:nvSpPr>
-        <p:spPr>
-          <a:xfrm>
-            <a:off x="1850517" y="2039112"/>
-            <a:ext cx="1501902" cy="310896"/>
+          <p:cNvPr id="51" name="Shape 49"/>
+          <p:cNvSpPr/>
+          <p:nvPr/>
+        </p:nvSpPr>
+        <p:spPr>
+          <a:xfrm>
+            <a:off x="1472184" y="2039112"/>
+            <a:ext cx="987552" cy="310896"/>
           </a:xfrm>
           <a:prstGeom prst="rect">
             <a:avLst/>
@@ -8902,14 +8782,14 @@
       </p:sp>
       <p:sp>
         <p:nvSpPr>
-          <p:cNvPr id="58" name="Text 56"/>
-          <p:cNvSpPr/>
-          <p:nvPr/>
-        </p:nvSpPr>
-        <p:spPr>
-          <a:xfrm>
-            <a:off x="1923669" y="2039112"/>
-            <a:ext cx="901141" cy="310896"/>
+          <p:cNvPr id="52" name="Text 50"/>
+          <p:cNvSpPr/>
+          <p:nvPr/>
+        </p:nvSpPr>
+        <p:spPr>
+          <a:xfrm>
+            <a:off x="1517904" y="2039112"/>
+            <a:ext cx="896112" cy="310896"/>
           </a:xfrm>
           <a:prstGeom prst="rect">
             <a:avLst/>
@@ -8921,7 +8801,7 @@
           <a:bodyPr wrap="square" rtlCol="0" anchor="ctr"/>
           <a:lstStyle/>
           <a:p>
-            <a:pPr algn="l" indent="0" marL="0">
+            <a:pPr algn="ctr" indent="0" marL="0">
               <a:buNone/>
             </a:pPr>
             <a:r>
@@ -8941,53 +8821,14 @@
       </p:sp>
       <p:sp>
         <p:nvSpPr>
-          <p:cNvPr id="59" name="Text 57"/>
-          <p:cNvSpPr/>
-          <p:nvPr/>
-        </p:nvSpPr>
-        <p:spPr>
-          <a:xfrm>
-            <a:off x="2751658" y="2039112"/>
-            <a:ext cx="525666" cy="310896"/>
-          </a:xfrm>
-          <a:prstGeom prst="rect">
-            <a:avLst/>
-          </a:prstGeom>
-          <a:noFill/>
-          <a:ln/>
-        </p:spPr>
-        <p:txBody>
-          <a:bodyPr wrap="square" rtlCol="0" anchor="ctr"/>
-          <a:lstStyle/>
-          <a:p>
-            <a:pPr algn="r" indent="0" marL="0">
-              <a:buNone/>
-            </a:pPr>
-            <a:r>
-              <a:rPr lang="en-US" sz="700" dirty="0">
-                <a:solidFill>
-                  <a:srgbClr val="8A9AA3"/>
-                </a:solidFill>
-                <a:latin typeface="맑은 고딕" pitchFamily="34" charset="0"/>
-                <a:ea typeface="맑은 고딕" pitchFamily="34" charset="-122"/>
-                <a:cs typeface="맑은 고딕" pitchFamily="34" charset="-120"/>
-              </a:rPr>
-              <a:t>40평</a:t>
-            </a:r>
-            <a:endParaRPr lang="en-US" sz="700" dirty="0"/>
-          </a:p>
-        </p:txBody>
-      </p:sp>
-      <p:sp>
-        <p:nvSpPr>
-          <p:cNvPr id="60" name="Text 58"/>
-          <p:cNvSpPr/>
-          <p:nvPr/>
-        </p:nvSpPr>
-        <p:spPr>
-          <a:xfrm>
-            <a:off x="566928" y="6080760"/>
-            <a:ext cx="4069080" cy="228600"/>
+          <p:cNvPr id="53" name="Text 51"/>
+          <p:cNvSpPr/>
+          <p:nvPr/>
+        </p:nvSpPr>
+        <p:spPr>
+          <a:xfrm>
+            <a:off x="502920" y="6080760"/>
+            <a:ext cx="2926080" cy="228600"/>
           </a:xfrm>
           <a:prstGeom prst="rect">
             <a:avLst/>
@@ -9032,20 +8873,24 @@
           </p:nvPr>
         </p:nvGraphicFramePr>
         <p:xfrm>
-          <a:off x="4773168" y="1645920"/>
-          <a:ext cx="6858000" cy="914400"/>
+          <a:off x="3749040" y="1645920"/>
+          <a:ext cx="6805879" cy="914400"/>
         </p:xfrm>
         <a:graphic>
           <a:graphicData uri="http://schemas.openxmlformats.org/drawingml/2006/table">
             <a:tbl>
               <a:tblPr/>
               <a:tblGrid>
-                <a:gridCol w="731520"/>
-                <a:gridCol w="1645920"/>
+                <a:gridCol w="457200"/>
+                <a:gridCol w="457200"/>
+                <a:gridCol w="868680"/>
                 <a:gridCol w="1188720"/>
-                <a:gridCol w="1188720"/>
-                <a:gridCol w="1005840"/>
-                <a:gridCol w="1097280"/>
+                <a:gridCol w="749808"/>
+                <a:gridCol w="749808"/>
+                <a:gridCol w="658368"/>
+                <a:gridCol w="658368"/>
+                <a:gridCol w="658368"/>
+                <a:gridCol w="502920"/>
               </a:tblGrid>
               <a:tr h="320040">
                 <a:tc>
@@ -9062,7 +8907,129 @@
                             <a:srgbClr val="FFFFFF"/>
                           </a:solidFill>
                         </a:rPr>
-                        <a:t>층수</a:t>
+                        <a:t>층</a:t>
+                      </a:r>
+                      <a:endParaRPr lang="en-US" sz="1000" dirty="0"/>
+                    </a:p>
+                  </a:txBody>
+                  <a:tcPr marL="91440" marR="91440" marT="45720" marB="45720" anchor="ctr">
+                    <a:lnL w="12700" cap="flat" cmpd="sng" algn="ctr">
+                      <a:solidFill>
+                        <a:srgbClr val="CBD5E0"/>
+                      </a:solidFill>
+                      <a:prstDash val="solid"/>
+                      <a:round/>
+                      <a:headEnd type="none" w="med" len="med"/>
+                      <a:tailEnd type="none" w="med" len="med"/>
+                    </a:lnL>
+                    <a:lnR w="12700" cap="flat" cmpd="sng" algn="ctr">
+                      <a:solidFill>
+                        <a:srgbClr val="CBD5E0"/>
+                      </a:solidFill>
+                      <a:prstDash val="solid"/>
+                      <a:round/>
+                      <a:headEnd type="none" w="med" len="med"/>
+                      <a:tailEnd type="none" w="med" len="med"/>
+                    </a:lnR>
+                    <a:lnT w="12700" cap="flat" cmpd="sng" algn="ctr">
+                      <a:solidFill>
+                        <a:srgbClr val="CBD5E0"/>
+                      </a:solidFill>
+                      <a:prstDash val="solid"/>
+                      <a:round/>
+                      <a:headEnd type="none" w="med" len="med"/>
+                      <a:tailEnd type="none" w="med" len="med"/>
+                    </a:lnT>
+                    <a:lnB w="12700" cap="flat" cmpd="sng" algn="ctr">
+                      <a:solidFill>
+                        <a:srgbClr val="CBD5E0"/>
+                      </a:solidFill>
+                      <a:prstDash val="solid"/>
+                      <a:round/>
+                      <a:headEnd type="none" w="med" len="med"/>
+                      <a:tailEnd type="none" w="med" len="med"/>
+                    </a:lnB>
+                    <a:solidFill>
+                      <a:srgbClr val="132A3A"/>
+                    </a:solidFill>
+                  </a:tcPr>
+                </a:tc>
+                <a:tc>
+                  <a:txBody>
+                    <a:bodyPr/>
+                    <a:lstStyle/>
+                    <a:p>
+                      <a:pPr algn="ctr" indent="0" marL="0">
+                        <a:buNone/>
+                      </a:pPr>
+                      <a:r>
+                        <a:rPr lang="en-US" sz="1000" b="1" dirty="0">
+                          <a:solidFill>
+                            <a:srgbClr val="FFFFFF"/>
+                          </a:solidFill>
+                        </a:rPr>
+                        <a:t>호실</a:t>
+                      </a:r>
+                      <a:endParaRPr lang="en-US" sz="1000" dirty="0"/>
+                    </a:p>
+                  </a:txBody>
+                  <a:tcPr marL="91440" marR="91440" marT="45720" marB="45720" anchor="ctr">
+                    <a:lnL w="12700" cap="flat" cmpd="sng" algn="ctr">
+                      <a:solidFill>
+                        <a:srgbClr val="CBD5E0"/>
+                      </a:solidFill>
+                      <a:prstDash val="solid"/>
+                      <a:round/>
+                      <a:headEnd type="none" w="med" len="med"/>
+                      <a:tailEnd type="none" w="med" len="med"/>
+                    </a:lnL>
+                    <a:lnR w="12700" cap="flat" cmpd="sng" algn="ctr">
+                      <a:solidFill>
+                        <a:srgbClr val="CBD5E0"/>
+                      </a:solidFill>
+                      <a:prstDash val="solid"/>
+                      <a:round/>
+                      <a:headEnd type="none" w="med" len="med"/>
+                      <a:tailEnd type="none" w="med" len="med"/>
+                    </a:lnR>
+                    <a:lnT w="12700" cap="flat" cmpd="sng" algn="ctr">
+                      <a:solidFill>
+                        <a:srgbClr val="CBD5E0"/>
+                      </a:solidFill>
+                      <a:prstDash val="solid"/>
+                      <a:round/>
+                      <a:headEnd type="none" w="med" len="med"/>
+                      <a:tailEnd type="none" w="med" len="med"/>
+                    </a:lnT>
+                    <a:lnB w="12700" cap="flat" cmpd="sng" algn="ctr">
+                      <a:solidFill>
+                        <a:srgbClr val="CBD5E0"/>
+                      </a:solidFill>
+                      <a:prstDash val="solid"/>
+                      <a:round/>
+                      <a:headEnd type="none" w="med" len="med"/>
+                      <a:tailEnd type="none" w="med" len="med"/>
+                    </a:lnB>
+                    <a:solidFill>
+                      <a:srgbClr val="132A3A"/>
+                    </a:solidFill>
+                  </a:tcPr>
+                </a:tc>
+                <a:tc>
+                  <a:txBody>
+                    <a:bodyPr/>
+                    <a:lstStyle/>
+                    <a:p>
+                      <a:pPr algn="ctr" indent="0" marL="0">
+                        <a:buNone/>
+                      </a:pPr>
+                      <a:r>
+                        <a:rPr lang="en-US" sz="1000" b="1" dirty="0">
+                          <a:solidFill>
+                            <a:srgbClr val="FFFFFF"/>
+                          </a:solidFill>
+                        </a:rPr>
+                        <a:t>용도/업종</a:t>
                       </a:r>
                       <a:endParaRPr lang="en-US" sz="1000" dirty="0"/>
                     </a:p>
@@ -9184,7 +9151,7 @@
                             <a:srgbClr val="FFFFFF"/>
                           </a:solidFill>
                         </a:rPr>
-                        <a:t>면적(평)</a:t>
+                        <a:t>전용면적(㎡)</a:t>
                       </a:r>
                       <a:endParaRPr lang="en-US" sz="1000" dirty="0"/>
                     </a:p>
@@ -9245,7 +9212,7 @@
                             <a:srgbClr val="FFFFFF"/>
                           </a:solidFill>
                         </a:rPr>
-                        <a:t>보증금</a:t>
+                        <a:t>보증금(만원)</a:t>
                       </a:r>
                       <a:endParaRPr lang="en-US" sz="1000" dirty="0"/>
                     </a:p>
@@ -9306,7 +9273,68 @@
                             <a:srgbClr val="FFFFFF"/>
                           </a:solidFill>
                         </a:rPr>
-                        <a:t>월세</a:t>
+                        <a:t>월세(만원)</a:t>
+                      </a:r>
+                      <a:endParaRPr lang="en-US" sz="1000" dirty="0"/>
+                    </a:p>
+                  </a:txBody>
+                  <a:tcPr marL="91440" marR="91440" marT="45720" marB="45720" anchor="ctr">
+                    <a:lnL w="12700" cap="flat" cmpd="sng" algn="ctr">
+                      <a:solidFill>
+                        <a:srgbClr val="CBD5E0"/>
+                      </a:solidFill>
+                      <a:prstDash val="solid"/>
+                      <a:round/>
+                      <a:headEnd type="none" w="med" len="med"/>
+                      <a:tailEnd type="none" w="med" len="med"/>
+                    </a:lnL>
+                    <a:lnR w="12700" cap="flat" cmpd="sng" algn="ctr">
+                      <a:solidFill>
+                        <a:srgbClr val="CBD5E0"/>
+                      </a:solidFill>
+                      <a:prstDash val="solid"/>
+                      <a:round/>
+                      <a:headEnd type="none" w="med" len="med"/>
+                      <a:tailEnd type="none" w="med" len="med"/>
+                    </a:lnR>
+                    <a:lnT w="12700" cap="flat" cmpd="sng" algn="ctr">
+                      <a:solidFill>
+                        <a:srgbClr val="CBD5E0"/>
+                      </a:solidFill>
+                      <a:prstDash val="solid"/>
+                      <a:round/>
+                      <a:headEnd type="none" w="med" len="med"/>
+                      <a:tailEnd type="none" w="med" len="med"/>
+                    </a:lnT>
+                    <a:lnB w="12700" cap="flat" cmpd="sng" algn="ctr">
+                      <a:solidFill>
+                        <a:srgbClr val="CBD5E0"/>
+                      </a:solidFill>
+                      <a:prstDash val="solid"/>
+                      <a:round/>
+                      <a:headEnd type="none" w="med" len="med"/>
+                      <a:tailEnd type="none" w="med" len="med"/>
+                    </a:lnB>
+                    <a:solidFill>
+                      <a:srgbClr val="132A3A"/>
+                    </a:solidFill>
+                  </a:tcPr>
+                </a:tc>
+                <a:tc>
+                  <a:txBody>
+                    <a:bodyPr/>
+                    <a:lstStyle/>
+                    <a:p>
+                      <a:pPr algn="ctr" indent="0" marL="0">
+                        <a:buNone/>
+                      </a:pPr>
+                      <a:r>
+                        <a:rPr lang="en-US" sz="1000" b="1" dirty="0">
+                          <a:solidFill>
+                            <a:srgbClr val="FFFFFF"/>
+                          </a:solidFill>
+                        </a:rPr>
+                        <a:t>관리비(만원)</a:t>
                       </a:r>
                       <a:endParaRPr lang="en-US" sz="1000" dirty="0"/>
                     </a:p>
@@ -9414,6 +9442,67 @@
                     </a:solidFill>
                   </a:tcPr>
                 </a:tc>
+                <a:tc>
+                  <a:txBody>
+                    <a:bodyPr/>
+                    <a:lstStyle/>
+                    <a:p>
+                      <a:pPr algn="ctr" indent="0" marL="0">
+                        <a:buNone/>
+                      </a:pPr>
+                      <a:r>
+                        <a:rPr lang="en-US" sz="1000" b="1" dirty="0">
+                          <a:solidFill>
+                            <a:srgbClr val="FFFFFF"/>
+                          </a:solidFill>
+                        </a:rPr>
+                        <a:t>비고</a:t>
+                      </a:r>
+                      <a:endParaRPr lang="en-US" sz="1000" dirty="0"/>
+                    </a:p>
+                  </a:txBody>
+                  <a:tcPr marL="91440" marR="91440" marT="45720" marB="45720" anchor="ctr">
+                    <a:lnL w="12700" cap="flat" cmpd="sng" algn="ctr">
+                      <a:solidFill>
+                        <a:srgbClr val="CBD5E0"/>
+                      </a:solidFill>
+                      <a:prstDash val="solid"/>
+                      <a:round/>
+                      <a:headEnd type="none" w="med" len="med"/>
+                      <a:tailEnd type="none" w="med" len="med"/>
+                    </a:lnL>
+                    <a:lnR w="12700" cap="flat" cmpd="sng" algn="ctr">
+                      <a:solidFill>
+                        <a:srgbClr val="CBD5E0"/>
+                      </a:solidFill>
+                      <a:prstDash val="solid"/>
+                      <a:round/>
+                      <a:headEnd type="none" w="med" len="med"/>
+                      <a:tailEnd type="none" w="med" len="med"/>
+                    </a:lnR>
+                    <a:lnT w="12700" cap="flat" cmpd="sng" algn="ctr">
+                      <a:solidFill>
+                        <a:srgbClr val="CBD5E0"/>
+                      </a:solidFill>
+                      <a:prstDash val="solid"/>
+                      <a:round/>
+                      <a:headEnd type="none" w="med" len="med"/>
+                      <a:tailEnd type="none" w="med" len="med"/>
+                    </a:lnT>
+                    <a:lnB w="12700" cap="flat" cmpd="sng" algn="ctr">
+                      <a:solidFill>
+                        <a:srgbClr val="CBD5E0"/>
+                      </a:solidFill>
+                      <a:prstDash val="solid"/>
+                      <a:round/>
+                      <a:headEnd type="none" w="med" len="med"/>
+                      <a:tailEnd type="none" w="med" len="med"/>
+                    </a:lnB>
+                    <a:solidFill>
+                      <a:srgbClr val="132A3A"/>
+                    </a:solidFill>
+                  </a:tcPr>
+                </a:tc>
               </a:tr>
               <a:tr h="320040">
                 <a:tc>
@@ -9425,7 +9514,7 @@
                         <a:buNone/>
                       </a:pPr>
                       <a:r>
-                        <a:rPr lang="en-US" sz="950" dirty="0">
+                        <a:rPr lang="en-US" sz="850" dirty="0">
                           <a:solidFill>
                             <a:srgbClr val="2B2B2B"/>
                           </a:solidFill>
@@ -9435,7 +9524,7 @@
                         </a:rPr>
                         <a:t>B1</a:t>
                       </a:r>
-                      <a:endParaRPr lang="en-US" sz="950" dirty="0">
+                      <a:endParaRPr lang="en-US" sz="850" dirty="0">
                         <a:latin typeface="맑은 고딕" charset="0"/>
                         <a:ea typeface="맑은 고딕" charset="0"/>
                         <a:cs typeface="맑은 고딕" charset="0"/>
@@ -9493,7 +9582,7 @@
                         <a:buNone/>
                       </a:pPr>
                       <a:r>
-                        <a:rPr lang="en-US" sz="950" dirty="0">
+                        <a:rPr lang="en-US" sz="850" dirty="0">
                           <a:solidFill>
                             <a:srgbClr val="2B2B2B"/>
                           </a:solidFill>
@@ -9501,9 +9590,9 @@
                           <a:ea typeface="맑은 고딕" pitchFamily="34" charset="-122"/>
                           <a:cs typeface="맑은 고딕" pitchFamily="34" charset="-120"/>
                         </a:rPr>
-                        <a:t>주점</a:t>
+                        <a:t>-</a:t>
                       </a:r>
-                      <a:endParaRPr lang="en-US" sz="950" dirty="0">
+                      <a:endParaRPr lang="en-US" sz="850" dirty="0">
                         <a:latin typeface="맑은 고딕" charset="0"/>
                         <a:ea typeface="맑은 고딕" charset="0"/>
                         <a:cs typeface="맑은 고딕" charset="0"/>
@@ -9561,7 +9650,7 @@
                         <a:buNone/>
                       </a:pPr>
                       <a:r>
-                        <a:rPr lang="en-US" sz="950" dirty="0">
+                        <a:rPr lang="en-US" sz="850" dirty="0">
                           <a:solidFill>
                             <a:srgbClr val="2B2B2B"/>
                           </a:solidFill>
@@ -9569,9 +9658,77 @@
                           <a:ea typeface="맑은 고딕" pitchFamily="34" charset="-122"/>
                           <a:cs typeface="맑은 고딕" pitchFamily="34" charset="-120"/>
                         </a:rPr>
-                        <a:t>96.43평</a:t>
+                        <a:t>주점</a:t>
                       </a:r>
-                      <a:endParaRPr lang="en-US" sz="950" dirty="0">
+                      <a:endParaRPr lang="en-US" sz="850" dirty="0">
+                        <a:latin typeface="맑은 고딕" charset="0"/>
+                        <a:ea typeface="맑은 고딕" charset="0"/>
+                        <a:cs typeface="맑은 고딕" charset="0"/>
+                      </a:endParaRPr>
+                    </a:p>
+                  </a:txBody>
+                  <a:tcPr marL="91440" marR="91440" marT="45720" marB="45720" anchor="ctr">
+                    <a:lnL w="12700" cap="flat" cmpd="sng" algn="ctr">
+                      <a:solidFill>
+                        <a:srgbClr val="CBD5E0"/>
+                      </a:solidFill>
+                      <a:prstDash val="solid"/>
+                      <a:round/>
+                      <a:headEnd type="none" w="med" len="med"/>
+                      <a:tailEnd type="none" w="med" len="med"/>
+                    </a:lnL>
+                    <a:lnR w="12700" cap="flat" cmpd="sng" algn="ctr">
+                      <a:solidFill>
+                        <a:srgbClr val="CBD5E0"/>
+                      </a:solidFill>
+                      <a:prstDash val="solid"/>
+                      <a:round/>
+                      <a:headEnd type="none" w="med" len="med"/>
+                      <a:tailEnd type="none" w="med" len="med"/>
+                    </a:lnR>
+                    <a:lnT w="12700" cap="flat" cmpd="sng" algn="ctr">
+                      <a:solidFill>
+                        <a:srgbClr val="CBD5E0"/>
+                      </a:solidFill>
+                      <a:prstDash val="solid"/>
+                      <a:round/>
+                      <a:headEnd type="none" w="med" len="med"/>
+                      <a:tailEnd type="none" w="med" len="med"/>
+                    </a:lnT>
+                    <a:lnB w="12700" cap="flat" cmpd="sng" algn="ctr">
+                      <a:solidFill>
+                        <a:srgbClr val="CBD5E0"/>
+                      </a:solidFill>
+                      <a:prstDash val="solid"/>
+                      <a:round/>
+                      <a:headEnd type="none" w="med" len="med"/>
+                      <a:tailEnd type="none" w="med" len="med"/>
+                    </a:lnB>
+                    <a:solidFill>
+                      <a:srgbClr val="FFFFFF"/>
+                    </a:solidFill>
+                  </a:tcPr>
+                </a:tc>
+                <a:tc>
+                  <a:txBody>
+                    <a:bodyPr/>
+                    <a:lstStyle/>
+                    <a:p>
+                      <a:pPr algn="ctr" indent="0" marL="0">
+                        <a:buNone/>
+                      </a:pPr>
+                      <a:r>
+                        <a:rPr lang="en-US" sz="850" dirty="0">
+                          <a:solidFill>
+                            <a:srgbClr val="2B2B2B"/>
+                          </a:solidFill>
+                          <a:latin typeface="맑은 고딕" pitchFamily="34" charset="0"/>
+                          <a:ea typeface="맑은 고딕" pitchFamily="34" charset="-122"/>
+                          <a:cs typeface="맑은 고딕" pitchFamily="34" charset="-120"/>
+                        </a:rPr>
+                        <a:t>주점</a:t>
+                      </a:r>
+                      <a:endParaRPr lang="en-US" sz="850" dirty="0">
                         <a:latin typeface="맑은 고딕" charset="0"/>
                         <a:ea typeface="맑은 고딕" charset="0"/>
                         <a:cs typeface="맑은 고딕" charset="0"/>
@@ -9629,7 +9786,7 @@
                         <a:buNone/>
                       </a:pPr>
                       <a:r>
-                        <a:rPr lang="en-US" sz="950" dirty="0">
+                        <a:rPr lang="en-US" sz="850" dirty="0">
                           <a:solidFill>
                             <a:srgbClr val="2B2B2B"/>
                           </a:solidFill>
@@ -9637,9 +9794,9 @@
                           <a:ea typeface="맑은 고딕" pitchFamily="34" charset="-122"/>
                           <a:cs typeface="맑은 고딕" pitchFamily="34" charset="-120"/>
                         </a:rPr>
-                        <a:t>34,000만</a:t>
+                        <a:t>318.8</a:t>
                       </a:r>
-                      <a:endParaRPr lang="en-US" sz="950" dirty="0">
+                      <a:endParaRPr lang="en-US" sz="850" dirty="0">
                         <a:latin typeface="맑은 고딕" charset="0"/>
                         <a:ea typeface="맑은 고딕" charset="0"/>
                         <a:cs typeface="맑은 고딕" charset="0"/>
@@ -9697,7 +9854,7 @@
                         <a:buNone/>
                       </a:pPr>
                       <a:r>
-                        <a:rPr lang="en-US" sz="950" dirty="0">
+                        <a:rPr lang="en-US" sz="850" dirty="0">
                           <a:solidFill>
                             <a:srgbClr val="2B2B2B"/>
                           </a:solidFill>
@@ -9705,9 +9862,145 @@
                           <a:ea typeface="맑은 고딕" pitchFamily="34" charset="-122"/>
                           <a:cs typeface="맑은 고딕" pitchFamily="34" charset="-120"/>
                         </a:rPr>
-                        <a:t>337만</a:t>
+                        <a:t>34,000</a:t>
                       </a:r>
-                      <a:endParaRPr lang="en-US" sz="950" dirty="0">
+                      <a:endParaRPr lang="en-US" sz="850" dirty="0">
+                        <a:latin typeface="맑은 고딕" charset="0"/>
+                        <a:ea typeface="맑은 고딕" charset="0"/>
+                        <a:cs typeface="맑은 고딕" charset="0"/>
+                      </a:endParaRPr>
+                    </a:p>
+                  </a:txBody>
+                  <a:tcPr marL="91440" marR="91440" marT="45720" marB="45720" anchor="ctr">
+                    <a:lnL w="12700" cap="flat" cmpd="sng" algn="ctr">
+                      <a:solidFill>
+                        <a:srgbClr val="CBD5E0"/>
+                      </a:solidFill>
+                      <a:prstDash val="solid"/>
+                      <a:round/>
+                      <a:headEnd type="none" w="med" len="med"/>
+                      <a:tailEnd type="none" w="med" len="med"/>
+                    </a:lnL>
+                    <a:lnR w="12700" cap="flat" cmpd="sng" algn="ctr">
+                      <a:solidFill>
+                        <a:srgbClr val="CBD5E0"/>
+                      </a:solidFill>
+                      <a:prstDash val="solid"/>
+                      <a:round/>
+                      <a:headEnd type="none" w="med" len="med"/>
+                      <a:tailEnd type="none" w="med" len="med"/>
+                    </a:lnR>
+                    <a:lnT w="12700" cap="flat" cmpd="sng" algn="ctr">
+                      <a:solidFill>
+                        <a:srgbClr val="CBD5E0"/>
+                      </a:solidFill>
+                      <a:prstDash val="solid"/>
+                      <a:round/>
+                      <a:headEnd type="none" w="med" len="med"/>
+                      <a:tailEnd type="none" w="med" len="med"/>
+                    </a:lnT>
+                    <a:lnB w="12700" cap="flat" cmpd="sng" algn="ctr">
+                      <a:solidFill>
+                        <a:srgbClr val="CBD5E0"/>
+                      </a:solidFill>
+                      <a:prstDash val="solid"/>
+                      <a:round/>
+                      <a:headEnd type="none" w="med" len="med"/>
+                      <a:tailEnd type="none" w="med" len="med"/>
+                    </a:lnB>
+                    <a:solidFill>
+                      <a:srgbClr val="FFFFFF"/>
+                    </a:solidFill>
+                  </a:tcPr>
+                </a:tc>
+                <a:tc>
+                  <a:txBody>
+                    <a:bodyPr/>
+                    <a:lstStyle/>
+                    <a:p>
+                      <a:pPr algn="r" indent="0" marL="0">
+                        <a:buNone/>
+                      </a:pPr>
+                      <a:r>
+                        <a:rPr lang="en-US" sz="850" dirty="0">
+                          <a:solidFill>
+                            <a:srgbClr val="2B2B2B"/>
+                          </a:solidFill>
+                          <a:latin typeface="맑은 고딕" pitchFamily="34" charset="0"/>
+                          <a:ea typeface="맑은 고딕" pitchFamily="34" charset="-122"/>
+                          <a:cs typeface="맑은 고딕" pitchFamily="34" charset="-120"/>
+                        </a:rPr>
+                        <a:t>337</a:t>
+                      </a:r>
+                      <a:endParaRPr lang="en-US" sz="850" dirty="0">
+                        <a:latin typeface="맑은 고딕" charset="0"/>
+                        <a:ea typeface="맑은 고딕" charset="0"/>
+                        <a:cs typeface="맑은 고딕" charset="0"/>
+                      </a:endParaRPr>
+                    </a:p>
+                  </a:txBody>
+                  <a:tcPr marL="91440" marR="91440" marT="45720" marB="45720" anchor="ctr">
+                    <a:lnL w="12700" cap="flat" cmpd="sng" algn="ctr">
+                      <a:solidFill>
+                        <a:srgbClr val="CBD5E0"/>
+                      </a:solidFill>
+                      <a:prstDash val="solid"/>
+                      <a:round/>
+                      <a:headEnd type="none" w="med" len="med"/>
+                      <a:tailEnd type="none" w="med" len="med"/>
+                    </a:lnL>
+                    <a:lnR w="12700" cap="flat" cmpd="sng" algn="ctr">
+                      <a:solidFill>
+                        <a:srgbClr val="CBD5E0"/>
+                      </a:solidFill>
+                      <a:prstDash val="solid"/>
+                      <a:round/>
+                      <a:headEnd type="none" w="med" len="med"/>
+                      <a:tailEnd type="none" w="med" len="med"/>
+                    </a:lnR>
+                    <a:lnT w="12700" cap="flat" cmpd="sng" algn="ctr">
+                      <a:solidFill>
+                        <a:srgbClr val="CBD5E0"/>
+                      </a:solidFill>
+                      <a:prstDash val="solid"/>
+                      <a:round/>
+                      <a:headEnd type="none" w="med" len="med"/>
+                      <a:tailEnd type="none" w="med" len="med"/>
+                    </a:lnT>
+                    <a:lnB w="12700" cap="flat" cmpd="sng" algn="ctr">
+                      <a:solidFill>
+                        <a:srgbClr val="CBD5E0"/>
+                      </a:solidFill>
+                      <a:prstDash val="solid"/>
+                      <a:round/>
+                      <a:headEnd type="none" w="med" len="med"/>
+                      <a:tailEnd type="none" w="med" len="med"/>
+                    </a:lnB>
+                    <a:solidFill>
+                      <a:srgbClr val="FFFFFF"/>
+                    </a:solidFill>
+                  </a:tcPr>
+                </a:tc>
+                <a:tc>
+                  <a:txBody>
+                    <a:bodyPr/>
+                    <a:lstStyle/>
+                    <a:p>
+                      <a:pPr algn="r" indent="0" marL="0">
+                        <a:buNone/>
+                      </a:pPr>
+                      <a:r>
+                        <a:rPr lang="en-US" sz="850" dirty="0">
+                          <a:solidFill>
+                            <a:srgbClr val="2B2B2B"/>
+                          </a:solidFill>
+                          <a:latin typeface="맑은 고딕" pitchFamily="34" charset="0"/>
+                          <a:ea typeface="맑은 고딕" pitchFamily="34" charset="-122"/>
+                          <a:cs typeface="맑은 고딕" pitchFamily="34" charset="-120"/>
+                        </a:rPr>
+                        <a:t>29</a:t>
+                      </a:r>
+                      <a:endParaRPr lang="en-US" sz="850" dirty="0">
                         <a:latin typeface="맑은 고딕" charset="0"/>
                         <a:ea typeface="맑은 고딕" charset="0"/>
                         <a:cs typeface="맑은 고딕" charset="0"/>
@@ -9765,7 +10058,7 @@
                         <a:buNone/>
                       </a:pPr>
                       <a:r>
-                        <a:rPr lang="en-US" sz="950" dirty="0">
+                        <a:rPr lang="en-US" sz="850" dirty="0">
                           <a:solidFill>
                             <a:srgbClr val="2B2B2B"/>
                           </a:solidFill>
@@ -9775,7 +10068,75 @@
                         </a:rPr>
                         <a:t>2027-03-31</a:t>
                       </a:r>
-                      <a:endParaRPr lang="en-US" sz="950" dirty="0">
+                      <a:endParaRPr lang="en-US" sz="850" dirty="0">
+                        <a:latin typeface="맑은 고딕" charset="0"/>
+                        <a:ea typeface="맑은 고딕" charset="0"/>
+                        <a:cs typeface="맑은 고딕" charset="0"/>
+                      </a:endParaRPr>
+                    </a:p>
+                  </a:txBody>
+                  <a:tcPr marL="91440" marR="91440" marT="45720" marB="45720" anchor="ctr">
+                    <a:lnL w="12700" cap="flat" cmpd="sng" algn="ctr">
+                      <a:solidFill>
+                        <a:srgbClr val="CBD5E0"/>
+                      </a:solidFill>
+                      <a:prstDash val="solid"/>
+                      <a:round/>
+                      <a:headEnd type="none" w="med" len="med"/>
+                      <a:tailEnd type="none" w="med" len="med"/>
+                    </a:lnL>
+                    <a:lnR w="12700" cap="flat" cmpd="sng" algn="ctr">
+                      <a:solidFill>
+                        <a:srgbClr val="CBD5E0"/>
+                      </a:solidFill>
+                      <a:prstDash val="solid"/>
+                      <a:round/>
+                      <a:headEnd type="none" w="med" len="med"/>
+                      <a:tailEnd type="none" w="med" len="med"/>
+                    </a:lnR>
+                    <a:lnT w="12700" cap="flat" cmpd="sng" algn="ctr">
+                      <a:solidFill>
+                        <a:srgbClr val="CBD5E0"/>
+                      </a:solidFill>
+                      <a:prstDash val="solid"/>
+                      <a:round/>
+                      <a:headEnd type="none" w="med" len="med"/>
+                      <a:tailEnd type="none" w="med" len="med"/>
+                    </a:lnT>
+                    <a:lnB w="12700" cap="flat" cmpd="sng" algn="ctr">
+                      <a:solidFill>
+                        <a:srgbClr val="CBD5E0"/>
+                      </a:solidFill>
+                      <a:prstDash val="solid"/>
+                      <a:round/>
+                      <a:headEnd type="none" w="med" len="med"/>
+                      <a:tailEnd type="none" w="med" len="med"/>
+                    </a:lnB>
+                    <a:solidFill>
+                      <a:srgbClr val="FFFFFF"/>
+                    </a:solidFill>
+                  </a:tcPr>
+                </a:tc>
+                <a:tc>
+                  <a:txBody>
+                    <a:bodyPr/>
+                    <a:lstStyle/>
+                    <a:p>
+                      <a:pPr algn="ctr" indent="0" marL="0">
+                        <a:buNone/>
+                      </a:pPr>
+                      <a:r>
+                        <a:rPr lang="en-US" sz="850" dirty="0">
+                          <a:solidFill>
+                            <a:srgbClr val="2B2B2B"/>
+                          </a:solidFill>
+                          <a:latin typeface="맑은 고딕" pitchFamily="34" charset="0"/>
+                          <a:ea typeface="맑은 고딕" pitchFamily="34" charset="-122"/>
+                          <a:cs typeface="맑은 고딕" pitchFamily="34" charset="-120"/>
+                        </a:rPr>
+                        <a:t>협의 중</a:t>
+                      </a:r>
+                      <a:endParaRPr lang="en-US" sz="850" dirty="0">
                         <a:latin typeface="맑은 고딕" charset="0"/>
                         <a:ea typeface="맑은 고딕" charset="0"/>
                         <a:cs typeface="맑은 고딕" charset="0"/>
@@ -9835,7 +10196,7 @@
                         <a:buNone/>
                       </a:pPr>
                       <a:r>
-                        <a:rPr lang="en-US" sz="950" dirty="0">
+                        <a:rPr lang="en-US" sz="850" dirty="0">
                           <a:solidFill>
                             <a:srgbClr val="2B2B2B"/>
                           </a:solidFill>
@@ -9845,7 +10206,7 @@
                         </a:rPr>
                         <a:t>B1</a:t>
                       </a:r>
-                      <a:endParaRPr lang="en-US" sz="950" dirty="0">
+                      <a:endParaRPr lang="en-US" sz="850" dirty="0">
                         <a:latin typeface="맑은 고딕" charset="0"/>
                         <a:ea typeface="맑은 고딕" charset="0"/>
                         <a:cs typeface="맑은 고딕" charset="0"/>
@@ -9903,7 +10264,7 @@
                         <a:buNone/>
                       </a:pPr>
                       <a:r>
-                        <a:rPr lang="en-US" sz="950" dirty="0">
+                        <a:rPr lang="en-US" sz="850" dirty="0">
                           <a:solidFill>
                             <a:srgbClr val="2B2B2B"/>
                           </a:solidFill>
@@ -9911,9 +10272,9 @@
                           <a:ea typeface="맑은 고딕" pitchFamily="34" charset="-122"/>
                           <a:cs typeface="맑은 고딕" pitchFamily="34" charset="-120"/>
                         </a:rPr>
-                        <a:t>창고</a:t>
+                        <a:t>-</a:t>
                       </a:r>
-                      <a:endParaRPr lang="en-US" sz="950" dirty="0">
+                      <a:endParaRPr lang="en-US" sz="850" dirty="0">
                         <a:latin typeface="맑은 고딕" charset="0"/>
                         <a:ea typeface="맑은 고딕" charset="0"/>
                         <a:cs typeface="맑은 고딕" charset="0"/>
@@ -9971,7 +10332,7 @@
                         <a:buNone/>
                       </a:pPr>
                       <a:r>
-                        <a:rPr lang="en-US" sz="950" dirty="0">
+                        <a:rPr lang="en-US" sz="850" dirty="0">
                           <a:solidFill>
                             <a:srgbClr val="2B2B2B"/>
                           </a:solidFill>
@@ -9979,9 +10340,77 @@
                           <a:ea typeface="맑은 고딕" pitchFamily="34" charset="-122"/>
                           <a:cs typeface="맑은 고딕" pitchFamily="34" charset="-120"/>
                         </a:rPr>
-                        <a:t>44.1평</a:t>
+                        <a:t>창고</a:t>
                       </a:r>
-                      <a:endParaRPr lang="en-US" sz="950" dirty="0">
+                      <a:endParaRPr lang="en-US" sz="850" dirty="0">
+                        <a:latin typeface="맑은 고딕" charset="0"/>
+                        <a:ea typeface="맑은 고딕" charset="0"/>
+                        <a:cs typeface="맑은 고딕" charset="0"/>
+                      </a:endParaRPr>
+                    </a:p>
+                  </a:txBody>
+                  <a:tcPr marL="91440" marR="91440" marT="45720" marB="45720" anchor="ctr">
+                    <a:lnL w="12700" cap="flat" cmpd="sng" algn="ctr">
+                      <a:solidFill>
+                        <a:srgbClr val="CBD5E0"/>
+                      </a:solidFill>
+                      <a:prstDash val="solid"/>
+                      <a:round/>
+                      <a:headEnd type="none" w="med" len="med"/>
+                      <a:tailEnd type="none" w="med" len="med"/>
+                    </a:lnL>
+                    <a:lnR w="12700" cap="flat" cmpd="sng" algn="ctr">
+                      <a:solidFill>
+                        <a:srgbClr val="CBD5E0"/>
+                      </a:solidFill>
+                      <a:prstDash val="solid"/>
+                      <a:round/>
+                      <a:headEnd type="none" w="med" len="med"/>
+                      <a:tailEnd type="none" w="med" len="med"/>
+                    </a:lnR>
+                    <a:lnT w="12700" cap="flat" cmpd="sng" algn="ctr">
+                      <a:solidFill>
+                        <a:srgbClr val="CBD5E0"/>
+                      </a:solidFill>
+                      <a:prstDash val="solid"/>
+                      <a:round/>
+                      <a:headEnd type="none" w="med" len="med"/>
+                      <a:tailEnd type="none" w="med" len="med"/>
+                    </a:lnT>
+                    <a:lnB w="12700" cap="flat" cmpd="sng" algn="ctr">
+                      <a:solidFill>
+                        <a:srgbClr val="CBD5E0"/>
+                      </a:solidFill>
+                      <a:prstDash val="solid"/>
+                      <a:round/>
+                      <a:headEnd type="none" w="med" len="med"/>
+                      <a:tailEnd type="none" w="med" len="med"/>
+                    </a:lnB>
+                    <a:solidFill>
+                      <a:srgbClr val="F3F6F7"/>
+                    </a:solidFill>
+                  </a:tcPr>
+                </a:tc>
+                <a:tc>
+                  <a:txBody>
+                    <a:bodyPr/>
+                    <a:lstStyle/>
+                    <a:p>
+                      <a:pPr algn="ctr" indent="0" marL="0">
+                        <a:buNone/>
+                      </a:pPr>
+                      <a:r>
+                        <a:rPr lang="en-US" sz="850" dirty="0">
+                          <a:solidFill>
+                            <a:srgbClr val="2B2B2B"/>
+                          </a:solidFill>
+                          <a:latin typeface="맑은 고딕" pitchFamily="34" charset="0"/>
+                          <a:ea typeface="맑은 고딕" pitchFamily="34" charset="-122"/>
+                          <a:cs typeface="맑은 고딕" pitchFamily="34" charset="-120"/>
+                        </a:rPr>
+                        <a:t>창고</a:t>
+                      </a:r>
+                      <a:endParaRPr lang="en-US" sz="850" dirty="0">
                         <a:latin typeface="맑은 고딕" charset="0"/>
                         <a:ea typeface="맑은 고딕" charset="0"/>
                         <a:cs typeface="맑은 고딕" charset="0"/>
@@ -10039,7 +10468,7 @@
                         <a:buNone/>
                       </a:pPr>
                       <a:r>
-                        <a:rPr lang="en-US" sz="950" dirty="0">
+                        <a:rPr lang="en-US" sz="850" dirty="0">
                           <a:solidFill>
                             <a:srgbClr val="2B2B2B"/>
                           </a:solidFill>
@@ -10047,9 +10476,9 @@
                           <a:ea typeface="맑은 고딕" pitchFamily="34" charset="-122"/>
                           <a:cs typeface="맑은 고딕" pitchFamily="34" charset="-120"/>
                         </a:rPr>
-                        <a:t>6,000만</a:t>
+                        <a:t>145.8</a:t>
                       </a:r>
-                      <a:endParaRPr lang="en-US" sz="950" dirty="0">
+                      <a:endParaRPr lang="en-US" sz="850" dirty="0">
                         <a:latin typeface="맑은 고딕" charset="0"/>
                         <a:ea typeface="맑은 고딕" charset="0"/>
                         <a:cs typeface="맑은 고딕" charset="0"/>
@@ -10107,7 +10536,7 @@
                         <a:buNone/>
                       </a:pPr>
                       <a:r>
-                        <a:rPr lang="en-US" sz="950" dirty="0">
+                        <a:rPr lang="en-US" sz="850" dirty="0">
                           <a:solidFill>
                             <a:srgbClr val="2B2B2B"/>
                           </a:solidFill>
@@ -10115,9 +10544,145 @@
                           <a:ea typeface="맑은 고딕" pitchFamily="34" charset="-122"/>
                           <a:cs typeface="맑은 고딕" pitchFamily="34" charset="-120"/>
                         </a:rPr>
-                        <a:t>88만</a:t>
+                        <a:t>6,000</a:t>
                       </a:r>
-                      <a:endParaRPr lang="en-US" sz="950" dirty="0">
+                      <a:endParaRPr lang="en-US" sz="850" dirty="0">
+                        <a:latin typeface="맑은 고딕" charset="0"/>
+                        <a:ea typeface="맑은 고딕" charset="0"/>
+                        <a:cs typeface="맑은 고딕" charset="0"/>
+                      </a:endParaRPr>
+                    </a:p>
+                  </a:txBody>
+                  <a:tcPr marL="91440" marR="91440" marT="45720" marB="45720" anchor="ctr">
+                    <a:lnL w="12700" cap="flat" cmpd="sng" algn="ctr">
+                      <a:solidFill>
+                        <a:srgbClr val="CBD5E0"/>
+                      </a:solidFill>
+                      <a:prstDash val="solid"/>
+                      <a:round/>
+                      <a:headEnd type="none" w="med" len="med"/>
+                      <a:tailEnd type="none" w="med" len="med"/>
+                    </a:lnL>
+                    <a:lnR w="12700" cap="flat" cmpd="sng" algn="ctr">
+                      <a:solidFill>
+                        <a:srgbClr val="CBD5E0"/>
+                      </a:solidFill>
+                      <a:prstDash val="solid"/>
+                      <a:round/>
+                      <a:headEnd type="none" w="med" len="med"/>
+                      <a:tailEnd type="none" w="med" len="med"/>
+                    </a:lnR>
+                    <a:lnT w="12700" cap="flat" cmpd="sng" algn="ctr">
+                      <a:solidFill>
+                        <a:srgbClr val="CBD5E0"/>
+                      </a:solidFill>
+                      <a:prstDash val="solid"/>
+                      <a:round/>
+                      <a:headEnd type="none" w="med" len="med"/>
+                      <a:tailEnd type="none" w="med" len="med"/>
+                    </a:lnT>
+                    <a:lnB w="12700" cap="flat" cmpd="sng" algn="ctr">
+                      <a:solidFill>
+                        <a:srgbClr val="CBD5E0"/>
+                      </a:solidFill>
+                      <a:prstDash val="solid"/>
+                      <a:round/>
+                      <a:headEnd type="none" w="med" len="med"/>
+                      <a:tailEnd type="none" w="med" len="med"/>
+                    </a:lnB>
+                    <a:solidFill>
+                      <a:srgbClr val="F3F6F7"/>
+                    </a:solidFill>
+                  </a:tcPr>
+                </a:tc>
+                <a:tc>
+                  <a:txBody>
+                    <a:bodyPr/>
+                    <a:lstStyle/>
+                    <a:p>
+                      <a:pPr algn="r" indent="0" marL="0">
+                        <a:buNone/>
+                      </a:pPr>
+                      <a:r>
+                        <a:rPr lang="en-US" sz="850" dirty="0">
+                          <a:solidFill>
+                            <a:srgbClr val="2B2B2B"/>
+                          </a:solidFill>
+                          <a:latin typeface="맑은 고딕" pitchFamily="34" charset="0"/>
+                          <a:ea typeface="맑은 고딕" pitchFamily="34" charset="-122"/>
+                          <a:cs typeface="맑은 고딕" pitchFamily="34" charset="-120"/>
+                        </a:rPr>
+                        <a:t>88</a:t>
+                      </a:r>
+                      <a:endParaRPr lang="en-US" sz="850" dirty="0">
+                        <a:latin typeface="맑은 고딕" charset="0"/>
+                        <a:ea typeface="맑은 고딕" charset="0"/>
+                        <a:cs typeface="맑은 고딕" charset="0"/>
+                      </a:endParaRPr>
+                    </a:p>
+                  </a:txBody>
+                  <a:tcPr marL="91440" marR="91440" marT="45720" marB="45720" anchor="ctr">
+                    <a:lnL w="12700" cap="flat" cmpd="sng" algn="ctr">
+                      <a:solidFill>
+                        <a:srgbClr val="CBD5E0"/>
+                      </a:solidFill>
+                      <a:prstDash val="solid"/>
+                      <a:round/>
+                      <a:headEnd type="none" w="med" len="med"/>
+                      <a:tailEnd type="none" w="med" len="med"/>
+                    </a:lnL>
+                    <a:lnR w="12700" cap="flat" cmpd="sng" algn="ctr">
+                      <a:solidFill>
+                        <a:srgbClr val="CBD5E0"/>
+                      </a:solidFill>
+                      <a:prstDash val="solid"/>
+                      <a:round/>
+                      <a:headEnd type="none" w="med" len="med"/>
+                      <a:tailEnd type="none" w="med" len="med"/>
+                    </a:lnR>
+                    <a:lnT w="12700" cap="flat" cmpd="sng" algn="ctr">
+                      <a:solidFill>
+                        <a:srgbClr val="CBD5E0"/>
+                      </a:solidFill>
+                      <a:prstDash val="solid"/>
+                      <a:round/>
+                      <a:headEnd type="none" w="med" len="med"/>
+                      <a:tailEnd type="none" w="med" len="med"/>
+                    </a:lnT>
+                    <a:lnB w="12700" cap="flat" cmpd="sng" algn="ctr">
+                      <a:solidFill>
+                        <a:srgbClr val="CBD5E0"/>
+                      </a:solidFill>
+                      <a:prstDash val="solid"/>
+                      <a:round/>
+                      <a:headEnd type="none" w="med" len="med"/>
+                      <a:tailEnd type="none" w="med" len="med"/>
+                    </a:lnB>
+                    <a:solidFill>
+                      <a:srgbClr val="F3F6F7"/>
+                    </a:solidFill>
+                  </a:tcPr>
+                </a:tc>
+                <a:tc>
+                  <a:txBody>
+                    <a:bodyPr/>
+                    <a:lstStyle/>
+                    <a:p>
+                      <a:pPr algn="r" indent="0" marL="0">
+                        <a:buNone/>
+                      </a:pPr>
+                      <a:r>
+                        <a:rPr lang="en-US" sz="850" dirty="0">
+                          <a:solidFill>
+                            <a:srgbClr val="2B2B2B"/>
+                          </a:solidFill>
+                          <a:latin typeface="맑은 고딕" pitchFamily="34" charset="0"/>
+                          <a:ea typeface="맑은 고딕" pitchFamily="34" charset="-122"/>
+                          <a:cs typeface="맑은 고딕" pitchFamily="34" charset="-120"/>
+                        </a:rPr>
+                        <a:t>13</a:t>
+                      </a:r>
+                      <a:endParaRPr lang="en-US" sz="850" dirty="0">
                         <a:latin typeface="맑은 고딕" charset="0"/>
                         <a:ea typeface="맑은 고딕" charset="0"/>
                         <a:cs typeface="맑은 고딕" charset="0"/>
@@ -10175,7 +10740,7 @@
                         <a:buNone/>
                       </a:pPr>
                       <a:r>
-                        <a:rPr lang="en-US" sz="950" dirty="0">
+                        <a:rPr lang="en-US" sz="850" dirty="0">
                           <a:solidFill>
                             <a:srgbClr val="2B2B2B"/>
                           </a:solidFill>
@@ -10185,7 +10750,75 @@
                         </a:rPr>
                         <a:t>2026-12-31</a:t>
                       </a:r>
-                      <a:endParaRPr lang="en-US" sz="950" dirty="0">
+                      <a:endParaRPr lang="en-US" sz="850" dirty="0">
+                        <a:latin typeface="맑은 고딕" charset="0"/>
+                        <a:ea typeface="맑은 고딕" charset="0"/>
+                        <a:cs typeface="맑은 고딕" charset="0"/>
+                      </a:endParaRPr>
+                    </a:p>
+                  </a:txBody>
+                  <a:tcPr marL="91440" marR="91440" marT="45720" marB="45720" anchor="ctr">
+                    <a:lnL w="12700" cap="flat" cmpd="sng" algn="ctr">
+                      <a:solidFill>
+                        <a:srgbClr val="CBD5E0"/>
+                      </a:solidFill>
+                      <a:prstDash val="solid"/>
+                      <a:round/>
+                      <a:headEnd type="none" w="med" len="med"/>
+                      <a:tailEnd type="none" w="med" len="med"/>
+                    </a:lnL>
+                    <a:lnR w="12700" cap="flat" cmpd="sng" algn="ctr">
+                      <a:solidFill>
+                        <a:srgbClr val="CBD5E0"/>
+                      </a:solidFill>
+                      <a:prstDash val="solid"/>
+                      <a:round/>
+                      <a:headEnd type="none" w="med" len="med"/>
+                      <a:tailEnd type="none" w="med" len="med"/>
+                    </a:lnR>
+                    <a:lnT w="12700" cap="flat" cmpd="sng" algn="ctr">
+                      <a:solidFill>
+                        <a:srgbClr val="CBD5E0"/>
+                      </a:solidFill>
+                      <a:prstDash val="solid"/>
+                      <a:round/>
+                      <a:headEnd type="none" w="med" len="med"/>
+                      <a:tailEnd type="none" w="med" len="med"/>
+                    </a:lnT>
+                    <a:lnB w="12700" cap="flat" cmpd="sng" algn="ctr">
+                      <a:solidFill>
+                        <a:srgbClr val="CBD5E0"/>
+                      </a:solidFill>
+                      <a:prstDash val="solid"/>
+                      <a:round/>
+                      <a:headEnd type="none" w="med" len="med"/>
+                      <a:tailEnd type="none" w="med" len="med"/>
+                    </a:lnB>
+                    <a:solidFill>
+                      <a:srgbClr val="F3F6F7"/>
+                    </a:solidFill>
+                  </a:tcPr>
+                </a:tc>
+                <a:tc>
+                  <a:txBody>
+                    <a:bodyPr/>
+                    <a:lstStyle/>
+                    <a:p>
+                      <a:pPr algn="ctr" indent="0" marL="0">
+                        <a:buNone/>
+                      </a:pPr>
+                      <a:r>
+                        <a:rPr lang="en-US" sz="850" dirty="0">
+                          <a:solidFill>
+                            <a:srgbClr val="2B2B2B"/>
+                          </a:solidFill>
+                          <a:latin typeface="맑은 고딕" pitchFamily="34" charset="0"/>
+                          <a:ea typeface="맑은 고딕" pitchFamily="34" charset="-122"/>
+                          <a:cs typeface="맑은 고딕" pitchFamily="34" charset="-120"/>
+                        </a:rPr>
+                        <a:t>합의 완료</a:t>
+                      </a:r>
+                      <a:endParaRPr lang="en-US" sz="850" dirty="0">
                         <a:latin typeface="맑은 고딕" charset="0"/>
                         <a:ea typeface="맑은 고딕" charset="0"/>
                         <a:cs typeface="맑은 고딕" charset="0"/>
@@ -10245,7 +10878,7 @@
                         <a:buNone/>
                       </a:pPr>
                       <a:r>
-                        <a:rPr lang="en-US" sz="950" dirty="0">
+                        <a:rPr lang="en-US" sz="850" dirty="0">
                           <a:solidFill>
                             <a:srgbClr val="2B2B2B"/>
                           </a:solidFill>
@@ -10255,7 +10888,7 @@
                         </a:rPr>
                         <a:t>1F</a:t>
                       </a:r>
-                      <a:endParaRPr lang="en-US" sz="950" dirty="0">
+                      <a:endParaRPr lang="en-US" sz="850" dirty="0">
                         <a:latin typeface="맑은 고딕" charset="0"/>
                         <a:ea typeface="맑은 고딕" charset="0"/>
                         <a:cs typeface="맑은 고딕" charset="0"/>
@@ -10313,7 +10946,7 @@
                         <a:buNone/>
                       </a:pPr>
                       <a:r>
-                        <a:rPr lang="en-US" sz="950" dirty="0">
+                        <a:rPr lang="en-US" sz="850" dirty="0">
                           <a:solidFill>
                             <a:srgbClr val="2B2B2B"/>
                           </a:solidFill>
@@ -10321,9 +10954,9 @@
                           <a:ea typeface="맑은 고딕" pitchFamily="34" charset="-122"/>
                           <a:cs typeface="맑은 고딕" pitchFamily="34" charset="-120"/>
                         </a:rPr>
-                        <a:t>소매점</a:t>
+                        <a:t>-</a:t>
                       </a:r>
-                      <a:endParaRPr lang="en-US" sz="950" dirty="0">
+                      <a:endParaRPr lang="en-US" sz="850" dirty="0">
                         <a:latin typeface="맑은 고딕" charset="0"/>
                         <a:ea typeface="맑은 고딕" charset="0"/>
                         <a:cs typeface="맑은 고딕" charset="0"/>
@@ -10381,7 +11014,7 @@
                         <a:buNone/>
                       </a:pPr>
                       <a:r>
-                        <a:rPr lang="en-US" sz="950" dirty="0">
+                        <a:rPr lang="en-US" sz="850" dirty="0">
                           <a:solidFill>
                             <a:srgbClr val="2B2B2B"/>
                           </a:solidFill>
@@ -10389,9 +11022,77 @@
                           <a:ea typeface="맑은 고딕" pitchFamily="34" charset="-122"/>
                           <a:cs typeface="맑은 고딕" pitchFamily="34" charset="-120"/>
                         </a:rPr>
-                        <a:t>31.37평</a:t>
+                        <a:t>소매점</a:t>
                       </a:r>
-                      <a:endParaRPr lang="en-US" sz="950" dirty="0">
+                      <a:endParaRPr lang="en-US" sz="850" dirty="0">
+                        <a:latin typeface="맑은 고딕" charset="0"/>
+                        <a:ea typeface="맑은 고딕" charset="0"/>
+                        <a:cs typeface="맑은 고딕" charset="0"/>
+                      </a:endParaRPr>
+                    </a:p>
+                  </a:txBody>
+                  <a:tcPr marL="91440" marR="91440" marT="45720" marB="45720" anchor="ctr">
+                    <a:lnL w="12700" cap="flat" cmpd="sng" algn="ctr">
+                      <a:solidFill>
+                        <a:srgbClr val="CBD5E0"/>
+                      </a:solidFill>
+                      <a:prstDash val="solid"/>
+                      <a:round/>
+                      <a:headEnd type="none" w="med" len="med"/>
+                      <a:tailEnd type="none" w="med" len="med"/>
+                    </a:lnL>
+                    <a:lnR w="12700" cap="flat" cmpd="sng" algn="ctr">
+                      <a:solidFill>
+                        <a:srgbClr val="CBD5E0"/>
+                      </a:solidFill>
+                      <a:prstDash val="solid"/>
+                      <a:round/>
+                      <a:headEnd type="none" w="med" len="med"/>
+                      <a:tailEnd type="none" w="med" len="med"/>
+                    </a:lnR>
+                    <a:lnT w="12700" cap="flat" cmpd="sng" algn="ctr">
+                      <a:solidFill>
+                        <a:srgbClr val="CBD5E0"/>
+                      </a:solidFill>
+                      <a:prstDash val="solid"/>
+                      <a:round/>
+                      <a:headEnd type="none" w="med" len="med"/>
+                      <a:tailEnd type="none" w="med" len="med"/>
+                    </a:lnT>
+                    <a:lnB w="12700" cap="flat" cmpd="sng" algn="ctr">
+                      <a:solidFill>
+                        <a:srgbClr val="CBD5E0"/>
+                      </a:solidFill>
+                      <a:prstDash val="solid"/>
+                      <a:round/>
+                      <a:headEnd type="none" w="med" len="med"/>
+                      <a:tailEnd type="none" w="med" len="med"/>
+                    </a:lnB>
+                    <a:solidFill>
+                      <a:srgbClr val="FFFFFF"/>
+                    </a:solidFill>
+                  </a:tcPr>
+                </a:tc>
+                <a:tc>
+                  <a:txBody>
+                    <a:bodyPr/>
+                    <a:lstStyle/>
+                    <a:p>
+                      <a:pPr algn="ctr" indent="0" marL="0">
+                        <a:buNone/>
+                      </a:pPr>
+                      <a:r>
+                        <a:rPr lang="en-US" sz="850" dirty="0">
+                          <a:solidFill>
+                            <a:srgbClr val="2B2B2B"/>
+                          </a:solidFill>
+                          <a:latin typeface="맑은 고딕" pitchFamily="34" charset="0"/>
+                          <a:ea typeface="맑은 고딕" pitchFamily="34" charset="-122"/>
+                          <a:cs typeface="맑은 고딕" pitchFamily="34" charset="-120"/>
+                        </a:rPr>
+                        <a:t>소매점</a:t>
+                      </a:r>
+                      <a:endParaRPr lang="en-US" sz="850" dirty="0">
                         <a:latin typeface="맑은 고딕" charset="0"/>
                         <a:ea typeface="맑은 고딕" charset="0"/>
                         <a:cs typeface="맑은 고딕" charset="0"/>
@@ -10449,7 +11150,7 @@
                         <a:buNone/>
                       </a:pPr>
                       <a:r>
-                        <a:rPr lang="en-US" sz="950" dirty="0">
+                        <a:rPr lang="en-US" sz="850" dirty="0">
                           <a:solidFill>
                             <a:srgbClr val="2B2B2B"/>
                           </a:solidFill>
@@ -10457,9 +11158,9 @@
                           <a:ea typeface="맑은 고딕" pitchFamily="34" charset="-122"/>
                           <a:cs typeface="맑은 고딕" pitchFamily="34" charset="-120"/>
                         </a:rPr>
-                        <a:t>5,000만</a:t>
+                        <a:t>103.7</a:t>
                       </a:r>
-                      <a:endParaRPr lang="en-US" sz="950" dirty="0">
+                      <a:endParaRPr lang="en-US" sz="850" dirty="0">
                         <a:latin typeface="맑은 고딕" charset="0"/>
                         <a:ea typeface="맑은 고딕" charset="0"/>
                         <a:cs typeface="맑은 고딕" charset="0"/>
@@ -10517,7 +11218,7 @@
                         <a:buNone/>
                       </a:pPr>
                       <a:r>
-                        <a:rPr lang="en-US" sz="950" dirty="0">
+                        <a:rPr lang="en-US" sz="850" dirty="0">
                           <a:solidFill>
                             <a:srgbClr val="2B2B2B"/>
                           </a:solidFill>
@@ -10525,9 +11226,145 @@
                           <a:ea typeface="맑은 고딕" pitchFamily="34" charset="-122"/>
                           <a:cs typeface="맑은 고딕" pitchFamily="34" charset="-120"/>
                         </a:rPr>
-                        <a:t>470만</a:t>
+                        <a:t>5,000</a:t>
                       </a:r>
-                      <a:endParaRPr lang="en-US" sz="950" dirty="0">
+                      <a:endParaRPr lang="en-US" sz="850" dirty="0">
+                        <a:latin typeface="맑은 고딕" charset="0"/>
+                        <a:ea typeface="맑은 고딕" charset="0"/>
+                        <a:cs typeface="맑은 고딕" charset="0"/>
+                      </a:endParaRPr>
+                    </a:p>
+                  </a:txBody>
+                  <a:tcPr marL="91440" marR="91440" marT="45720" marB="45720" anchor="ctr">
+                    <a:lnL w="12700" cap="flat" cmpd="sng" algn="ctr">
+                      <a:solidFill>
+                        <a:srgbClr val="CBD5E0"/>
+                      </a:solidFill>
+                      <a:prstDash val="solid"/>
+                      <a:round/>
+                      <a:headEnd type="none" w="med" len="med"/>
+                      <a:tailEnd type="none" w="med" len="med"/>
+                    </a:lnL>
+                    <a:lnR w="12700" cap="flat" cmpd="sng" algn="ctr">
+                      <a:solidFill>
+                        <a:srgbClr val="CBD5E0"/>
+                      </a:solidFill>
+                      <a:prstDash val="solid"/>
+                      <a:round/>
+                      <a:headEnd type="none" w="med" len="med"/>
+                      <a:tailEnd type="none" w="med" len="med"/>
+                    </a:lnR>
+                    <a:lnT w="12700" cap="flat" cmpd="sng" algn="ctr">
+                      <a:solidFill>
+                        <a:srgbClr val="CBD5E0"/>
+                      </a:solidFill>
+                      <a:prstDash val="solid"/>
+                      <a:round/>
+                      <a:headEnd type="none" w="med" len="med"/>
+                      <a:tailEnd type="none" w="med" len="med"/>
+                    </a:lnT>
+                    <a:lnB w="12700" cap="flat" cmpd="sng" algn="ctr">
+                      <a:solidFill>
+                        <a:srgbClr val="CBD5E0"/>
+                      </a:solidFill>
+                      <a:prstDash val="solid"/>
+                      <a:round/>
+                      <a:headEnd type="none" w="med" len="med"/>
+                      <a:tailEnd type="none" w="med" len="med"/>
+                    </a:lnB>
+                    <a:solidFill>
+                      <a:srgbClr val="FFFFFF"/>
+                    </a:solidFill>
+                  </a:tcPr>
+                </a:tc>
+                <a:tc>
+                  <a:txBody>
+                    <a:bodyPr/>
+                    <a:lstStyle/>
+                    <a:p>
+                      <a:pPr algn="r" indent="0" marL="0">
+                        <a:buNone/>
+                      </a:pPr>
+                      <a:r>
+                        <a:rPr lang="en-US" sz="850" dirty="0">
+                          <a:solidFill>
+                            <a:srgbClr val="2B2B2B"/>
+                          </a:solidFill>
+                          <a:latin typeface="맑은 고딕" pitchFamily="34" charset="0"/>
+                          <a:ea typeface="맑은 고딕" pitchFamily="34" charset="-122"/>
+                          <a:cs typeface="맑은 고딕" pitchFamily="34" charset="-120"/>
+                        </a:rPr>
+                        <a:t>470</a:t>
+                      </a:r>
+                      <a:endParaRPr lang="en-US" sz="850" dirty="0">
+                        <a:latin typeface="맑은 고딕" charset="0"/>
+                        <a:ea typeface="맑은 고딕" charset="0"/>
+                        <a:cs typeface="맑은 고딕" charset="0"/>
+                      </a:endParaRPr>
+                    </a:p>
+                  </a:txBody>
+                  <a:tcPr marL="91440" marR="91440" marT="45720" marB="45720" anchor="ctr">
+                    <a:lnL w="12700" cap="flat" cmpd="sng" algn="ctr">
+                      <a:solidFill>
+                        <a:srgbClr val="CBD5E0"/>
+                      </a:solidFill>
+                      <a:prstDash val="solid"/>
+                      <a:round/>
+                      <a:headEnd type="none" w="med" len="med"/>
+                      <a:tailEnd type="none" w="med" len="med"/>
+                    </a:lnL>
+                    <a:lnR w="12700" cap="flat" cmpd="sng" algn="ctr">
+                      <a:solidFill>
+                        <a:srgbClr val="CBD5E0"/>
+                      </a:solidFill>
+                      <a:prstDash val="solid"/>
+                      <a:round/>
+                      <a:headEnd type="none" w="med" len="med"/>
+                      <a:tailEnd type="none" w="med" len="med"/>
+                    </a:lnR>
+                    <a:lnT w="12700" cap="flat" cmpd="sng" algn="ctr">
+                      <a:solidFill>
+                        <a:srgbClr val="CBD5E0"/>
+                      </a:solidFill>
+                      <a:prstDash val="solid"/>
+                      <a:round/>
+                      <a:headEnd type="none" w="med" len="med"/>
+                      <a:tailEnd type="none" w="med" len="med"/>
+                    </a:lnT>
+                    <a:lnB w="12700" cap="flat" cmpd="sng" algn="ctr">
+                      <a:solidFill>
+                        <a:srgbClr val="CBD5E0"/>
+                      </a:solidFill>
+                      <a:prstDash val="solid"/>
+                      <a:round/>
+                      <a:headEnd type="none" w="med" len="med"/>
+                      <a:tailEnd type="none" w="med" len="med"/>
+                    </a:lnB>
+                    <a:solidFill>
+                      <a:srgbClr val="FFFFFF"/>
+                    </a:solidFill>
+                  </a:tcPr>
+                </a:tc>
+                <a:tc>
+                  <a:txBody>
+                    <a:bodyPr/>
+                    <a:lstStyle/>
+                    <a:p>
+                      <a:pPr algn="r" indent="0" marL="0">
+                        <a:buNone/>
+                      </a:pPr>
+                      <a:r>
+                        <a:rPr lang="en-US" sz="850" dirty="0">
+                          <a:solidFill>
+                            <a:srgbClr val="2B2B2B"/>
+                          </a:solidFill>
+                          <a:latin typeface="맑은 고딕" pitchFamily="34" charset="0"/>
+                          <a:ea typeface="맑은 고딕" pitchFamily="34" charset="-122"/>
+                          <a:cs typeface="맑은 고딕" pitchFamily="34" charset="-120"/>
+                        </a:rPr>
+                        <a:t>10</a:t>
+                      </a:r>
+                      <a:endParaRPr lang="en-US" sz="850" dirty="0">
                         <a:latin typeface="맑은 고딕" charset="0"/>
                         <a:ea typeface="맑은 고딕" charset="0"/>
                         <a:cs typeface="맑은 고딕" charset="0"/>
@@ -10585,7 +11422,7 @@
                         <a:buNone/>
                       </a:pPr>
                       <a:r>
-                        <a:rPr lang="en-US" sz="950" dirty="0">
+                        <a:rPr lang="en-US" sz="850" dirty="0">
                           <a:solidFill>
                             <a:srgbClr val="2B2B2B"/>
                           </a:solidFill>
@@ -10595,7 +11432,75 @@
                         </a:rPr>
                         <a:t>2027-09-30</a:t>
                       </a:r>
-                      <a:endParaRPr lang="en-US" sz="950" dirty="0">
+                      <a:endParaRPr lang="en-US" sz="850" dirty="0">
+                        <a:latin typeface="맑은 고딕" charset="0"/>
+                        <a:ea typeface="맑은 고딕" charset="0"/>
+                        <a:cs typeface="맑은 고딕" charset="0"/>
+                      </a:endParaRPr>
+                    </a:p>
+                  </a:txBody>
+                  <a:tcPr marL="91440" marR="91440" marT="45720" marB="45720" anchor="ctr">
+                    <a:lnL w="12700" cap="flat" cmpd="sng" algn="ctr">
+                      <a:solidFill>
+                        <a:srgbClr val="CBD5E0"/>
+                      </a:solidFill>
+                      <a:prstDash val="solid"/>
+                      <a:round/>
+                      <a:headEnd type="none" w="med" len="med"/>
+                      <a:tailEnd type="none" w="med" len="med"/>
+                    </a:lnL>
+                    <a:lnR w="12700" cap="flat" cmpd="sng" algn="ctr">
+                      <a:solidFill>
+                        <a:srgbClr val="CBD5E0"/>
+                      </a:solidFill>
+                      <a:prstDash val="solid"/>
+                      <a:round/>
+                      <a:headEnd type="none" w="med" len="med"/>
+                      <a:tailEnd type="none" w="med" len="med"/>
+                    </a:lnR>
+                    <a:lnT w="12700" cap="flat" cmpd="sng" algn="ctr">
+                      <a:solidFill>
+                        <a:srgbClr val="CBD5E0"/>
+                      </a:solidFill>
+                      <a:prstDash val="solid"/>
+                      <a:round/>
+                      <a:headEnd type="none" w="med" len="med"/>
+                      <a:tailEnd type="none" w="med" len="med"/>
+                    </a:lnT>
+                    <a:lnB w="12700" cap="flat" cmpd="sng" algn="ctr">
+                      <a:solidFill>
+                        <a:srgbClr val="CBD5E0"/>
+                      </a:solidFill>
+                      <a:prstDash val="solid"/>
+                      <a:round/>
+                      <a:headEnd type="none" w="med" len="med"/>
+                      <a:tailEnd type="none" w="med" len="med"/>
+                    </a:lnB>
+                    <a:solidFill>
+                      <a:srgbClr val="FFFFFF"/>
+                    </a:solidFill>
+                  </a:tcPr>
+                </a:tc>
+                <a:tc>
+                  <a:txBody>
+                    <a:bodyPr/>
+                    <a:lstStyle/>
+                    <a:p>
+                      <a:pPr algn="ctr" indent="0" marL="0">
+                        <a:buNone/>
+                      </a:pPr>
+                      <a:r>
+                        <a:rPr lang="en-US" sz="850" dirty="0">
+                          <a:solidFill>
+                            <a:srgbClr val="2B2B2B"/>
+                          </a:solidFill>
+                          <a:latin typeface="맑은 고딕" pitchFamily="34" charset="0"/>
+                          <a:ea typeface="맑은 고딕" pitchFamily="34" charset="-122"/>
+                          <a:cs typeface="맑은 고딕" pitchFamily="34" charset="-120"/>
+                        </a:rPr>
+                        <a:t>미협의</a:t>
+                      </a:r>
+                      <a:endParaRPr lang="en-US" sz="850" dirty="0">
                         <a:latin typeface="맑은 고딕" charset="0"/>
                         <a:ea typeface="맑은 고딕" charset="0"/>
                         <a:cs typeface="맑은 고딕" charset="0"/>
@@ -10655,7 +11560,7 @@
                         <a:buNone/>
                       </a:pPr>
                       <a:r>
-                        <a:rPr lang="en-US" sz="950" dirty="0">
+                        <a:rPr lang="en-US" sz="850" dirty="0">
                           <a:solidFill>
                             <a:srgbClr val="2B2B2B"/>
                           </a:solidFill>
@@ -10665,7 +11570,7 @@
                         </a:rPr>
                         <a:t>1F</a:t>
                       </a:r>
-                      <a:endParaRPr lang="en-US" sz="950" dirty="0">
+                      <a:endParaRPr lang="en-US" sz="850" dirty="0">
                         <a:latin typeface="맑은 고딕" charset="0"/>
                         <a:ea typeface="맑은 고딕" charset="0"/>
                         <a:cs typeface="맑은 고딕" charset="0"/>
@@ -10723,7 +11628,7 @@
                         <a:buNone/>
                       </a:pPr>
                       <a:r>
-                        <a:rPr lang="en-US" sz="950" dirty="0">
+                        <a:rPr lang="en-US" sz="850" dirty="0">
                           <a:solidFill>
                             <a:srgbClr val="2B2B2B"/>
                           </a:solidFill>
@@ -10731,9 +11636,9 @@
                           <a:ea typeface="맑은 고딕" pitchFamily="34" charset="-122"/>
                           <a:cs typeface="맑은 고딕" pitchFamily="34" charset="-120"/>
                         </a:rPr>
-                        <a:t>휴게음식점</a:t>
+                        <a:t>-</a:t>
                       </a:r>
-                      <a:endParaRPr lang="en-US" sz="950" dirty="0">
+                      <a:endParaRPr lang="en-US" sz="850" dirty="0">
                         <a:latin typeface="맑은 고딕" charset="0"/>
                         <a:ea typeface="맑은 고딕" charset="0"/>
                         <a:cs typeface="맑은 고딕" charset="0"/>
@@ -10791,7 +11696,7 @@
                         <a:buNone/>
                       </a:pPr>
                       <a:r>
-                        <a:rPr lang="en-US" sz="950" dirty="0">
+                        <a:rPr lang="en-US" sz="850" dirty="0">
                           <a:solidFill>
                             <a:srgbClr val="2B2B2B"/>
                           </a:solidFill>
@@ -10799,9 +11704,77 @@
                           <a:ea typeface="맑은 고딕" pitchFamily="34" charset="-122"/>
                           <a:cs typeface="맑은 고딕" pitchFamily="34" charset="-120"/>
                         </a:rPr>
-                        <a:t>28.15평</a:t>
+                        <a:t>휴게음식점</a:t>
                       </a:r>
-                      <a:endParaRPr lang="en-US" sz="950" dirty="0">
+                      <a:endParaRPr lang="en-US" sz="850" dirty="0">
+                        <a:latin typeface="맑은 고딕" charset="0"/>
+                        <a:ea typeface="맑은 고딕" charset="0"/>
+                        <a:cs typeface="맑은 고딕" charset="0"/>
+                      </a:endParaRPr>
+                    </a:p>
+                  </a:txBody>
+                  <a:tcPr marL="91440" marR="91440" marT="45720" marB="45720" anchor="ctr">
+                    <a:lnL w="12700" cap="flat" cmpd="sng" algn="ctr">
+                      <a:solidFill>
+                        <a:srgbClr val="CBD5E0"/>
+                      </a:solidFill>
+                      <a:prstDash val="solid"/>
+                      <a:round/>
+                      <a:headEnd type="none" w="med" len="med"/>
+                      <a:tailEnd type="none" w="med" len="med"/>
+                    </a:lnL>
+                    <a:lnR w="12700" cap="flat" cmpd="sng" algn="ctr">
+                      <a:solidFill>
+                        <a:srgbClr val="CBD5E0"/>
+                      </a:solidFill>
+                      <a:prstDash val="solid"/>
+                      <a:round/>
+                      <a:headEnd type="none" w="med" len="med"/>
+                      <a:tailEnd type="none" w="med" len="med"/>
+                    </a:lnR>
+                    <a:lnT w="12700" cap="flat" cmpd="sng" algn="ctr">
+                      <a:solidFill>
+                        <a:srgbClr val="CBD5E0"/>
+                      </a:solidFill>
+                      <a:prstDash val="solid"/>
+                      <a:round/>
+                      <a:headEnd type="none" w="med" len="med"/>
+                      <a:tailEnd type="none" w="med" len="med"/>
+                    </a:lnT>
+                    <a:lnB w="12700" cap="flat" cmpd="sng" algn="ctr">
+                      <a:solidFill>
+                        <a:srgbClr val="CBD5E0"/>
+                      </a:solidFill>
+                      <a:prstDash val="solid"/>
+                      <a:round/>
+                      <a:headEnd type="none" w="med" len="med"/>
+                      <a:tailEnd type="none" w="med" len="med"/>
+                    </a:lnB>
+                    <a:solidFill>
+                      <a:srgbClr val="F3F6F7"/>
+                    </a:solidFill>
+                  </a:tcPr>
+                </a:tc>
+                <a:tc>
+                  <a:txBody>
+                    <a:bodyPr/>
+                    <a:lstStyle/>
+                    <a:p>
+                      <a:pPr algn="ctr" indent="0" marL="0">
+                        <a:buNone/>
+                      </a:pPr>
+                      <a:r>
+                        <a:rPr lang="en-US" sz="850" dirty="0">
+                          <a:solidFill>
+                            <a:srgbClr val="2B2B2B"/>
+                          </a:solidFill>
+                          <a:latin typeface="맑은 고딕" pitchFamily="34" charset="0"/>
+                          <a:ea typeface="맑은 고딕" pitchFamily="34" charset="-122"/>
+                          <a:cs typeface="맑은 고딕" pitchFamily="34" charset="-120"/>
+                        </a:rPr>
+                        <a:t>휴게음식점</a:t>
+                      </a:r>
+                      <a:endParaRPr lang="en-US" sz="850" dirty="0">
                         <a:latin typeface="맑은 고딕" charset="0"/>
                         <a:ea typeface="맑은 고딕" charset="0"/>
                         <a:cs typeface="맑은 고딕" charset="0"/>
@@ -10859,7 +11832,7 @@
                         <a:buNone/>
                       </a:pPr>
                       <a:r>
-                        <a:rPr lang="en-US" sz="950" dirty="0">
+                        <a:rPr lang="en-US" sz="850" dirty="0">
                           <a:solidFill>
                             <a:srgbClr val="2B2B2B"/>
                           </a:solidFill>
@@ -10867,9 +11840,9 @@
                           <a:ea typeface="맑은 고딕" pitchFamily="34" charset="-122"/>
                           <a:cs typeface="맑은 고딕" pitchFamily="34" charset="-120"/>
                         </a:rPr>
-                        <a:t>8,000만</a:t>
+                        <a:t>93.1</a:t>
                       </a:r>
-                      <a:endParaRPr lang="en-US" sz="950" dirty="0">
+                      <a:endParaRPr lang="en-US" sz="850" dirty="0">
                         <a:latin typeface="맑은 고딕" charset="0"/>
                         <a:ea typeface="맑은 고딕" charset="0"/>
                         <a:cs typeface="맑은 고딕" charset="0"/>
@@ -10927,7 +11900,7 @@
                         <a:buNone/>
                       </a:pPr>
                       <a:r>
-                        <a:rPr lang="en-US" sz="950" dirty="0">
+                        <a:rPr lang="en-US" sz="850" dirty="0">
                           <a:solidFill>
                             <a:srgbClr val="2B2B2B"/>
                           </a:solidFill>
@@ -10935,9 +11908,145 @@
                           <a:ea typeface="맑은 고딕" pitchFamily="34" charset="-122"/>
                           <a:cs typeface="맑은 고딕" pitchFamily="34" charset="-120"/>
                         </a:rPr>
-                        <a:t>350만</a:t>
+                        <a:t>8,000</a:t>
                       </a:r>
-                      <a:endParaRPr lang="en-US" sz="950" dirty="0">
+                      <a:endParaRPr lang="en-US" sz="850" dirty="0">
+                        <a:latin typeface="맑은 고딕" charset="0"/>
+                        <a:ea typeface="맑은 고딕" charset="0"/>
+                        <a:cs typeface="맑은 고딕" charset="0"/>
+                      </a:endParaRPr>
+                    </a:p>
+                  </a:txBody>
+                  <a:tcPr marL="91440" marR="91440" marT="45720" marB="45720" anchor="ctr">
+                    <a:lnL w="12700" cap="flat" cmpd="sng" algn="ctr">
+                      <a:solidFill>
+                        <a:srgbClr val="CBD5E0"/>
+                      </a:solidFill>
+                      <a:prstDash val="solid"/>
+                      <a:round/>
+                      <a:headEnd type="none" w="med" len="med"/>
+                      <a:tailEnd type="none" w="med" len="med"/>
+                    </a:lnL>
+                    <a:lnR w="12700" cap="flat" cmpd="sng" algn="ctr">
+                      <a:solidFill>
+                        <a:srgbClr val="CBD5E0"/>
+                      </a:solidFill>
+                      <a:prstDash val="solid"/>
+                      <a:round/>
+                      <a:headEnd type="none" w="med" len="med"/>
+                      <a:tailEnd type="none" w="med" len="med"/>
+                    </a:lnR>
+                    <a:lnT w="12700" cap="flat" cmpd="sng" algn="ctr">
+                      <a:solidFill>
+                        <a:srgbClr val="CBD5E0"/>
+                      </a:solidFill>
+                      <a:prstDash val="solid"/>
+                      <a:round/>
+                      <a:headEnd type="none" w="med" len="med"/>
+                      <a:tailEnd type="none" w="med" len="med"/>
+                    </a:lnT>
+                    <a:lnB w="12700" cap="flat" cmpd="sng" algn="ctr">
+                      <a:solidFill>
+                        <a:srgbClr val="CBD5E0"/>
+                      </a:solidFill>
+                      <a:prstDash val="solid"/>
+                      <a:round/>
+                      <a:headEnd type="none" w="med" len="med"/>
+                      <a:tailEnd type="none" w="med" len="med"/>
+                    </a:lnB>
+                    <a:solidFill>
+                      <a:srgbClr val="F3F6F7"/>
+                    </a:solidFill>
+                  </a:tcPr>
+                </a:tc>
+                <a:tc>
+                  <a:txBody>
+                    <a:bodyPr/>
+                    <a:lstStyle/>
+                    <a:p>
+                      <a:pPr algn="r" indent="0" marL="0">
+                        <a:buNone/>
+                      </a:pPr>
+                      <a:r>
+                        <a:rPr lang="en-US" sz="850" dirty="0">
+                          <a:solidFill>
+                            <a:srgbClr val="2B2B2B"/>
+                          </a:solidFill>
+                          <a:latin typeface="맑은 고딕" pitchFamily="34" charset="0"/>
+                          <a:ea typeface="맑은 고딕" pitchFamily="34" charset="-122"/>
+                          <a:cs typeface="맑은 고딕" pitchFamily="34" charset="-120"/>
+                        </a:rPr>
+                        <a:t>350</a:t>
+                      </a:r>
+                      <a:endParaRPr lang="en-US" sz="850" dirty="0">
+                        <a:latin typeface="맑은 고딕" charset="0"/>
+                        <a:ea typeface="맑은 고딕" charset="0"/>
+                        <a:cs typeface="맑은 고딕" charset="0"/>
+                      </a:endParaRPr>
+                    </a:p>
+                  </a:txBody>
+                  <a:tcPr marL="91440" marR="91440" marT="45720" marB="45720" anchor="ctr">
+                    <a:lnL w="12700" cap="flat" cmpd="sng" algn="ctr">
+                      <a:solidFill>
+                        <a:srgbClr val="CBD5E0"/>
+                      </a:solidFill>
+                      <a:prstDash val="solid"/>
+                      <a:round/>
+                      <a:headEnd type="none" w="med" len="med"/>
+                      <a:tailEnd type="none" w="med" len="med"/>
+                    </a:lnL>
+                    <a:lnR w="12700" cap="flat" cmpd="sng" algn="ctr">
+                      <a:solidFill>
+                        <a:srgbClr val="CBD5E0"/>
+                      </a:solidFill>
+                      <a:prstDash val="solid"/>
+                      <a:round/>
+                      <a:headEnd type="none" w="med" len="med"/>
+                      <a:tailEnd type="none" w="med" len="med"/>
+                    </a:lnR>
+                    <a:lnT w="12700" cap="flat" cmpd="sng" algn="ctr">
+                      <a:solidFill>
+                        <a:srgbClr val="CBD5E0"/>
+                      </a:solidFill>
+                      <a:prstDash val="solid"/>
+                      <a:round/>
+                      <a:headEnd type="none" w="med" len="med"/>
+                      <a:tailEnd type="none" w="med" len="med"/>
+                    </a:lnT>
+                    <a:lnB w="12700" cap="flat" cmpd="sng" algn="ctr">
+                      <a:solidFill>
+                        <a:srgbClr val="CBD5E0"/>
+                      </a:solidFill>
+                      <a:prstDash val="solid"/>
+                      <a:round/>
+                      <a:headEnd type="none" w="med" len="med"/>
+                      <a:tailEnd type="none" w="med" len="med"/>
+                    </a:lnB>
+                    <a:solidFill>
+                      <a:srgbClr val="F3F6F7"/>
+                    </a:solidFill>
+                  </a:tcPr>
+                </a:tc>
+                <a:tc>
+                  <a:txBody>
+                    <a:bodyPr/>
+                    <a:lstStyle/>
+                    <a:p>
+                      <a:pPr algn="r" indent="0" marL="0">
+                        <a:buNone/>
+                      </a:pPr>
+                      <a:r>
+                        <a:rPr lang="en-US" sz="850" dirty="0">
+                          <a:solidFill>
+                            <a:srgbClr val="2B2B2B"/>
+                          </a:solidFill>
+                          <a:latin typeface="맑은 고딕" pitchFamily="34" charset="0"/>
+                          <a:ea typeface="맑은 고딕" pitchFamily="34" charset="-122"/>
+                          <a:cs typeface="맑은 고딕" pitchFamily="34" charset="-120"/>
+                        </a:rPr>
+                        <a:t>8</a:t>
+                      </a:r>
+                      <a:endParaRPr lang="en-US" sz="850" dirty="0">
                         <a:latin typeface="맑은 고딕" charset="0"/>
                         <a:ea typeface="맑은 고딕" charset="0"/>
                         <a:cs typeface="맑은 고딕" charset="0"/>
@@ -10995,7 +12104,7 @@
                         <a:buNone/>
                       </a:pPr>
                       <a:r>
-                        <a:rPr lang="en-US" sz="950" dirty="0">
+                        <a:rPr lang="en-US" sz="850" dirty="0">
                           <a:solidFill>
                             <a:srgbClr val="2B2B2B"/>
                           </a:solidFill>
@@ -11005,7 +12114,75 @@
                         </a:rPr>
                         <a:t>2026-12-31</a:t>
                       </a:r>
-                      <a:endParaRPr lang="en-US" sz="950" dirty="0">
+                      <a:endParaRPr lang="en-US" sz="850" dirty="0">
+                        <a:latin typeface="맑은 고딕" charset="0"/>
+                        <a:ea typeface="맑은 고딕" charset="0"/>
+                        <a:cs typeface="맑은 고딕" charset="0"/>
+                      </a:endParaRPr>
+                    </a:p>
+                  </a:txBody>
+                  <a:tcPr marL="91440" marR="91440" marT="45720" marB="45720" anchor="ctr">
+                    <a:lnL w="12700" cap="flat" cmpd="sng" algn="ctr">
+                      <a:solidFill>
+                        <a:srgbClr val="CBD5E0"/>
+                      </a:solidFill>
+                      <a:prstDash val="solid"/>
+                      <a:round/>
+                      <a:headEnd type="none" w="med" len="med"/>
+                      <a:tailEnd type="none" w="med" len="med"/>
+                    </a:lnL>
+                    <a:lnR w="12700" cap="flat" cmpd="sng" algn="ctr">
+                      <a:solidFill>
+                        <a:srgbClr val="CBD5E0"/>
+                      </a:solidFill>
+                      <a:prstDash val="solid"/>
+                      <a:round/>
+                      <a:headEnd type="none" w="med" len="med"/>
+                      <a:tailEnd type="none" w="med" len="med"/>
+                    </a:lnR>
+                    <a:lnT w="12700" cap="flat" cmpd="sng" algn="ctr">
+                      <a:solidFill>
+                        <a:srgbClr val="CBD5E0"/>
+                      </a:solidFill>
+                      <a:prstDash val="solid"/>
+                      <a:round/>
+                      <a:headEnd type="none" w="med" len="med"/>
+                      <a:tailEnd type="none" w="med" len="med"/>
+                    </a:lnT>
+                    <a:lnB w="12700" cap="flat" cmpd="sng" algn="ctr">
+                      <a:solidFill>
+                        <a:srgbClr val="CBD5E0"/>
+                      </a:solidFill>
+                      <a:prstDash val="solid"/>
+                      <a:round/>
+                      <a:headEnd type="none" w="med" len="med"/>
+                      <a:tailEnd type="none" w="med" len="med"/>
+                    </a:lnB>
+                    <a:solidFill>
+                      <a:srgbClr val="F3F6F7"/>
+                    </a:solidFill>
+                  </a:tcPr>
+                </a:tc>
+                <a:tc>
+                  <a:txBody>
+                    <a:bodyPr/>
+                    <a:lstStyle/>
+                    <a:p>
+                      <a:pPr algn="ctr" indent="0" marL="0">
+                        <a:buNone/>
+                      </a:pPr>
+                      <a:r>
+                        <a:rPr lang="en-US" sz="850" dirty="0">
+                          <a:solidFill>
+                            <a:srgbClr val="2B2B2B"/>
+                          </a:solidFill>
+                          <a:latin typeface="맑은 고딕" pitchFamily="34" charset="0"/>
+                          <a:ea typeface="맑은 고딕" pitchFamily="34" charset="-122"/>
+                          <a:cs typeface="맑은 고딕" pitchFamily="34" charset="-120"/>
+                        </a:rPr>
+                        <a:t>합의 완료</a:t>
+                      </a:r>
+                      <a:endParaRPr lang="en-US" sz="850" dirty="0">
                         <a:latin typeface="맑은 고딕" charset="0"/>
                         <a:ea typeface="맑은 고딕" charset="0"/>
                         <a:cs typeface="맑은 고딕" charset="0"/>
@@ -11065,7 +12242,7 @@
                         <a:buNone/>
                       </a:pPr>
                       <a:r>
-                        <a:rPr lang="en-US" sz="950" dirty="0">
+                        <a:rPr lang="en-US" sz="850" dirty="0">
                           <a:solidFill>
                             <a:srgbClr val="2B2B2B"/>
                           </a:solidFill>
@@ -11075,7 +12252,7 @@
                         </a:rPr>
                         <a:t>1F</a:t>
                       </a:r>
-                      <a:endParaRPr lang="en-US" sz="950" dirty="0">
+                      <a:endParaRPr lang="en-US" sz="850" dirty="0">
                         <a:latin typeface="맑은 고딕" charset="0"/>
                         <a:ea typeface="맑은 고딕" charset="0"/>
                         <a:cs typeface="맑은 고딕" charset="0"/>
@@ -11133,7 +12310,7 @@
                         <a:buNone/>
                       </a:pPr>
                       <a:r>
-                        <a:rPr lang="en-US" sz="950" dirty="0">
+                        <a:rPr lang="en-US" sz="850" dirty="0">
                           <a:solidFill>
                             <a:srgbClr val="2B2B2B"/>
                           </a:solidFill>
@@ -11141,9 +12318,9 @@
                           <a:ea typeface="맑은 고딕" pitchFamily="34" charset="-122"/>
                           <a:cs typeface="맑은 고딕" pitchFamily="34" charset="-120"/>
                         </a:rPr>
-                        <a:t>부동산중개</a:t>
+                        <a:t>-</a:t>
                       </a:r>
-                      <a:endParaRPr lang="en-US" sz="950" dirty="0">
+                      <a:endParaRPr lang="en-US" sz="850" dirty="0">
                         <a:latin typeface="맑은 고딕" charset="0"/>
                         <a:ea typeface="맑은 고딕" charset="0"/>
                         <a:cs typeface="맑은 고딕" charset="0"/>
@@ -11201,7 +12378,7 @@
                         <a:buNone/>
                       </a:pPr>
                       <a:r>
-                        <a:rPr lang="en-US" sz="950" dirty="0">
+                        <a:rPr lang="en-US" sz="850" dirty="0">
                           <a:solidFill>
                             <a:srgbClr val="2B2B2B"/>
                           </a:solidFill>
@@ -11209,9 +12386,77 @@
                           <a:ea typeface="맑은 고딕" pitchFamily="34" charset="-122"/>
                           <a:cs typeface="맑은 고딕" pitchFamily="34" charset="-120"/>
                         </a:rPr>
-                        <a:t>9.68평</a:t>
+                        <a:t>부동산중개</a:t>
                       </a:r>
-                      <a:endParaRPr lang="en-US" sz="950" dirty="0">
+                      <a:endParaRPr lang="en-US" sz="850" dirty="0">
+                        <a:latin typeface="맑은 고딕" charset="0"/>
+                        <a:ea typeface="맑은 고딕" charset="0"/>
+                        <a:cs typeface="맑은 고딕" charset="0"/>
+                      </a:endParaRPr>
+                    </a:p>
+                  </a:txBody>
+                  <a:tcPr marL="91440" marR="91440" marT="45720" marB="45720" anchor="ctr">
+                    <a:lnL w="12700" cap="flat" cmpd="sng" algn="ctr">
+                      <a:solidFill>
+                        <a:srgbClr val="CBD5E0"/>
+                      </a:solidFill>
+                      <a:prstDash val="solid"/>
+                      <a:round/>
+                      <a:headEnd type="none" w="med" len="med"/>
+                      <a:tailEnd type="none" w="med" len="med"/>
+                    </a:lnL>
+                    <a:lnR w="12700" cap="flat" cmpd="sng" algn="ctr">
+                      <a:solidFill>
+                        <a:srgbClr val="CBD5E0"/>
+                      </a:solidFill>
+                      <a:prstDash val="solid"/>
+                      <a:round/>
+                      <a:headEnd type="none" w="med" len="med"/>
+                      <a:tailEnd type="none" w="med" len="med"/>
+                    </a:lnR>
+                    <a:lnT w="12700" cap="flat" cmpd="sng" algn="ctr">
+                      <a:solidFill>
+                        <a:srgbClr val="CBD5E0"/>
+                      </a:solidFill>
+                      <a:prstDash val="solid"/>
+                      <a:round/>
+                      <a:headEnd type="none" w="med" len="med"/>
+                      <a:tailEnd type="none" w="med" len="med"/>
+                    </a:lnT>
+                    <a:lnB w="12700" cap="flat" cmpd="sng" algn="ctr">
+                      <a:solidFill>
+                        <a:srgbClr val="CBD5E0"/>
+                      </a:solidFill>
+                      <a:prstDash val="solid"/>
+                      <a:round/>
+                      <a:headEnd type="none" w="med" len="med"/>
+                      <a:tailEnd type="none" w="med" len="med"/>
+                    </a:lnB>
+                    <a:solidFill>
+                      <a:srgbClr val="FFFFFF"/>
+                    </a:solidFill>
+                  </a:tcPr>
+                </a:tc>
+                <a:tc>
+                  <a:txBody>
+                    <a:bodyPr/>
+                    <a:lstStyle/>
+                    <a:p>
+                      <a:pPr algn="ctr" indent="0" marL="0">
+                        <a:buNone/>
+                      </a:pPr>
+                      <a:r>
+                        <a:rPr lang="en-US" sz="850" dirty="0">
+                          <a:solidFill>
+                            <a:srgbClr val="2B2B2B"/>
+                          </a:solidFill>
+                          <a:latin typeface="맑은 고딕" pitchFamily="34" charset="0"/>
+                          <a:ea typeface="맑은 고딕" pitchFamily="34" charset="-122"/>
+                          <a:cs typeface="맑은 고딕" pitchFamily="34" charset="-120"/>
+                        </a:rPr>
+                        <a:t>부동산중개</a:t>
+                      </a:r>
+                      <a:endParaRPr lang="en-US" sz="850" dirty="0">
                         <a:latin typeface="맑은 고딕" charset="0"/>
                         <a:ea typeface="맑은 고딕" charset="0"/>
                         <a:cs typeface="맑은 고딕" charset="0"/>
@@ -11269,7 +12514,7 @@
                         <a:buNone/>
                       </a:pPr>
                       <a:r>
-                        <a:rPr lang="en-US" sz="950" dirty="0">
+                        <a:rPr lang="en-US" sz="850" dirty="0">
                           <a:solidFill>
                             <a:srgbClr val="2B2B2B"/>
                           </a:solidFill>
@@ -11277,9 +12522,9 @@
                           <a:ea typeface="맑은 고딕" pitchFamily="34" charset="-122"/>
                           <a:cs typeface="맑은 고딕" pitchFamily="34" charset="-120"/>
                         </a:rPr>
-                        <a:t>3,000만</a:t>
+                        <a:t>32.0</a:t>
                       </a:r>
-                      <a:endParaRPr lang="en-US" sz="950" dirty="0">
+                      <a:endParaRPr lang="en-US" sz="850" dirty="0">
                         <a:latin typeface="맑은 고딕" charset="0"/>
                         <a:ea typeface="맑은 고딕" charset="0"/>
                         <a:cs typeface="맑은 고딕" charset="0"/>
@@ -11337,7 +12582,7 @@
                         <a:buNone/>
                       </a:pPr>
                       <a:r>
-                        <a:rPr lang="en-US" sz="950" dirty="0">
+                        <a:rPr lang="en-US" sz="850" dirty="0">
                           <a:solidFill>
                             <a:srgbClr val="2B2B2B"/>
                           </a:solidFill>
@@ -11345,9 +12590,145 @@
                           <a:ea typeface="맑은 고딕" pitchFamily="34" charset="-122"/>
                           <a:cs typeface="맑은 고딕" pitchFamily="34" charset="-120"/>
                         </a:rPr>
-                        <a:t>150만</a:t>
+                        <a:t>3,000</a:t>
                       </a:r>
-                      <a:endParaRPr lang="en-US" sz="950" dirty="0">
+                      <a:endParaRPr lang="en-US" sz="850" dirty="0">
+                        <a:latin typeface="맑은 고딕" charset="0"/>
+                        <a:ea typeface="맑은 고딕" charset="0"/>
+                        <a:cs typeface="맑은 고딕" charset="0"/>
+                      </a:endParaRPr>
+                    </a:p>
+                  </a:txBody>
+                  <a:tcPr marL="91440" marR="91440" marT="45720" marB="45720" anchor="ctr">
+                    <a:lnL w="12700" cap="flat" cmpd="sng" algn="ctr">
+                      <a:solidFill>
+                        <a:srgbClr val="CBD5E0"/>
+                      </a:solidFill>
+                      <a:prstDash val="solid"/>
+                      <a:round/>
+                      <a:headEnd type="none" w="med" len="med"/>
+                      <a:tailEnd type="none" w="med" len="med"/>
+                    </a:lnL>
+                    <a:lnR w="12700" cap="flat" cmpd="sng" algn="ctr">
+                      <a:solidFill>
+                        <a:srgbClr val="CBD5E0"/>
+                      </a:solidFill>
+                      <a:prstDash val="solid"/>
+                      <a:round/>
+                      <a:headEnd type="none" w="med" len="med"/>
+                      <a:tailEnd type="none" w="med" len="med"/>
+                    </a:lnR>
+                    <a:lnT w="12700" cap="flat" cmpd="sng" algn="ctr">
+                      <a:solidFill>
+                        <a:srgbClr val="CBD5E0"/>
+                      </a:solidFill>
+                      <a:prstDash val="solid"/>
+                      <a:round/>
+                      <a:headEnd type="none" w="med" len="med"/>
+                      <a:tailEnd type="none" w="med" len="med"/>
+                    </a:lnT>
+                    <a:lnB w="12700" cap="flat" cmpd="sng" algn="ctr">
+                      <a:solidFill>
+                        <a:srgbClr val="CBD5E0"/>
+                      </a:solidFill>
+                      <a:prstDash val="solid"/>
+                      <a:round/>
+                      <a:headEnd type="none" w="med" len="med"/>
+                      <a:tailEnd type="none" w="med" len="med"/>
+                    </a:lnB>
+                    <a:solidFill>
+                      <a:srgbClr val="FFFFFF"/>
+                    </a:solidFill>
+                  </a:tcPr>
+                </a:tc>
+                <a:tc>
+                  <a:txBody>
+                    <a:bodyPr/>
+                    <a:lstStyle/>
+                    <a:p>
+                      <a:pPr algn="r" indent="0" marL="0">
+                        <a:buNone/>
+                      </a:pPr>
+                      <a:r>
+                        <a:rPr lang="en-US" sz="850" dirty="0">
+                          <a:solidFill>
+                            <a:srgbClr val="2B2B2B"/>
+                          </a:solidFill>
+                          <a:latin typeface="맑은 고딕" pitchFamily="34" charset="0"/>
+                          <a:ea typeface="맑은 고딕" pitchFamily="34" charset="-122"/>
+                          <a:cs typeface="맑은 고딕" pitchFamily="34" charset="-120"/>
+                        </a:rPr>
+                        <a:t>150</a:t>
+                      </a:r>
+                      <a:endParaRPr lang="en-US" sz="850" dirty="0">
+                        <a:latin typeface="맑은 고딕" charset="0"/>
+                        <a:ea typeface="맑은 고딕" charset="0"/>
+                        <a:cs typeface="맑은 고딕" charset="0"/>
+                      </a:endParaRPr>
+                    </a:p>
+                  </a:txBody>
+                  <a:tcPr marL="91440" marR="91440" marT="45720" marB="45720" anchor="ctr">
+                    <a:lnL w="12700" cap="flat" cmpd="sng" algn="ctr">
+                      <a:solidFill>
+                        <a:srgbClr val="CBD5E0"/>
+                      </a:solidFill>
+                      <a:prstDash val="solid"/>
+                      <a:round/>
+                      <a:headEnd type="none" w="med" len="med"/>
+                      <a:tailEnd type="none" w="med" len="med"/>
+                    </a:lnL>
+                    <a:lnR w="12700" cap="flat" cmpd="sng" algn="ctr">
+                      <a:solidFill>
+                        <a:srgbClr val="CBD5E0"/>
+                      </a:solidFill>
+                      <a:prstDash val="solid"/>
+                      <a:round/>
+                      <a:headEnd type="none" w="med" len="med"/>
+                      <a:tailEnd type="none" w="med" len="med"/>
+                    </a:lnR>
+                    <a:lnT w="12700" cap="flat" cmpd="sng" algn="ctr">
+                      <a:solidFill>
+                        <a:srgbClr val="CBD5E0"/>
+                      </a:solidFill>
+                      <a:prstDash val="solid"/>
+                      <a:round/>
+                      <a:headEnd type="none" w="med" len="med"/>
+                      <a:tailEnd type="none" w="med" len="med"/>
+                    </a:lnT>
+                    <a:lnB w="12700" cap="flat" cmpd="sng" algn="ctr">
+                      <a:solidFill>
+                        <a:srgbClr val="CBD5E0"/>
+                      </a:solidFill>
+                      <a:prstDash val="solid"/>
+                      <a:round/>
+                      <a:headEnd type="none" w="med" len="med"/>
+                      <a:tailEnd type="none" w="med" len="med"/>
+                    </a:lnB>
+                    <a:solidFill>
+                      <a:srgbClr val="FFFFFF"/>
+                    </a:solidFill>
+                  </a:tcPr>
+                </a:tc>
+                <a:tc>
+                  <a:txBody>
+                    <a:bodyPr/>
+                    <a:lstStyle/>
+                    <a:p>
+                      <a:pPr algn="r" indent="0" marL="0">
+                        <a:buNone/>
+                      </a:pPr>
+                      <a:r>
+                        <a:rPr lang="en-US" sz="850" dirty="0">
+                          <a:solidFill>
+                            <a:srgbClr val="2B2B2B"/>
+                          </a:solidFill>
+                          <a:latin typeface="맑은 고딕" pitchFamily="34" charset="0"/>
+                          <a:ea typeface="맑은 고딕" pitchFamily="34" charset="-122"/>
+                          <a:cs typeface="맑은 고딕" pitchFamily="34" charset="-120"/>
+                        </a:rPr>
+                        <a:t>3</a:t>
+                      </a:r>
+                      <a:endParaRPr lang="en-US" sz="850" dirty="0">
                         <a:latin typeface="맑은 고딕" charset="0"/>
                         <a:ea typeface="맑은 고딕" charset="0"/>
                         <a:cs typeface="맑은 고딕" charset="0"/>
@@ -11405,7 +12786,7 @@
                         <a:buNone/>
                       </a:pPr>
                       <a:r>
-                        <a:rPr lang="en-US" sz="950" dirty="0">
+                        <a:rPr lang="en-US" sz="850" dirty="0">
                           <a:solidFill>
                             <a:srgbClr val="2B2B2B"/>
                           </a:solidFill>
@@ -11415,7 +12796,75 @@
                         </a:rPr>
                         <a:t>2025-02-28</a:t>
                       </a:r>
-                      <a:endParaRPr lang="en-US" sz="950" dirty="0">
+                      <a:endParaRPr lang="en-US" sz="850" dirty="0">
+                        <a:latin typeface="맑은 고딕" charset="0"/>
+                        <a:ea typeface="맑은 고딕" charset="0"/>
+                        <a:cs typeface="맑은 고딕" charset="0"/>
+                      </a:endParaRPr>
+                    </a:p>
+                  </a:txBody>
+                  <a:tcPr marL="91440" marR="91440" marT="45720" marB="45720" anchor="ctr">
+                    <a:lnL w="12700" cap="flat" cmpd="sng" algn="ctr">
+                      <a:solidFill>
+                        <a:srgbClr val="CBD5E0"/>
+                      </a:solidFill>
+                      <a:prstDash val="solid"/>
+                      <a:round/>
+                      <a:headEnd type="none" w="med" len="med"/>
+                      <a:tailEnd type="none" w="med" len="med"/>
+                    </a:lnL>
+                    <a:lnR w="12700" cap="flat" cmpd="sng" algn="ctr">
+                      <a:solidFill>
+                        <a:srgbClr val="CBD5E0"/>
+                      </a:solidFill>
+                      <a:prstDash val="solid"/>
+                      <a:round/>
+                      <a:headEnd type="none" w="med" len="med"/>
+                      <a:tailEnd type="none" w="med" len="med"/>
+                    </a:lnR>
+                    <a:lnT w="12700" cap="flat" cmpd="sng" algn="ctr">
+                      <a:solidFill>
+                        <a:srgbClr val="CBD5E0"/>
+                      </a:solidFill>
+                      <a:prstDash val="solid"/>
+                      <a:round/>
+                      <a:headEnd type="none" w="med" len="med"/>
+                      <a:tailEnd type="none" w="med" len="med"/>
+                    </a:lnT>
+                    <a:lnB w="12700" cap="flat" cmpd="sng" algn="ctr">
+                      <a:solidFill>
+                        <a:srgbClr val="CBD5E0"/>
+                      </a:solidFill>
+                      <a:prstDash val="solid"/>
+                      <a:round/>
+                      <a:headEnd type="none" w="med" len="med"/>
+                      <a:tailEnd type="none" w="med" len="med"/>
+                    </a:lnB>
+                    <a:solidFill>
+                      <a:srgbClr val="FFFFFF"/>
+                    </a:solidFill>
+                  </a:tcPr>
+                </a:tc>
+                <a:tc>
+                  <a:txBody>
+                    <a:bodyPr/>
+                    <a:lstStyle/>
+                    <a:p>
+                      <a:pPr algn="ctr" indent="0" marL="0">
+                        <a:buNone/>
+                      </a:pPr>
+                      <a:r>
+                        <a:rPr lang="en-US" sz="850" dirty="0">
+                          <a:solidFill>
+                            <a:srgbClr val="2B2B2B"/>
+                          </a:solidFill>
+                          <a:latin typeface="맑은 고딕" pitchFamily="34" charset="0"/>
+                          <a:ea typeface="맑은 고딕" pitchFamily="34" charset="-122"/>
+                          <a:cs typeface="맑은 고딕" pitchFamily="34" charset="-120"/>
+                        </a:rPr>
+                        <a:t>만기퇴거</a:t>
+                      </a:r>
+                      <a:endParaRPr lang="en-US" sz="850" dirty="0">
                         <a:latin typeface="맑은 고딕" charset="0"/>
                         <a:ea typeface="맑은 고딕" charset="0"/>
                         <a:cs typeface="맑은 고딕" charset="0"/>
@@ -11475,7 +12924,7 @@
                         <a:buNone/>
                       </a:pPr>
                       <a:r>
-                        <a:rPr lang="en-US" sz="950" dirty="0">
+                        <a:rPr lang="en-US" sz="850" dirty="0">
                           <a:solidFill>
                             <a:srgbClr val="2B2B2B"/>
                           </a:solidFill>
@@ -11485,7 +12934,7 @@
                         </a:rPr>
                         <a:t>2F</a:t>
                       </a:r>
-                      <a:endParaRPr lang="en-US" sz="950" dirty="0">
+                      <a:endParaRPr lang="en-US" sz="850" dirty="0">
                         <a:latin typeface="맑은 고딕" charset="0"/>
                         <a:ea typeface="맑은 고딕" charset="0"/>
                         <a:cs typeface="맑은 고딕" charset="0"/>
@@ -11543,7 +12992,7 @@
                         <a:buNone/>
                       </a:pPr>
                       <a:r>
-                        <a:rPr lang="en-US" sz="950" dirty="0">
+                        <a:rPr lang="en-US" sz="850" dirty="0">
                           <a:solidFill>
                             <a:srgbClr val="2B2B2B"/>
                           </a:solidFill>
@@ -11551,9 +13000,9 @@
                           <a:ea typeface="맑은 고딕" pitchFamily="34" charset="-122"/>
                           <a:cs typeface="맑은 고딕" pitchFamily="34" charset="-120"/>
                         </a:rPr>
-                        <a:t>일반음식점</a:t>
+                        <a:t>-</a:t>
                       </a:r>
-                      <a:endParaRPr lang="en-US" sz="950" dirty="0">
+                      <a:endParaRPr lang="en-US" sz="850" dirty="0">
                         <a:latin typeface="맑은 고딕" charset="0"/>
                         <a:ea typeface="맑은 고딕" charset="0"/>
                         <a:cs typeface="맑은 고딕" charset="0"/>
@@ -11611,7 +13060,7 @@
                         <a:buNone/>
                       </a:pPr>
                       <a:r>
-                        <a:rPr lang="en-US" sz="950" dirty="0">
+                        <a:rPr lang="en-US" sz="850" dirty="0">
                           <a:solidFill>
                             <a:srgbClr val="2B2B2B"/>
                           </a:solidFill>
@@ -11619,9 +13068,77 @@
                           <a:ea typeface="맑은 고딕" pitchFamily="34" charset="-122"/>
                           <a:cs typeface="맑은 고딕" pitchFamily="34" charset="-120"/>
                         </a:rPr>
-                        <a:t>80.58평</a:t>
+                        <a:t>일반음식점</a:t>
                       </a:r>
-                      <a:endParaRPr lang="en-US" sz="950" dirty="0">
+                      <a:endParaRPr lang="en-US" sz="850" dirty="0">
+                        <a:latin typeface="맑은 고딕" charset="0"/>
+                        <a:ea typeface="맑은 고딕" charset="0"/>
+                        <a:cs typeface="맑은 고딕" charset="0"/>
+                      </a:endParaRPr>
+                    </a:p>
+                  </a:txBody>
+                  <a:tcPr marL="91440" marR="91440" marT="45720" marB="45720" anchor="ctr">
+                    <a:lnL w="12700" cap="flat" cmpd="sng" algn="ctr">
+                      <a:solidFill>
+                        <a:srgbClr val="CBD5E0"/>
+                      </a:solidFill>
+                      <a:prstDash val="solid"/>
+                      <a:round/>
+                      <a:headEnd type="none" w="med" len="med"/>
+                      <a:tailEnd type="none" w="med" len="med"/>
+                    </a:lnL>
+                    <a:lnR w="12700" cap="flat" cmpd="sng" algn="ctr">
+                      <a:solidFill>
+                        <a:srgbClr val="CBD5E0"/>
+                      </a:solidFill>
+                      <a:prstDash val="solid"/>
+                      <a:round/>
+                      <a:headEnd type="none" w="med" len="med"/>
+                      <a:tailEnd type="none" w="med" len="med"/>
+                    </a:lnR>
+                    <a:lnT w="12700" cap="flat" cmpd="sng" algn="ctr">
+                      <a:solidFill>
+                        <a:srgbClr val="CBD5E0"/>
+                      </a:solidFill>
+                      <a:prstDash val="solid"/>
+                      <a:round/>
+                      <a:headEnd type="none" w="med" len="med"/>
+                      <a:tailEnd type="none" w="med" len="med"/>
+                    </a:lnT>
+                    <a:lnB w="12700" cap="flat" cmpd="sng" algn="ctr">
+                      <a:solidFill>
+                        <a:srgbClr val="CBD5E0"/>
+                      </a:solidFill>
+                      <a:prstDash val="solid"/>
+                      <a:round/>
+                      <a:headEnd type="none" w="med" len="med"/>
+                      <a:tailEnd type="none" w="med" len="med"/>
+                    </a:lnB>
+                    <a:solidFill>
+                      <a:srgbClr val="F3F6F7"/>
+                    </a:solidFill>
+                  </a:tcPr>
+                </a:tc>
+                <a:tc>
+                  <a:txBody>
+                    <a:bodyPr/>
+                    <a:lstStyle/>
+                    <a:p>
+                      <a:pPr algn="ctr" indent="0" marL="0">
+                        <a:buNone/>
+                      </a:pPr>
+                      <a:r>
+                        <a:rPr lang="en-US" sz="850" dirty="0">
+                          <a:solidFill>
+                            <a:srgbClr val="2B2B2B"/>
+                          </a:solidFill>
+                          <a:latin typeface="맑은 고딕" pitchFamily="34" charset="0"/>
+                          <a:ea typeface="맑은 고딕" pitchFamily="34" charset="-122"/>
+                          <a:cs typeface="맑은 고딕" pitchFamily="34" charset="-120"/>
+                        </a:rPr>
+                        <a:t>일반음식점</a:t>
+                      </a:r>
+                      <a:endParaRPr lang="en-US" sz="850" dirty="0">
                         <a:latin typeface="맑은 고딕" charset="0"/>
                         <a:ea typeface="맑은 고딕" charset="0"/>
                         <a:cs typeface="맑은 고딕" charset="0"/>
@@ -11679,7 +13196,7 @@
                         <a:buNone/>
                       </a:pPr>
                       <a:r>
-                        <a:rPr lang="en-US" sz="950" dirty="0">
+                        <a:rPr lang="en-US" sz="850" dirty="0">
                           <a:solidFill>
                             <a:srgbClr val="2B2B2B"/>
                           </a:solidFill>
@@ -11687,9 +13204,9 @@
                           <a:ea typeface="맑은 고딕" pitchFamily="34" charset="-122"/>
                           <a:cs typeface="맑은 고딕" pitchFamily="34" charset="-120"/>
                         </a:rPr>
-                        <a:t>15,000만</a:t>
+                        <a:t>266.4</a:t>
                       </a:r>
-                      <a:endParaRPr lang="en-US" sz="950" dirty="0">
+                      <a:endParaRPr lang="en-US" sz="850" dirty="0">
                         <a:latin typeface="맑은 고딕" charset="0"/>
                         <a:ea typeface="맑은 고딕" charset="0"/>
                         <a:cs typeface="맑은 고딕" charset="0"/>
@@ -11747,7 +13264,7 @@
                         <a:buNone/>
                       </a:pPr>
                       <a:r>
-                        <a:rPr lang="en-US" sz="950" dirty="0">
+                        <a:rPr lang="en-US" sz="850" dirty="0">
                           <a:solidFill>
                             <a:srgbClr val="2B2B2B"/>
                           </a:solidFill>
@@ -11755,9 +13272,145 @@
                           <a:ea typeface="맑은 고딕" pitchFamily="34" charset="-122"/>
                           <a:cs typeface="맑은 고딕" pitchFamily="34" charset="-120"/>
                         </a:rPr>
-                        <a:t>500만</a:t>
+                        <a:t>15,000</a:t>
                       </a:r>
-                      <a:endParaRPr lang="en-US" sz="950" dirty="0">
+                      <a:endParaRPr lang="en-US" sz="850" dirty="0">
+                        <a:latin typeface="맑은 고딕" charset="0"/>
+                        <a:ea typeface="맑은 고딕" charset="0"/>
+                        <a:cs typeface="맑은 고딕" charset="0"/>
+                      </a:endParaRPr>
+                    </a:p>
+                  </a:txBody>
+                  <a:tcPr marL="91440" marR="91440" marT="45720" marB="45720" anchor="ctr">
+                    <a:lnL w="12700" cap="flat" cmpd="sng" algn="ctr">
+                      <a:solidFill>
+                        <a:srgbClr val="CBD5E0"/>
+                      </a:solidFill>
+                      <a:prstDash val="solid"/>
+                      <a:round/>
+                      <a:headEnd type="none" w="med" len="med"/>
+                      <a:tailEnd type="none" w="med" len="med"/>
+                    </a:lnL>
+                    <a:lnR w="12700" cap="flat" cmpd="sng" algn="ctr">
+                      <a:solidFill>
+                        <a:srgbClr val="CBD5E0"/>
+                      </a:solidFill>
+                      <a:prstDash val="solid"/>
+                      <a:round/>
+                      <a:headEnd type="none" w="med" len="med"/>
+                      <a:tailEnd type="none" w="med" len="med"/>
+                    </a:lnR>
+                    <a:lnT w="12700" cap="flat" cmpd="sng" algn="ctr">
+                      <a:solidFill>
+                        <a:srgbClr val="CBD5E0"/>
+                      </a:solidFill>
+                      <a:prstDash val="solid"/>
+                      <a:round/>
+                      <a:headEnd type="none" w="med" len="med"/>
+                      <a:tailEnd type="none" w="med" len="med"/>
+                    </a:lnT>
+                    <a:lnB w="12700" cap="flat" cmpd="sng" algn="ctr">
+                      <a:solidFill>
+                        <a:srgbClr val="CBD5E0"/>
+                      </a:solidFill>
+                      <a:prstDash val="solid"/>
+                      <a:round/>
+                      <a:headEnd type="none" w="med" len="med"/>
+                      <a:tailEnd type="none" w="med" len="med"/>
+                    </a:lnB>
+                    <a:solidFill>
+                      <a:srgbClr val="F3F6F7"/>
+                    </a:solidFill>
+                  </a:tcPr>
+                </a:tc>
+                <a:tc>
+                  <a:txBody>
+                    <a:bodyPr/>
+                    <a:lstStyle/>
+                    <a:p>
+                      <a:pPr algn="r" indent="0" marL="0">
+                        <a:buNone/>
+                      </a:pPr>
+                      <a:r>
+                        <a:rPr lang="en-US" sz="850" dirty="0">
+                          <a:solidFill>
+                            <a:srgbClr val="2B2B2B"/>
+                          </a:solidFill>
+                          <a:latin typeface="맑은 고딕" pitchFamily="34" charset="0"/>
+                          <a:ea typeface="맑은 고딕" pitchFamily="34" charset="-122"/>
+                          <a:cs typeface="맑은 고딕" pitchFamily="34" charset="-120"/>
+                        </a:rPr>
+                        <a:t>500</a:t>
+                      </a:r>
+                      <a:endParaRPr lang="en-US" sz="850" dirty="0">
+                        <a:latin typeface="맑은 고딕" charset="0"/>
+                        <a:ea typeface="맑은 고딕" charset="0"/>
+                        <a:cs typeface="맑은 고딕" charset="0"/>
+                      </a:endParaRPr>
+                    </a:p>
+                  </a:txBody>
+                  <a:tcPr marL="91440" marR="91440" marT="45720" marB="45720" anchor="ctr">
+                    <a:lnL w="12700" cap="flat" cmpd="sng" algn="ctr">
+                      <a:solidFill>
+                        <a:srgbClr val="CBD5E0"/>
+                      </a:solidFill>
+                      <a:prstDash val="solid"/>
+                      <a:round/>
+                      <a:headEnd type="none" w="med" len="med"/>
+                      <a:tailEnd type="none" w="med" len="med"/>
+                    </a:lnL>
+                    <a:lnR w="12700" cap="flat" cmpd="sng" algn="ctr">
+                      <a:solidFill>
+                        <a:srgbClr val="CBD5E0"/>
+                      </a:solidFill>
+                      <a:prstDash val="solid"/>
+                      <a:round/>
+                      <a:headEnd type="none" w="med" len="med"/>
+                      <a:tailEnd type="none" w="med" len="med"/>
+                    </a:lnR>
+                    <a:lnT w="12700" cap="flat" cmpd="sng" algn="ctr">
+                      <a:solidFill>
+                        <a:srgbClr val="CBD5E0"/>
+                      </a:solidFill>
+                      <a:prstDash val="solid"/>
+                      <a:round/>
+                      <a:headEnd type="none" w="med" len="med"/>
+                      <a:tailEnd type="none" w="med" len="med"/>
+                    </a:lnT>
+                    <a:lnB w="12700" cap="flat" cmpd="sng" algn="ctr">
+                      <a:solidFill>
+                        <a:srgbClr val="CBD5E0"/>
+                      </a:solidFill>
+                      <a:prstDash val="solid"/>
+                      <a:round/>
+                      <a:headEnd type="none" w="med" len="med"/>
+                      <a:tailEnd type="none" w="med" len="med"/>
+                    </a:lnB>
+                    <a:solidFill>
+                      <a:srgbClr val="F3F6F7"/>
+                    </a:solidFill>
+                  </a:tcPr>
+                </a:tc>
+                <a:tc>
+                  <a:txBody>
+                    <a:bodyPr/>
+                    <a:lstStyle/>
+                    <a:p>
+                      <a:pPr algn="r" indent="0" marL="0">
+                        <a:buNone/>
+                      </a:pPr>
+                      <a:r>
+                        <a:rPr lang="en-US" sz="850" dirty="0">
+                          <a:solidFill>
+                            <a:srgbClr val="2B2B2B"/>
+                          </a:solidFill>
+                          <a:latin typeface="맑은 고딕" pitchFamily="34" charset="0"/>
+                          <a:ea typeface="맑은 고딕" pitchFamily="34" charset="-122"/>
+                          <a:cs typeface="맑은 고딕" pitchFamily="34" charset="-120"/>
+                        </a:rPr>
+                        <a:t>24</a:t>
+                      </a:r>
+                      <a:endParaRPr lang="en-US" sz="850" dirty="0">
                         <a:latin typeface="맑은 고딕" charset="0"/>
                         <a:ea typeface="맑은 고딕" charset="0"/>
                         <a:cs typeface="맑은 고딕" charset="0"/>
@@ -11815,7 +13468,7 @@
                         <a:buNone/>
                       </a:pPr>
                       <a:r>
-                        <a:rPr lang="en-US" sz="950" dirty="0">
+                        <a:rPr lang="en-US" sz="850" dirty="0">
                           <a:solidFill>
                             <a:srgbClr val="2B2B2B"/>
                           </a:solidFill>
@@ -11825,7 +13478,64 @@
                         </a:rPr>
                         <a:t>2026-04-30</a:t>
                       </a:r>
-                      <a:endParaRPr lang="en-US" sz="950" dirty="0">
+                      <a:endParaRPr lang="en-US" sz="850" dirty="0">
+                        <a:latin typeface="맑은 고딕" charset="0"/>
+                        <a:ea typeface="맑은 고딕" charset="0"/>
+                        <a:cs typeface="맑은 고딕" charset="0"/>
+                      </a:endParaRPr>
+                    </a:p>
+                  </a:txBody>
+                  <a:tcPr marL="91440" marR="91440" marT="45720" marB="45720" anchor="ctr">
+                    <a:lnL w="12700" cap="flat" cmpd="sng" algn="ctr">
+                      <a:solidFill>
+                        <a:srgbClr val="CBD5E0"/>
+                      </a:solidFill>
+                      <a:prstDash val="solid"/>
+                      <a:round/>
+                      <a:headEnd type="none" w="med" len="med"/>
+                      <a:tailEnd type="none" w="med" len="med"/>
+                    </a:lnL>
+                    <a:lnR w="12700" cap="flat" cmpd="sng" algn="ctr">
+                      <a:solidFill>
+                        <a:srgbClr val="CBD5E0"/>
+                      </a:solidFill>
+                      <a:prstDash val="solid"/>
+                      <a:round/>
+                      <a:headEnd type="none" w="med" len="med"/>
+                      <a:tailEnd type="none" w="med" len="med"/>
+                    </a:lnR>
+                    <a:lnT w="12700" cap="flat" cmpd="sng" algn="ctr">
+                      <a:solidFill>
+                        <a:srgbClr val="CBD5E0"/>
+                      </a:solidFill>
+                      <a:prstDash val="solid"/>
+                      <a:round/>
+                      <a:headEnd type="none" w="med" len="med"/>
+                      <a:tailEnd type="none" w="med" len="med"/>
+                    </a:lnT>
+                    <a:lnB w="12700" cap="flat" cmpd="sng" algn="ctr">
+                      <a:solidFill>
+                        <a:srgbClr val="CBD5E0"/>
+                      </a:solidFill>
+                      <a:prstDash val="solid"/>
+                      <a:round/>
+                      <a:headEnd type="none" w="med" len="med"/>
+                      <a:tailEnd type="none" w="med" len="med"/>
+                    </a:lnB>
+                    <a:solidFill>
+                      <a:srgbClr val="F3F6F7"/>
+                    </a:solidFill>
+                  </a:tcPr>
+                </a:tc>
+                <a:tc>
+                  <a:txBody>
+                    <a:bodyPr/>
+                    <a:lstStyle/>
+                    <a:p>
+                      <a:pPr algn="ctr" indent="0" marL="0">
+                        <a:buNone/>
+                      </a:pPr>
+                      <a:endParaRPr lang="en-US" sz="850" dirty="0">
                         <a:latin typeface="맑은 고딕" charset="0"/>
                         <a:ea typeface="맑은 고딕" charset="0"/>
                         <a:cs typeface="맑은 고딕" charset="0"/>
@@ -11885,7 +13595,7 @@
                         <a:buNone/>
                       </a:pPr>
                       <a:r>
-                        <a:rPr lang="en-US" sz="950" dirty="0">
+                        <a:rPr lang="en-US" sz="850" dirty="0">
                           <a:solidFill>
                             <a:srgbClr val="2B2B2B"/>
                           </a:solidFill>
@@ -11895,7 +13605,7 @@
                         </a:rPr>
                         <a:t>3F-1</a:t>
                       </a:r>
-                      <a:endParaRPr lang="en-US" sz="950" dirty="0">
+                      <a:endParaRPr lang="en-US" sz="850" dirty="0">
                         <a:latin typeface="맑은 고딕" charset="0"/>
                         <a:ea typeface="맑은 고딕" charset="0"/>
                         <a:cs typeface="맑은 고딕" charset="0"/>
@@ -11953,7 +13663,7 @@
                         <a:buNone/>
                       </a:pPr>
                       <a:r>
-                        <a:rPr lang="en-US" sz="950" dirty="0">
+                        <a:rPr lang="en-US" sz="850" dirty="0">
                           <a:solidFill>
                             <a:srgbClr val="2B2B2B"/>
                           </a:solidFill>
@@ -11961,9 +13671,9 @@
                           <a:ea typeface="맑은 고딕" pitchFamily="34" charset="-122"/>
                           <a:cs typeface="맑은 고딕" pitchFamily="34" charset="-120"/>
                         </a:rPr>
-                        <a:t>사무소</a:t>
+                        <a:t>-</a:t>
                       </a:r>
-                      <a:endParaRPr lang="en-US" sz="950" dirty="0">
+                      <a:endParaRPr lang="en-US" sz="850" dirty="0">
                         <a:latin typeface="맑은 고딕" charset="0"/>
                         <a:ea typeface="맑은 고딕" charset="0"/>
                         <a:cs typeface="맑은 고딕" charset="0"/>
@@ -12021,7 +13731,7 @@
                         <a:buNone/>
                       </a:pPr>
                       <a:r>
-                        <a:rPr lang="en-US" sz="950" dirty="0">
+                        <a:rPr lang="en-US" sz="850" dirty="0">
                           <a:solidFill>
                             <a:srgbClr val="2B2B2B"/>
                           </a:solidFill>
@@ -12029,9 +13739,77 @@
                           <a:ea typeface="맑은 고딕" pitchFamily="34" charset="-122"/>
                           <a:cs typeface="맑은 고딕" pitchFamily="34" charset="-120"/>
                         </a:rPr>
-                        <a:t>41.02평</a:t>
+                        <a:t>사무소</a:t>
                       </a:r>
-                      <a:endParaRPr lang="en-US" sz="950" dirty="0">
+                      <a:endParaRPr lang="en-US" sz="850" dirty="0">
+                        <a:latin typeface="맑은 고딕" charset="0"/>
+                        <a:ea typeface="맑은 고딕" charset="0"/>
+                        <a:cs typeface="맑은 고딕" charset="0"/>
+                      </a:endParaRPr>
+                    </a:p>
+                  </a:txBody>
+                  <a:tcPr marL="91440" marR="91440" marT="45720" marB="45720" anchor="ctr">
+                    <a:lnL w="12700" cap="flat" cmpd="sng" algn="ctr">
+                      <a:solidFill>
+                        <a:srgbClr val="CBD5E0"/>
+                      </a:solidFill>
+                      <a:prstDash val="solid"/>
+                      <a:round/>
+                      <a:headEnd type="none" w="med" len="med"/>
+                      <a:tailEnd type="none" w="med" len="med"/>
+                    </a:lnL>
+                    <a:lnR w="12700" cap="flat" cmpd="sng" algn="ctr">
+                      <a:solidFill>
+                        <a:srgbClr val="CBD5E0"/>
+                      </a:solidFill>
+                      <a:prstDash val="solid"/>
+                      <a:round/>
+                      <a:headEnd type="none" w="med" len="med"/>
+                      <a:tailEnd type="none" w="med" len="med"/>
+                    </a:lnR>
+                    <a:lnT w="12700" cap="flat" cmpd="sng" algn="ctr">
+                      <a:solidFill>
+                        <a:srgbClr val="CBD5E0"/>
+                      </a:solidFill>
+                      <a:prstDash val="solid"/>
+                      <a:round/>
+                      <a:headEnd type="none" w="med" len="med"/>
+                      <a:tailEnd type="none" w="med" len="med"/>
+                    </a:lnT>
+                    <a:lnB w="12700" cap="flat" cmpd="sng" algn="ctr">
+                      <a:solidFill>
+                        <a:srgbClr val="CBD5E0"/>
+                      </a:solidFill>
+                      <a:prstDash val="solid"/>
+                      <a:round/>
+                      <a:headEnd type="none" w="med" len="med"/>
+                      <a:tailEnd type="none" w="med" len="med"/>
+                    </a:lnB>
+                    <a:solidFill>
+                      <a:srgbClr val="FFFFFF"/>
+                    </a:solidFill>
+                  </a:tcPr>
+                </a:tc>
+                <a:tc>
+                  <a:txBody>
+                    <a:bodyPr/>
+                    <a:lstStyle/>
+                    <a:p>
+                      <a:pPr algn="ctr" indent="0" marL="0">
+                        <a:buNone/>
+                      </a:pPr>
+                      <a:r>
+                        <a:rPr lang="en-US" sz="850" dirty="0">
+                          <a:solidFill>
+                            <a:srgbClr val="2B2B2B"/>
+                          </a:solidFill>
+                          <a:latin typeface="맑은 고딕" pitchFamily="34" charset="0"/>
+                          <a:ea typeface="맑은 고딕" pitchFamily="34" charset="-122"/>
+                          <a:cs typeface="맑은 고딕" pitchFamily="34" charset="-120"/>
+                        </a:rPr>
+                        <a:t>사무소</a:t>
+                      </a:r>
+                      <a:endParaRPr lang="en-US" sz="850" dirty="0">
                         <a:latin typeface="맑은 고딕" charset="0"/>
                         <a:ea typeface="맑은 고딕" charset="0"/>
                         <a:cs typeface="맑은 고딕" charset="0"/>
@@ -12089,7 +13867,7 @@
                         <a:buNone/>
                       </a:pPr>
                       <a:r>
-                        <a:rPr lang="en-US" sz="950" dirty="0">
+                        <a:rPr lang="en-US" sz="850" dirty="0">
                           <a:solidFill>
                             <a:srgbClr val="2B2B2B"/>
                           </a:solidFill>
@@ -12097,9 +13875,9 @@
                           <a:ea typeface="맑은 고딕" pitchFamily="34" charset="-122"/>
                           <a:cs typeface="맑은 고딕" pitchFamily="34" charset="-120"/>
                         </a:rPr>
-                        <a:t>5,000만</a:t>
+                        <a:t>135.6</a:t>
                       </a:r>
-                      <a:endParaRPr lang="en-US" sz="950" dirty="0">
+                      <a:endParaRPr lang="en-US" sz="850" dirty="0">
                         <a:latin typeface="맑은 고딕" charset="0"/>
                         <a:ea typeface="맑은 고딕" charset="0"/>
                         <a:cs typeface="맑은 고딕" charset="0"/>
@@ -12157,7 +13935,7 @@
                         <a:buNone/>
                       </a:pPr>
                       <a:r>
-                        <a:rPr lang="en-US" sz="950" dirty="0">
+                        <a:rPr lang="en-US" sz="850" dirty="0">
                           <a:solidFill>
                             <a:srgbClr val="2B2B2B"/>
                           </a:solidFill>
@@ -12165,9 +13943,145 @@
                           <a:ea typeface="맑은 고딕" pitchFamily="34" charset="-122"/>
                           <a:cs typeface="맑은 고딕" pitchFamily="34" charset="-120"/>
                         </a:rPr>
-                        <a:t>250만</a:t>
+                        <a:t>5,000</a:t>
                       </a:r>
-                      <a:endParaRPr lang="en-US" sz="950" dirty="0">
+                      <a:endParaRPr lang="en-US" sz="850" dirty="0">
+                        <a:latin typeface="맑은 고딕" charset="0"/>
+                        <a:ea typeface="맑은 고딕" charset="0"/>
+                        <a:cs typeface="맑은 고딕" charset="0"/>
+                      </a:endParaRPr>
+                    </a:p>
+                  </a:txBody>
+                  <a:tcPr marL="91440" marR="91440" marT="45720" marB="45720" anchor="ctr">
+                    <a:lnL w="12700" cap="flat" cmpd="sng" algn="ctr">
+                      <a:solidFill>
+                        <a:srgbClr val="CBD5E0"/>
+                      </a:solidFill>
+                      <a:prstDash val="solid"/>
+                      <a:round/>
+                      <a:headEnd type="none" w="med" len="med"/>
+                      <a:tailEnd type="none" w="med" len="med"/>
+                    </a:lnL>
+                    <a:lnR w="12700" cap="flat" cmpd="sng" algn="ctr">
+                      <a:solidFill>
+                        <a:srgbClr val="CBD5E0"/>
+                      </a:solidFill>
+                      <a:prstDash val="solid"/>
+                      <a:round/>
+                      <a:headEnd type="none" w="med" len="med"/>
+                      <a:tailEnd type="none" w="med" len="med"/>
+                    </a:lnR>
+                    <a:lnT w="12700" cap="flat" cmpd="sng" algn="ctr">
+                      <a:solidFill>
+                        <a:srgbClr val="CBD5E0"/>
+                      </a:solidFill>
+                      <a:prstDash val="solid"/>
+                      <a:round/>
+                      <a:headEnd type="none" w="med" len="med"/>
+                      <a:tailEnd type="none" w="med" len="med"/>
+                    </a:lnT>
+                    <a:lnB w="12700" cap="flat" cmpd="sng" algn="ctr">
+                      <a:solidFill>
+                        <a:srgbClr val="CBD5E0"/>
+                      </a:solidFill>
+                      <a:prstDash val="solid"/>
+                      <a:round/>
+                      <a:headEnd type="none" w="med" len="med"/>
+                      <a:tailEnd type="none" w="med" len="med"/>
+                    </a:lnB>
+                    <a:solidFill>
+                      <a:srgbClr val="FFFFFF"/>
+                    </a:solidFill>
+                  </a:tcPr>
+                </a:tc>
+                <a:tc>
+                  <a:txBody>
+                    <a:bodyPr/>
+                    <a:lstStyle/>
+                    <a:p>
+                      <a:pPr algn="r" indent="0" marL="0">
+                        <a:buNone/>
+                      </a:pPr>
+                      <a:r>
+                        <a:rPr lang="en-US" sz="850" dirty="0">
+                          <a:solidFill>
+                            <a:srgbClr val="2B2B2B"/>
+                          </a:solidFill>
+                          <a:latin typeface="맑은 고딕" pitchFamily="34" charset="0"/>
+                          <a:ea typeface="맑은 고딕" pitchFamily="34" charset="-122"/>
+                          <a:cs typeface="맑은 고딕" pitchFamily="34" charset="-120"/>
+                        </a:rPr>
+                        <a:t>250</a:t>
+                      </a:r>
+                      <a:endParaRPr lang="en-US" sz="850" dirty="0">
+                        <a:latin typeface="맑은 고딕" charset="0"/>
+                        <a:ea typeface="맑은 고딕" charset="0"/>
+                        <a:cs typeface="맑은 고딕" charset="0"/>
+                      </a:endParaRPr>
+                    </a:p>
+                  </a:txBody>
+                  <a:tcPr marL="91440" marR="91440" marT="45720" marB="45720" anchor="ctr">
+                    <a:lnL w="12700" cap="flat" cmpd="sng" algn="ctr">
+                      <a:solidFill>
+                        <a:srgbClr val="CBD5E0"/>
+                      </a:solidFill>
+                      <a:prstDash val="solid"/>
+                      <a:round/>
+                      <a:headEnd type="none" w="med" len="med"/>
+                      <a:tailEnd type="none" w="med" len="med"/>
+                    </a:lnL>
+                    <a:lnR w="12700" cap="flat" cmpd="sng" algn="ctr">
+                      <a:solidFill>
+                        <a:srgbClr val="CBD5E0"/>
+                      </a:solidFill>
+                      <a:prstDash val="solid"/>
+                      <a:round/>
+                      <a:headEnd type="none" w="med" len="med"/>
+                      <a:tailEnd type="none" w="med" len="med"/>
+                    </a:lnR>
+                    <a:lnT w="12700" cap="flat" cmpd="sng" algn="ctr">
+                      <a:solidFill>
+                        <a:srgbClr val="CBD5E0"/>
+                      </a:solidFill>
+                      <a:prstDash val="solid"/>
+                      <a:round/>
+                      <a:headEnd type="none" w="med" len="med"/>
+                      <a:tailEnd type="none" w="med" len="med"/>
+                    </a:lnT>
+                    <a:lnB w="12700" cap="flat" cmpd="sng" algn="ctr">
+                      <a:solidFill>
+                        <a:srgbClr val="CBD5E0"/>
+                      </a:solidFill>
+                      <a:prstDash val="solid"/>
+                      <a:round/>
+                      <a:headEnd type="none" w="med" len="med"/>
+                      <a:tailEnd type="none" w="med" len="med"/>
+                    </a:lnB>
+                    <a:solidFill>
+                      <a:srgbClr val="FFFFFF"/>
+                    </a:solidFill>
+                  </a:tcPr>
+                </a:tc>
+                <a:tc>
+                  <a:txBody>
+                    <a:bodyPr/>
+                    <a:lstStyle/>
+                    <a:p>
+                      <a:pPr algn="r" indent="0" marL="0">
+                        <a:buNone/>
+                      </a:pPr>
+                      <a:r>
+                        <a:rPr lang="en-US" sz="850" dirty="0">
+                          <a:solidFill>
+                            <a:srgbClr val="2B2B2B"/>
+                          </a:solidFill>
+                          <a:latin typeface="맑은 고딕" pitchFamily="34" charset="0"/>
+                          <a:ea typeface="맑은 고딕" pitchFamily="34" charset="-122"/>
+                          <a:cs typeface="맑은 고딕" pitchFamily="34" charset="-120"/>
+                        </a:rPr>
+                        <a:t>12</a:t>
+                      </a:r>
+                      <a:endParaRPr lang="en-US" sz="850" dirty="0">
                         <a:latin typeface="맑은 고딕" charset="0"/>
                         <a:ea typeface="맑은 고딕" charset="0"/>
                         <a:cs typeface="맑은 고딕" charset="0"/>
@@ -12225,7 +14139,7 @@
                         <a:buNone/>
                       </a:pPr>
                       <a:r>
-                        <a:rPr lang="en-US" sz="950" dirty="0">
+                        <a:rPr lang="en-US" sz="850" dirty="0">
                           <a:solidFill>
                             <a:srgbClr val="2B2B2B"/>
                           </a:solidFill>
@@ -12235,7 +14149,64 @@
                         </a:rPr>
                         <a:t>-</a:t>
                       </a:r>
-                      <a:endParaRPr lang="en-US" sz="950" dirty="0">
+                      <a:endParaRPr lang="en-US" sz="850" dirty="0">
+                        <a:latin typeface="맑은 고딕" charset="0"/>
+                        <a:ea typeface="맑은 고딕" charset="0"/>
+                        <a:cs typeface="맑은 고딕" charset="0"/>
+                      </a:endParaRPr>
+                    </a:p>
+                  </a:txBody>
+                  <a:tcPr marL="91440" marR="91440" marT="45720" marB="45720" anchor="ctr">
+                    <a:lnL w="12700" cap="flat" cmpd="sng" algn="ctr">
+                      <a:solidFill>
+                        <a:srgbClr val="CBD5E0"/>
+                      </a:solidFill>
+                      <a:prstDash val="solid"/>
+                      <a:round/>
+                      <a:headEnd type="none" w="med" len="med"/>
+                      <a:tailEnd type="none" w="med" len="med"/>
+                    </a:lnL>
+                    <a:lnR w="12700" cap="flat" cmpd="sng" algn="ctr">
+                      <a:solidFill>
+                        <a:srgbClr val="CBD5E0"/>
+                      </a:solidFill>
+                      <a:prstDash val="solid"/>
+                      <a:round/>
+                      <a:headEnd type="none" w="med" len="med"/>
+                      <a:tailEnd type="none" w="med" len="med"/>
+                    </a:lnR>
+                    <a:lnT w="12700" cap="flat" cmpd="sng" algn="ctr">
+                      <a:solidFill>
+                        <a:srgbClr val="CBD5E0"/>
+                      </a:solidFill>
+                      <a:prstDash val="solid"/>
+                      <a:round/>
+                      <a:headEnd type="none" w="med" len="med"/>
+                      <a:tailEnd type="none" w="med" len="med"/>
+                    </a:lnT>
+                    <a:lnB w="12700" cap="flat" cmpd="sng" algn="ctr">
+                      <a:solidFill>
+                        <a:srgbClr val="CBD5E0"/>
+                      </a:solidFill>
+                      <a:prstDash val="solid"/>
+                      <a:round/>
+                      <a:headEnd type="none" w="med" len="med"/>
+                      <a:tailEnd type="none" w="med" len="med"/>
+                    </a:lnB>
+                    <a:solidFill>
+                      <a:srgbClr val="FFFFFF"/>
+                    </a:solidFill>
+                  </a:tcPr>
+                </a:tc>
+                <a:tc>
+                  <a:txBody>
+                    <a:bodyPr/>
+                    <a:lstStyle/>
+                    <a:p>
+                      <a:pPr algn="ctr" indent="0" marL="0">
+                        <a:buNone/>
+                      </a:pPr>
+                      <a:endParaRPr lang="en-US" sz="850" dirty="0">
                         <a:latin typeface="맑은 고딕" charset="0"/>
                         <a:ea typeface="맑은 고딕" charset="0"/>
                         <a:cs typeface="맑은 고딕" charset="0"/>
@@ -12295,7 +14266,7 @@
                         <a:buNone/>
                       </a:pPr>
                       <a:r>
-                        <a:rPr lang="en-US" sz="950" dirty="0">
+                        <a:rPr lang="en-US" sz="850" dirty="0">
                           <a:solidFill>
                             <a:srgbClr val="2B2B2B"/>
                           </a:solidFill>
@@ -12305,7 +14276,7 @@
                         </a:rPr>
                         <a:t>3F-2</a:t>
                       </a:r>
-                      <a:endParaRPr lang="en-US" sz="950" dirty="0">
+                      <a:endParaRPr lang="en-US" sz="850" dirty="0">
                         <a:latin typeface="맑은 고딕" charset="0"/>
                         <a:ea typeface="맑은 고딕" charset="0"/>
                         <a:cs typeface="맑은 고딕" charset="0"/>
@@ -12363,7 +14334,7 @@
                         <a:buNone/>
                       </a:pPr>
                       <a:r>
-                        <a:rPr lang="en-US" sz="950" dirty="0">
+                        <a:rPr lang="en-US" sz="850" dirty="0">
                           <a:solidFill>
                             <a:srgbClr val="2B2B2B"/>
                           </a:solidFill>
@@ -12371,9 +14342,9 @@
                           <a:ea typeface="맑은 고딕" pitchFamily="34" charset="-122"/>
                           <a:cs typeface="맑은 고딕" pitchFamily="34" charset="-120"/>
                         </a:rPr>
-                        <a:t>의원</a:t>
+                        <a:t>-</a:t>
                       </a:r>
-                      <a:endParaRPr lang="en-US" sz="950" dirty="0">
+                      <a:endParaRPr lang="en-US" sz="850" dirty="0">
                         <a:latin typeface="맑은 고딕" charset="0"/>
                         <a:ea typeface="맑은 고딕" charset="0"/>
                         <a:cs typeface="맑은 고딕" charset="0"/>
@@ -12431,7 +14402,7 @@
                         <a:buNone/>
                       </a:pPr>
                       <a:r>
-                        <a:rPr lang="en-US" sz="950" dirty="0">
+                        <a:rPr lang="en-US" sz="850" dirty="0">
                           <a:solidFill>
                             <a:srgbClr val="2B2B2B"/>
                           </a:solidFill>
@@ -12439,9 +14410,77 @@
                           <a:ea typeface="맑은 고딕" pitchFamily="34" charset="-122"/>
                           <a:cs typeface="맑은 고딕" pitchFamily="34" charset="-120"/>
                         </a:rPr>
-                        <a:t>39.55평</a:t>
+                        <a:t>의원</a:t>
                       </a:r>
-                      <a:endParaRPr lang="en-US" sz="950" dirty="0">
+                      <a:endParaRPr lang="en-US" sz="850" dirty="0">
+                        <a:latin typeface="맑은 고딕" charset="0"/>
+                        <a:ea typeface="맑은 고딕" charset="0"/>
+                        <a:cs typeface="맑은 고딕" charset="0"/>
+                      </a:endParaRPr>
+                    </a:p>
+                  </a:txBody>
+                  <a:tcPr marL="91440" marR="91440" marT="45720" marB="45720" anchor="ctr">
+                    <a:lnL w="12700" cap="flat" cmpd="sng" algn="ctr">
+                      <a:solidFill>
+                        <a:srgbClr val="CBD5E0"/>
+                      </a:solidFill>
+                      <a:prstDash val="solid"/>
+                      <a:round/>
+                      <a:headEnd type="none" w="med" len="med"/>
+                      <a:tailEnd type="none" w="med" len="med"/>
+                    </a:lnL>
+                    <a:lnR w="12700" cap="flat" cmpd="sng" algn="ctr">
+                      <a:solidFill>
+                        <a:srgbClr val="CBD5E0"/>
+                      </a:solidFill>
+                      <a:prstDash val="solid"/>
+                      <a:round/>
+                      <a:headEnd type="none" w="med" len="med"/>
+                      <a:tailEnd type="none" w="med" len="med"/>
+                    </a:lnR>
+                    <a:lnT w="12700" cap="flat" cmpd="sng" algn="ctr">
+                      <a:solidFill>
+                        <a:srgbClr val="CBD5E0"/>
+                      </a:solidFill>
+                      <a:prstDash val="solid"/>
+                      <a:round/>
+                      <a:headEnd type="none" w="med" len="med"/>
+                      <a:tailEnd type="none" w="med" len="med"/>
+                    </a:lnT>
+                    <a:lnB w="12700" cap="flat" cmpd="sng" algn="ctr">
+                      <a:solidFill>
+                        <a:srgbClr val="CBD5E0"/>
+                      </a:solidFill>
+                      <a:prstDash val="solid"/>
+                      <a:round/>
+                      <a:headEnd type="none" w="med" len="med"/>
+                      <a:tailEnd type="none" w="med" len="med"/>
+                    </a:lnB>
+                    <a:solidFill>
+                      <a:srgbClr val="F3F6F7"/>
+                    </a:solidFill>
+                  </a:tcPr>
+                </a:tc>
+                <a:tc>
+                  <a:txBody>
+                    <a:bodyPr/>
+                    <a:lstStyle/>
+                    <a:p>
+                      <a:pPr algn="ctr" indent="0" marL="0">
+                        <a:buNone/>
+                      </a:pPr>
+                      <a:r>
+                        <a:rPr lang="en-US" sz="850" dirty="0">
+                          <a:solidFill>
+                            <a:srgbClr val="2B2B2B"/>
+                          </a:solidFill>
+                          <a:latin typeface="맑은 고딕" pitchFamily="34" charset="0"/>
+                          <a:ea typeface="맑은 고딕" pitchFamily="34" charset="-122"/>
+                          <a:cs typeface="맑은 고딕" pitchFamily="34" charset="-120"/>
+                        </a:rPr>
+                        <a:t>의원</a:t>
+                      </a:r>
+                      <a:endParaRPr lang="en-US" sz="850" dirty="0">
                         <a:latin typeface="맑은 고딕" charset="0"/>
                         <a:ea typeface="맑은 고딕" charset="0"/>
                         <a:cs typeface="맑은 고딕" charset="0"/>
@@ -12499,7 +14538,7 @@
                         <a:buNone/>
                       </a:pPr>
                       <a:r>
-                        <a:rPr lang="en-US" sz="950" dirty="0">
+                        <a:rPr lang="en-US" sz="850" dirty="0">
                           <a:solidFill>
                             <a:srgbClr val="2B2B2B"/>
                           </a:solidFill>
@@ -12507,9 +14546,9 @@
                           <a:ea typeface="맑은 고딕" pitchFamily="34" charset="-122"/>
                           <a:cs typeface="맑은 고딕" pitchFamily="34" charset="-120"/>
                         </a:rPr>
-                        <a:t>7,000만</a:t>
+                        <a:t>130.7</a:t>
                       </a:r>
-                      <a:endParaRPr lang="en-US" sz="950" dirty="0">
+                      <a:endParaRPr lang="en-US" sz="850" dirty="0">
                         <a:latin typeface="맑은 고딕" charset="0"/>
                         <a:ea typeface="맑은 고딕" charset="0"/>
                         <a:cs typeface="맑은 고딕" charset="0"/>
@@ -12567,7 +14606,7 @@
                         <a:buNone/>
                       </a:pPr>
                       <a:r>
-                        <a:rPr lang="en-US" sz="950" dirty="0">
+                        <a:rPr lang="en-US" sz="850" dirty="0">
                           <a:solidFill>
                             <a:srgbClr val="2B2B2B"/>
                           </a:solidFill>
@@ -12575,9 +14614,145 @@
                           <a:ea typeface="맑은 고딕" pitchFamily="34" charset="-122"/>
                           <a:cs typeface="맑은 고딕" pitchFamily="34" charset="-120"/>
                         </a:rPr>
-                        <a:t>300만</a:t>
+                        <a:t>7,000</a:t>
                       </a:r>
-                      <a:endParaRPr lang="en-US" sz="950" dirty="0">
+                      <a:endParaRPr lang="en-US" sz="850" dirty="0">
+                        <a:latin typeface="맑은 고딕" charset="0"/>
+                        <a:ea typeface="맑은 고딕" charset="0"/>
+                        <a:cs typeface="맑은 고딕" charset="0"/>
+                      </a:endParaRPr>
+                    </a:p>
+                  </a:txBody>
+                  <a:tcPr marL="91440" marR="91440" marT="45720" marB="45720" anchor="ctr">
+                    <a:lnL w="12700" cap="flat" cmpd="sng" algn="ctr">
+                      <a:solidFill>
+                        <a:srgbClr val="CBD5E0"/>
+                      </a:solidFill>
+                      <a:prstDash val="solid"/>
+                      <a:round/>
+                      <a:headEnd type="none" w="med" len="med"/>
+                      <a:tailEnd type="none" w="med" len="med"/>
+                    </a:lnL>
+                    <a:lnR w="12700" cap="flat" cmpd="sng" algn="ctr">
+                      <a:solidFill>
+                        <a:srgbClr val="CBD5E0"/>
+                      </a:solidFill>
+                      <a:prstDash val="solid"/>
+                      <a:round/>
+                      <a:headEnd type="none" w="med" len="med"/>
+                      <a:tailEnd type="none" w="med" len="med"/>
+                    </a:lnR>
+                    <a:lnT w="12700" cap="flat" cmpd="sng" algn="ctr">
+                      <a:solidFill>
+                        <a:srgbClr val="CBD5E0"/>
+                      </a:solidFill>
+                      <a:prstDash val="solid"/>
+                      <a:round/>
+                      <a:headEnd type="none" w="med" len="med"/>
+                      <a:tailEnd type="none" w="med" len="med"/>
+                    </a:lnT>
+                    <a:lnB w="12700" cap="flat" cmpd="sng" algn="ctr">
+                      <a:solidFill>
+                        <a:srgbClr val="CBD5E0"/>
+                      </a:solidFill>
+                      <a:prstDash val="solid"/>
+                      <a:round/>
+                      <a:headEnd type="none" w="med" len="med"/>
+                      <a:tailEnd type="none" w="med" len="med"/>
+                    </a:lnB>
+                    <a:solidFill>
+                      <a:srgbClr val="F3F6F7"/>
+                    </a:solidFill>
+                  </a:tcPr>
+                </a:tc>
+                <a:tc>
+                  <a:txBody>
+                    <a:bodyPr/>
+                    <a:lstStyle/>
+                    <a:p>
+                      <a:pPr algn="r" indent="0" marL="0">
+                        <a:buNone/>
+                      </a:pPr>
+                      <a:r>
+                        <a:rPr lang="en-US" sz="850" dirty="0">
+                          <a:solidFill>
+                            <a:srgbClr val="2B2B2B"/>
+                          </a:solidFill>
+                          <a:latin typeface="맑은 고딕" pitchFamily="34" charset="0"/>
+                          <a:ea typeface="맑은 고딕" pitchFamily="34" charset="-122"/>
+                          <a:cs typeface="맑은 고딕" pitchFamily="34" charset="-120"/>
+                        </a:rPr>
+                        <a:t>300</a:t>
+                      </a:r>
+                      <a:endParaRPr lang="en-US" sz="850" dirty="0">
+                        <a:latin typeface="맑은 고딕" charset="0"/>
+                        <a:ea typeface="맑은 고딕" charset="0"/>
+                        <a:cs typeface="맑은 고딕" charset="0"/>
+                      </a:endParaRPr>
+                    </a:p>
+                  </a:txBody>
+                  <a:tcPr marL="91440" marR="91440" marT="45720" marB="45720" anchor="ctr">
+                    <a:lnL w="12700" cap="flat" cmpd="sng" algn="ctr">
+                      <a:solidFill>
+                        <a:srgbClr val="CBD5E0"/>
+                      </a:solidFill>
+                      <a:prstDash val="solid"/>
+                      <a:round/>
+                      <a:headEnd type="none" w="med" len="med"/>
+                      <a:tailEnd type="none" w="med" len="med"/>
+                    </a:lnL>
+                    <a:lnR w="12700" cap="flat" cmpd="sng" algn="ctr">
+                      <a:solidFill>
+                        <a:srgbClr val="CBD5E0"/>
+                      </a:solidFill>
+                      <a:prstDash val="solid"/>
+                      <a:round/>
+                      <a:headEnd type="none" w="med" len="med"/>
+                      <a:tailEnd type="none" w="med" len="med"/>
+                    </a:lnR>
+                    <a:lnT w="12700" cap="flat" cmpd="sng" algn="ctr">
+                      <a:solidFill>
+                        <a:srgbClr val="CBD5E0"/>
+                      </a:solidFill>
+                      <a:prstDash val="solid"/>
+                      <a:round/>
+                      <a:headEnd type="none" w="med" len="med"/>
+                      <a:tailEnd type="none" w="med" len="med"/>
+                    </a:lnT>
+                    <a:lnB w="12700" cap="flat" cmpd="sng" algn="ctr">
+                      <a:solidFill>
+                        <a:srgbClr val="CBD5E0"/>
+                      </a:solidFill>
+                      <a:prstDash val="solid"/>
+                      <a:round/>
+                      <a:headEnd type="none" w="med" len="med"/>
+                      <a:tailEnd type="none" w="med" len="med"/>
+                    </a:lnB>
+                    <a:solidFill>
+                      <a:srgbClr val="F3F6F7"/>
+                    </a:solidFill>
+                  </a:tcPr>
+                </a:tc>
+                <a:tc>
+                  <a:txBody>
+                    <a:bodyPr/>
+                    <a:lstStyle/>
+                    <a:p>
+                      <a:pPr algn="r" indent="0" marL="0">
+                        <a:buNone/>
+                      </a:pPr>
+                      <a:r>
+                        <a:rPr lang="en-US" sz="850" dirty="0">
+                          <a:solidFill>
+                            <a:srgbClr val="2B2B2B"/>
+                          </a:solidFill>
+                          <a:latin typeface="맑은 고딕" pitchFamily="34" charset="0"/>
+                          <a:ea typeface="맑은 고딕" pitchFamily="34" charset="-122"/>
+                          <a:cs typeface="맑은 고딕" pitchFamily="34" charset="-120"/>
+                        </a:rPr>
+                        <a:t>12</a:t>
+                      </a:r>
+                      <a:endParaRPr lang="en-US" sz="850" dirty="0">
                         <a:latin typeface="맑은 고딕" charset="0"/>
                         <a:ea typeface="맑은 고딕" charset="0"/>
                         <a:cs typeface="맑은 고딕" charset="0"/>
@@ -12635,7 +14810,7 @@
                         <a:buNone/>
                       </a:pPr>
                       <a:r>
-                        <a:rPr lang="en-US" sz="950" dirty="0">
+                        <a:rPr lang="en-US" sz="850" dirty="0">
                           <a:solidFill>
                             <a:srgbClr val="2B2B2B"/>
                           </a:solidFill>
@@ -12645,7 +14820,64 @@
                         </a:rPr>
                         <a:t>-</a:t>
                       </a:r>
-                      <a:endParaRPr lang="en-US" sz="950" dirty="0">
+                      <a:endParaRPr lang="en-US" sz="850" dirty="0">
+                        <a:latin typeface="맑은 고딕" charset="0"/>
+                        <a:ea typeface="맑은 고딕" charset="0"/>
+                        <a:cs typeface="맑은 고딕" charset="0"/>
+                      </a:endParaRPr>
+                    </a:p>
+                  </a:txBody>
+                  <a:tcPr marL="91440" marR="91440" marT="45720" marB="45720" anchor="ctr">
+                    <a:lnL w="12700" cap="flat" cmpd="sng" algn="ctr">
+                      <a:solidFill>
+                        <a:srgbClr val="CBD5E0"/>
+                      </a:solidFill>
+                      <a:prstDash val="solid"/>
+                      <a:round/>
+                      <a:headEnd type="none" w="med" len="med"/>
+                      <a:tailEnd type="none" w="med" len="med"/>
+                    </a:lnL>
+                    <a:lnR w="12700" cap="flat" cmpd="sng" algn="ctr">
+                      <a:solidFill>
+                        <a:srgbClr val="CBD5E0"/>
+                      </a:solidFill>
+                      <a:prstDash val="solid"/>
+                      <a:round/>
+                      <a:headEnd type="none" w="med" len="med"/>
+                      <a:tailEnd type="none" w="med" len="med"/>
+                    </a:lnR>
+                    <a:lnT w="12700" cap="flat" cmpd="sng" algn="ctr">
+                      <a:solidFill>
+                        <a:srgbClr val="CBD5E0"/>
+                      </a:solidFill>
+                      <a:prstDash val="solid"/>
+                      <a:round/>
+                      <a:headEnd type="none" w="med" len="med"/>
+                      <a:tailEnd type="none" w="med" len="med"/>
+                    </a:lnT>
+                    <a:lnB w="12700" cap="flat" cmpd="sng" algn="ctr">
+                      <a:solidFill>
+                        <a:srgbClr val="CBD5E0"/>
+                      </a:solidFill>
+                      <a:prstDash val="solid"/>
+                      <a:round/>
+                      <a:headEnd type="none" w="med" len="med"/>
+                      <a:tailEnd type="none" w="med" len="med"/>
+                    </a:lnB>
+                    <a:solidFill>
+                      <a:srgbClr val="F3F6F7"/>
+                    </a:solidFill>
+                  </a:tcPr>
+                </a:tc>
+                <a:tc>
+                  <a:txBody>
+                    <a:bodyPr/>
+                    <a:lstStyle/>
+                    <a:p>
+                      <a:pPr algn="ctr" indent="0" marL="0">
+                        <a:buNone/>
+                      </a:pPr>
+                      <a:endParaRPr lang="en-US" sz="850" dirty="0">
                         <a:latin typeface="맑은 고딕" charset="0"/>
                         <a:ea typeface="맑은 고딕" charset="0"/>
                         <a:cs typeface="맑은 고딕" charset="0"/>
@@ -12705,7 +14937,7 @@
                         <a:buNone/>
                       </a:pPr>
                       <a:r>
-                        <a:rPr lang="en-US" sz="950" dirty="0">
+                        <a:rPr lang="en-US" sz="850" dirty="0">
                           <a:solidFill>
                             <a:srgbClr val="2B2B2B"/>
                           </a:solidFill>
@@ -12715,7 +14947,7 @@
                         </a:rPr>
                         <a:t>4F</a:t>
                       </a:r>
-                      <a:endParaRPr lang="en-US" sz="950" dirty="0">
+                      <a:endParaRPr lang="en-US" sz="850" dirty="0">
                         <a:latin typeface="맑은 고딕" charset="0"/>
                         <a:ea typeface="맑은 고딕" charset="0"/>
                         <a:cs typeface="맑은 고딕" charset="0"/>
@@ -12773,7 +15005,7 @@
                         <a:buNone/>
                       </a:pPr>
                       <a:r>
-                        <a:rPr lang="en-US" sz="950" dirty="0">
+                        <a:rPr lang="en-US" sz="850" dirty="0">
                           <a:solidFill>
                             <a:srgbClr val="2B2B2B"/>
                           </a:solidFill>
@@ -12781,9 +15013,9 @@
                           <a:ea typeface="맑은 고딕" pitchFamily="34" charset="-122"/>
                           <a:cs typeface="맑은 고딕" pitchFamily="34" charset="-120"/>
                         </a:rPr>
-                        <a:t>사무소</a:t>
+                        <a:t>-</a:t>
                       </a:r>
-                      <a:endParaRPr lang="en-US" sz="950" dirty="0">
+                      <a:endParaRPr lang="en-US" sz="850" dirty="0">
                         <a:latin typeface="맑은 고딕" charset="0"/>
                         <a:ea typeface="맑은 고딕" charset="0"/>
                         <a:cs typeface="맑은 고딕" charset="0"/>
@@ -12841,7 +15073,7 @@
                         <a:buNone/>
                       </a:pPr>
                       <a:r>
-                        <a:rPr lang="en-US" sz="950" dirty="0">
+                        <a:rPr lang="en-US" sz="850" dirty="0">
                           <a:solidFill>
                             <a:srgbClr val="2B2B2B"/>
                           </a:solidFill>
@@ -12849,9 +15081,77 @@
                           <a:ea typeface="맑은 고딕" pitchFamily="34" charset="-122"/>
                           <a:cs typeface="맑은 고딕" pitchFamily="34" charset="-120"/>
                         </a:rPr>
-                        <a:t>80.58평</a:t>
+                        <a:t>사무소</a:t>
                       </a:r>
-                      <a:endParaRPr lang="en-US" sz="950" dirty="0">
+                      <a:endParaRPr lang="en-US" sz="850" dirty="0">
+                        <a:latin typeface="맑은 고딕" charset="0"/>
+                        <a:ea typeface="맑은 고딕" charset="0"/>
+                        <a:cs typeface="맑은 고딕" charset="0"/>
+                      </a:endParaRPr>
+                    </a:p>
+                  </a:txBody>
+                  <a:tcPr marL="91440" marR="91440" marT="45720" marB="45720" anchor="ctr">
+                    <a:lnL w="12700" cap="flat" cmpd="sng" algn="ctr">
+                      <a:solidFill>
+                        <a:srgbClr val="CBD5E0"/>
+                      </a:solidFill>
+                      <a:prstDash val="solid"/>
+                      <a:round/>
+                      <a:headEnd type="none" w="med" len="med"/>
+                      <a:tailEnd type="none" w="med" len="med"/>
+                    </a:lnL>
+                    <a:lnR w="12700" cap="flat" cmpd="sng" algn="ctr">
+                      <a:solidFill>
+                        <a:srgbClr val="CBD5E0"/>
+                      </a:solidFill>
+                      <a:prstDash val="solid"/>
+                      <a:round/>
+                      <a:headEnd type="none" w="med" len="med"/>
+                      <a:tailEnd type="none" w="med" len="med"/>
+                    </a:lnR>
+                    <a:lnT w="12700" cap="flat" cmpd="sng" algn="ctr">
+                      <a:solidFill>
+                        <a:srgbClr val="CBD5E0"/>
+                      </a:solidFill>
+                      <a:prstDash val="solid"/>
+                      <a:round/>
+                      <a:headEnd type="none" w="med" len="med"/>
+                      <a:tailEnd type="none" w="med" len="med"/>
+                    </a:lnT>
+                    <a:lnB w="12700" cap="flat" cmpd="sng" algn="ctr">
+                      <a:solidFill>
+                        <a:srgbClr val="CBD5E0"/>
+                      </a:solidFill>
+                      <a:prstDash val="solid"/>
+                      <a:round/>
+                      <a:headEnd type="none" w="med" len="med"/>
+                      <a:tailEnd type="none" w="med" len="med"/>
+                    </a:lnB>
+                    <a:solidFill>
+                      <a:srgbClr val="FFFFFF"/>
+                    </a:solidFill>
+                  </a:tcPr>
+                </a:tc>
+                <a:tc>
+                  <a:txBody>
+                    <a:bodyPr/>
+                    <a:lstStyle/>
+                    <a:p>
+                      <a:pPr algn="ctr" indent="0" marL="0">
+                        <a:buNone/>
+                      </a:pPr>
+                      <a:r>
+                        <a:rPr lang="en-US" sz="850" dirty="0">
+                          <a:solidFill>
+                            <a:srgbClr val="2B2B2B"/>
+                          </a:solidFill>
+                          <a:latin typeface="맑은 고딕" pitchFamily="34" charset="0"/>
+                          <a:ea typeface="맑은 고딕" pitchFamily="34" charset="-122"/>
+                          <a:cs typeface="맑은 고딕" pitchFamily="34" charset="-120"/>
+                        </a:rPr>
+                        <a:t>사무소</a:t>
+                      </a:r>
+                      <a:endParaRPr lang="en-US" sz="850" dirty="0">
                         <a:latin typeface="맑은 고딕" charset="0"/>
                         <a:ea typeface="맑은 고딕" charset="0"/>
                         <a:cs typeface="맑은 고딕" charset="0"/>
@@ -12909,7 +15209,7 @@
                         <a:buNone/>
                       </a:pPr>
                       <a:r>
-                        <a:rPr lang="en-US" sz="950" dirty="0">
+                        <a:rPr lang="en-US" sz="850" dirty="0">
                           <a:solidFill>
                             <a:srgbClr val="2B2B2B"/>
                           </a:solidFill>
@@ -12917,9 +15217,9 @@
                           <a:ea typeface="맑은 고딕" pitchFamily="34" charset="-122"/>
                           <a:cs typeface="맑은 고딕" pitchFamily="34" charset="-120"/>
                         </a:rPr>
-                        <a:t>10,000만</a:t>
+                        <a:t>266.4</a:t>
                       </a:r>
-                      <a:endParaRPr lang="en-US" sz="950" dirty="0">
+                      <a:endParaRPr lang="en-US" sz="850" dirty="0">
                         <a:latin typeface="맑은 고딕" charset="0"/>
                         <a:ea typeface="맑은 고딕" charset="0"/>
                         <a:cs typeface="맑은 고딕" charset="0"/>
@@ -12977,7 +15277,7 @@
                         <a:buNone/>
                       </a:pPr>
                       <a:r>
-                        <a:rPr lang="en-US" sz="950" dirty="0">
+                        <a:rPr lang="en-US" sz="850" dirty="0">
                           <a:solidFill>
                             <a:srgbClr val="2B2B2B"/>
                           </a:solidFill>
@@ -12985,9 +15285,145 @@
                           <a:ea typeface="맑은 고딕" pitchFamily="34" charset="-122"/>
                           <a:cs typeface="맑은 고딕" pitchFamily="34" charset="-120"/>
                         </a:rPr>
-                        <a:t>400만</a:t>
+                        <a:t>10,000</a:t>
                       </a:r>
-                      <a:endParaRPr lang="en-US" sz="950" dirty="0">
+                      <a:endParaRPr lang="en-US" sz="850" dirty="0">
+                        <a:latin typeface="맑은 고딕" charset="0"/>
+                        <a:ea typeface="맑은 고딕" charset="0"/>
+                        <a:cs typeface="맑은 고딕" charset="0"/>
+                      </a:endParaRPr>
+                    </a:p>
+                  </a:txBody>
+                  <a:tcPr marL="91440" marR="91440" marT="45720" marB="45720" anchor="ctr">
+                    <a:lnL w="12700" cap="flat" cmpd="sng" algn="ctr">
+                      <a:solidFill>
+                        <a:srgbClr val="CBD5E0"/>
+                      </a:solidFill>
+                      <a:prstDash val="solid"/>
+                      <a:round/>
+                      <a:headEnd type="none" w="med" len="med"/>
+                      <a:tailEnd type="none" w="med" len="med"/>
+                    </a:lnL>
+                    <a:lnR w="12700" cap="flat" cmpd="sng" algn="ctr">
+                      <a:solidFill>
+                        <a:srgbClr val="CBD5E0"/>
+                      </a:solidFill>
+                      <a:prstDash val="solid"/>
+                      <a:round/>
+                      <a:headEnd type="none" w="med" len="med"/>
+                      <a:tailEnd type="none" w="med" len="med"/>
+                    </a:lnR>
+                    <a:lnT w="12700" cap="flat" cmpd="sng" algn="ctr">
+                      <a:solidFill>
+                        <a:srgbClr val="CBD5E0"/>
+                      </a:solidFill>
+                      <a:prstDash val="solid"/>
+                      <a:round/>
+                      <a:headEnd type="none" w="med" len="med"/>
+                      <a:tailEnd type="none" w="med" len="med"/>
+                    </a:lnT>
+                    <a:lnB w="12700" cap="flat" cmpd="sng" algn="ctr">
+                      <a:solidFill>
+                        <a:srgbClr val="CBD5E0"/>
+                      </a:solidFill>
+                      <a:prstDash val="solid"/>
+                      <a:round/>
+                      <a:headEnd type="none" w="med" len="med"/>
+                      <a:tailEnd type="none" w="med" len="med"/>
+                    </a:lnB>
+                    <a:solidFill>
+                      <a:srgbClr val="FFFFFF"/>
+                    </a:solidFill>
+                  </a:tcPr>
+                </a:tc>
+                <a:tc>
+                  <a:txBody>
+                    <a:bodyPr/>
+                    <a:lstStyle/>
+                    <a:p>
+                      <a:pPr algn="r" indent="0" marL="0">
+                        <a:buNone/>
+                      </a:pPr>
+                      <a:r>
+                        <a:rPr lang="en-US" sz="850" dirty="0">
+                          <a:solidFill>
+                            <a:srgbClr val="2B2B2B"/>
+                          </a:solidFill>
+                          <a:latin typeface="맑은 고딕" pitchFamily="34" charset="0"/>
+                          <a:ea typeface="맑은 고딕" pitchFamily="34" charset="-122"/>
+                          <a:cs typeface="맑은 고딕" pitchFamily="34" charset="-120"/>
+                        </a:rPr>
+                        <a:t>400</a:t>
+                      </a:r>
+                      <a:endParaRPr lang="en-US" sz="850" dirty="0">
+                        <a:latin typeface="맑은 고딕" charset="0"/>
+                        <a:ea typeface="맑은 고딕" charset="0"/>
+                        <a:cs typeface="맑은 고딕" charset="0"/>
+                      </a:endParaRPr>
+                    </a:p>
+                  </a:txBody>
+                  <a:tcPr marL="91440" marR="91440" marT="45720" marB="45720" anchor="ctr">
+                    <a:lnL w="12700" cap="flat" cmpd="sng" algn="ctr">
+                      <a:solidFill>
+                        <a:srgbClr val="CBD5E0"/>
+                      </a:solidFill>
+                      <a:prstDash val="solid"/>
+                      <a:round/>
+                      <a:headEnd type="none" w="med" len="med"/>
+                      <a:tailEnd type="none" w="med" len="med"/>
+                    </a:lnL>
+                    <a:lnR w="12700" cap="flat" cmpd="sng" algn="ctr">
+                      <a:solidFill>
+                        <a:srgbClr val="CBD5E0"/>
+                      </a:solidFill>
+                      <a:prstDash val="solid"/>
+                      <a:round/>
+                      <a:headEnd type="none" w="med" len="med"/>
+                      <a:tailEnd type="none" w="med" len="med"/>
+                    </a:lnR>
+                    <a:lnT w="12700" cap="flat" cmpd="sng" algn="ctr">
+                      <a:solidFill>
+                        <a:srgbClr val="CBD5E0"/>
+                      </a:solidFill>
+                      <a:prstDash val="solid"/>
+                      <a:round/>
+                      <a:headEnd type="none" w="med" len="med"/>
+                      <a:tailEnd type="none" w="med" len="med"/>
+                    </a:lnT>
+                    <a:lnB w="12700" cap="flat" cmpd="sng" algn="ctr">
+                      <a:solidFill>
+                        <a:srgbClr val="CBD5E0"/>
+                      </a:solidFill>
+                      <a:prstDash val="solid"/>
+                      <a:round/>
+                      <a:headEnd type="none" w="med" len="med"/>
+                      <a:tailEnd type="none" w="med" len="med"/>
+                    </a:lnB>
+                    <a:solidFill>
+                      <a:srgbClr val="FFFFFF"/>
+                    </a:solidFill>
+                  </a:tcPr>
+                </a:tc>
+                <a:tc>
+                  <a:txBody>
+                    <a:bodyPr/>
+                    <a:lstStyle/>
+                    <a:p>
+                      <a:pPr algn="r" indent="0" marL="0">
+                        <a:buNone/>
+                      </a:pPr>
+                      <a:r>
+                        <a:rPr lang="en-US" sz="850" dirty="0">
+                          <a:solidFill>
+                            <a:srgbClr val="2B2B2B"/>
+                          </a:solidFill>
+                          <a:latin typeface="맑은 고딕" pitchFamily="34" charset="0"/>
+                          <a:ea typeface="맑은 고딕" pitchFamily="34" charset="-122"/>
+                          <a:cs typeface="맑은 고딕" pitchFamily="34" charset="-120"/>
+                        </a:rPr>
+                        <a:t>24</a:t>
+                      </a:r>
+                      <a:endParaRPr lang="en-US" sz="850" dirty="0">
                         <a:latin typeface="맑은 고딕" charset="0"/>
                         <a:ea typeface="맑은 고딕" charset="0"/>
                         <a:cs typeface="맑은 고딕" charset="0"/>
@@ -13045,7 +15481,7 @@
                         <a:buNone/>
                       </a:pPr>
                       <a:r>
-                        <a:rPr lang="en-US" sz="950" dirty="0">
+                        <a:rPr lang="en-US" sz="850" dirty="0">
                           <a:solidFill>
                             <a:srgbClr val="2B2B2B"/>
                           </a:solidFill>
@@ -13055,7 +15491,64 @@
                         </a:rPr>
                         <a:t>-</a:t>
                       </a:r>
-                      <a:endParaRPr lang="en-US" sz="950" dirty="0">
+                      <a:endParaRPr lang="en-US" sz="850" dirty="0">
+                        <a:latin typeface="맑은 고딕" charset="0"/>
+                        <a:ea typeface="맑은 고딕" charset="0"/>
+                        <a:cs typeface="맑은 고딕" charset="0"/>
+                      </a:endParaRPr>
+                    </a:p>
+                  </a:txBody>
+                  <a:tcPr marL="91440" marR="91440" marT="45720" marB="45720" anchor="ctr">
+                    <a:lnL w="12700" cap="flat" cmpd="sng" algn="ctr">
+                      <a:solidFill>
+                        <a:srgbClr val="CBD5E0"/>
+                      </a:solidFill>
+                      <a:prstDash val="solid"/>
+                      <a:round/>
+                      <a:headEnd type="none" w="med" len="med"/>
+                      <a:tailEnd type="none" w="med" len="med"/>
+                    </a:lnL>
+                    <a:lnR w="12700" cap="flat" cmpd="sng" algn="ctr">
+                      <a:solidFill>
+                        <a:srgbClr val="CBD5E0"/>
+                      </a:solidFill>
+                      <a:prstDash val="solid"/>
+                      <a:round/>
+                      <a:headEnd type="none" w="med" len="med"/>
+                      <a:tailEnd type="none" w="med" len="med"/>
+                    </a:lnR>
+                    <a:lnT w="12700" cap="flat" cmpd="sng" algn="ctr">
+                      <a:solidFill>
+                        <a:srgbClr val="CBD5E0"/>
+                      </a:solidFill>
+                      <a:prstDash val="solid"/>
+                      <a:round/>
+                      <a:headEnd type="none" w="med" len="med"/>
+                      <a:tailEnd type="none" w="med" len="med"/>
+                    </a:lnT>
+                    <a:lnB w="12700" cap="flat" cmpd="sng" algn="ctr">
+                      <a:solidFill>
+                        <a:srgbClr val="CBD5E0"/>
+                      </a:solidFill>
+                      <a:prstDash val="solid"/>
+                      <a:round/>
+                      <a:headEnd type="none" w="med" len="med"/>
+                      <a:tailEnd type="none" w="med" len="med"/>
+                    </a:lnB>
+                    <a:solidFill>
+                      <a:srgbClr val="FFFFFF"/>
+                    </a:solidFill>
+                  </a:tcPr>
+                </a:tc>
+                <a:tc>
+                  <a:txBody>
+                    <a:bodyPr/>
+                    <a:lstStyle/>
+                    <a:p>
+                      <a:pPr algn="ctr" indent="0" marL="0">
+                        <a:buNone/>
+                      </a:pPr>
+                      <a:endParaRPr lang="en-US" sz="850" dirty="0">
                         <a:latin typeface="맑은 고딕" charset="0"/>
                         <a:ea typeface="맑은 고딕" charset="0"/>
                         <a:cs typeface="맑은 고딕" charset="0"/>
@@ -13115,7 +15608,7 @@
                         <a:buNone/>
                       </a:pPr>
                       <a:r>
-                        <a:rPr lang="en-US" sz="950" dirty="0">
+                        <a:rPr lang="en-US" sz="850" dirty="0">
                           <a:solidFill>
                             <a:srgbClr val="2B2B2B"/>
                           </a:solidFill>
@@ -13125,7 +15618,7 @@
                         </a:rPr>
                         <a:t>5F-1</a:t>
                       </a:r>
-                      <a:endParaRPr lang="en-US" sz="950" dirty="0">
+                      <a:endParaRPr lang="en-US" sz="850" dirty="0">
                         <a:latin typeface="맑은 고딕" charset="0"/>
                         <a:ea typeface="맑은 고딕" charset="0"/>
                         <a:cs typeface="맑은 고딕" charset="0"/>
@@ -13183,7 +15676,7 @@
                         <a:buNone/>
                       </a:pPr>
                       <a:r>
-                        <a:rPr lang="en-US" sz="950" dirty="0">
+                        <a:rPr lang="en-US" sz="850" dirty="0">
                           <a:solidFill>
                             <a:srgbClr val="2B2B2B"/>
                           </a:solidFill>
@@ -13191,9 +15684,9 @@
                           <a:ea typeface="맑은 고딕" pitchFamily="34" charset="-122"/>
                           <a:cs typeface="맑은 고딕" pitchFamily="34" charset="-120"/>
                         </a:rPr>
-                        <a:t>학원</a:t>
+                        <a:t>-</a:t>
                       </a:r>
-                      <a:endParaRPr lang="en-US" sz="950" dirty="0">
+                      <a:endParaRPr lang="en-US" sz="850" dirty="0">
                         <a:latin typeface="맑은 고딕" charset="0"/>
                         <a:ea typeface="맑은 고딕" charset="0"/>
                         <a:cs typeface="맑은 고딕" charset="0"/>
@@ -13251,7 +15744,7 @@
                         <a:buNone/>
                       </a:pPr>
                       <a:r>
-                        <a:rPr lang="en-US" sz="950" dirty="0">
+                        <a:rPr lang="en-US" sz="850" dirty="0">
                           <a:solidFill>
                             <a:srgbClr val="2B2B2B"/>
                           </a:solidFill>
@@ -13259,9 +15752,77 @@
                           <a:ea typeface="맑은 고딕" pitchFamily="34" charset="-122"/>
                           <a:cs typeface="맑은 고딕" pitchFamily="34" charset="-120"/>
                         </a:rPr>
-                        <a:t>41.06평</a:t>
+                        <a:t>학원</a:t>
                       </a:r>
-                      <a:endParaRPr lang="en-US" sz="950" dirty="0">
+                      <a:endParaRPr lang="en-US" sz="850" dirty="0">
+                        <a:latin typeface="맑은 고딕" charset="0"/>
+                        <a:ea typeface="맑은 고딕" charset="0"/>
+                        <a:cs typeface="맑은 고딕" charset="0"/>
+                      </a:endParaRPr>
+                    </a:p>
+                  </a:txBody>
+                  <a:tcPr marL="91440" marR="91440" marT="45720" marB="45720" anchor="ctr">
+                    <a:lnL w="12700" cap="flat" cmpd="sng" algn="ctr">
+                      <a:solidFill>
+                        <a:srgbClr val="CBD5E0"/>
+                      </a:solidFill>
+                      <a:prstDash val="solid"/>
+                      <a:round/>
+                      <a:headEnd type="none" w="med" len="med"/>
+                      <a:tailEnd type="none" w="med" len="med"/>
+                    </a:lnL>
+                    <a:lnR w="12700" cap="flat" cmpd="sng" algn="ctr">
+                      <a:solidFill>
+                        <a:srgbClr val="CBD5E0"/>
+                      </a:solidFill>
+                      <a:prstDash val="solid"/>
+                      <a:round/>
+                      <a:headEnd type="none" w="med" len="med"/>
+                      <a:tailEnd type="none" w="med" len="med"/>
+                    </a:lnR>
+                    <a:lnT w="12700" cap="flat" cmpd="sng" algn="ctr">
+                      <a:solidFill>
+                        <a:srgbClr val="CBD5E0"/>
+                      </a:solidFill>
+                      <a:prstDash val="solid"/>
+                      <a:round/>
+                      <a:headEnd type="none" w="med" len="med"/>
+                      <a:tailEnd type="none" w="med" len="med"/>
+                    </a:lnT>
+                    <a:lnB w="12700" cap="flat" cmpd="sng" algn="ctr">
+                      <a:solidFill>
+                        <a:srgbClr val="CBD5E0"/>
+                      </a:solidFill>
+                      <a:prstDash val="solid"/>
+                      <a:round/>
+                      <a:headEnd type="none" w="med" len="med"/>
+                      <a:tailEnd type="none" w="med" len="med"/>
+                    </a:lnB>
+                    <a:solidFill>
+                      <a:srgbClr val="F3F6F7"/>
+                    </a:solidFill>
+                  </a:tcPr>
+                </a:tc>
+                <a:tc>
+                  <a:txBody>
+                    <a:bodyPr/>
+                    <a:lstStyle/>
+                    <a:p>
+                      <a:pPr algn="ctr" indent="0" marL="0">
+                        <a:buNone/>
+                      </a:pPr>
+                      <a:r>
+                        <a:rPr lang="en-US" sz="850" dirty="0">
+                          <a:solidFill>
+                            <a:srgbClr val="2B2B2B"/>
+                          </a:solidFill>
+                          <a:latin typeface="맑은 고딕" pitchFamily="34" charset="0"/>
+                          <a:ea typeface="맑은 고딕" pitchFamily="34" charset="-122"/>
+                          <a:cs typeface="맑은 고딕" pitchFamily="34" charset="-120"/>
+                        </a:rPr>
+                        <a:t>학원</a:t>
+                      </a:r>
+                      <a:endParaRPr lang="en-US" sz="850" dirty="0">
                         <a:latin typeface="맑은 고딕" charset="0"/>
                         <a:ea typeface="맑은 고딕" charset="0"/>
                         <a:cs typeface="맑은 고딕" charset="0"/>
@@ -13319,7 +15880,7 @@
                         <a:buNone/>
                       </a:pPr>
                       <a:r>
-                        <a:rPr lang="en-US" sz="950" dirty="0">
+                        <a:rPr lang="en-US" sz="850" dirty="0">
                           <a:solidFill>
                             <a:srgbClr val="2B2B2B"/>
                           </a:solidFill>
@@ -13327,9 +15888,9 @@
                           <a:ea typeface="맑은 고딕" pitchFamily="34" charset="-122"/>
                           <a:cs typeface="맑은 고딕" pitchFamily="34" charset="-120"/>
                         </a:rPr>
-                        <a:t>5,000만</a:t>
+                        <a:t>135.7</a:t>
                       </a:r>
-                      <a:endParaRPr lang="en-US" sz="950" dirty="0">
+                      <a:endParaRPr lang="en-US" sz="850" dirty="0">
                         <a:latin typeface="맑은 고딕" charset="0"/>
                         <a:ea typeface="맑은 고딕" charset="0"/>
                         <a:cs typeface="맑은 고딕" charset="0"/>
@@ -13387,7 +15948,7 @@
                         <a:buNone/>
                       </a:pPr>
                       <a:r>
-                        <a:rPr lang="en-US" sz="950" dirty="0">
+                        <a:rPr lang="en-US" sz="850" dirty="0">
                           <a:solidFill>
                             <a:srgbClr val="2B2B2B"/>
                           </a:solidFill>
@@ -13395,9 +15956,145 @@
                           <a:ea typeface="맑은 고딕" pitchFamily="34" charset="-122"/>
                           <a:cs typeface="맑은 고딕" pitchFamily="34" charset="-120"/>
                         </a:rPr>
-                        <a:t>250만</a:t>
+                        <a:t>5,000</a:t>
                       </a:r>
-                      <a:endParaRPr lang="en-US" sz="950" dirty="0">
+                      <a:endParaRPr lang="en-US" sz="850" dirty="0">
+                        <a:latin typeface="맑은 고딕" charset="0"/>
+                        <a:ea typeface="맑은 고딕" charset="0"/>
+                        <a:cs typeface="맑은 고딕" charset="0"/>
+                      </a:endParaRPr>
+                    </a:p>
+                  </a:txBody>
+                  <a:tcPr marL="91440" marR="91440" marT="45720" marB="45720" anchor="ctr">
+                    <a:lnL w="12700" cap="flat" cmpd="sng" algn="ctr">
+                      <a:solidFill>
+                        <a:srgbClr val="CBD5E0"/>
+                      </a:solidFill>
+                      <a:prstDash val="solid"/>
+                      <a:round/>
+                      <a:headEnd type="none" w="med" len="med"/>
+                      <a:tailEnd type="none" w="med" len="med"/>
+                    </a:lnL>
+                    <a:lnR w="12700" cap="flat" cmpd="sng" algn="ctr">
+                      <a:solidFill>
+                        <a:srgbClr val="CBD5E0"/>
+                      </a:solidFill>
+                      <a:prstDash val="solid"/>
+                      <a:round/>
+                      <a:headEnd type="none" w="med" len="med"/>
+                      <a:tailEnd type="none" w="med" len="med"/>
+                    </a:lnR>
+                    <a:lnT w="12700" cap="flat" cmpd="sng" algn="ctr">
+                      <a:solidFill>
+                        <a:srgbClr val="CBD5E0"/>
+                      </a:solidFill>
+                      <a:prstDash val="solid"/>
+                      <a:round/>
+                      <a:headEnd type="none" w="med" len="med"/>
+                      <a:tailEnd type="none" w="med" len="med"/>
+                    </a:lnT>
+                    <a:lnB w="12700" cap="flat" cmpd="sng" algn="ctr">
+                      <a:solidFill>
+                        <a:srgbClr val="CBD5E0"/>
+                      </a:solidFill>
+                      <a:prstDash val="solid"/>
+                      <a:round/>
+                      <a:headEnd type="none" w="med" len="med"/>
+                      <a:tailEnd type="none" w="med" len="med"/>
+                    </a:lnB>
+                    <a:solidFill>
+                      <a:srgbClr val="F3F6F7"/>
+                    </a:solidFill>
+                  </a:tcPr>
+                </a:tc>
+                <a:tc>
+                  <a:txBody>
+                    <a:bodyPr/>
+                    <a:lstStyle/>
+                    <a:p>
+                      <a:pPr algn="r" indent="0" marL="0">
+                        <a:buNone/>
+                      </a:pPr>
+                      <a:r>
+                        <a:rPr lang="en-US" sz="850" dirty="0">
+                          <a:solidFill>
+                            <a:srgbClr val="2B2B2B"/>
+                          </a:solidFill>
+                          <a:latin typeface="맑은 고딕" pitchFamily="34" charset="0"/>
+                          <a:ea typeface="맑은 고딕" pitchFamily="34" charset="-122"/>
+                          <a:cs typeface="맑은 고딕" pitchFamily="34" charset="-120"/>
+                        </a:rPr>
+                        <a:t>250</a:t>
+                      </a:r>
+                      <a:endParaRPr lang="en-US" sz="850" dirty="0">
+                        <a:latin typeface="맑은 고딕" charset="0"/>
+                        <a:ea typeface="맑은 고딕" charset="0"/>
+                        <a:cs typeface="맑은 고딕" charset="0"/>
+                      </a:endParaRPr>
+                    </a:p>
+                  </a:txBody>
+                  <a:tcPr marL="91440" marR="91440" marT="45720" marB="45720" anchor="ctr">
+                    <a:lnL w="12700" cap="flat" cmpd="sng" algn="ctr">
+                      <a:solidFill>
+                        <a:srgbClr val="CBD5E0"/>
+                      </a:solidFill>
+                      <a:prstDash val="solid"/>
+                      <a:round/>
+                      <a:headEnd type="none" w="med" len="med"/>
+                      <a:tailEnd type="none" w="med" len="med"/>
+                    </a:lnL>
+                    <a:lnR w="12700" cap="flat" cmpd="sng" algn="ctr">
+                      <a:solidFill>
+                        <a:srgbClr val="CBD5E0"/>
+                      </a:solidFill>
+                      <a:prstDash val="solid"/>
+                      <a:round/>
+                      <a:headEnd type="none" w="med" len="med"/>
+                      <a:tailEnd type="none" w="med" len="med"/>
+                    </a:lnR>
+                    <a:lnT w="12700" cap="flat" cmpd="sng" algn="ctr">
+                      <a:solidFill>
+                        <a:srgbClr val="CBD5E0"/>
+                      </a:solidFill>
+                      <a:prstDash val="solid"/>
+                      <a:round/>
+                      <a:headEnd type="none" w="med" len="med"/>
+                      <a:tailEnd type="none" w="med" len="med"/>
+                    </a:lnT>
+                    <a:lnB w="12700" cap="flat" cmpd="sng" algn="ctr">
+                      <a:solidFill>
+                        <a:srgbClr val="CBD5E0"/>
+                      </a:solidFill>
+                      <a:prstDash val="solid"/>
+                      <a:round/>
+                      <a:headEnd type="none" w="med" len="med"/>
+                      <a:tailEnd type="none" w="med" len="med"/>
+                    </a:lnB>
+                    <a:solidFill>
+                      <a:srgbClr val="F3F6F7"/>
+                    </a:solidFill>
+                  </a:tcPr>
+                </a:tc>
+                <a:tc>
+                  <a:txBody>
+                    <a:bodyPr/>
+                    <a:lstStyle/>
+                    <a:p>
+                      <a:pPr algn="r" indent="0" marL="0">
+                        <a:buNone/>
+                      </a:pPr>
+                      <a:r>
+                        <a:rPr lang="en-US" sz="850" dirty="0">
+                          <a:solidFill>
+                            <a:srgbClr val="2B2B2B"/>
+                          </a:solidFill>
+                          <a:latin typeface="맑은 고딕" pitchFamily="34" charset="0"/>
+                          <a:ea typeface="맑은 고딕" pitchFamily="34" charset="-122"/>
+                          <a:cs typeface="맑은 고딕" pitchFamily="34" charset="-120"/>
+                        </a:rPr>
+                        <a:t>12</a:t>
+                      </a:r>
+                      <a:endParaRPr lang="en-US" sz="850" dirty="0">
                         <a:latin typeface="맑은 고딕" charset="0"/>
                         <a:ea typeface="맑은 고딕" charset="0"/>
                         <a:cs typeface="맑은 고딕" charset="0"/>
@@ -13455,7 +16152,7 @@
                         <a:buNone/>
                       </a:pPr>
                       <a:r>
-                        <a:rPr lang="en-US" sz="950" dirty="0">
+                        <a:rPr lang="en-US" sz="850" dirty="0">
                           <a:solidFill>
                             <a:srgbClr val="2B2B2B"/>
                           </a:solidFill>
@@ -13465,7 +16162,64 @@
                         </a:rPr>
                         <a:t>-</a:t>
                       </a:r>
-                      <a:endParaRPr lang="en-US" sz="950" dirty="0">
+                      <a:endParaRPr lang="en-US" sz="850" dirty="0">
+                        <a:latin typeface="맑은 고딕" charset="0"/>
+                        <a:ea typeface="맑은 고딕" charset="0"/>
+                        <a:cs typeface="맑은 고딕" charset="0"/>
+                      </a:endParaRPr>
+                    </a:p>
+                  </a:txBody>
+                  <a:tcPr marL="91440" marR="91440" marT="45720" marB="45720" anchor="ctr">
+                    <a:lnL w="12700" cap="flat" cmpd="sng" algn="ctr">
+                      <a:solidFill>
+                        <a:srgbClr val="CBD5E0"/>
+                      </a:solidFill>
+                      <a:prstDash val="solid"/>
+                      <a:round/>
+                      <a:headEnd type="none" w="med" len="med"/>
+                      <a:tailEnd type="none" w="med" len="med"/>
+                    </a:lnL>
+                    <a:lnR w="12700" cap="flat" cmpd="sng" algn="ctr">
+                      <a:solidFill>
+                        <a:srgbClr val="CBD5E0"/>
+                      </a:solidFill>
+                      <a:prstDash val="solid"/>
+                      <a:round/>
+                      <a:headEnd type="none" w="med" len="med"/>
+                      <a:tailEnd type="none" w="med" len="med"/>
+                    </a:lnR>
+                    <a:lnT w="12700" cap="flat" cmpd="sng" algn="ctr">
+                      <a:solidFill>
+                        <a:srgbClr val="CBD5E0"/>
+                      </a:solidFill>
+                      <a:prstDash val="solid"/>
+                      <a:round/>
+                      <a:headEnd type="none" w="med" len="med"/>
+                      <a:tailEnd type="none" w="med" len="med"/>
+                    </a:lnT>
+                    <a:lnB w="12700" cap="flat" cmpd="sng" algn="ctr">
+                      <a:solidFill>
+                        <a:srgbClr val="CBD5E0"/>
+                      </a:solidFill>
+                      <a:prstDash val="solid"/>
+                      <a:round/>
+                      <a:headEnd type="none" w="med" len="med"/>
+                      <a:tailEnd type="none" w="med" len="med"/>
+                    </a:lnB>
+                    <a:solidFill>
+                      <a:srgbClr val="F3F6F7"/>
+                    </a:solidFill>
+                  </a:tcPr>
+                </a:tc>
+                <a:tc>
+                  <a:txBody>
+                    <a:bodyPr/>
+                    <a:lstStyle/>
+                    <a:p>
+                      <a:pPr algn="ctr" indent="0" marL="0">
+                        <a:buNone/>
+                      </a:pPr>
+                      <a:endParaRPr lang="en-US" sz="850" dirty="0">
                         <a:latin typeface="맑은 고딕" charset="0"/>
                         <a:ea typeface="맑은 고딕" charset="0"/>
                         <a:cs typeface="맑은 고딕" charset="0"/>
@@ -13521,14 +16275,14 @@
       </p:graphicFrame>
       <p:sp>
         <p:nvSpPr>
-          <p:cNvPr id="62" name="Text 59"/>
-          <p:cNvSpPr/>
-          <p:nvPr/>
-        </p:nvSpPr>
-        <p:spPr>
-          <a:xfrm>
-            <a:off x="4773168" y="5257800"/>
-            <a:ext cx="6858000" cy="182880"/>
+          <p:cNvPr id="55" name="Text 52"/>
+          <p:cNvSpPr/>
+          <p:nvPr/>
+        </p:nvSpPr>
+        <p:spPr>
+          <a:xfrm>
+            <a:off x="3749040" y="5257800"/>
+            <a:ext cx="6805879" cy="182880"/>
           </a:xfrm>
           <a:prstGeom prst="rect">
             <a:avLst/>
@@ -13560,7 +16314,7 @@
       </p:sp>
       <p:sp>
         <p:nvSpPr>
-          <p:cNvPr id="63" name="Text 60"/>
+          <p:cNvPr id="56" name="Text 53"/>
           <p:cNvSpPr/>
           <p:nvPr/>
         </p:nvSpPr>
@@ -13591,7 +16345,7 @@
                 <a:ea typeface="맑은 고딕" pitchFamily="34" charset="-122"/>
                 <a:cs typeface="맑은 고딕" pitchFamily="34" charset="-120"/>
               </a:rPr>
-              <a:t>CRE DEAL   |   </a:t>
+              <a:t>CRE DEAL</a:t>
             </a:r>
             <a:endParaRPr lang="en-US" sz="800" dirty="0"/>
           </a:p>
@@ -13599,7 +16353,7 @@
       </p:sp>
       <p:sp>
         <p:nvSpPr>
-          <p:cNvPr id="64" name="Text 61"/>
+          <p:cNvPr id="57" name="Text 54"/>
           <p:cNvSpPr/>
           <p:nvPr/>
         </p:nvSpPr>
@@ -14480,7 +17234,7 @@
                 <a:ea typeface="맑은 고딕" pitchFamily="34" charset="-122"/>
                 <a:cs typeface="맑은 고딕" pitchFamily="34" charset="-120"/>
               </a:rPr>
-              <a:t>CRE DEAL   |   </a:t>
+              <a:t>CRE DEAL</a:t>
             </a:r>
             <a:endParaRPr lang="en-US" sz="800" dirty="0"/>
           </a:p>
@@ -16166,7 +18920,7 @@
                 <a:ea typeface="맑은 고딕" pitchFamily="34" charset="-122"/>
                 <a:cs typeface="맑은 고딕" pitchFamily="34" charset="-120"/>
               </a:rPr>
-              <a:t>CRE DEAL   |   </a:t>
+              <a:t>CRE DEAL</a:t>
             </a:r>
             <a:endParaRPr lang="en-US" sz="800" dirty="0"/>
           </a:p>

--- a/docs/test/golden-outputs/p4-jamwon-r3/jamwon_dev_r3_basic.pptx
+++ b/docs/test/golden-outputs/p4-jamwon-r3/jamwon_dev_r3_basic.pptx
@@ -2110,7 +2110,7 @@
                 <a:ea typeface="맑은 고딕" pitchFamily="34" charset="-122"/>
                 <a:cs typeface="맑은 고딕" pitchFamily="34" charset="-120"/>
               </a:rPr>
-              <a:t>2026.09.22  |  담당자  |  CREDEAL</a:t>
+              <a:t>2026.09.23  |  담당자  |  CREDEAL</a:t>
             </a:r>
             <a:endParaRPr lang="en-US" sz="900" dirty="0"/>
           </a:p>

--- a/docs/test/golden-outputs/p4-jamwon-r3/jamwon_dev_r3_basic.pptx
+++ b/docs/test/golden-outputs/p4-jamwon-r3/jamwon_dev_r3_basic.pptx
@@ -2110,7 +2110,7 @@
                 <a:ea typeface="맑은 고딕" pitchFamily="34" charset="-122"/>
                 <a:cs typeface="맑은 고딕" pitchFamily="34" charset="-120"/>
               </a:rPr>
-              <a:t>2026.09.23  |  담당자  |  CREDEAL</a:t>
+              <a:t>2026.09.24  |  담당자  |  CREDEAL</a:t>
             </a:r>
             <a:endParaRPr lang="en-US" sz="900" dirty="0"/>
           </a:p>
@@ -8889,8 +8889,7 @@
                 <a:gridCol w="749808"/>
                 <a:gridCol w="658368"/>
                 <a:gridCol w="658368"/>
-                <a:gridCol w="658368"/>
-                <a:gridCol w="502920"/>
+                <a:gridCol w="1161288"/>
               </a:tblGrid>
               <a:tr h="320040">
                 <a:tc>
@@ -9274,67 +9273,6 @@
                           </a:solidFill>
                         </a:rPr>
                         <a:t>월세(만원)</a:t>
-                      </a:r>
-                      <a:endParaRPr lang="en-US" sz="1000" dirty="0"/>
-                    </a:p>
-                  </a:txBody>
-                  <a:tcPr marL="91440" marR="91440" marT="45720" marB="45720" anchor="ctr">
-                    <a:lnL w="12700" cap="flat" cmpd="sng" algn="ctr">
-                      <a:solidFill>
-                        <a:srgbClr val="CBD5E0"/>
-                      </a:solidFill>
-                      <a:prstDash val="solid"/>
-                      <a:round/>
-                      <a:headEnd type="none" w="med" len="med"/>
-                      <a:tailEnd type="none" w="med" len="med"/>
-                    </a:lnL>
-                    <a:lnR w="12700" cap="flat" cmpd="sng" algn="ctr">
-                      <a:solidFill>
-                        <a:srgbClr val="CBD5E0"/>
-                      </a:solidFill>
-                      <a:prstDash val="solid"/>
-                      <a:round/>
-                      <a:headEnd type="none" w="med" len="med"/>
-                      <a:tailEnd type="none" w="med" len="med"/>
-                    </a:lnR>
-                    <a:lnT w="12700" cap="flat" cmpd="sng" algn="ctr">
-                      <a:solidFill>
-                        <a:srgbClr val="CBD5E0"/>
-                      </a:solidFill>
-                      <a:prstDash val="solid"/>
-                      <a:round/>
-                      <a:headEnd type="none" w="med" len="med"/>
-                      <a:tailEnd type="none" w="med" len="med"/>
-                    </a:lnT>
-                    <a:lnB w="12700" cap="flat" cmpd="sng" algn="ctr">
-                      <a:solidFill>
-                        <a:srgbClr val="CBD5E0"/>
-                      </a:solidFill>
-                      <a:prstDash val="solid"/>
-                      <a:round/>
-                      <a:headEnd type="none" w="med" len="med"/>
-                      <a:tailEnd type="none" w="med" len="med"/>
-                    </a:lnB>
-                    <a:solidFill>
-                      <a:srgbClr val="132A3A"/>
-                    </a:solidFill>
-                  </a:tcPr>
-                </a:tc>
-                <a:tc>
-                  <a:txBody>
-                    <a:bodyPr/>
-                    <a:lstStyle/>
-                    <a:p>
-                      <a:pPr algn="ctr" indent="0" marL="0">
-                        <a:buNone/>
-                      </a:pPr>
-                      <a:r>
-                        <a:rPr lang="en-US" sz="1000" b="1" dirty="0">
-                          <a:solidFill>
-                            <a:srgbClr val="FFFFFF"/>
-                          </a:solidFill>
-                        </a:rPr>
-                        <a:t>관리비(만원)</a:t>
                       </a:r>
                       <a:endParaRPr lang="en-US" sz="1000" dirty="0"/>
                     </a:p>
@@ -9998,74 +9936,6 @@
                           <a:ea typeface="맑은 고딕" pitchFamily="34" charset="-122"/>
                           <a:cs typeface="맑은 고딕" pitchFamily="34" charset="-120"/>
                         </a:rPr>
-                        <a:t>29</a:t>
-                      </a:r>
-                      <a:endParaRPr lang="en-US" sz="850" dirty="0">
-                        <a:latin typeface="맑은 고딕" charset="0"/>
-                        <a:ea typeface="맑은 고딕" charset="0"/>
-                        <a:cs typeface="맑은 고딕" charset="0"/>
-                      </a:endParaRPr>
-                    </a:p>
-                  </a:txBody>
-                  <a:tcPr marL="91440" marR="91440" marT="45720" marB="45720" anchor="ctr">
-                    <a:lnL w="12700" cap="flat" cmpd="sng" algn="ctr">
-                      <a:solidFill>
-                        <a:srgbClr val="CBD5E0"/>
-                      </a:solidFill>
-                      <a:prstDash val="solid"/>
-                      <a:round/>
-                      <a:headEnd type="none" w="med" len="med"/>
-                      <a:tailEnd type="none" w="med" len="med"/>
-                    </a:lnL>
-                    <a:lnR w="12700" cap="flat" cmpd="sng" algn="ctr">
-                      <a:solidFill>
-                        <a:srgbClr val="CBD5E0"/>
-                      </a:solidFill>
-                      <a:prstDash val="solid"/>
-                      <a:round/>
-                      <a:headEnd type="none" w="med" len="med"/>
-                      <a:tailEnd type="none" w="med" len="med"/>
-                    </a:lnR>
-                    <a:lnT w="12700" cap="flat" cmpd="sng" algn="ctr">
-                      <a:solidFill>
-                        <a:srgbClr val="CBD5E0"/>
-                      </a:solidFill>
-                      <a:prstDash val="solid"/>
-                      <a:round/>
-                      <a:headEnd type="none" w="med" len="med"/>
-                      <a:tailEnd type="none" w="med" len="med"/>
-                    </a:lnT>
-                    <a:lnB w="12700" cap="flat" cmpd="sng" algn="ctr">
-                      <a:solidFill>
-                        <a:srgbClr val="CBD5E0"/>
-                      </a:solidFill>
-                      <a:prstDash val="solid"/>
-                      <a:round/>
-                      <a:headEnd type="none" w="med" len="med"/>
-                      <a:tailEnd type="none" w="med" len="med"/>
-                    </a:lnB>
-                    <a:solidFill>
-                      <a:srgbClr val="FFFFFF"/>
-                    </a:solidFill>
-                  </a:tcPr>
-                </a:tc>
-                <a:tc>
-                  <a:txBody>
-                    <a:bodyPr/>
-                    <a:lstStyle/>
-                    <a:p>
-                      <a:pPr algn="ctr" indent="0" marL="0">
-                        <a:buNone/>
-                      </a:pPr>
-                      <a:r>
-                        <a:rPr lang="en-US" sz="850" dirty="0">
-                          <a:solidFill>
-                            <a:srgbClr val="2B2B2B"/>
-                          </a:solidFill>
-                          <a:latin typeface="맑은 고딕" pitchFamily="34" charset="0"/>
-                          <a:ea typeface="맑은 고딕" pitchFamily="34" charset="-122"/>
-                          <a:cs typeface="맑은 고딕" pitchFamily="34" charset="-120"/>
-                        </a:rPr>
                         <a:t>2027-03-31</a:t>
                       </a:r>
                       <a:endParaRPr lang="en-US" sz="850" dirty="0">
@@ -10136,6 +10006,63 @@
                         </a:rPr>
                         <a:t>협의 중</a:t>
                       </a:r>
+                      <a:endParaRPr lang="en-US" sz="850" dirty="0">
+                        <a:latin typeface="맑은 고딕" charset="0"/>
+                        <a:ea typeface="맑은 고딕" charset="0"/>
+                        <a:cs typeface="맑은 고딕" charset="0"/>
+                      </a:endParaRPr>
+                    </a:p>
+                  </a:txBody>
+                  <a:tcPr marL="91440" marR="91440" marT="45720" marB="45720" anchor="ctr">
+                    <a:lnL w="12700" cap="flat" cmpd="sng" algn="ctr">
+                      <a:solidFill>
+                        <a:srgbClr val="CBD5E0"/>
+                      </a:solidFill>
+                      <a:prstDash val="solid"/>
+                      <a:round/>
+                      <a:headEnd type="none" w="med" len="med"/>
+                      <a:tailEnd type="none" w="med" len="med"/>
+                    </a:lnL>
+                    <a:lnR w="12700" cap="flat" cmpd="sng" algn="ctr">
+                      <a:solidFill>
+                        <a:srgbClr val="CBD5E0"/>
+                      </a:solidFill>
+                      <a:prstDash val="solid"/>
+                      <a:round/>
+                      <a:headEnd type="none" w="med" len="med"/>
+                      <a:tailEnd type="none" w="med" len="med"/>
+                    </a:lnR>
+                    <a:lnT w="12700" cap="flat" cmpd="sng" algn="ctr">
+                      <a:solidFill>
+                        <a:srgbClr val="CBD5E0"/>
+                      </a:solidFill>
+                      <a:prstDash val="solid"/>
+                      <a:round/>
+                      <a:headEnd type="none" w="med" len="med"/>
+                      <a:tailEnd type="none" w="med" len="med"/>
+                    </a:lnT>
+                    <a:lnB w="12700" cap="flat" cmpd="sng" algn="ctr">
+                      <a:solidFill>
+                        <a:srgbClr val="CBD5E0"/>
+                      </a:solidFill>
+                      <a:prstDash val="solid"/>
+                      <a:round/>
+                      <a:headEnd type="none" w="med" len="med"/>
+                      <a:tailEnd type="none" w="med" len="med"/>
+                    </a:lnB>
+                    <a:solidFill>
+                      <a:srgbClr val="FFFFFF"/>
+                    </a:solidFill>
+                  </a:tcPr>
+                </a:tc>
+                <a:tc>
+                  <a:txBody>
+                    <a:bodyPr/>
+                    <a:lstStyle/>
+                    <a:p>
+                      <a:pPr algn="ctr" indent="0" marL="0">
+                        <a:buNone/>
+                      </a:pPr>
                       <a:endParaRPr lang="en-US" sz="850" dirty="0">
                         <a:latin typeface="맑은 고딕" charset="0"/>
                         <a:ea typeface="맑은 고딕" charset="0"/>
@@ -10680,74 +10607,6 @@
                           <a:ea typeface="맑은 고딕" pitchFamily="34" charset="-122"/>
                           <a:cs typeface="맑은 고딕" pitchFamily="34" charset="-120"/>
                         </a:rPr>
-                        <a:t>13</a:t>
-                      </a:r>
-                      <a:endParaRPr lang="en-US" sz="850" dirty="0">
-                        <a:latin typeface="맑은 고딕" charset="0"/>
-                        <a:ea typeface="맑은 고딕" charset="0"/>
-                        <a:cs typeface="맑은 고딕" charset="0"/>
-                      </a:endParaRPr>
-                    </a:p>
-                  </a:txBody>
-                  <a:tcPr marL="91440" marR="91440" marT="45720" marB="45720" anchor="ctr">
-                    <a:lnL w="12700" cap="flat" cmpd="sng" algn="ctr">
-                      <a:solidFill>
-                        <a:srgbClr val="CBD5E0"/>
-                      </a:solidFill>
-                      <a:prstDash val="solid"/>
-                      <a:round/>
-                      <a:headEnd type="none" w="med" len="med"/>
-                      <a:tailEnd type="none" w="med" len="med"/>
-                    </a:lnL>
-                    <a:lnR w="12700" cap="flat" cmpd="sng" algn="ctr">
-                      <a:solidFill>
-                        <a:srgbClr val="CBD5E0"/>
-                      </a:solidFill>
-                      <a:prstDash val="solid"/>
-                      <a:round/>
-                      <a:headEnd type="none" w="med" len="med"/>
-                      <a:tailEnd type="none" w="med" len="med"/>
-                    </a:lnR>
-                    <a:lnT w="12700" cap="flat" cmpd="sng" algn="ctr">
-                      <a:solidFill>
-                        <a:srgbClr val="CBD5E0"/>
-                      </a:solidFill>
-                      <a:prstDash val="solid"/>
-                      <a:round/>
-                      <a:headEnd type="none" w="med" len="med"/>
-                      <a:tailEnd type="none" w="med" len="med"/>
-                    </a:lnT>
-                    <a:lnB w="12700" cap="flat" cmpd="sng" algn="ctr">
-                      <a:solidFill>
-                        <a:srgbClr val="CBD5E0"/>
-                      </a:solidFill>
-                      <a:prstDash val="solid"/>
-                      <a:round/>
-                      <a:headEnd type="none" w="med" len="med"/>
-                      <a:tailEnd type="none" w="med" len="med"/>
-                    </a:lnB>
-                    <a:solidFill>
-                      <a:srgbClr val="F3F6F7"/>
-                    </a:solidFill>
-                  </a:tcPr>
-                </a:tc>
-                <a:tc>
-                  <a:txBody>
-                    <a:bodyPr/>
-                    <a:lstStyle/>
-                    <a:p>
-                      <a:pPr algn="ctr" indent="0" marL="0">
-                        <a:buNone/>
-                      </a:pPr>
-                      <a:r>
-                        <a:rPr lang="en-US" sz="850" dirty="0">
-                          <a:solidFill>
-                            <a:srgbClr val="2B2B2B"/>
-                          </a:solidFill>
-                          <a:latin typeface="맑은 고딕" pitchFamily="34" charset="0"/>
-                          <a:ea typeface="맑은 고딕" pitchFamily="34" charset="-122"/>
-                          <a:cs typeface="맑은 고딕" pitchFamily="34" charset="-120"/>
-                        </a:rPr>
                         <a:t>2026-12-31</a:t>
                       </a:r>
                       <a:endParaRPr lang="en-US" sz="850" dirty="0">
@@ -10818,6 +10677,63 @@
                         </a:rPr>
                         <a:t>합의 완료</a:t>
                       </a:r>
+                      <a:endParaRPr lang="en-US" sz="850" dirty="0">
+                        <a:latin typeface="맑은 고딕" charset="0"/>
+                        <a:ea typeface="맑은 고딕" charset="0"/>
+                        <a:cs typeface="맑은 고딕" charset="0"/>
+                      </a:endParaRPr>
+                    </a:p>
+                  </a:txBody>
+                  <a:tcPr marL="91440" marR="91440" marT="45720" marB="45720" anchor="ctr">
+                    <a:lnL w="12700" cap="flat" cmpd="sng" algn="ctr">
+                      <a:solidFill>
+                        <a:srgbClr val="CBD5E0"/>
+                      </a:solidFill>
+                      <a:prstDash val="solid"/>
+                      <a:round/>
+                      <a:headEnd type="none" w="med" len="med"/>
+                      <a:tailEnd type="none" w="med" len="med"/>
+                    </a:lnL>
+                    <a:lnR w="12700" cap="flat" cmpd="sng" algn="ctr">
+                      <a:solidFill>
+                        <a:srgbClr val="CBD5E0"/>
+                      </a:solidFill>
+                      <a:prstDash val="solid"/>
+                      <a:round/>
+                      <a:headEnd type="none" w="med" len="med"/>
+                      <a:tailEnd type="none" w="med" len="med"/>
+                    </a:lnR>
+                    <a:lnT w="12700" cap="flat" cmpd="sng" algn="ctr">
+                      <a:solidFill>
+                        <a:srgbClr val="CBD5E0"/>
+                      </a:solidFill>
+                      <a:prstDash val="solid"/>
+                      <a:round/>
+                      <a:headEnd type="none" w="med" len="med"/>
+                      <a:tailEnd type="none" w="med" len="med"/>
+                    </a:lnT>
+                    <a:lnB w="12700" cap="flat" cmpd="sng" algn="ctr">
+                      <a:solidFill>
+                        <a:srgbClr val="CBD5E0"/>
+                      </a:solidFill>
+                      <a:prstDash val="solid"/>
+                      <a:round/>
+                      <a:headEnd type="none" w="med" len="med"/>
+                      <a:tailEnd type="none" w="med" len="med"/>
+                    </a:lnB>
+                    <a:solidFill>
+                      <a:srgbClr val="F3F6F7"/>
+                    </a:solidFill>
+                  </a:tcPr>
+                </a:tc>
+                <a:tc>
+                  <a:txBody>
+                    <a:bodyPr/>
+                    <a:lstStyle/>
+                    <a:p>
+                      <a:pPr algn="ctr" indent="0" marL="0">
+                        <a:buNone/>
+                      </a:pPr>
                       <a:endParaRPr lang="en-US" sz="850" dirty="0">
                         <a:latin typeface="맑은 고딕" charset="0"/>
                         <a:ea typeface="맑은 고딕" charset="0"/>
@@ -11362,74 +11278,6 @@
                           <a:ea typeface="맑은 고딕" pitchFamily="34" charset="-122"/>
                           <a:cs typeface="맑은 고딕" pitchFamily="34" charset="-120"/>
                         </a:rPr>
-                        <a:t>10</a:t>
-                      </a:r>
-                      <a:endParaRPr lang="en-US" sz="850" dirty="0">
-                        <a:latin typeface="맑은 고딕" charset="0"/>
-                        <a:ea typeface="맑은 고딕" charset="0"/>
-                        <a:cs typeface="맑은 고딕" charset="0"/>
-                      </a:endParaRPr>
-                    </a:p>
-                  </a:txBody>
-                  <a:tcPr marL="91440" marR="91440" marT="45720" marB="45720" anchor="ctr">
-                    <a:lnL w="12700" cap="flat" cmpd="sng" algn="ctr">
-                      <a:solidFill>
-                        <a:srgbClr val="CBD5E0"/>
-                      </a:solidFill>
-                      <a:prstDash val="solid"/>
-                      <a:round/>
-                      <a:headEnd type="none" w="med" len="med"/>
-                      <a:tailEnd type="none" w="med" len="med"/>
-                    </a:lnL>
-                    <a:lnR w="12700" cap="flat" cmpd="sng" algn="ctr">
-                      <a:solidFill>
-                        <a:srgbClr val="CBD5E0"/>
-                      </a:solidFill>
-                      <a:prstDash val="solid"/>
-                      <a:round/>
-                      <a:headEnd type="none" w="med" len="med"/>
-                      <a:tailEnd type="none" w="med" len="med"/>
-                    </a:lnR>
-                    <a:lnT w="12700" cap="flat" cmpd="sng" algn="ctr">
-                      <a:solidFill>
-                        <a:srgbClr val="CBD5E0"/>
-                      </a:solidFill>
-                      <a:prstDash val="solid"/>
-                      <a:round/>
-                      <a:headEnd type="none" w="med" len="med"/>
-                      <a:tailEnd type="none" w="med" len="med"/>
-                    </a:lnT>
-                    <a:lnB w="12700" cap="flat" cmpd="sng" algn="ctr">
-                      <a:solidFill>
-                        <a:srgbClr val="CBD5E0"/>
-                      </a:solidFill>
-                      <a:prstDash val="solid"/>
-                      <a:round/>
-                      <a:headEnd type="none" w="med" len="med"/>
-                      <a:tailEnd type="none" w="med" len="med"/>
-                    </a:lnB>
-                    <a:solidFill>
-                      <a:srgbClr val="FFFFFF"/>
-                    </a:solidFill>
-                  </a:tcPr>
-                </a:tc>
-                <a:tc>
-                  <a:txBody>
-                    <a:bodyPr/>
-                    <a:lstStyle/>
-                    <a:p>
-                      <a:pPr algn="ctr" indent="0" marL="0">
-                        <a:buNone/>
-                      </a:pPr>
-                      <a:r>
-                        <a:rPr lang="en-US" sz="850" dirty="0">
-                          <a:solidFill>
-                            <a:srgbClr val="2B2B2B"/>
-                          </a:solidFill>
-                          <a:latin typeface="맑은 고딕" pitchFamily="34" charset="0"/>
-                          <a:ea typeface="맑은 고딕" pitchFamily="34" charset="-122"/>
-                          <a:cs typeface="맑은 고딕" pitchFamily="34" charset="-120"/>
-                        </a:rPr>
                         <a:t>2027-09-30</a:t>
                       </a:r>
                       <a:endParaRPr lang="en-US" sz="850" dirty="0">
@@ -11500,6 +11348,63 @@
                         </a:rPr>
                         <a:t>미협의</a:t>
                       </a:r>
+                      <a:endParaRPr lang="en-US" sz="850" dirty="0">
+                        <a:latin typeface="맑은 고딕" charset="0"/>
+                        <a:ea typeface="맑은 고딕" charset="0"/>
+                        <a:cs typeface="맑은 고딕" charset="0"/>
+                      </a:endParaRPr>
+                    </a:p>
+                  </a:txBody>
+                  <a:tcPr marL="91440" marR="91440" marT="45720" marB="45720" anchor="ctr">
+                    <a:lnL w="12700" cap="flat" cmpd="sng" algn="ctr">
+                      <a:solidFill>
+                        <a:srgbClr val="CBD5E0"/>
+                      </a:solidFill>
+                      <a:prstDash val="solid"/>
+                      <a:round/>
+                      <a:headEnd type="none" w="med" len="med"/>
+                      <a:tailEnd type="none" w="med" len="med"/>
+                    </a:lnL>
+                    <a:lnR w="12700" cap="flat" cmpd="sng" algn="ctr">
+                      <a:solidFill>
+                        <a:srgbClr val="CBD5E0"/>
+                      </a:solidFill>
+                      <a:prstDash val="solid"/>
+                      <a:round/>
+                      <a:headEnd type="none" w="med" len="med"/>
+                      <a:tailEnd type="none" w="med" len="med"/>
+                    </a:lnR>
+                    <a:lnT w="12700" cap="flat" cmpd="sng" algn="ctr">
+                      <a:solidFill>
+                        <a:srgbClr val="CBD5E0"/>
+                      </a:solidFill>
+                      <a:prstDash val="solid"/>
+                      <a:round/>
+                      <a:headEnd type="none" w="med" len="med"/>
+                      <a:tailEnd type="none" w="med" len="med"/>
+                    </a:lnT>
+                    <a:lnB w="12700" cap="flat" cmpd="sng" algn="ctr">
+                      <a:solidFill>
+                        <a:srgbClr val="CBD5E0"/>
+                      </a:solidFill>
+                      <a:prstDash val="solid"/>
+                      <a:round/>
+                      <a:headEnd type="none" w="med" len="med"/>
+                      <a:tailEnd type="none" w="med" len="med"/>
+                    </a:lnB>
+                    <a:solidFill>
+                      <a:srgbClr val="FFFFFF"/>
+                    </a:solidFill>
+                  </a:tcPr>
+                </a:tc>
+                <a:tc>
+                  <a:txBody>
+                    <a:bodyPr/>
+                    <a:lstStyle/>
+                    <a:p>
+                      <a:pPr algn="ctr" indent="0" marL="0">
+                        <a:buNone/>
+                      </a:pPr>
                       <a:endParaRPr lang="en-US" sz="850" dirty="0">
                         <a:latin typeface="맑은 고딕" charset="0"/>
                         <a:ea typeface="맑은 고딕" charset="0"/>
@@ -12044,74 +11949,6 @@
                           <a:ea typeface="맑은 고딕" pitchFamily="34" charset="-122"/>
                           <a:cs typeface="맑은 고딕" pitchFamily="34" charset="-120"/>
                         </a:rPr>
-                        <a:t>8</a:t>
-                      </a:r>
-                      <a:endParaRPr lang="en-US" sz="850" dirty="0">
-                        <a:latin typeface="맑은 고딕" charset="0"/>
-                        <a:ea typeface="맑은 고딕" charset="0"/>
-                        <a:cs typeface="맑은 고딕" charset="0"/>
-                      </a:endParaRPr>
-                    </a:p>
-                  </a:txBody>
-                  <a:tcPr marL="91440" marR="91440" marT="45720" marB="45720" anchor="ctr">
-                    <a:lnL w="12700" cap="flat" cmpd="sng" algn="ctr">
-                      <a:solidFill>
-                        <a:srgbClr val="CBD5E0"/>
-                      </a:solidFill>
-                      <a:prstDash val="solid"/>
-                      <a:round/>
-                      <a:headEnd type="none" w="med" len="med"/>
-                      <a:tailEnd type="none" w="med" len="med"/>
-                    </a:lnL>
-                    <a:lnR w="12700" cap="flat" cmpd="sng" algn="ctr">
-                      <a:solidFill>
-                        <a:srgbClr val="CBD5E0"/>
-                      </a:solidFill>
-                      <a:prstDash val="solid"/>
-                      <a:round/>
-                      <a:headEnd type="none" w="med" len="med"/>
-                      <a:tailEnd type="none" w="med" len="med"/>
-                    </a:lnR>
-                    <a:lnT w="12700" cap="flat" cmpd="sng" algn="ctr">
-                      <a:solidFill>
-                        <a:srgbClr val="CBD5E0"/>
-                      </a:solidFill>
-                      <a:prstDash val="solid"/>
-                      <a:round/>
-                      <a:headEnd type="none" w="med" len="med"/>
-                      <a:tailEnd type="none" w="med" len="med"/>
-                    </a:lnT>
-                    <a:lnB w="12700" cap="flat" cmpd="sng" algn="ctr">
-                      <a:solidFill>
-                        <a:srgbClr val="CBD5E0"/>
-                      </a:solidFill>
-                      <a:prstDash val="solid"/>
-                      <a:round/>
-                      <a:headEnd type="none" w="med" len="med"/>
-                      <a:tailEnd type="none" w="med" len="med"/>
-                    </a:lnB>
-                    <a:solidFill>
-                      <a:srgbClr val="F3F6F7"/>
-                    </a:solidFill>
-                  </a:tcPr>
-                </a:tc>
-                <a:tc>
-                  <a:txBody>
-                    <a:bodyPr/>
-                    <a:lstStyle/>
-                    <a:p>
-                      <a:pPr algn="ctr" indent="0" marL="0">
-                        <a:buNone/>
-                      </a:pPr>
-                      <a:r>
-                        <a:rPr lang="en-US" sz="850" dirty="0">
-                          <a:solidFill>
-                            <a:srgbClr val="2B2B2B"/>
-                          </a:solidFill>
-                          <a:latin typeface="맑은 고딕" pitchFamily="34" charset="0"/>
-                          <a:ea typeface="맑은 고딕" pitchFamily="34" charset="-122"/>
-                          <a:cs typeface="맑은 고딕" pitchFamily="34" charset="-120"/>
-                        </a:rPr>
                         <a:t>2026-12-31</a:t>
                       </a:r>
                       <a:endParaRPr lang="en-US" sz="850" dirty="0">
@@ -12182,6 +12019,63 @@
                         </a:rPr>
                         <a:t>합의 완료</a:t>
                       </a:r>
+                      <a:endParaRPr lang="en-US" sz="850" dirty="0">
+                        <a:latin typeface="맑은 고딕" charset="0"/>
+                        <a:ea typeface="맑은 고딕" charset="0"/>
+                        <a:cs typeface="맑은 고딕" charset="0"/>
+                      </a:endParaRPr>
+                    </a:p>
+                  </a:txBody>
+                  <a:tcPr marL="91440" marR="91440" marT="45720" marB="45720" anchor="ctr">
+                    <a:lnL w="12700" cap="flat" cmpd="sng" algn="ctr">
+                      <a:solidFill>
+                        <a:srgbClr val="CBD5E0"/>
+                      </a:solidFill>
+                      <a:prstDash val="solid"/>
+                      <a:round/>
+                      <a:headEnd type="none" w="med" len="med"/>
+                      <a:tailEnd type="none" w="med" len="med"/>
+                    </a:lnL>
+                    <a:lnR w="12700" cap="flat" cmpd="sng" algn="ctr">
+                      <a:solidFill>
+                        <a:srgbClr val="CBD5E0"/>
+                      </a:solidFill>
+                      <a:prstDash val="solid"/>
+                      <a:round/>
+                      <a:headEnd type="none" w="med" len="med"/>
+                      <a:tailEnd type="none" w="med" len="med"/>
+                    </a:lnR>
+                    <a:lnT w="12700" cap="flat" cmpd="sng" algn="ctr">
+                      <a:solidFill>
+                        <a:srgbClr val="CBD5E0"/>
+                      </a:solidFill>
+                      <a:prstDash val="solid"/>
+                      <a:round/>
+                      <a:headEnd type="none" w="med" len="med"/>
+                      <a:tailEnd type="none" w="med" len="med"/>
+                    </a:lnT>
+                    <a:lnB w="12700" cap="flat" cmpd="sng" algn="ctr">
+                      <a:solidFill>
+                        <a:srgbClr val="CBD5E0"/>
+                      </a:solidFill>
+                      <a:prstDash val="solid"/>
+                      <a:round/>
+                      <a:headEnd type="none" w="med" len="med"/>
+                      <a:tailEnd type="none" w="med" len="med"/>
+                    </a:lnB>
+                    <a:solidFill>
+                      <a:srgbClr val="F3F6F7"/>
+                    </a:solidFill>
+                  </a:tcPr>
+                </a:tc>
+                <a:tc>
+                  <a:txBody>
+                    <a:bodyPr/>
+                    <a:lstStyle/>
+                    <a:p>
+                      <a:pPr algn="ctr" indent="0" marL="0">
+                        <a:buNone/>
+                      </a:pPr>
                       <a:endParaRPr lang="en-US" sz="850" dirty="0">
                         <a:latin typeface="맑은 고딕" charset="0"/>
                         <a:ea typeface="맑은 고딕" charset="0"/>
@@ -12726,74 +12620,6 @@
                           <a:ea typeface="맑은 고딕" pitchFamily="34" charset="-122"/>
                           <a:cs typeface="맑은 고딕" pitchFamily="34" charset="-120"/>
                         </a:rPr>
-                        <a:t>3</a:t>
-                      </a:r>
-                      <a:endParaRPr lang="en-US" sz="850" dirty="0">
-                        <a:latin typeface="맑은 고딕" charset="0"/>
-                        <a:ea typeface="맑은 고딕" charset="0"/>
-                        <a:cs typeface="맑은 고딕" charset="0"/>
-                      </a:endParaRPr>
-                    </a:p>
-                  </a:txBody>
-                  <a:tcPr marL="91440" marR="91440" marT="45720" marB="45720" anchor="ctr">
-                    <a:lnL w="12700" cap="flat" cmpd="sng" algn="ctr">
-                      <a:solidFill>
-                        <a:srgbClr val="CBD5E0"/>
-                      </a:solidFill>
-                      <a:prstDash val="solid"/>
-                      <a:round/>
-                      <a:headEnd type="none" w="med" len="med"/>
-                      <a:tailEnd type="none" w="med" len="med"/>
-                    </a:lnL>
-                    <a:lnR w="12700" cap="flat" cmpd="sng" algn="ctr">
-                      <a:solidFill>
-                        <a:srgbClr val="CBD5E0"/>
-                      </a:solidFill>
-                      <a:prstDash val="solid"/>
-                      <a:round/>
-                      <a:headEnd type="none" w="med" len="med"/>
-                      <a:tailEnd type="none" w="med" len="med"/>
-                    </a:lnR>
-                    <a:lnT w="12700" cap="flat" cmpd="sng" algn="ctr">
-                      <a:solidFill>
-                        <a:srgbClr val="CBD5E0"/>
-                      </a:solidFill>
-                      <a:prstDash val="solid"/>
-                      <a:round/>
-                      <a:headEnd type="none" w="med" len="med"/>
-                      <a:tailEnd type="none" w="med" len="med"/>
-                    </a:lnT>
-                    <a:lnB w="12700" cap="flat" cmpd="sng" algn="ctr">
-                      <a:solidFill>
-                        <a:srgbClr val="CBD5E0"/>
-                      </a:solidFill>
-                      <a:prstDash val="solid"/>
-                      <a:round/>
-                      <a:headEnd type="none" w="med" len="med"/>
-                      <a:tailEnd type="none" w="med" len="med"/>
-                    </a:lnB>
-                    <a:solidFill>
-                      <a:srgbClr val="FFFFFF"/>
-                    </a:solidFill>
-                  </a:tcPr>
-                </a:tc>
-                <a:tc>
-                  <a:txBody>
-                    <a:bodyPr/>
-                    <a:lstStyle/>
-                    <a:p>
-                      <a:pPr algn="ctr" indent="0" marL="0">
-                        <a:buNone/>
-                      </a:pPr>
-                      <a:r>
-                        <a:rPr lang="en-US" sz="850" dirty="0">
-                          <a:solidFill>
-                            <a:srgbClr val="2B2B2B"/>
-                          </a:solidFill>
-                          <a:latin typeface="맑은 고딕" pitchFamily="34" charset="0"/>
-                          <a:ea typeface="맑은 고딕" pitchFamily="34" charset="-122"/>
-                          <a:cs typeface="맑은 고딕" pitchFamily="34" charset="-120"/>
-                        </a:rPr>
                         <a:t>2025-02-28</a:t>
                       </a:r>
                       <a:endParaRPr lang="en-US" sz="850" dirty="0">
@@ -12864,6 +12690,63 @@
                         </a:rPr>
                         <a:t>만기퇴거</a:t>
                       </a:r>
+                      <a:endParaRPr lang="en-US" sz="850" dirty="0">
+                        <a:latin typeface="맑은 고딕" charset="0"/>
+                        <a:ea typeface="맑은 고딕" charset="0"/>
+                        <a:cs typeface="맑은 고딕" charset="0"/>
+                      </a:endParaRPr>
+                    </a:p>
+                  </a:txBody>
+                  <a:tcPr marL="91440" marR="91440" marT="45720" marB="45720" anchor="ctr">
+                    <a:lnL w="12700" cap="flat" cmpd="sng" algn="ctr">
+                      <a:solidFill>
+                        <a:srgbClr val="CBD5E0"/>
+                      </a:solidFill>
+                      <a:prstDash val="solid"/>
+                      <a:round/>
+                      <a:headEnd type="none" w="med" len="med"/>
+                      <a:tailEnd type="none" w="med" len="med"/>
+                    </a:lnL>
+                    <a:lnR w="12700" cap="flat" cmpd="sng" algn="ctr">
+                      <a:solidFill>
+                        <a:srgbClr val="CBD5E0"/>
+                      </a:solidFill>
+                      <a:prstDash val="solid"/>
+                      <a:round/>
+                      <a:headEnd type="none" w="med" len="med"/>
+                      <a:tailEnd type="none" w="med" len="med"/>
+                    </a:lnR>
+                    <a:lnT w="12700" cap="flat" cmpd="sng" algn="ctr">
+                      <a:solidFill>
+                        <a:srgbClr val="CBD5E0"/>
+                      </a:solidFill>
+                      <a:prstDash val="solid"/>
+                      <a:round/>
+                      <a:headEnd type="none" w="med" len="med"/>
+                      <a:tailEnd type="none" w="med" len="med"/>
+                    </a:lnT>
+                    <a:lnB w="12700" cap="flat" cmpd="sng" algn="ctr">
+                      <a:solidFill>
+                        <a:srgbClr val="CBD5E0"/>
+                      </a:solidFill>
+                      <a:prstDash val="solid"/>
+                      <a:round/>
+                      <a:headEnd type="none" w="med" len="med"/>
+                      <a:tailEnd type="none" w="med" len="med"/>
+                    </a:lnB>
+                    <a:solidFill>
+                      <a:srgbClr val="FFFFFF"/>
+                    </a:solidFill>
+                  </a:tcPr>
+                </a:tc>
+                <a:tc>
+                  <a:txBody>
+                    <a:bodyPr/>
+                    <a:lstStyle/>
+                    <a:p>
+                      <a:pPr algn="ctr" indent="0" marL="0">
+                        <a:buNone/>
+                      </a:pPr>
                       <a:endParaRPr lang="en-US" sz="850" dirty="0">
                         <a:latin typeface="맑은 고딕" charset="0"/>
                         <a:ea typeface="맑은 고딕" charset="0"/>
@@ -13408,7 +13291,7 @@
                           <a:ea typeface="맑은 고딕" pitchFamily="34" charset="-122"/>
                           <a:cs typeface="맑은 고딕" pitchFamily="34" charset="-120"/>
                         </a:rPr>
-                        <a:t>24</a:t>
+                        <a:t>2026-04-30</a:t>
                       </a:r>
                       <a:endParaRPr lang="en-US" sz="850" dirty="0">
                         <a:latin typeface="맑은 고딕" charset="0"/>
@@ -13467,17 +13350,6 @@
                       <a:pPr algn="ctr" indent="0" marL="0">
                         <a:buNone/>
                       </a:pPr>
-                      <a:r>
-                        <a:rPr lang="en-US" sz="850" dirty="0">
-                          <a:solidFill>
-                            <a:srgbClr val="2B2B2B"/>
-                          </a:solidFill>
-                          <a:latin typeface="맑은 고딕" pitchFamily="34" charset="0"/>
-                          <a:ea typeface="맑은 고딕" pitchFamily="34" charset="-122"/>
-                          <a:cs typeface="맑은 고딕" pitchFamily="34" charset="-120"/>
-                        </a:rPr>
-                        <a:t>2026-04-30</a:t>
-                      </a:r>
                       <a:endParaRPr lang="en-US" sz="850" dirty="0">
                         <a:latin typeface="맑은 고딕" charset="0"/>
                         <a:ea typeface="맑은 고딕" charset="0"/>
@@ -14079,7 +13951,7 @@
                           <a:ea typeface="맑은 고딕" pitchFamily="34" charset="-122"/>
                           <a:cs typeface="맑은 고딕" pitchFamily="34" charset="-120"/>
                         </a:rPr>
-                        <a:t>12</a:t>
+                        <a:t>-</a:t>
                       </a:r>
                       <a:endParaRPr lang="en-US" sz="850" dirty="0">
                         <a:latin typeface="맑은 고딕" charset="0"/>
@@ -14138,17 +14010,6 @@
                       <a:pPr algn="ctr" indent="0" marL="0">
                         <a:buNone/>
                       </a:pPr>
-                      <a:r>
-                        <a:rPr lang="en-US" sz="850" dirty="0">
-                          <a:solidFill>
-                            <a:srgbClr val="2B2B2B"/>
-                          </a:solidFill>
-                          <a:latin typeface="맑은 고딕" pitchFamily="34" charset="0"/>
-                          <a:ea typeface="맑은 고딕" pitchFamily="34" charset="-122"/>
-                          <a:cs typeface="맑은 고딕" pitchFamily="34" charset="-120"/>
-                        </a:rPr>
-                        <a:t>-</a:t>
-                      </a:r>
                       <a:endParaRPr lang="en-US" sz="850" dirty="0">
                         <a:latin typeface="맑은 고딕" charset="0"/>
                         <a:ea typeface="맑은 고딕" charset="0"/>
@@ -14750,7 +14611,7 @@
                           <a:ea typeface="맑은 고딕" pitchFamily="34" charset="-122"/>
                           <a:cs typeface="맑은 고딕" pitchFamily="34" charset="-120"/>
                         </a:rPr>
-                        <a:t>12</a:t>
+                        <a:t>-</a:t>
                       </a:r>
                       <a:endParaRPr lang="en-US" sz="850" dirty="0">
                         <a:latin typeface="맑은 고딕" charset="0"/>
@@ -14809,17 +14670,6 @@
                       <a:pPr algn="ctr" indent="0" marL="0">
                         <a:buNone/>
                       </a:pPr>
-                      <a:r>
-                        <a:rPr lang="en-US" sz="850" dirty="0">
-                          <a:solidFill>
-                            <a:srgbClr val="2B2B2B"/>
-                          </a:solidFill>
-                          <a:latin typeface="맑은 고딕" pitchFamily="34" charset="0"/>
-                          <a:ea typeface="맑은 고딕" pitchFamily="34" charset="-122"/>
-                          <a:cs typeface="맑은 고딕" pitchFamily="34" charset="-120"/>
-                        </a:rPr>
-                        <a:t>-</a:t>
-                      </a:r>
                       <a:endParaRPr lang="en-US" sz="850" dirty="0">
                         <a:latin typeface="맑은 고딕" charset="0"/>
                         <a:ea typeface="맑은 고딕" charset="0"/>
@@ -15421,7 +15271,7 @@
                           <a:ea typeface="맑은 고딕" pitchFamily="34" charset="-122"/>
                           <a:cs typeface="맑은 고딕" pitchFamily="34" charset="-120"/>
                         </a:rPr>
-                        <a:t>24</a:t>
+                        <a:t>-</a:t>
                       </a:r>
                       <a:endParaRPr lang="en-US" sz="850" dirty="0">
                         <a:latin typeface="맑은 고딕" charset="0"/>
@@ -15480,17 +15330,6 @@
                       <a:pPr algn="ctr" indent="0" marL="0">
                         <a:buNone/>
                       </a:pPr>
-                      <a:r>
-                        <a:rPr lang="en-US" sz="850" dirty="0">
-                          <a:solidFill>
-                            <a:srgbClr val="2B2B2B"/>
-                          </a:solidFill>
-                          <a:latin typeface="맑은 고딕" pitchFamily="34" charset="0"/>
-                          <a:ea typeface="맑은 고딕" pitchFamily="34" charset="-122"/>
-                          <a:cs typeface="맑은 고딕" pitchFamily="34" charset="-120"/>
-                        </a:rPr>
-                        <a:t>-</a:t>
-                      </a:r>
                       <a:endParaRPr lang="en-US" sz="850" dirty="0">
                         <a:latin typeface="맑은 고딕" charset="0"/>
                         <a:ea typeface="맑은 고딕" charset="0"/>
@@ -16092,7 +15931,7 @@
                           <a:ea typeface="맑은 고딕" pitchFamily="34" charset="-122"/>
                           <a:cs typeface="맑은 고딕" pitchFamily="34" charset="-120"/>
                         </a:rPr>
-                        <a:t>12</a:t>
+                        <a:t>-</a:t>
                       </a:r>
                       <a:endParaRPr lang="en-US" sz="850" dirty="0">
                         <a:latin typeface="맑은 고딕" charset="0"/>
@@ -16151,17 +15990,6 @@
                       <a:pPr algn="ctr" indent="0" marL="0">
                         <a:buNone/>
                       </a:pPr>
-                      <a:r>
-                        <a:rPr lang="en-US" sz="850" dirty="0">
-                          <a:solidFill>
-                            <a:srgbClr val="2B2B2B"/>
-                          </a:solidFill>
-                          <a:latin typeface="맑은 고딕" pitchFamily="34" charset="0"/>
-                          <a:ea typeface="맑은 고딕" pitchFamily="34" charset="-122"/>
-                          <a:cs typeface="맑은 고딕" pitchFamily="34" charset="-120"/>
-                        </a:rPr>
-                        <a:t>-</a:t>
-                      </a:r>
                       <a:endParaRPr lang="en-US" sz="850" dirty="0">
                         <a:latin typeface="맑은 고딕" charset="0"/>
                         <a:ea typeface="맑은 고딕" charset="0"/>

--- a/docs/test/golden-outputs/p4-jamwon-r3/jamwon_dev_r3_basic.pptx
+++ b/docs/test/golden-outputs/p4-jamwon-r3/jamwon_dev_r3_basic.pptx
@@ -2110,7 +2110,7 @@
                 <a:ea typeface="맑은 고딕" pitchFamily="34" charset="-122"/>
                 <a:cs typeface="맑은 고딕" pitchFamily="34" charset="-120"/>
               </a:rPr>
-              <a:t>2026.09.24  |  담당자  |  CREDEAL</a:t>
+              <a:t>2026.09.29  |  담당자  |  CREDEAL</a:t>
             </a:r>
             <a:endParaRPr lang="en-US" sz="900" dirty="0"/>
           </a:p>
@@ -7242,183 +7242,6 @@
             <a:avLst/>
           </a:prstGeom>
           <a:solidFill>
-            <a:srgbClr val="C9A9A6"/>
-          </a:solidFill>
-          <a:ln/>
-        </p:spPr>
-      </p:sp>
-      <p:sp>
-        <p:nvSpPr>
-          <p:cNvPr id="7" name="Text 5"/>
-          <p:cNvSpPr/>
-          <p:nvPr/>
-        </p:nvSpPr>
-        <p:spPr>
-          <a:xfrm>
-            <a:off x="685800" y="1645920"/>
-            <a:ext cx="548640" cy="137160"/>
-          </a:xfrm>
-          <a:prstGeom prst="rect">
-            <a:avLst/>
-          </a:prstGeom>
-          <a:noFill/>
-          <a:ln/>
-        </p:spPr>
-        <p:txBody>
-          <a:bodyPr wrap="square" rtlCol="0" anchor="ctr"/>
-          <a:lstStyle/>
-          <a:p>
-            <a:pPr indent="0" marL="0">
-              <a:buNone/>
-            </a:pPr>
-            <a:r>
-              <a:rPr lang="en-US" sz="900" dirty="0">
-                <a:solidFill>
-                  <a:srgbClr val="5B6B73"/>
-                </a:solidFill>
-                <a:latin typeface="맑은 고딕" pitchFamily="34" charset="0"/>
-                <a:ea typeface="맑은 고딕" pitchFamily="34" charset="-122"/>
-                <a:cs typeface="맑은 고딕" pitchFamily="34" charset="-120"/>
-              </a:rPr>
-              <a:t>2025</a:t>
-            </a:r>
-            <a:endParaRPr lang="en-US" sz="900" dirty="0"/>
-          </a:p>
-        </p:txBody>
-      </p:sp>
-      <p:sp>
-        <p:nvSpPr>
-          <p:cNvPr id="8" name="Shape 6"/>
-          <p:cNvSpPr/>
-          <p:nvPr/>
-        </p:nvSpPr>
-        <p:spPr>
-          <a:xfrm>
-            <a:off x="1234440" y="1645920"/>
-            <a:ext cx="137160" cy="137160"/>
-          </a:xfrm>
-          <a:prstGeom prst="rect">
-            <a:avLst/>
-          </a:prstGeom>
-          <a:solidFill>
-            <a:srgbClr val="93B3A0"/>
-          </a:solidFill>
-          <a:ln/>
-        </p:spPr>
-      </p:sp>
-      <p:sp>
-        <p:nvSpPr>
-          <p:cNvPr id="9" name="Text 7"/>
-          <p:cNvSpPr/>
-          <p:nvPr/>
-        </p:nvSpPr>
-        <p:spPr>
-          <a:xfrm>
-            <a:off x="1417320" y="1645920"/>
-            <a:ext cx="548640" cy="137160"/>
-          </a:xfrm>
-          <a:prstGeom prst="rect">
-            <a:avLst/>
-          </a:prstGeom>
-          <a:noFill/>
-          <a:ln/>
-        </p:spPr>
-        <p:txBody>
-          <a:bodyPr wrap="square" rtlCol="0" anchor="ctr"/>
-          <a:lstStyle/>
-          <a:p>
-            <a:pPr indent="0" marL="0">
-              <a:buNone/>
-            </a:pPr>
-            <a:r>
-              <a:rPr lang="en-US" sz="900" dirty="0">
-                <a:solidFill>
-                  <a:srgbClr val="5B6B73"/>
-                </a:solidFill>
-                <a:latin typeface="맑은 고딕" pitchFamily="34" charset="0"/>
-                <a:ea typeface="맑은 고딕" pitchFamily="34" charset="-122"/>
-                <a:cs typeface="맑은 고딕" pitchFamily="34" charset="-120"/>
-              </a:rPr>
-              <a:t>2026</a:t>
-            </a:r>
-            <a:endParaRPr lang="en-US" sz="900" dirty="0"/>
-          </a:p>
-        </p:txBody>
-      </p:sp>
-      <p:sp>
-        <p:nvSpPr>
-          <p:cNvPr id="10" name="Shape 8"/>
-          <p:cNvSpPr/>
-          <p:nvPr/>
-        </p:nvSpPr>
-        <p:spPr>
-          <a:xfrm>
-            <a:off x="1965960" y="1645920"/>
-            <a:ext cx="137160" cy="137160"/>
-          </a:xfrm>
-          <a:prstGeom prst="rect">
-            <a:avLst/>
-          </a:prstGeom>
-          <a:solidFill>
-            <a:srgbClr val="A6C1D9"/>
-          </a:solidFill>
-          <a:ln/>
-        </p:spPr>
-      </p:sp>
-      <p:sp>
-        <p:nvSpPr>
-          <p:cNvPr id="11" name="Text 9"/>
-          <p:cNvSpPr/>
-          <p:nvPr/>
-        </p:nvSpPr>
-        <p:spPr>
-          <a:xfrm>
-            <a:off x="2148840" y="1645920"/>
-            <a:ext cx="548640" cy="137160"/>
-          </a:xfrm>
-          <a:prstGeom prst="rect">
-            <a:avLst/>
-          </a:prstGeom>
-          <a:noFill/>
-          <a:ln/>
-        </p:spPr>
-        <p:txBody>
-          <a:bodyPr wrap="square" rtlCol="0" anchor="ctr"/>
-          <a:lstStyle/>
-          <a:p>
-            <a:pPr indent="0" marL="0">
-              <a:buNone/>
-            </a:pPr>
-            <a:r>
-              <a:rPr lang="en-US" sz="900" dirty="0">
-                <a:solidFill>
-                  <a:srgbClr val="5B6B73"/>
-                </a:solidFill>
-                <a:latin typeface="맑은 고딕" pitchFamily="34" charset="0"/>
-                <a:ea typeface="맑은 고딕" pitchFamily="34" charset="-122"/>
-                <a:cs typeface="맑은 고딕" pitchFamily="34" charset="-120"/>
-              </a:rPr>
-              <a:t>2027</a:t>
-            </a:r>
-            <a:endParaRPr lang="en-US" sz="900" dirty="0"/>
-          </a:p>
-        </p:txBody>
-      </p:sp>
-      <p:sp>
-        <p:nvSpPr>
-          <p:cNvPr id="12" name="Shape 10"/>
-          <p:cNvSpPr/>
-          <p:nvPr/>
-        </p:nvSpPr>
-        <p:spPr>
-          <a:xfrm>
-            <a:off x="2697480" y="1645920"/>
-            <a:ext cx="137160" cy="137160"/>
-          </a:xfrm>
-          <a:prstGeom prst="rect">
-            <a:avLst/>
-          </a:prstGeom>
-          <a:solidFill>
             <a:srgbClr val="FBEFE8"/>
           </a:solidFill>
           <a:ln w="12700">
@@ -7431,13 +7254,13 @@
       </p:sp>
       <p:sp>
         <p:nvSpPr>
-          <p:cNvPr id="13" name="Text 11"/>
-          <p:cNvSpPr/>
-          <p:nvPr/>
-        </p:nvSpPr>
-        <p:spPr>
-          <a:xfrm>
-            <a:off x="2880360" y="1645920"/>
+          <p:cNvPr id="7" name="Text 5"/>
+          <p:cNvSpPr/>
+          <p:nvPr/>
+        </p:nvSpPr>
+        <p:spPr>
+          <a:xfrm>
+            <a:off x="685800" y="1645920"/>
             <a:ext cx="548640" cy="137160"/>
           </a:xfrm>
           <a:prstGeom prst="rect">
@@ -7470,14 +7293,14 @@
       </p:sp>
       <p:sp>
         <p:nvSpPr>
-          <p:cNvPr id="14" name="Shape 12"/>
-          <p:cNvSpPr/>
-          <p:nvPr/>
-        </p:nvSpPr>
-        <p:spPr>
-          <a:xfrm>
-            <a:off x="685800" y="5303520"/>
-            <a:ext cx="2560320" cy="0"/>
+          <p:cNvPr id="8" name="Shape 6"/>
+          <p:cNvSpPr/>
+          <p:nvPr/>
+        </p:nvSpPr>
+        <p:spPr>
+          <a:xfrm>
+            <a:off x="685800" y="5532120"/>
+            <a:ext cx="2743200" cy="0"/>
           </a:xfrm>
           <a:prstGeom prst="line">
             <a:avLst/>
@@ -7493,13 +7316,13 @@
       </p:sp>
       <p:sp>
         <p:nvSpPr>
-          <p:cNvPr id="15" name="Text 13"/>
-          <p:cNvSpPr/>
-          <p:nvPr/>
-        </p:nvSpPr>
-        <p:spPr>
-          <a:xfrm>
-            <a:off x="685800" y="5120640"/>
+          <p:cNvPr id="9" name="Text 7"/>
+          <p:cNvSpPr/>
+          <p:nvPr/>
+        </p:nvSpPr>
+        <p:spPr>
+          <a:xfrm>
+            <a:off x="685800" y="5349240"/>
             <a:ext cx="1828800" cy="182880"/>
           </a:xfrm>
           <a:prstGeom prst="rect">
@@ -7532,14 +7355,14 @@
       </p:sp>
       <p:sp>
         <p:nvSpPr>
-          <p:cNvPr id="16" name="Text 14"/>
-          <p:cNvSpPr/>
-          <p:nvPr/>
-        </p:nvSpPr>
-        <p:spPr>
-          <a:xfrm>
-            <a:off x="502920" y="5669280"/>
-            <a:ext cx="320040" cy="365760"/>
+          <p:cNvPr id="10" name="Text 8"/>
+          <p:cNvSpPr/>
+          <p:nvPr/>
+        </p:nvSpPr>
+        <p:spPr>
+          <a:xfrm>
+            <a:off x="502920" y="5532120"/>
+            <a:ext cx="475488" cy="502920"/>
           </a:xfrm>
           <a:prstGeom prst="rect">
             <a:avLst/>
@@ -7555,7 +7378,7 @@
               <a:buNone/>
             </a:pPr>
             <a:r>
-              <a:rPr lang="en-US" sz="900" b="1" dirty="0">
+              <a:rPr lang="en-US" sz="1000" b="1" dirty="0">
                 <a:solidFill>
                   <a:srgbClr val="132A3A"/>
                 </a:solidFill>
@@ -7565,26 +7388,26 @@
               </a:rPr>
               <a:t>B1</a:t>
             </a:r>
-            <a:endParaRPr lang="en-US" sz="900" dirty="0"/>
-          </a:p>
-        </p:txBody>
-      </p:sp>
-      <p:sp>
-        <p:nvSpPr>
-          <p:cNvPr id="17" name="Shape 15"/>
-          <p:cNvSpPr/>
-          <p:nvPr/>
-        </p:nvSpPr>
-        <p:spPr>
-          <a:xfrm>
-            <a:off x="868680" y="5696712"/>
-            <a:ext cx="2194560" cy="310896"/>
+            <a:endParaRPr lang="en-US" sz="1000" dirty="0"/>
+          </a:p>
+        </p:txBody>
+      </p:sp>
+      <p:sp>
+        <p:nvSpPr>
+          <p:cNvPr id="11" name="Shape 9"/>
+          <p:cNvSpPr/>
+          <p:nvPr/>
+        </p:nvSpPr>
+        <p:spPr>
+          <a:xfrm>
+            <a:off x="1033272" y="5559552"/>
+            <a:ext cx="1234440" cy="448056"/>
           </a:xfrm>
           <a:prstGeom prst="rect">
             <a:avLst/>
           </a:prstGeom>
           <a:solidFill>
-            <a:srgbClr val="A6C1D9"/>
+            <a:srgbClr val="E2E8F0"/>
           </a:solidFill>
           <a:ln w="13970">
             <a:solidFill>
@@ -7596,14 +7419,14 @@
       </p:sp>
       <p:sp>
         <p:nvSpPr>
-          <p:cNvPr id="18" name="Text 16"/>
-          <p:cNvSpPr/>
-          <p:nvPr/>
-        </p:nvSpPr>
-        <p:spPr>
-          <a:xfrm>
-            <a:off x="941832" y="5696712"/>
-            <a:ext cx="1316736" cy="310896"/>
+          <p:cNvPr id="12" name="Text 10"/>
+          <p:cNvSpPr/>
+          <p:nvPr/>
+        </p:nvSpPr>
+        <p:spPr>
+          <a:xfrm>
+            <a:off x="1069848" y="5550408"/>
+            <a:ext cx="1161288" cy="466344"/>
           </a:xfrm>
           <a:prstGeom prst="rect">
             <a:avLst/>
@@ -7615,11 +7438,11 @@
           <a:bodyPr wrap="square" rtlCol="0" anchor="ctr"/>
           <a:lstStyle/>
           <a:p>
-            <a:pPr algn="l" indent="0" marL="0">
+            <a:pPr algn="ctr" indent="0" marL="0">
               <a:buNone/>
             </a:pPr>
             <a:r>
-              <a:rPr lang="en-US" sz="800" dirty="0">
+              <a:rPr lang="en-US" sz="900" dirty="0">
                 <a:solidFill>
                   <a:srgbClr val="3A3A3A"/>
                 </a:solidFill>
@@ -7629,104 +7452,26 @@
               </a:rPr>
               <a:t>주점</a:t>
             </a:r>
-            <a:endParaRPr lang="en-US" sz="800" dirty="0"/>
-          </a:p>
-        </p:txBody>
-      </p:sp>
-      <p:sp>
-        <p:nvSpPr>
-          <p:cNvPr id="19" name="Text 17"/>
-          <p:cNvSpPr/>
-          <p:nvPr/>
-        </p:nvSpPr>
-        <p:spPr>
-          <a:xfrm>
-            <a:off x="2185416" y="5696712"/>
-            <a:ext cx="768096" cy="310896"/>
-          </a:xfrm>
-          <a:prstGeom prst="rect">
-            <a:avLst/>
-          </a:prstGeom>
-          <a:noFill/>
-          <a:ln/>
-        </p:spPr>
-        <p:txBody>
-          <a:bodyPr wrap="square" rtlCol="0" anchor="ctr"/>
-          <a:lstStyle/>
-          <a:p>
-            <a:pPr algn="r" indent="0" marL="0">
-              <a:buNone/>
-            </a:pPr>
-            <a:r>
-              <a:rPr lang="en-US" sz="700" dirty="0">
-                <a:solidFill>
-                  <a:srgbClr val="8A9AA3"/>
-                </a:solidFill>
-                <a:latin typeface="맑은 고딕" pitchFamily="34" charset="0"/>
-                <a:ea typeface="맑은 고딕" pitchFamily="34" charset="-122"/>
-                <a:cs typeface="맑은 고딕" pitchFamily="34" charset="-120"/>
-              </a:rPr>
-              <a:t>319평</a:t>
-            </a:r>
-            <a:endParaRPr lang="en-US" sz="700" dirty="0"/>
-          </a:p>
-        </p:txBody>
-      </p:sp>
-      <p:sp>
-        <p:nvSpPr>
-          <p:cNvPr id="20" name="Text 18"/>
-          <p:cNvSpPr/>
-          <p:nvPr/>
-        </p:nvSpPr>
-        <p:spPr>
-          <a:xfrm>
-            <a:off x="502920" y="5303520"/>
-            <a:ext cx="320040" cy="365760"/>
-          </a:xfrm>
-          <a:prstGeom prst="rect">
-            <a:avLst/>
-          </a:prstGeom>
-          <a:noFill/>
-          <a:ln/>
-        </p:spPr>
-        <p:txBody>
-          <a:bodyPr wrap="square" rtlCol="0" anchor="ctr"/>
-          <a:lstStyle/>
-          <a:p>
-            <a:pPr algn="r" indent="0" marL="0">
-              <a:buNone/>
-            </a:pPr>
-            <a:r>
-              <a:rPr lang="en-US" sz="900" b="1" dirty="0">
-                <a:solidFill>
-                  <a:srgbClr val="132A3A"/>
-                </a:solidFill>
-                <a:latin typeface="맑은 고딕" pitchFamily="34" charset="0"/>
-                <a:ea typeface="맑은 고딕" pitchFamily="34" charset="-122"/>
-                <a:cs typeface="맑은 고딕" pitchFamily="34" charset="-120"/>
-              </a:rPr>
-              <a:t>B1</a:t>
-            </a:r>
             <a:endParaRPr lang="en-US" sz="900" dirty="0"/>
           </a:p>
         </p:txBody>
       </p:sp>
       <p:sp>
         <p:nvSpPr>
-          <p:cNvPr id="21" name="Shape 19"/>
-          <p:cNvSpPr/>
-          <p:nvPr/>
-        </p:nvSpPr>
-        <p:spPr>
-          <a:xfrm>
-            <a:off x="868680" y="5330952"/>
-            <a:ext cx="2194560" cy="310896"/>
+          <p:cNvPr id="13" name="Shape 11"/>
+          <p:cNvSpPr/>
+          <p:nvPr/>
+        </p:nvSpPr>
+        <p:spPr>
+          <a:xfrm>
+            <a:off x="2267712" y="5559552"/>
+            <a:ext cx="1234440" cy="448056"/>
           </a:xfrm>
           <a:prstGeom prst="rect">
             <a:avLst/>
           </a:prstGeom>
           <a:solidFill>
-            <a:srgbClr val="93B3A0"/>
+            <a:srgbClr val="E2E8F0"/>
           </a:solidFill>
           <a:ln w="13970">
             <a:solidFill>
@@ -7738,14 +7483,14 @@
       </p:sp>
       <p:sp>
         <p:nvSpPr>
-          <p:cNvPr id="22" name="Text 20"/>
-          <p:cNvSpPr/>
-          <p:nvPr/>
-        </p:nvSpPr>
-        <p:spPr>
-          <a:xfrm>
-            <a:off x="941832" y="5330952"/>
-            <a:ext cx="1316736" cy="310896"/>
+          <p:cNvPr id="14" name="Text 12"/>
+          <p:cNvSpPr/>
+          <p:nvPr/>
+        </p:nvSpPr>
+        <p:spPr>
+          <a:xfrm>
+            <a:off x="2304288" y="5550408"/>
+            <a:ext cx="1161288" cy="466344"/>
           </a:xfrm>
           <a:prstGeom prst="rect">
             <a:avLst/>
@@ -7757,11 +7502,11 @@
           <a:bodyPr wrap="square" rtlCol="0" anchor="ctr"/>
           <a:lstStyle/>
           <a:p>
-            <a:pPr algn="l" indent="0" marL="0">
+            <a:pPr algn="ctr" indent="0" marL="0">
               <a:buNone/>
             </a:pPr>
             <a:r>
-              <a:rPr lang="en-US" sz="800" dirty="0">
+              <a:rPr lang="en-US" sz="900" dirty="0">
                 <a:solidFill>
                   <a:srgbClr val="3A3A3A"/>
                 </a:solidFill>
@@ -7771,20 +7516,20 @@
               </a:rPr>
               <a:t>창고</a:t>
             </a:r>
-            <a:endParaRPr lang="en-US" sz="800" dirty="0"/>
-          </a:p>
-        </p:txBody>
-      </p:sp>
-      <p:sp>
-        <p:nvSpPr>
-          <p:cNvPr id="23" name="Text 21"/>
-          <p:cNvSpPr/>
-          <p:nvPr/>
-        </p:nvSpPr>
-        <p:spPr>
-          <a:xfrm>
-            <a:off x="2185416" y="5330952"/>
-            <a:ext cx="768096" cy="310896"/>
+            <a:endParaRPr lang="en-US" sz="900" dirty="0"/>
+          </a:p>
+        </p:txBody>
+      </p:sp>
+      <p:sp>
+        <p:nvSpPr>
+          <p:cNvPr id="15" name="Text 13"/>
+          <p:cNvSpPr/>
+          <p:nvPr/>
+        </p:nvSpPr>
+        <p:spPr>
+          <a:xfrm>
+            <a:off x="502920" y="5029200"/>
+            <a:ext cx="475488" cy="502920"/>
           </a:xfrm>
           <a:prstGeom prst="rect">
             <a:avLst/>
@@ -7800,46 +7545,7 @@
               <a:buNone/>
             </a:pPr>
             <a:r>
-              <a:rPr lang="en-US" sz="700" dirty="0">
-                <a:solidFill>
-                  <a:srgbClr val="8A9AA3"/>
-                </a:solidFill>
-                <a:latin typeface="맑은 고딕" pitchFamily="34" charset="0"/>
-                <a:ea typeface="맑은 고딕" pitchFamily="34" charset="-122"/>
-                <a:cs typeface="맑은 고딕" pitchFamily="34" charset="-120"/>
-              </a:rPr>
-              <a:t>146평</a:t>
-            </a:r>
-            <a:endParaRPr lang="en-US" sz="700" dirty="0"/>
-          </a:p>
-        </p:txBody>
-      </p:sp>
-      <p:sp>
-        <p:nvSpPr>
-          <p:cNvPr id="24" name="Text 22"/>
-          <p:cNvSpPr/>
-          <p:nvPr/>
-        </p:nvSpPr>
-        <p:spPr>
-          <a:xfrm>
-            <a:off x="502920" y="4937760"/>
-            <a:ext cx="320040" cy="365760"/>
-          </a:xfrm>
-          <a:prstGeom prst="rect">
-            <a:avLst/>
-          </a:prstGeom>
-          <a:noFill/>
-          <a:ln/>
-        </p:spPr>
-        <p:txBody>
-          <a:bodyPr wrap="square" rtlCol="0" anchor="ctr"/>
-          <a:lstStyle/>
-          <a:p>
-            <a:pPr algn="r" indent="0" marL="0">
-              <a:buNone/>
-            </a:pPr>
-            <a:r>
-              <a:rPr lang="en-US" sz="900" b="1" dirty="0">
+              <a:rPr lang="en-US" sz="1000" b="1" dirty="0">
                 <a:solidFill>
                   <a:srgbClr val="132A3A"/>
                 </a:solidFill>
@@ -7849,26 +7555,26 @@
               </a:rPr>
               <a:t>1F</a:t>
             </a:r>
-            <a:endParaRPr lang="en-US" sz="900" dirty="0"/>
-          </a:p>
-        </p:txBody>
-      </p:sp>
-      <p:sp>
-        <p:nvSpPr>
-          <p:cNvPr id="25" name="Shape 23"/>
-          <p:cNvSpPr/>
-          <p:nvPr/>
-        </p:nvSpPr>
-        <p:spPr>
-          <a:xfrm>
-            <a:off x="1472184" y="4965192"/>
-            <a:ext cx="987552" cy="310896"/>
+            <a:endParaRPr lang="en-US" sz="1000" dirty="0"/>
+          </a:p>
+        </p:txBody>
+      </p:sp>
+      <p:sp>
+        <p:nvSpPr>
+          <p:cNvPr id="16" name="Shape 14"/>
+          <p:cNvSpPr/>
+          <p:nvPr/>
+        </p:nvSpPr>
+        <p:spPr>
+          <a:xfrm>
+            <a:off x="1033272" y="5056632"/>
+            <a:ext cx="822960" cy="448056"/>
           </a:xfrm>
           <a:prstGeom prst="rect">
             <a:avLst/>
           </a:prstGeom>
           <a:solidFill>
-            <a:srgbClr val="A6C1D9"/>
+            <a:srgbClr val="E2E8F0"/>
           </a:solidFill>
           <a:ln w="13970">
             <a:solidFill>
@@ -7880,14 +7586,14 @@
       </p:sp>
       <p:sp>
         <p:nvSpPr>
-          <p:cNvPr id="26" name="Text 24"/>
-          <p:cNvSpPr/>
-          <p:nvPr/>
-        </p:nvSpPr>
-        <p:spPr>
-          <a:xfrm>
-            <a:off x="1517904" y="4965192"/>
-            <a:ext cx="896112" cy="310896"/>
+          <p:cNvPr id="17" name="Text 15"/>
+          <p:cNvSpPr/>
+          <p:nvPr/>
+        </p:nvSpPr>
+        <p:spPr>
+          <a:xfrm>
+            <a:off x="1051560" y="5047488"/>
+            <a:ext cx="786384" cy="466344"/>
           </a:xfrm>
           <a:prstGeom prst="rect">
             <a:avLst/>
@@ -7919,59 +7625,20 @@
       </p:sp>
       <p:sp>
         <p:nvSpPr>
-          <p:cNvPr id="27" name="Text 25"/>
-          <p:cNvSpPr/>
-          <p:nvPr/>
-        </p:nvSpPr>
-        <p:spPr>
-          <a:xfrm>
-            <a:off x="502920" y="4572000"/>
-            <a:ext cx="320040" cy="365760"/>
-          </a:xfrm>
-          <a:prstGeom prst="rect">
-            <a:avLst/>
-          </a:prstGeom>
-          <a:noFill/>
-          <a:ln/>
-        </p:spPr>
-        <p:txBody>
-          <a:bodyPr wrap="square" rtlCol="0" anchor="ctr"/>
-          <a:lstStyle/>
-          <a:p>
-            <a:pPr algn="r" indent="0" marL="0">
-              <a:buNone/>
-            </a:pPr>
-            <a:r>
-              <a:rPr lang="en-US" sz="900" b="1" dirty="0">
-                <a:solidFill>
-                  <a:srgbClr val="132A3A"/>
-                </a:solidFill>
-                <a:latin typeface="맑은 고딕" pitchFamily="34" charset="0"/>
-                <a:ea typeface="맑은 고딕" pitchFamily="34" charset="-122"/>
-                <a:cs typeface="맑은 고딕" pitchFamily="34" charset="-120"/>
-              </a:rPr>
-              <a:t>1F</a:t>
-            </a:r>
-            <a:endParaRPr lang="en-US" sz="900" dirty="0"/>
-          </a:p>
-        </p:txBody>
-      </p:sp>
-      <p:sp>
-        <p:nvSpPr>
-          <p:cNvPr id="28" name="Shape 26"/>
-          <p:cNvSpPr/>
-          <p:nvPr/>
-        </p:nvSpPr>
-        <p:spPr>
-          <a:xfrm>
-            <a:off x="1472184" y="4599432"/>
-            <a:ext cx="987552" cy="310896"/>
+          <p:cNvPr id="18" name="Shape 16"/>
+          <p:cNvSpPr/>
+          <p:nvPr/>
+        </p:nvSpPr>
+        <p:spPr>
+          <a:xfrm>
+            <a:off x="1856232" y="5056632"/>
+            <a:ext cx="822960" cy="448056"/>
           </a:xfrm>
           <a:prstGeom prst="rect">
             <a:avLst/>
           </a:prstGeom>
           <a:solidFill>
-            <a:srgbClr val="93B3A0"/>
+            <a:srgbClr val="E2E8F0"/>
           </a:solidFill>
           <a:ln w="13970">
             <a:solidFill>
@@ -7983,14 +7650,14 @@
       </p:sp>
       <p:sp>
         <p:nvSpPr>
-          <p:cNvPr id="29" name="Text 27"/>
-          <p:cNvSpPr/>
-          <p:nvPr/>
-        </p:nvSpPr>
-        <p:spPr>
-          <a:xfrm>
-            <a:off x="1517904" y="4599432"/>
-            <a:ext cx="896112" cy="310896"/>
+          <p:cNvPr id="19" name="Text 17"/>
+          <p:cNvSpPr/>
+          <p:nvPr/>
+        </p:nvSpPr>
+        <p:spPr>
+          <a:xfrm>
+            <a:off x="1874520" y="5047488"/>
+            <a:ext cx="786384" cy="466344"/>
           </a:xfrm>
           <a:prstGeom prst="rect">
             <a:avLst/>
@@ -8022,59 +7689,20 @@
       </p:sp>
       <p:sp>
         <p:nvSpPr>
-          <p:cNvPr id="30" name="Text 28"/>
-          <p:cNvSpPr/>
-          <p:nvPr/>
-        </p:nvSpPr>
-        <p:spPr>
-          <a:xfrm>
-            <a:off x="502920" y="4206240"/>
-            <a:ext cx="320040" cy="365760"/>
-          </a:xfrm>
-          <a:prstGeom prst="rect">
-            <a:avLst/>
-          </a:prstGeom>
-          <a:noFill/>
-          <a:ln/>
-        </p:spPr>
-        <p:txBody>
-          <a:bodyPr wrap="square" rtlCol="0" anchor="ctr"/>
-          <a:lstStyle/>
-          <a:p>
-            <a:pPr algn="r" indent="0" marL="0">
-              <a:buNone/>
-            </a:pPr>
-            <a:r>
-              <a:rPr lang="en-US" sz="900" b="1" dirty="0">
-                <a:solidFill>
-                  <a:srgbClr val="132A3A"/>
-                </a:solidFill>
-                <a:latin typeface="맑은 고딕" pitchFamily="34" charset="0"/>
-                <a:ea typeface="맑은 고딕" pitchFamily="34" charset="-122"/>
-                <a:cs typeface="맑은 고딕" pitchFamily="34" charset="-120"/>
-              </a:rPr>
-              <a:t>1F</a:t>
-            </a:r>
-            <a:endParaRPr lang="en-US" sz="900" dirty="0"/>
-          </a:p>
-        </p:txBody>
-      </p:sp>
-      <p:sp>
-        <p:nvSpPr>
-          <p:cNvPr id="31" name="Shape 29"/>
-          <p:cNvSpPr/>
-          <p:nvPr/>
-        </p:nvSpPr>
-        <p:spPr>
-          <a:xfrm>
-            <a:off x="1472184" y="4233672"/>
-            <a:ext cx="987552" cy="310896"/>
+          <p:cNvPr id="20" name="Shape 18"/>
+          <p:cNvSpPr/>
+          <p:nvPr/>
+        </p:nvSpPr>
+        <p:spPr>
+          <a:xfrm>
+            <a:off x="2679192" y="5056632"/>
+            <a:ext cx="822960" cy="448056"/>
           </a:xfrm>
           <a:prstGeom prst="rect">
             <a:avLst/>
           </a:prstGeom>
           <a:solidFill>
-            <a:srgbClr val="C9A9A6"/>
+            <a:srgbClr val="E2E8F0"/>
           </a:solidFill>
           <a:ln w="13970">
             <a:solidFill>
@@ -8086,14 +7714,14 @@
       </p:sp>
       <p:sp>
         <p:nvSpPr>
-          <p:cNvPr id="32" name="Text 30"/>
-          <p:cNvSpPr/>
-          <p:nvPr/>
-        </p:nvSpPr>
-        <p:spPr>
-          <a:xfrm>
-            <a:off x="1517904" y="4233672"/>
-            <a:ext cx="896112" cy="310896"/>
+          <p:cNvPr id="21" name="Text 19"/>
+          <p:cNvSpPr/>
+          <p:nvPr/>
+        </p:nvSpPr>
+        <p:spPr>
+          <a:xfrm>
+            <a:off x="2697480" y="5047488"/>
+            <a:ext cx="786384" cy="466344"/>
           </a:xfrm>
           <a:prstGeom prst="rect">
             <a:avLst/>
@@ -8125,14 +7753,14 @@
       </p:sp>
       <p:sp>
         <p:nvSpPr>
-          <p:cNvPr id="33" name="Text 31"/>
-          <p:cNvSpPr/>
-          <p:nvPr/>
-        </p:nvSpPr>
-        <p:spPr>
-          <a:xfrm>
-            <a:off x="502920" y="3840480"/>
-            <a:ext cx="320040" cy="365760"/>
+          <p:cNvPr id="22" name="Text 20"/>
+          <p:cNvSpPr/>
+          <p:nvPr/>
+        </p:nvSpPr>
+        <p:spPr>
+          <a:xfrm>
+            <a:off x="502920" y="4526280"/>
+            <a:ext cx="475488" cy="502920"/>
           </a:xfrm>
           <a:prstGeom prst="rect">
             <a:avLst/>
@@ -8148,7 +7776,7 @@
               <a:buNone/>
             </a:pPr>
             <a:r>
-              <a:rPr lang="en-US" sz="900" b="1" dirty="0">
+              <a:rPr lang="en-US" sz="1000" b="1" dirty="0">
                 <a:solidFill>
                   <a:srgbClr val="132A3A"/>
                 </a:solidFill>
@@ -8158,162 +7786,20 @@
               </a:rPr>
               <a:t>2F</a:t>
             </a:r>
-            <a:endParaRPr lang="en-US" sz="900" dirty="0"/>
-          </a:p>
-        </p:txBody>
-      </p:sp>
-      <p:sp>
-        <p:nvSpPr>
-          <p:cNvPr id="34" name="Shape 32"/>
-          <p:cNvSpPr/>
-          <p:nvPr/>
-        </p:nvSpPr>
-        <p:spPr>
-          <a:xfrm>
-            <a:off x="1044245" y="3867912"/>
-            <a:ext cx="1843430" cy="310896"/>
-          </a:xfrm>
-          <a:prstGeom prst="rect">
-            <a:avLst/>
-          </a:prstGeom>
-          <a:solidFill>
-            <a:srgbClr val="93B3A0"/>
-          </a:solidFill>
-          <a:ln w="13970">
-            <a:solidFill>
-              <a:srgbClr val="5B6B73"/>
-            </a:solidFill>
-            <a:prstDash val="solid"/>
-          </a:ln>
-        </p:spPr>
-      </p:sp>
-      <p:sp>
-        <p:nvSpPr>
-          <p:cNvPr id="35" name="Text 33"/>
-          <p:cNvSpPr/>
-          <p:nvPr/>
-        </p:nvSpPr>
-        <p:spPr>
-          <a:xfrm>
-            <a:off x="1117397" y="3867912"/>
-            <a:ext cx="1106058" cy="310896"/>
-          </a:xfrm>
-          <a:prstGeom prst="rect">
-            <a:avLst/>
-          </a:prstGeom>
-          <a:noFill/>
-          <a:ln/>
-        </p:spPr>
-        <p:txBody>
-          <a:bodyPr wrap="square" rtlCol="0" anchor="ctr"/>
-          <a:lstStyle/>
-          <a:p>
-            <a:pPr algn="l" indent="0" marL="0">
-              <a:buNone/>
-            </a:pPr>
-            <a:r>
-              <a:rPr lang="en-US" sz="800" dirty="0">
-                <a:solidFill>
-                  <a:srgbClr val="3A3A3A"/>
-                </a:solidFill>
-                <a:latin typeface="맑은 고딕" pitchFamily="34" charset="0"/>
-                <a:ea typeface="맑은 고딕" pitchFamily="34" charset="-122"/>
-                <a:cs typeface="맑은 고딕" pitchFamily="34" charset="-120"/>
-              </a:rPr>
-              <a:t>일반음식점</a:t>
-            </a:r>
-            <a:endParaRPr lang="en-US" sz="800" dirty="0"/>
-          </a:p>
-        </p:txBody>
-      </p:sp>
-      <p:sp>
-        <p:nvSpPr>
-          <p:cNvPr id="36" name="Text 34"/>
-          <p:cNvSpPr/>
-          <p:nvPr/>
-        </p:nvSpPr>
-        <p:spPr>
-          <a:xfrm>
-            <a:off x="2150303" y="3867912"/>
-            <a:ext cx="645201" cy="310896"/>
-          </a:xfrm>
-          <a:prstGeom prst="rect">
-            <a:avLst/>
-          </a:prstGeom>
-          <a:noFill/>
-          <a:ln/>
-        </p:spPr>
-        <p:txBody>
-          <a:bodyPr wrap="square" rtlCol="0" anchor="ctr"/>
-          <a:lstStyle/>
-          <a:p>
-            <a:pPr algn="r" indent="0" marL="0">
-              <a:buNone/>
-            </a:pPr>
-            <a:r>
-              <a:rPr lang="en-US" sz="700" dirty="0">
-                <a:solidFill>
-                  <a:srgbClr val="8A9AA3"/>
-                </a:solidFill>
-                <a:latin typeface="맑은 고딕" pitchFamily="34" charset="0"/>
-                <a:ea typeface="맑은 고딕" pitchFamily="34" charset="-122"/>
-                <a:cs typeface="맑은 고딕" pitchFamily="34" charset="-120"/>
-              </a:rPr>
-              <a:t>266평</a:t>
-            </a:r>
-            <a:endParaRPr lang="en-US" sz="700" dirty="0"/>
-          </a:p>
-        </p:txBody>
-      </p:sp>
-      <p:sp>
-        <p:nvSpPr>
-          <p:cNvPr id="37" name="Text 35"/>
-          <p:cNvSpPr/>
-          <p:nvPr/>
-        </p:nvSpPr>
-        <p:spPr>
-          <a:xfrm>
-            <a:off x="502920" y="3474720"/>
-            <a:ext cx="320040" cy="365760"/>
-          </a:xfrm>
-          <a:prstGeom prst="rect">
-            <a:avLst/>
-          </a:prstGeom>
-          <a:noFill/>
-          <a:ln/>
-        </p:spPr>
-        <p:txBody>
-          <a:bodyPr wrap="square" rtlCol="0" anchor="ctr"/>
-          <a:lstStyle/>
-          <a:p>
-            <a:pPr algn="r" indent="0" marL="0">
-              <a:buNone/>
-            </a:pPr>
-            <a:r>
-              <a:rPr lang="en-US" sz="900" b="1" dirty="0">
-                <a:solidFill>
-                  <a:srgbClr val="132A3A"/>
-                </a:solidFill>
-                <a:latin typeface="맑은 고딕" pitchFamily="34" charset="0"/>
-                <a:ea typeface="맑은 고딕" pitchFamily="34" charset="-122"/>
-                <a:cs typeface="맑은 고딕" pitchFamily="34" charset="-120"/>
-              </a:rPr>
-              <a:t>3F-1</a:t>
-            </a:r>
-            <a:endParaRPr lang="en-US" sz="900" dirty="0"/>
-          </a:p>
-        </p:txBody>
-      </p:sp>
-      <p:sp>
-        <p:nvSpPr>
-          <p:cNvPr id="38" name="Shape 36"/>
-          <p:cNvSpPr/>
-          <p:nvPr/>
-        </p:nvSpPr>
-        <p:spPr>
-          <a:xfrm>
-            <a:off x="1472184" y="3502152"/>
-            <a:ext cx="987552" cy="310896"/>
+            <a:endParaRPr lang="en-US" sz="1000" dirty="0"/>
+          </a:p>
+        </p:txBody>
+      </p:sp>
+      <p:sp>
+        <p:nvSpPr>
+          <p:cNvPr id="23" name="Shape 21"/>
+          <p:cNvSpPr/>
+          <p:nvPr/>
+        </p:nvSpPr>
+        <p:spPr>
+          <a:xfrm>
+            <a:off x="1033272" y="4553712"/>
+            <a:ext cx="2468880" cy="448056"/>
           </a:xfrm>
           <a:prstGeom prst="rect">
             <a:avLst/>
@@ -8331,14 +7817,14 @@
       </p:sp>
       <p:sp>
         <p:nvSpPr>
-          <p:cNvPr id="39" name="Text 37"/>
-          <p:cNvSpPr/>
-          <p:nvPr/>
-        </p:nvSpPr>
-        <p:spPr>
-          <a:xfrm>
-            <a:off x="1517904" y="3502152"/>
-            <a:ext cx="896112" cy="310896"/>
+          <p:cNvPr id="24" name="Text 22"/>
+          <p:cNvSpPr/>
+          <p:nvPr/>
+        </p:nvSpPr>
+        <p:spPr>
+          <a:xfrm>
+            <a:off x="1069848" y="4544568"/>
+            <a:ext cx="2395728" cy="466344"/>
           </a:xfrm>
           <a:prstGeom prst="rect">
             <a:avLst/>
@@ -8354,7 +7840,7 @@
               <a:buNone/>
             </a:pPr>
             <a:r>
-              <a:rPr lang="en-US" sz="800" dirty="0">
+              <a:rPr lang="en-US" sz="900" dirty="0">
                 <a:solidFill>
                   <a:srgbClr val="3A3A3A"/>
                 </a:solidFill>
@@ -8362,22 +7848,22 @@
                 <a:ea typeface="맑은 고딕" pitchFamily="34" charset="-122"/>
                 <a:cs typeface="맑은 고딕" pitchFamily="34" charset="-120"/>
               </a:rPr>
-              <a:t>사무소</a:t>
-            </a:r>
-            <a:endParaRPr lang="en-US" sz="800" dirty="0"/>
-          </a:p>
-        </p:txBody>
-      </p:sp>
-      <p:sp>
-        <p:nvSpPr>
-          <p:cNvPr id="40" name="Text 38"/>
-          <p:cNvSpPr/>
-          <p:nvPr/>
-        </p:nvSpPr>
-        <p:spPr>
-          <a:xfrm>
-            <a:off x="502920" y="3108960"/>
-            <a:ext cx="320040" cy="365760"/>
+              <a:t>일반음식점</a:t>
+            </a:r>
+            <a:endParaRPr lang="en-US" sz="900" dirty="0"/>
+          </a:p>
+        </p:txBody>
+      </p:sp>
+      <p:sp>
+        <p:nvSpPr>
+          <p:cNvPr id="25" name="Text 23"/>
+          <p:cNvSpPr/>
+          <p:nvPr/>
+        </p:nvSpPr>
+        <p:spPr>
+          <a:xfrm>
+            <a:off x="502920" y="4023360"/>
+            <a:ext cx="475488" cy="502920"/>
           </a:xfrm>
           <a:prstGeom prst="rect">
             <a:avLst/>
@@ -8393,7 +7879,7 @@
               <a:buNone/>
             </a:pPr>
             <a:r>
-              <a:rPr lang="en-US" sz="900" b="1" dirty="0">
+              <a:rPr lang="en-US" sz="1000" b="1" dirty="0">
                 <a:solidFill>
                   <a:srgbClr val="132A3A"/>
                 </a:solidFill>
@@ -8401,22 +7887,22 @@
                 <a:ea typeface="맑은 고딕" pitchFamily="34" charset="-122"/>
                 <a:cs typeface="맑은 고딕" pitchFamily="34" charset="-120"/>
               </a:rPr>
-              <a:t>3F-2</a:t>
-            </a:r>
-            <a:endParaRPr lang="en-US" sz="900" dirty="0"/>
-          </a:p>
-        </p:txBody>
-      </p:sp>
-      <p:sp>
-        <p:nvSpPr>
-          <p:cNvPr id="41" name="Shape 39"/>
-          <p:cNvSpPr/>
-          <p:nvPr/>
-        </p:nvSpPr>
-        <p:spPr>
-          <a:xfrm>
-            <a:off x="1472184" y="3136392"/>
-            <a:ext cx="987552" cy="310896"/>
+              <a:t>3F-1</a:t>
+            </a:r>
+            <a:endParaRPr lang="en-US" sz="1000" dirty="0"/>
+          </a:p>
+        </p:txBody>
+      </p:sp>
+      <p:sp>
+        <p:nvSpPr>
+          <p:cNvPr id="26" name="Shape 24"/>
+          <p:cNvSpPr/>
+          <p:nvPr/>
+        </p:nvSpPr>
+        <p:spPr>
+          <a:xfrm>
+            <a:off x="1033272" y="4050792"/>
+            <a:ext cx="2468880" cy="448056"/>
           </a:xfrm>
           <a:prstGeom prst="rect">
             <a:avLst/>
@@ -8434,14 +7920,14 @@
       </p:sp>
       <p:sp>
         <p:nvSpPr>
-          <p:cNvPr id="42" name="Text 40"/>
-          <p:cNvSpPr/>
-          <p:nvPr/>
-        </p:nvSpPr>
-        <p:spPr>
-          <a:xfrm>
-            <a:off x="1517904" y="3136392"/>
-            <a:ext cx="896112" cy="310896"/>
+          <p:cNvPr id="27" name="Text 25"/>
+          <p:cNvSpPr/>
+          <p:nvPr/>
+        </p:nvSpPr>
+        <p:spPr>
+          <a:xfrm>
+            <a:off x="1069848" y="4041648"/>
+            <a:ext cx="2395728" cy="466344"/>
           </a:xfrm>
           <a:prstGeom prst="rect">
             <a:avLst/>
@@ -8457,7 +7943,7 @@
               <a:buNone/>
             </a:pPr>
             <a:r>
-              <a:rPr lang="en-US" sz="800" dirty="0">
+              <a:rPr lang="en-US" sz="900" dirty="0">
                 <a:solidFill>
                   <a:srgbClr val="3A3A3A"/>
                 </a:solidFill>
@@ -8465,22 +7951,22 @@
                 <a:ea typeface="맑은 고딕" pitchFamily="34" charset="-122"/>
                 <a:cs typeface="맑은 고딕" pitchFamily="34" charset="-120"/>
               </a:rPr>
-              <a:t>의원</a:t>
-            </a:r>
-            <a:endParaRPr lang="en-US" sz="800" dirty="0"/>
-          </a:p>
-        </p:txBody>
-      </p:sp>
-      <p:sp>
-        <p:nvSpPr>
-          <p:cNvPr id="43" name="Text 41"/>
-          <p:cNvSpPr/>
-          <p:nvPr/>
-        </p:nvSpPr>
-        <p:spPr>
-          <a:xfrm>
-            <a:off x="502920" y="2743200"/>
-            <a:ext cx="320040" cy="365760"/>
+              <a:t>사무소</a:t>
+            </a:r>
+            <a:endParaRPr lang="en-US" sz="900" dirty="0"/>
+          </a:p>
+        </p:txBody>
+      </p:sp>
+      <p:sp>
+        <p:nvSpPr>
+          <p:cNvPr id="28" name="Text 26"/>
+          <p:cNvSpPr/>
+          <p:nvPr/>
+        </p:nvSpPr>
+        <p:spPr>
+          <a:xfrm>
+            <a:off x="502920" y="3520440"/>
+            <a:ext cx="475488" cy="502920"/>
           </a:xfrm>
           <a:prstGeom prst="rect">
             <a:avLst/>
@@ -8496,7 +7982,7 @@
               <a:buNone/>
             </a:pPr>
             <a:r>
-              <a:rPr lang="en-US" sz="900" b="1" dirty="0">
+              <a:rPr lang="en-US" sz="1000" b="1" dirty="0">
                 <a:solidFill>
                   <a:srgbClr val="132A3A"/>
                 </a:solidFill>
@@ -8504,22 +7990,22 @@
                 <a:ea typeface="맑은 고딕" pitchFamily="34" charset="-122"/>
                 <a:cs typeface="맑은 고딕" pitchFamily="34" charset="-120"/>
               </a:rPr>
-              <a:t>4F</a:t>
-            </a:r>
-            <a:endParaRPr lang="en-US" sz="900" dirty="0"/>
-          </a:p>
-        </p:txBody>
-      </p:sp>
-      <p:sp>
-        <p:nvSpPr>
-          <p:cNvPr id="44" name="Shape 42"/>
-          <p:cNvSpPr/>
-          <p:nvPr/>
-        </p:nvSpPr>
-        <p:spPr>
-          <a:xfrm>
-            <a:off x="1044245" y="2770632"/>
-            <a:ext cx="1843430" cy="310896"/>
+              <a:t>3F-2</a:t>
+            </a:r>
+            <a:endParaRPr lang="en-US" sz="1000" dirty="0"/>
+          </a:p>
+        </p:txBody>
+      </p:sp>
+      <p:sp>
+        <p:nvSpPr>
+          <p:cNvPr id="29" name="Shape 27"/>
+          <p:cNvSpPr/>
+          <p:nvPr/>
+        </p:nvSpPr>
+        <p:spPr>
+          <a:xfrm>
+            <a:off x="1033272" y="3547872"/>
+            <a:ext cx="2468880" cy="448056"/>
           </a:xfrm>
           <a:prstGeom prst="rect">
             <a:avLst/>
@@ -8537,14 +8023,14 @@
       </p:sp>
       <p:sp>
         <p:nvSpPr>
-          <p:cNvPr id="45" name="Text 43"/>
-          <p:cNvSpPr/>
-          <p:nvPr/>
-        </p:nvSpPr>
-        <p:spPr>
-          <a:xfrm>
-            <a:off x="1117397" y="2770632"/>
-            <a:ext cx="1106058" cy="310896"/>
+          <p:cNvPr id="30" name="Text 28"/>
+          <p:cNvSpPr/>
+          <p:nvPr/>
+        </p:nvSpPr>
+        <p:spPr>
+          <a:xfrm>
+            <a:off x="1069848" y="3538728"/>
+            <a:ext cx="2395728" cy="466344"/>
           </a:xfrm>
           <a:prstGeom prst="rect">
             <a:avLst/>
@@ -8556,11 +8042,11 @@
           <a:bodyPr wrap="square" rtlCol="0" anchor="ctr"/>
           <a:lstStyle/>
           <a:p>
-            <a:pPr algn="l" indent="0" marL="0">
+            <a:pPr algn="ctr" indent="0" marL="0">
               <a:buNone/>
             </a:pPr>
             <a:r>
-              <a:rPr lang="en-US" sz="800" dirty="0">
+              <a:rPr lang="en-US" sz="900" dirty="0">
                 <a:solidFill>
                   <a:srgbClr val="3A3A3A"/>
                 </a:solidFill>
@@ -8568,22 +8054,22 @@
                 <a:ea typeface="맑은 고딕" pitchFamily="34" charset="-122"/>
                 <a:cs typeface="맑은 고딕" pitchFamily="34" charset="-120"/>
               </a:rPr>
-              <a:t>사무소</a:t>
-            </a:r>
-            <a:endParaRPr lang="en-US" sz="800" dirty="0"/>
-          </a:p>
-        </p:txBody>
-      </p:sp>
-      <p:sp>
-        <p:nvSpPr>
-          <p:cNvPr id="46" name="Text 44"/>
-          <p:cNvSpPr/>
-          <p:nvPr/>
-        </p:nvSpPr>
-        <p:spPr>
-          <a:xfrm>
-            <a:off x="2150303" y="2770632"/>
-            <a:ext cx="645201" cy="310896"/>
+              <a:t>의원</a:t>
+            </a:r>
+            <a:endParaRPr lang="en-US" sz="900" dirty="0"/>
+          </a:p>
+        </p:txBody>
+      </p:sp>
+      <p:sp>
+        <p:nvSpPr>
+          <p:cNvPr id="31" name="Text 29"/>
+          <p:cNvSpPr/>
+          <p:nvPr/>
+        </p:nvSpPr>
+        <p:spPr>
+          <a:xfrm>
+            <a:off x="502920" y="3017520"/>
+            <a:ext cx="475488" cy="502920"/>
           </a:xfrm>
           <a:prstGeom prst="rect">
             <a:avLst/>
@@ -8599,46 +8085,7 @@
               <a:buNone/>
             </a:pPr>
             <a:r>
-              <a:rPr lang="en-US" sz="700" dirty="0">
-                <a:solidFill>
-                  <a:srgbClr val="8A9AA3"/>
-                </a:solidFill>
-                <a:latin typeface="맑은 고딕" pitchFamily="34" charset="0"/>
-                <a:ea typeface="맑은 고딕" pitchFamily="34" charset="-122"/>
-                <a:cs typeface="맑은 고딕" pitchFamily="34" charset="-120"/>
-              </a:rPr>
-              <a:t>266평</a:t>
-            </a:r>
-            <a:endParaRPr lang="en-US" sz="700" dirty="0"/>
-          </a:p>
-        </p:txBody>
-      </p:sp>
-      <p:sp>
-        <p:nvSpPr>
-          <p:cNvPr id="47" name="Text 45"/>
-          <p:cNvSpPr/>
-          <p:nvPr/>
-        </p:nvSpPr>
-        <p:spPr>
-          <a:xfrm>
-            <a:off x="502920" y="2377440"/>
-            <a:ext cx="320040" cy="365760"/>
-          </a:xfrm>
-          <a:prstGeom prst="rect">
-            <a:avLst/>
-          </a:prstGeom>
-          <a:noFill/>
-          <a:ln/>
-        </p:spPr>
-        <p:txBody>
-          <a:bodyPr wrap="square" rtlCol="0" anchor="ctr"/>
-          <a:lstStyle/>
-          <a:p>
-            <a:pPr algn="r" indent="0" marL="0">
-              <a:buNone/>
-            </a:pPr>
-            <a:r>
-              <a:rPr lang="en-US" sz="900" b="1" dirty="0">
+              <a:rPr lang="en-US" sz="1000" b="1" dirty="0">
                 <a:solidFill>
                   <a:srgbClr val="132A3A"/>
                 </a:solidFill>
@@ -8646,22 +8093,22 @@
                 <a:ea typeface="맑은 고딕" pitchFamily="34" charset="-122"/>
                 <a:cs typeface="맑은 고딕" pitchFamily="34" charset="-120"/>
               </a:rPr>
-              <a:t>5F-1</a:t>
-            </a:r>
-            <a:endParaRPr lang="en-US" sz="900" dirty="0"/>
-          </a:p>
-        </p:txBody>
-      </p:sp>
-      <p:sp>
-        <p:nvSpPr>
-          <p:cNvPr id="48" name="Shape 46"/>
-          <p:cNvSpPr/>
-          <p:nvPr/>
-        </p:nvSpPr>
-        <p:spPr>
-          <a:xfrm>
-            <a:off x="1472184" y="2404872"/>
-            <a:ext cx="987552" cy="310896"/>
+              <a:t>4F</a:t>
+            </a:r>
+            <a:endParaRPr lang="en-US" sz="1000" dirty="0"/>
+          </a:p>
+        </p:txBody>
+      </p:sp>
+      <p:sp>
+        <p:nvSpPr>
+          <p:cNvPr id="32" name="Shape 30"/>
+          <p:cNvSpPr/>
+          <p:nvPr/>
+        </p:nvSpPr>
+        <p:spPr>
+          <a:xfrm>
+            <a:off x="1033272" y="3044952"/>
+            <a:ext cx="2468880" cy="448056"/>
           </a:xfrm>
           <a:prstGeom prst="rect">
             <a:avLst/>
@@ -8679,14 +8126,14 @@
       </p:sp>
       <p:sp>
         <p:nvSpPr>
-          <p:cNvPr id="49" name="Text 47"/>
-          <p:cNvSpPr/>
-          <p:nvPr/>
-        </p:nvSpPr>
-        <p:spPr>
-          <a:xfrm>
-            <a:off x="1517904" y="2404872"/>
-            <a:ext cx="896112" cy="310896"/>
+          <p:cNvPr id="33" name="Text 31"/>
+          <p:cNvSpPr/>
+          <p:nvPr/>
+        </p:nvSpPr>
+        <p:spPr>
+          <a:xfrm>
+            <a:off x="1069848" y="3035808"/>
+            <a:ext cx="2395728" cy="466344"/>
           </a:xfrm>
           <a:prstGeom prst="rect">
             <a:avLst/>
@@ -8702,7 +8149,7 @@
               <a:buNone/>
             </a:pPr>
             <a:r>
-              <a:rPr lang="en-US" sz="800" dirty="0">
+              <a:rPr lang="en-US" sz="900" dirty="0">
                 <a:solidFill>
                   <a:srgbClr val="3A3A3A"/>
                 </a:solidFill>
@@ -8710,22 +8157,22 @@
                 <a:ea typeface="맑은 고딕" pitchFamily="34" charset="-122"/>
                 <a:cs typeface="맑은 고딕" pitchFamily="34" charset="-120"/>
               </a:rPr>
-              <a:t>학원</a:t>
-            </a:r>
-            <a:endParaRPr lang="en-US" sz="800" dirty="0"/>
-          </a:p>
-        </p:txBody>
-      </p:sp>
-      <p:sp>
-        <p:nvSpPr>
-          <p:cNvPr id="50" name="Text 48"/>
-          <p:cNvSpPr/>
-          <p:nvPr/>
-        </p:nvSpPr>
-        <p:spPr>
-          <a:xfrm>
-            <a:off x="502920" y="2011680"/>
-            <a:ext cx="320040" cy="365760"/>
+              <a:t>사무소</a:t>
+            </a:r>
+            <a:endParaRPr lang="en-US" sz="900" dirty="0"/>
+          </a:p>
+        </p:txBody>
+      </p:sp>
+      <p:sp>
+        <p:nvSpPr>
+          <p:cNvPr id="34" name="Text 32"/>
+          <p:cNvSpPr/>
+          <p:nvPr/>
+        </p:nvSpPr>
+        <p:spPr>
+          <a:xfrm>
+            <a:off x="502920" y="2514600"/>
+            <a:ext cx="475488" cy="502920"/>
           </a:xfrm>
           <a:prstGeom prst="rect">
             <a:avLst/>
@@ -8741,7 +8188,7 @@
               <a:buNone/>
             </a:pPr>
             <a:r>
-              <a:rPr lang="en-US" sz="900" b="1" dirty="0">
+              <a:rPr lang="en-US" sz="1000" b="1" dirty="0">
                 <a:solidFill>
                   <a:srgbClr val="132A3A"/>
                 </a:solidFill>
@@ -8749,22 +8196,22 @@
                 <a:ea typeface="맑은 고딕" pitchFamily="34" charset="-122"/>
                 <a:cs typeface="맑은 고딕" pitchFamily="34" charset="-120"/>
               </a:rPr>
-              <a:t>5F-2</a:t>
-            </a:r>
-            <a:endParaRPr lang="en-US" sz="900" dirty="0"/>
-          </a:p>
-        </p:txBody>
-      </p:sp>
-      <p:sp>
-        <p:nvSpPr>
-          <p:cNvPr id="51" name="Shape 49"/>
-          <p:cNvSpPr/>
-          <p:nvPr/>
-        </p:nvSpPr>
-        <p:spPr>
-          <a:xfrm>
-            <a:off x="1472184" y="2039112"/>
-            <a:ext cx="987552" cy="310896"/>
+              <a:t>5F-1</a:t>
+            </a:r>
+            <a:endParaRPr lang="en-US" sz="1000" dirty="0"/>
+          </a:p>
+        </p:txBody>
+      </p:sp>
+      <p:sp>
+        <p:nvSpPr>
+          <p:cNvPr id="35" name="Shape 33"/>
+          <p:cNvSpPr/>
+          <p:nvPr/>
+        </p:nvSpPr>
+        <p:spPr>
+          <a:xfrm>
+            <a:off x="1033272" y="2542032"/>
+            <a:ext cx="2468880" cy="448056"/>
           </a:xfrm>
           <a:prstGeom prst="rect">
             <a:avLst/>
@@ -8782,14 +8229,14 @@
       </p:sp>
       <p:sp>
         <p:nvSpPr>
-          <p:cNvPr id="52" name="Text 50"/>
-          <p:cNvSpPr/>
-          <p:nvPr/>
-        </p:nvSpPr>
-        <p:spPr>
-          <a:xfrm>
-            <a:off x="1517904" y="2039112"/>
-            <a:ext cx="896112" cy="310896"/>
+          <p:cNvPr id="36" name="Text 34"/>
+          <p:cNvSpPr/>
+          <p:nvPr/>
+        </p:nvSpPr>
+        <p:spPr>
+          <a:xfrm>
+            <a:off x="1069848" y="2532888"/>
+            <a:ext cx="2395728" cy="466344"/>
           </a:xfrm>
           <a:prstGeom prst="rect">
             <a:avLst/>
@@ -8805,7 +8252,7 @@
               <a:buNone/>
             </a:pPr>
             <a:r>
-              <a:rPr lang="en-US" sz="800" dirty="0">
+              <a:rPr lang="en-US" sz="900" dirty="0">
                 <a:solidFill>
                   <a:srgbClr val="3A3A3A"/>
                 </a:solidFill>
@@ -8815,20 +8262,123 @@
               </a:rPr>
               <a:t>학원</a:t>
             </a:r>
-            <a:endParaRPr lang="en-US" sz="800" dirty="0"/>
-          </a:p>
-        </p:txBody>
-      </p:sp>
-      <p:sp>
-        <p:nvSpPr>
-          <p:cNvPr id="53" name="Text 51"/>
+            <a:endParaRPr lang="en-US" sz="900" dirty="0"/>
+          </a:p>
+        </p:txBody>
+      </p:sp>
+      <p:sp>
+        <p:nvSpPr>
+          <p:cNvPr id="37" name="Text 35"/>
+          <p:cNvSpPr/>
+          <p:nvPr/>
+        </p:nvSpPr>
+        <p:spPr>
+          <a:xfrm>
+            <a:off x="502920" y="2011680"/>
+            <a:ext cx="475488" cy="502920"/>
+          </a:xfrm>
+          <a:prstGeom prst="rect">
+            <a:avLst/>
+          </a:prstGeom>
+          <a:noFill/>
+          <a:ln/>
+        </p:spPr>
+        <p:txBody>
+          <a:bodyPr wrap="square" rtlCol="0" anchor="ctr"/>
+          <a:lstStyle/>
+          <a:p>
+            <a:pPr algn="r" indent="0" marL="0">
+              <a:buNone/>
+            </a:pPr>
+            <a:r>
+              <a:rPr lang="en-US" sz="1000" b="1" dirty="0">
+                <a:solidFill>
+                  <a:srgbClr val="132A3A"/>
+                </a:solidFill>
+                <a:latin typeface="맑은 고딕" pitchFamily="34" charset="0"/>
+                <a:ea typeface="맑은 고딕" pitchFamily="34" charset="-122"/>
+                <a:cs typeface="맑은 고딕" pitchFamily="34" charset="-120"/>
+              </a:rPr>
+              <a:t>5F-2</a:t>
+            </a:r>
+            <a:endParaRPr lang="en-US" sz="1000" dirty="0"/>
+          </a:p>
+        </p:txBody>
+      </p:sp>
+      <p:sp>
+        <p:nvSpPr>
+          <p:cNvPr id="38" name="Shape 36"/>
+          <p:cNvSpPr/>
+          <p:nvPr/>
+        </p:nvSpPr>
+        <p:spPr>
+          <a:xfrm>
+            <a:off x="1033272" y="2039112"/>
+            <a:ext cx="2468880" cy="448056"/>
+          </a:xfrm>
+          <a:prstGeom prst="rect">
+            <a:avLst/>
+          </a:prstGeom>
+          <a:solidFill>
+            <a:srgbClr val="E2E8F0"/>
+          </a:solidFill>
+          <a:ln w="13970">
+            <a:solidFill>
+              <a:srgbClr val="5B6B73"/>
+            </a:solidFill>
+            <a:prstDash val="solid"/>
+          </a:ln>
+        </p:spPr>
+      </p:sp>
+      <p:sp>
+        <p:nvSpPr>
+          <p:cNvPr id="39" name="Text 37"/>
+          <p:cNvSpPr/>
+          <p:nvPr/>
+        </p:nvSpPr>
+        <p:spPr>
+          <a:xfrm>
+            <a:off x="1069848" y="2029968"/>
+            <a:ext cx="2395728" cy="466344"/>
+          </a:xfrm>
+          <a:prstGeom prst="rect">
+            <a:avLst/>
+          </a:prstGeom>
+          <a:noFill/>
+          <a:ln/>
+        </p:spPr>
+        <p:txBody>
+          <a:bodyPr wrap="square" rtlCol="0" anchor="ctr"/>
+          <a:lstStyle/>
+          <a:p>
+            <a:pPr algn="ctr" indent="0" marL="0">
+              <a:buNone/>
+            </a:pPr>
+            <a:r>
+              <a:rPr lang="en-US" sz="900" dirty="0">
+                <a:solidFill>
+                  <a:srgbClr val="3A3A3A"/>
+                </a:solidFill>
+                <a:latin typeface="맑은 고딕" pitchFamily="34" charset="0"/>
+                <a:ea typeface="맑은 고딕" pitchFamily="34" charset="-122"/>
+                <a:cs typeface="맑은 고딕" pitchFamily="34" charset="-120"/>
+              </a:rPr>
+              <a:t>학원</a:t>
+            </a:r>
+            <a:endParaRPr lang="en-US" sz="900" dirty="0"/>
+          </a:p>
+        </p:txBody>
+      </p:sp>
+      <p:sp>
+        <p:nvSpPr>
+          <p:cNvPr id="40" name="Text 38"/>
           <p:cNvSpPr/>
           <p:nvPr/>
         </p:nvSpPr>
         <p:spPr>
           <a:xfrm>
             <a:off x="502920" y="6080760"/>
-            <a:ext cx="2926080" cy="228600"/>
+            <a:ext cx="3108960" cy="228600"/>
           </a:xfrm>
           <a:prstGeom prst="rect">
             <a:avLst/>
@@ -8873,25 +8423,28 @@
           </p:nvPr>
         </p:nvGraphicFramePr>
         <p:xfrm>
-          <a:off x="3749040" y="1645920"/>
-          <a:ext cx="6805879" cy="914400"/>
+          <a:off x="3886200" y="1645920"/>
+          <a:ext cx="7674559" cy="914400"/>
         </p:xfrm>
         <a:graphic>
           <a:graphicData uri="http://schemas.openxmlformats.org/drawingml/2006/table">
             <a:tbl>
               <a:tblPr/>
               <a:tblGrid>
-                <a:gridCol w="457200"/>
-                <a:gridCol w="457200"/>
-                <a:gridCol w="868680"/>
-                <a:gridCol w="1188720"/>
-                <a:gridCol w="749808"/>
-                <a:gridCol w="749808"/>
-                <a:gridCol w="658368"/>
-                <a:gridCol w="658368"/>
-                <a:gridCol w="1161288"/>
+                <a:gridCol w="411480"/>
+                <a:gridCol w="411480"/>
+                <a:gridCol w="640080"/>
+                <a:gridCol w="1051560"/>
+                <a:gridCol w="640080"/>
+                <a:gridCol w="640080"/>
+                <a:gridCol w="502920"/>
+                <a:gridCol w="640080"/>
+                <a:gridCol w="640080"/>
+                <a:gridCol w="640080"/>
+                <a:gridCol w="640080"/>
+                <a:gridCol w="850392"/>
               </a:tblGrid>
-              <a:tr h="320040">
+              <a:tr h="337625">
                 <a:tc>
                   <a:txBody>
                     <a:bodyPr/>
@@ -8901,14 +8454,14 @@
                         <a:buNone/>
                       </a:pPr>
                       <a:r>
-                        <a:rPr lang="en-US" sz="1000" b="1" dirty="0">
+                        <a:rPr lang="en-US" sz="900" b="1" dirty="0">
                           <a:solidFill>
                             <a:srgbClr val="FFFFFF"/>
                           </a:solidFill>
                         </a:rPr>
                         <a:t>층</a:t>
                       </a:r>
-                      <a:endParaRPr lang="en-US" sz="1000" dirty="0"/>
+                      <a:endParaRPr lang="en-US" sz="900" dirty="0"/>
                     </a:p>
                   </a:txBody>
                   <a:tcPr marL="91440" marR="91440" marT="45720" marB="45720" anchor="ctr">
@@ -8962,14 +8515,14 @@
                         <a:buNone/>
                       </a:pPr>
                       <a:r>
-                        <a:rPr lang="en-US" sz="1000" b="1" dirty="0">
+                        <a:rPr lang="en-US" sz="900" b="1" dirty="0">
                           <a:solidFill>
                             <a:srgbClr val="FFFFFF"/>
                           </a:solidFill>
                         </a:rPr>
                         <a:t>호실</a:t>
                       </a:r>
-                      <a:endParaRPr lang="en-US" sz="1000" dirty="0"/>
+                      <a:endParaRPr lang="en-US" sz="900" dirty="0"/>
                     </a:p>
                   </a:txBody>
                   <a:tcPr marL="91440" marR="91440" marT="45720" marB="45720" anchor="ctr">
@@ -9023,14 +8576,14 @@
                         <a:buNone/>
                       </a:pPr>
                       <a:r>
-                        <a:rPr lang="en-US" sz="1000" b="1" dirty="0">
+                        <a:rPr lang="en-US" sz="900" b="1" dirty="0">
                           <a:solidFill>
                             <a:srgbClr val="FFFFFF"/>
                           </a:solidFill>
                         </a:rPr>
-                        <a:t>용도/업종</a:t>
+                        <a:t>용도</a:t>
                       </a:r>
-                      <a:endParaRPr lang="en-US" sz="1000" dirty="0"/>
+                      <a:endParaRPr lang="en-US" sz="900" dirty="0"/>
                     </a:p>
                   </a:txBody>
                   <a:tcPr marL="91440" marR="91440" marT="45720" marB="45720" anchor="ctr">
@@ -9084,14 +8637,14 @@
                         <a:buNone/>
                       </a:pPr>
                       <a:r>
-                        <a:rPr lang="en-US" sz="1000" b="1" dirty="0">
+                        <a:rPr lang="en-US" sz="900" b="1" dirty="0">
                           <a:solidFill>
                             <a:srgbClr val="FFFFFF"/>
                           </a:solidFill>
                         </a:rPr>
                         <a:t>임차인</a:t>
                       </a:r>
-                      <a:endParaRPr lang="en-US" sz="1000" dirty="0"/>
+                      <a:endParaRPr lang="en-US" sz="900" dirty="0"/>
                     </a:p>
                   </a:txBody>
                   <a:tcPr marL="91440" marR="91440" marT="45720" marB="45720" anchor="ctr">
@@ -9145,14 +8698,14 @@
                         <a:buNone/>
                       </a:pPr>
                       <a:r>
-                        <a:rPr lang="en-US" sz="1000" b="1" dirty="0">
+                        <a:rPr lang="en-US" sz="900" b="1" dirty="0">
                           <a:solidFill>
                             <a:srgbClr val="FFFFFF"/>
                           </a:solidFill>
                         </a:rPr>
-                        <a:t>전용면적(㎡)</a:t>
+                        <a:t>임대(㎡)</a:t>
                       </a:r>
-                      <a:endParaRPr lang="en-US" sz="1000" dirty="0"/>
+                      <a:endParaRPr lang="en-US" sz="900" dirty="0"/>
                     </a:p>
                   </a:txBody>
                   <a:tcPr marL="91440" marR="91440" marT="45720" marB="45720" anchor="ctr">
@@ -9206,14 +8759,14 @@
                         <a:buNone/>
                       </a:pPr>
                       <a:r>
-                        <a:rPr lang="en-US" sz="1000" b="1" dirty="0">
+                        <a:rPr lang="en-US" sz="900" b="1" dirty="0">
                           <a:solidFill>
                             <a:srgbClr val="FFFFFF"/>
                           </a:solidFill>
                         </a:rPr>
-                        <a:t>보증금(만원)</a:t>
+                        <a:t>전용(㎡)</a:t>
                       </a:r>
-                      <a:endParaRPr lang="en-US" sz="1000" dirty="0"/>
+                      <a:endParaRPr lang="en-US" sz="900" dirty="0"/>
                     </a:p>
                   </a:txBody>
                   <a:tcPr marL="91440" marR="91440" marT="45720" marB="45720" anchor="ctr">
@@ -9267,14 +8820,14 @@
                         <a:buNone/>
                       </a:pPr>
                       <a:r>
-                        <a:rPr lang="en-US" sz="1000" b="1" dirty="0">
+                        <a:rPr lang="en-US" sz="900" b="1" dirty="0">
                           <a:solidFill>
                             <a:srgbClr val="FFFFFF"/>
                           </a:solidFill>
                         </a:rPr>
-                        <a:t>월세(만원)</a:t>
+                        <a:t>전용률</a:t>
                       </a:r>
-                      <a:endParaRPr lang="en-US" sz="1000" dirty="0"/>
+                      <a:endParaRPr lang="en-US" sz="900" dirty="0"/>
                     </a:p>
                   </a:txBody>
                   <a:tcPr marL="91440" marR="91440" marT="45720" marB="45720" anchor="ctr">
@@ -9328,14 +8881,14 @@
                         <a:buNone/>
                       </a:pPr>
                       <a:r>
-                        <a:rPr lang="en-US" sz="1000" b="1" dirty="0">
+                        <a:rPr lang="en-US" sz="900" b="1" dirty="0">
                           <a:solidFill>
                             <a:srgbClr val="FFFFFF"/>
                           </a:solidFill>
                         </a:rPr>
-                        <a:t>계약종료</a:t>
+                        <a:t>보증금</a:t>
                       </a:r>
-                      <a:endParaRPr lang="en-US" sz="1000" dirty="0"/>
+                      <a:endParaRPr lang="en-US" sz="900" dirty="0"/>
                     </a:p>
                   </a:txBody>
                   <a:tcPr marL="91440" marR="91440" marT="45720" marB="45720" anchor="ctr">
@@ -9389,14 +8942,197 @@
                         <a:buNone/>
                       </a:pPr>
                       <a:r>
-                        <a:rPr lang="en-US" sz="1000" b="1" dirty="0">
+                        <a:rPr lang="en-US" sz="900" b="1" dirty="0">
                           <a:solidFill>
                             <a:srgbClr val="FFFFFF"/>
                           </a:solidFill>
                         </a:rPr>
-                        <a:t>비고</a:t>
+                        <a:t>월세</a:t>
                       </a:r>
-                      <a:endParaRPr lang="en-US" sz="1000" dirty="0"/>
+                      <a:endParaRPr lang="en-US" sz="900" dirty="0"/>
+                    </a:p>
+                  </a:txBody>
+                  <a:tcPr marL="91440" marR="91440" marT="45720" marB="45720" anchor="ctr">
+                    <a:lnL w="12700" cap="flat" cmpd="sng" algn="ctr">
+                      <a:solidFill>
+                        <a:srgbClr val="CBD5E0"/>
+                      </a:solidFill>
+                      <a:prstDash val="solid"/>
+                      <a:round/>
+                      <a:headEnd type="none" w="med" len="med"/>
+                      <a:tailEnd type="none" w="med" len="med"/>
+                    </a:lnL>
+                    <a:lnR w="12700" cap="flat" cmpd="sng" algn="ctr">
+                      <a:solidFill>
+                        <a:srgbClr val="CBD5E0"/>
+                      </a:solidFill>
+                      <a:prstDash val="solid"/>
+                      <a:round/>
+                      <a:headEnd type="none" w="med" len="med"/>
+                      <a:tailEnd type="none" w="med" len="med"/>
+                    </a:lnR>
+                    <a:lnT w="12700" cap="flat" cmpd="sng" algn="ctr">
+                      <a:solidFill>
+                        <a:srgbClr val="CBD5E0"/>
+                      </a:solidFill>
+                      <a:prstDash val="solid"/>
+                      <a:round/>
+                      <a:headEnd type="none" w="med" len="med"/>
+                      <a:tailEnd type="none" w="med" len="med"/>
+                    </a:lnT>
+                    <a:lnB w="12700" cap="flat" cmpd="sng" algn="ctr">
+                      <a:solidFill>
+                        <a:srgbClr val="CBD5E0"/>
+                      </a:solidFill>
+                      <a:prstDash val="solid"/>
+                      <a:round/>
+                      <a:headEnd type="none" w="med" len="med"/>
+                      <a:tailEnd type="none" w="med" len="med"/>
+                    </a:lnB>
+                    <a:solidFill>
+                      <a:srgbClr val="132A3A"/>
+                    </a:solidFill>
+                  </a:tcPr>
+                </a:tc>
+                <a:tc>
+                  <a:txBody>
+                    <a:bodyPr/>
+                    <a:lstStyle/>
+                    <a:p>
+                      <a:pPr algn="ctr" indent="0" marL="0">
+                        <a:buNone/>
+                      </a:pPr>
+                      <a:r>
+                        <a:rPr lang="en-US" sz="900" b="1" dirty="0">
+                          <a:solidFill>
+                            <a:srgbClr val="FFFFFF"/>
+                          </a:solidFill>
+                        </a:rPr>
+                        <a:t>관리비</a:t>
+                      </a:r>
+                      <a:endParaRPr lang="en-US" sz="900" dirty="0"/>
+                    </a:p>
+                  </a:txBody>
+                  <a:tcPr marL="91440" marR="91440" marT="45720" marB="45720" anchor="ctr">
+                    <a:lnL w="12700" cap="flat" cmpd="sng" algn="ctr">
+                      <a:solidFill>
+                        <a:srgbClr val="CBD5E0"/>
+                      </a:solidFill>
+                      <a:prstDash val="solid"/>
+                      <a:round/>
+                      <a:headEnd type="none" w="med" len="med"/>
+                      <a:tailEnd type="none" w="med" len="med"/>
+                    </a:lnL>
+                    <a:lnR w="12700" cap="flat" cmpd="sng" algn="ctr">
+                      <a:solidFill>
+                        <a:srgbClr val="CBD5E0"/>
+                      </a:solidFill>
+                      <a:prstDash val="solid"/>
+                      <a:round/>
+                      <a:headEnd type="none" w="med" len="med"/>
+                      <a:tailEnd type="none" w="med" len="med"/>
+                    </a:lnR>
+                    <a:lnT w="12700" cap="flat" cmpd="sng" algn="ctr">
+                      <a:solidFill>
+                        <a:srgbClr val="CBD5E0"/>
+                      </a:solidFill>
+                      <a:prstDash val="solid"/>
+                      <a:round/>
+                      <a:headEnd type="none" w="med" len="med"/>
+                      <a:tailEnd type="none" w="med" len="med"/>
+                    </a:lnT>
+                    <a:lnB w="12700" cap="flat" cmpd="sng" algn="ctr">
+                      <a:solidFill>
+                        <a:srgbClr val="CBD5E0"/>
+                      </a:solidFill>
+                      <a:prstDash val="solid"/>
+                      <a:round/>
+                      <a:headEnd type="none" w="med" len="med"/>
+                      <a:tailEnd type="none" w="med" len="med"/>
+                    </a:lnB>
+                    <a:solidFill>
+                      <a:srgbClr val="132A3A"/>
+                    </a:solidFill>
+                  </a:tcPr>
+                </a:tc>
+                <a:tc>
+                  <a:txBody>
+                    <a:bodyPr/>
+                    <a:lstStyle/>
+                    <a:p>
+                      <a:pPr algn="ctr" indent="0" marL="0">
+                        <a:buNone/>
+                      </a:pPr>
+                      <a:r>
+                        <a:rPr lang="en-US" sz="900" b="1" dirty="0">
+                          <a:solidFill>
+                            <a:srgbClr val="FFFFFF"/>
+                          </a:solidFill>
+                        </a:rPr>
+                        <a:t>NOC</a:t>
+                      </a:r>
+                      <a:endParaRPr lang="en-US" sz="900" dirty="0"/>
+                    </a:p>
+                  </a:txBody>
+                  <a:tcPr marL="91440" marR="91440" marT="45720" marB="45720" anchor="ctr">
+                    <a:lnL w="12700" cap="flat" cmpd="sng" algn="ctr">
+                      <a:solidFill>
+                        <a:srgbClr val="CBD5E0"/>
+                      </a:solidFill>
+                      <a:prstDash val="solid"/>
+                      <a:round/>
+                      <a:headEnd type="none" w="med" len="med"/>
+                      <a:tailEnd type="none" w="med" len="med"/>
+                    </a:lnL>
+                    <a:lnR w="12700" cap="flat" cmpd="sng" algn="ctr">
+                      <a:solidFill>
+                        <a:srgbClr val="CBD5E0"/>
+                      </a:solidFill>
+                      <a:prstDash val="solid"/>
+                      <a:round/>
+                      <a:headEnd type="none" w="med" len="med"/>
+                      <a:tailEnd type="none" w="med" len="med"/>
+                    </a:lnR>
+                    <a:lnT w="12700" cap="flat" cmpd="sng" algn="ctr">
+                      <a:solidFill>
+                        <a:srgbClr val="CBD5E0"/>
+                      </a:solidFill>
+                      <a:prstDash val="solid"/>
+                      <a:round/>
+                      <a:headEnd type="none" w="med" len="med"/>
+                      <a:tailEnd type="none" w="med" len="med"/>
+                    </a:lnT>
+                    <a:lnB w="12700" cap="flat" cmpd="sng" algn="ctr">
+                      <a:solidFill>
+                        <a:srgbClr val="CBD5E0"/>
+                      </a:solidFill>
+                      <a:prstDash val="solid"/>
+                      <a:round/>
+                      <a:headEnd type="none" w="med" len="med"/>
+                      <a:tailEnd type="none" w="med" len="med"/>
+                    </a:lnB>
+                    <a:solidFill>
+                      <a:srgbClr val="132A3A"/>
+                    </a:solidFill>
+                  </a:tcPr>
+                </a:tc>
+                <a:tc>
+                  <a:txBody>
+                    <a:bodyPr/>
+                    <a:lstStyle/>
+                    <a:p>
+                      <a:pPr algn="ctr" indent="0" marL="0">
+                        <a:buNone/>
+                      </a:pPr>
+                      <a:r>
+                        <a:rPr lang="en-US" sz="900" b="1" dirty="0">
+                          <a:solidFill>
+                            <a:srgbClr val="FFFFFF"/>
+                          </a:solidFill>
+                        </a:rPr>
+                        <a:t>만기일</a:t>
+                      </a:r>
+                      <a:endParaRPr lang="en-US" sz="900" dirty="0"/>
                     </a:p>
                   </a:txBody>
                   <a:tcPr marL="91440" marR="91440" marT="45720" marB="45720" anchor="ctr">
@@ -9442,7 +9178,7 @@
                   </a:tcPr>
                 </a:tc>
               </a:tr>
-              <a:tr h="320040">
+              <a:tr h="337625">
                 <a:tc>
                   <a:txBody>
                     <a:bodyPr/>
@@ -9732,7 +9468,143 @@
                           <a:ea typeface="맑은 고딕" pitchFamily="34" charset="-122"/>
                           <a:cs typeface="맑은 고딕" pitchFamily="34" charset="-120"/>
                         </a:rPr>
-                        <a:t>318.8</a:t>
+                        <a:t>-</a:t>
+                      </a:r>
+                      <a:endParaRPr lang="en-US" sz="850" dirty="0">
+                        <a:latin typeface="맑은 고딕" charset="0"/>
+                        <a:ea typeface="맑은 고딕" charset="0"/>
+                        <a:cs typeface="맑은 고딕" charset="0"/>
+                      </a:endParaRPr>
+                    </a:p>
+                  </a:txBody>
+                  <a:tcPr marL="91440" marR="91440" marT="45720" marB="45720" anchor="ctr">
+                    <a:lnL w="12700" cap="flat" cmpd="sng" algn="ctr">
+                      <a:solidFill>
+                        <a:srgbClr val="CBD5E0"/>
+                      </a:solidFill>
+                      <a:prstDash val="solid"/>
+                      <a:round/>
+                      <a:headEnd type="none" w="med" len="med"/>
+                      <a:tailEnd type="none" w="med" len="med"/>
+                    </a:lnL>
+                    <a:lnR w="12700" cap="flat" cmpd="sng" algn="ctr">
+                      <a:solidFill>
+                        <a:srgbClr val="CBD5E0"/>
+                      </a:solidFill>
+                      <a:prstDash val="solid"/>
+                      <a:round/>
+                      <a:headEnd type="none" w="med" len="med"/>
+                      <a:tailEnd type="none" w="med" len="med"/>
+                    </a:lnR>
+                    <a:lnT w="12700" cap="flat" cmpd="sng" algn="ctr">
+                      <a:solidFill>
+                        <a:srgbClr val="CBD5E0"/>
+                      </a:solidFill>
+                      <a:prstDash val="solid"/>
+                      <a:round/>
+                      <a:headEnd type="none" w="med" len="med"/>
+                      <a:tailEnd type="none" w="med" len="med"/>
+                    </a:lnT>
+                    <a:lnB w="12700" cap="flat" cmpd="sng" algn="ctr">
+                      <a:solidFill>
+                        <a:srgbClr val="CBD5E0"/>
+                      </a:solidFill>
+                      <a:prstDash val="solid"/>
+                      <a:round/>
+                      <a:headEnd type="none" w="med" len="med"/>
+                      <a:tailEnd type="none" w="med" len="med"/>
+                    </a:lnB>
+                    <a:solidFill>
+                      <a:srgbClr val="FFFFFF"/>
+                    </a:solidFill>
+                  </a:tcPr>
+                </a:tc>
+                <a:tc>
+                  <a:txBody>
+                    <a:bodyPr/>
+                    <a:lstStyle/>
+                    <a:p>
+                      <a:pPr algn="r" indent="0" marL="0">
+                        <a:buNone/>
+                      </a:pPr>
+                      <a:r>
+                        <a:rPr lang="en-US" sz="850" dirty="0">
+                          <a:solidFill>
+                            <a:srgbClr val="2B2B2B"/>
+                          </a:solidFill>
+                          <a:latin typeface="맑은 고딕" pitchFamily="34" charset="0"/>
+                          <a:ea typeface="맑은 고딕" pitchFamily="34" charset="-122"/>
+                          <a:cs typeface="맑은 고딕" pitchFamily="34" charset="-120"/>
+                        </a:rPr>
+                        <a:t>-</a:t>
+                      </a:r>
+                      <a:endParaRPr lang="en-US" sz="850" dirty="0">
+                        <a:latin typeface="맑은 고딕" charset="0"/>
+                        <a:ea typeface="맑은 고딕" charset="0"/>
+                        <a:cs typeface="맑은 고딕" charset="0"/>
+                      </a:endParaRPr>
+                    </a:p>
+                  </a:txBody>
+                  <a:tcPr marL="91440" marR="91440" marT="45720" marB="45720" anchor="ctr">
+                    <a:lnL w="12700" cap="flat" cmpd="sng" algn="ctr">
+                      <a:solidFill>
+                        <a:srgbClr val="CBD5E0"/>
+                      </a:solidFill>
+                      <a:prstDash val="solid"/>
+                      <a:round/>
+                      <a:headEnd type="none" w="med" len="med"/>
+                      <a:tailEnd type="none" w="med" len="med"/>
+                    </a:lnL>
+                    <a:lnR w="12700" cap="flat" cmpd="sng" algn="ctr">
+                      <a:solidFill>
+                        <a:srgbClr val="CBD5E0"/>
+                      </a:solidFill>
+                      <a:prstDash val="solid"/>
+                      <a:round/>
+                      <a:headEnd type="none" w="med" len="med"/>
+                      <a:tailEnd type="none" w="med" len="med"/>
+                    </a:lnR>
+                    <a:lnT w="12700" cap="flat" cmpd="sng" algn="ctr">
+                      <a:solidFill>
+                        <a:srgbClr val="CBD5E0"/>
+                      </a:solidFill>
+                      <a:prstDash val="solid"/>
+                      <a:round/>
+                      <a:headEnd type="none" w="med" len="med"/>
+                      <a:tailEnd type="none" w="med" len="med"/>
+                    </a:lnT>
+                    <a:lnB w="12700" cap="flat" cmpd="sng" algn="ctr">
+                      <a:solidFill>
+                        <a:srgbClr val="CBD5E0"/>
+                      </a:solidFill>
+                      <a:prstDash val="solid"/>
+                      <a:round/>
+                      <a:headEnd type="none" w="med" len="med"/>
+                      <a:tailEnd type="none" w="med" len="med"/>
+                    </a:lnB>
+                    <a:solidFill>
+                      <a:srgbClr val="FFFFFF"/>
+                    </a:solidFill>
+                  </a:tcPr>
+                </a:tc>
+                <a:tc>
+                  <a:txBody>
+                    <a:bodyPr/>
+                    <a:lstStyle/>
+                    <a:p>
+                      <a:pPr algn="r" indent="0" marL="0">
+                        <a:buNone/>
+                      </a:pPr>
+                      <a:r>
+                        <a:rPr lang="en-US" sz="850" dirty="0">
+                          <a:solidFill>
+                            <a:srgbClr val="2B2B2B"/>
+                          </a:solidFill>
+                          <a:latin typeface="맑은 고딕" pitchFamily="34" charset="0"/>
+                          <a:ea typeface="맑은 고딕" pitchFamily="34" charset="-122"/>
+                          <a:cs typeface="맑은 고딕" pitchFamily="34" charset="-120"/>
+                        </a:rPr>
+                        <a:t>-</a:t>
                       </a:r>
                       <a:endParaRPr lang="en-US" sz="850" dirty="0">
                         <a:latin typeface="맑은 고딕" charset="0"/>
@@ -9856,7 +9728,7 @@
                     <a:bodyPr/>
                     <a:lstStyle/>
                     <a:p>
-                      <a:pPr algn="r" indent="0" marL="0">
+                      <a:pPr algn="ctr" indent="0" marL="0">
                         <a:buNone/>
                       </a:pPr>
                       <a:r>
@@ -9919,201 +9791,8 @@
                     </a:solidFill>
                   </a:tcPr>
                 </a:tc>
-                <a:tc>
-                  <a:txBody>
-                    <a:bodyPr/>
-                    <a:lstStyle/>
-                    <a:p>
-                      <a:pPr algn="r" indent="0" marL="0">
-                        <a:buNone/>
-                      </a:pPr>
-                      <a:r>
-                        <a:rPr lang="en-US" sz="850" dirty="0">
-                          <a:solidFill>
-                            <a:srgbClr val="2B2B2B"/>
-                          </a:solidFill>
-                          <a:latin typeface="맑은 고딕" pitchFamily="34" charset="0"/>
-                          <a:ea typeface="맑은 고딕" pitchFamily="34" charset="-122"/>
-                          <a:cs typeface="맑은 고딕" pitchFamily="34" charset="-120"/>
-                        </a:rPr>
-                        <a:t>2027-03-31</a:t>
-                      </a:r>
-                      <a:endParaRPr lang="en-US" sz="850" dirty="0">
-                        <a:latin typeface="맑은 고딕" charset="0"/>
-                        <a:ea typeface="맑은 고딕" charset="0"/>
-                        <a:cs typeface="맑은 고딕" charset="0"/>
-                      </a:endParaRPr>
-                    </a:p>
-                  </a:txBody>
-                  <a:tcPr marL="91440" marR="91440" marT="45720" marB="45720" anchor="ctr">
-                    <a:lnL w="12700" cap="flat" cmpd="sng" algn="ctr">
-                      <a:solidFill>
-                        <a:srgbClr val="CBD5E0"/>
-                      </a:solidFill>
-                      <a:prstDash val="solid"/>
-                      <a:round/>
-                      <a:headEnd type="none" w="med" len="med"/>
-                      <a:tailEnd type="none" w="med" len="med"/>
-                    </a:lnL>
-                    <a:lnR w="12700" cap="flat" cmpd="sng" algn="ctr">
-                      <a:solidFill>
-                        <a:srgbClr val="CBD5E0"/>
-                      </a:solidFill>
-                      <a:prstDash val="solid"/>
-                      <a:round/>
-                      <a:headEnd type="none" w="med" len="med"/>
-                      <a:tailEnd type="none" w="med" len="med"/>
-                    </a:lnR>
-                    <a:lnT w="12700" cap="flat" cmpd="sng" algn="ctr">
-                      <a:solidFill>
-                        <a:srgbClr val="CBD5E0"/>
-                      </a:solidFill>
-                      <a:prstDash val="solid"/>
-                      <a:round/>
-                      <a:headEnd type="none" w="med" len="med"/>
-                      <a:tailEnd type="none" w="med" len="med"/>
-                    </a:lnT>
-                    <a:lnB w="12700" cap="flat" cmpd="sng" algn="ctr">
-                      <a:solidFill>
-                        <a:srgbClr val="CBD5E0"/>
-                      </a:solidFill>
-                      <a:prstDash val="solid"/>
-                      <a:round/>
-                      <a:headEnd type="none" w="med" len="med"/>
-                      <a:tailEnd type="none" w="med" len="med"/>
-                    </a:lnB>
-                    <a:solidFill>
-                      <a:srgbClr val="FFFFFF"/>
-                    </a:solidFill>
-                  </a:tcPr>
-                </a:tc>
-                <a:tc>
-                  <a:txBody>
-                    <a:bodyPr/>
-                    <a:lstStyle/>
-                    <a:p>
-                      <a:pPr algn="ctr" indent="0" marL="0">
-                        <a:buNone/>
-                      </a:pPr>
-                      <a:r>
-                        <a:rPr lang="en-US" sz="850" dirty="0">
-                          <a:solidFill>
-                            <a:srgbClr val="2B2B2B"/>
-                          </a:solidFill>
-                          <a:latin typeface="맑은 고딕" pitchFamily="34" charset="0"/>
-                          <a:ea typeface="맑은 고딕" pitchFamily="34" charset="-122"/>
-                          <a:cs typeface="맑은 고딕" pitchFamily="34" charset="-120"/>
-                        </a:rPr>
-                        <a:t>협의 중</a:t>
-                      </a:r>
-                      <a:endParaRPr lang="en-US" sz="850" dirty="0">
-                        <a:latin typeface="맑은 고딕" charset="0"/>
-                        <a:ea typeface="맑은 고딕" charset="0"/>
-                        <a:cs typeface="맑은 고딕" charset="0"/>
-                      </a:endParaRPr>
-                    </a:p>
-                  </a:txBody>
-                  <a:tcPr marL="91440" marR="91440" marT="45720" marB="45720" anchor="ctr">
-                    <a:lnL w="12700" cap="flat" cmpd="sng" algn="ctr">
-                      <a:solidFill>
-                        <a:srgbClr val="CBD5E0"/>
-                      </a:solidFill>
-                      <a:prstDash val="solid"/>
-                      <a:round/>
-                      <a:headEnd type="none" w="med" len="med"/>
-                      <a:tailEnd type="none" w="med" len="med"/>
-                    </a:lnL>
-                    <a:lnR w="12700" cap="flat" cmpd="sng" algn="ctr">
-                      <a:solidFill>
-                        <a:srgbClr val="CBD5E0"/>
-                      </a:solidFill>
-                      <a:prstDash val="solid"/>
-                      <a:round/>
-                      <a:headEnd type="none" w="med" len="med"/>
-                      <a:tailEnd type="none" w="med" len="med"/>
-                    </a:lnR>
-                    <a:lnT w="12700" cap="flat" cmpd="sng" algn="ctr">
-                      <a:solidFill>
-                        <a:srgbClr val="CBD5E0"/>
-                      </a:solidFill>
-                      <a:prstDash val="solid"/>
-                      <a:round/>
-                      <a:headEnd type="none" w="med" len="med"/>
-                      <a:tailEnd type="none" w="med" len="med"/>
-                    </a:lnT>
-                    <a:lnB w="12700" cap="flat" cmpd="sng" algn="ctr">
-                      <a:solidFill>
-                        <a:srgbClr val="CBD5E0"/>
-                      </a:solidFill>
-                      <a:prstDash val="solid"/>
-                      <a:round/>
-                      <a:headEnd type="none" w="med" len="med"/>
-                      <a:tailEnd type="none" w="med" len="med"/>
-                    </a:lnB>
-                    <a:solidFill>
-                      <a:srgbClr val="FFFFFF"/>
-                    </a:solidFill>
-                  </a:tcPr>
-                </a:tc>
-                <a:tc>
-                  <a:txBody>
-                    <a:bodyPr/>
-                    <a:lstStyle/>
-                    <a:p>
-                      <a:pPr algn="ctr" indent="0" marL="0">
-                        <a:buNone/>
-                      </a:pPr>
-                      <a:endParaRPr lang="en-US" sz="850" dirty="0">
-                        <a:latin typeface="맑은 고딕" charset="0"/>
-                        <a:ea typeface="맑은 고딕" charset="0"/>
-                        <a:cs typeface="맑은 고딕" charset="0"/>
-                      </a:endParaRPr>
-                    </a:p>
-                  </a:txBody>
-                  <a:tcPr marL="91440" marR="91440" marT="45720" marB="45720" anchor="ctr">
-                    <a:lnL w="12700" cap="flat" cmpd="sng" algn="ctr">
-                      <a:solidFill>
-                        <a:srgbClr val="CBD5E0"/>
-                      </a:solidFill>
-                      <a:prstDash val="solid"/>
-                      <a:round/>
-                      <a:headEnd type="none" w="med" len="med"/>
-                      <a:tailEnd type="none" w="med" len="med"/>
-                    </a:lnL>
-                    <a:lnR w="12700" cap="flat" cmpd="sng" algn="ctr">
-                      <a:solidFill>
-                        <a:srgbClr val="CBD5E0"/>
-                      </a:solidFill>
-                      <a:prstDash val="solid"/>
-                      <a:round/>
-                      <a:headEnd type="none" w="med" len="med"/>
-                      <a:tailEnd type="none" w="med" len="med"/>
-                    </a:lnR>
-                    <a:lnT w="12700" cap="flat" cmpd="sng" algn="ctr">
-                      <a:solidFill>
-                        <a:srgbClr val="CBD5E0"/>
-                      </a:solidFill>
-                      <a:prstDash val="solid"/>
-                      <a:round/>
-                      <a:headEnd type="none" w="med" len="med"/>
-                      <a:tailEnd type="none" w="med" len="med"/>
-                    </a:lnT>
-                    <a:lnB w="12700" cap="flat" cmpd="sng" algn="ctr">
-                      <a:solidFill>
-                        <a:srgbClr val="CBD5E0"/>
-                      </a:solidFill>
-                      <a:prstDash val="solid"/>
-                      <a:round/>
-                      <a:headEnd type="none" w="med" len="med"/>
-                      <a:tailEnd type="none" w="med" len="med"/>
-                    </a:lnB>
-                    <a:solidFill>
-                      <a:srgbClr val="FFFFFF"/>
-                    </a:solidFill>
-                  </a:tcPr>
-                </a:tc>
               </a:tr>
-              <a:tr h="320040">
+              <a:tr h="337625">
                 <a:tc>
                   <a:txBody>
                     <a:bodyPr/>
@@ -10403,7 +10082,143 @@
                           <a:ea typeface="맑은 고딕" pitchFamily="34" charset="-122"/>
                           <a:cs typeface="맑은 고딕" pitchFamily="34" charset="-120"/>
                         </a:rPr>
-                        <a:t>145.8</a:t>
+                        <a:t>-</a:t>
+                      </a:r>
+                      <a:endParaRPr lang="en-US" sz="850" dirty="0">
+                        <a:latin typeface="맑은 고딕" charset="0"/>
+                        <a:ea typeface="맑은 고딕" charset="0"/>
+                        <a:cs typeface="맑은 고딕" charset="0"/>
+                      </a:endParaRPr>
+                    </a:p>
+                  </a:txBody>
+                  <a:tcPr marL="91440" marR="91440" marT="45720" marB="45720" anchor="ctr">
+                    <a:lnL w="12700" cap="flat" cmpd="sng" algn="ctr">
+                      <a:solidFill>
+                        <a:srgbClr val="CBD5E0"/>
+                      </a:solidFill>
+                      <a:prstDash val="solid"/>
+                      <a:round/>
+                      <a:headEnd type="none" w="med" len="med"/>
+                      <a:tailEnd type="none" w="med" len="med"/>
+                    </a:lnL>
+                    <a:lnR w="12700" cap="flat" cmpd="sng" algn="ctr">
+                      <a:solidFill>
+                        <a:srgbClr val="CBD5E0"/>
+                      </a:solidFill>
+                      <a:prstDash val="solid"/>
+                      <a:round/>
+                      <a:headEnd type="none" w="med" len="med"/>
+                      <a:tailEnd type="none" w="med" len="med"/>
+                    </a:lnR>
+                    <a:lnT w="12700" cap="flat" cmpd="sng" algn="ctr">
+                      <a:solidFill>
+                        <a:srgbClr val="CBD5E0"/>
+                      </a:solidFill>
+                      <a:prstDash val="solid"/>
+                      <a:round/>
+                      <a:headEnd type="none" w="med" len="med"/>
+                      <a:tailEnd type="none" w="med" len="med"/>
+                    </a:lnT>
+                    <a:lnB w="12700" cap="flat" cmpd="sng" algn="ctr">
+                      <a:solidFill>
+                        <a:srgbClr val="CBD5E0"/>
+                      </a:solidFill>
+                      <a:prstDash val="solid"/>
+                      <a:round/>
+                      <a:headEnd type="none" w="med" len="med"/>
+                      <a:tailEnd type="none" w="med" len="med"/>
+                    </a:lnB>
+                    <a:solidFill>
+                      <a:srgbClr val="F3F6F7"/>
+                    </a:solidFill>
+                  </a:tcPr>
+                </a:tc>
+                <a:tc>
+                  <a:txBody>
+                    <a:bodyPr/>
+                    <a:lstStyle/>
+                    <a:p>
+                      <a:pPr algn="r" indent="0" marL="0">
+                        <a:buNone/>
+                      </a:pPr>
+                      <a:r>
+                        <a:rPr lang="en-US" sz="850" dirty="0">
+                          <a:solidFill>
+                            <a:srgbClr val="2B2B2B"/>
+                          </a:solidFill>
+                          <a:latin typeface="맑은 고딕" pitchFamily="34" charset="0"/>
+                          <a:ea typeface="맑은 고딕" pitchFamily="34" charset="-122"/>
+                          <a:cs typeface="맑은 고딕" pitchFamily="34" charset="-120"/>
+                        </a:rPr>
+                        <a:t>-</a:t>
+                      </a:r>
+                      <a:endParaRPr lang="en-US" sz="850" dirty="0">
+                        <a:latin typeface="맑은 고딕" charset="0"/>
+                        <a:ea typeface="맑은 고딕" charset="0"/>
+                        <a:cs typeface="맑은 고딕" charset="0"/>
+                      </a:endParaRPr>
+                    </a:p>
+                  </a:txBody>
+                  <a:tcPr marL="91440" marR="91440" marT="45720" marB="45720" anchor="ctr">
+                    <a:lnL w="12700" cap="flat" cmpd="sng" algn="ctr">
+                      <a:solidFill>
+                        <a:srgbClr val="CBD5E0"/>
+                      </a:solidFill>
+                      <a:prstDash val="solid"/>
+                      <a:round/>
+                      <a:headEnd type="none" w="med" len="med"/>
+                      <a:tailEnd type="none" w="med" len="med"/>
+                    </a:lnL>
+                    <a:lnR w="12700" cap="flat" cmpd="sng" algn="ctr">
+                      <a:solidFill>
+                        <a:srgbClr val="CBD5E0"/>
+                      </a:solidFill>
+                      <a:prstDash val="solid"/>
+                      <a:round/>
+                      <a:headEnd type="none" w="med" len="med"/>
+                      <a:tailEnd type="none" w="med" len="med"/>
+                    </a:lnR>
+                    <a:lnT w="12700" cap="flat" cmpd="sng" algn="ctr">
+                      <a:solidFill>
+                        <a:srgbClr val="CBD5E0"/>
+                      </a:solidFill>
+                      <a:prstDash val="solid"/>
+                      <a:round/>
+                      <a:headEnd type="none" w="med" len="med"/>
+                      <a:tailEnd type="none" w="med" len="med"/>
+                    </a:lnT>
+                    <a:lnB w="12700" cap="flat" cmpd="sng" algn="ctr">
+                      <a:solidFill>
+                        <a:srgbClr val="CBD5E0"/>
+                      </a:solidFill>
+                      <a:prstDash val="solid"/>
+                      <a:round/>
+                      <a:headEnd type="none" w="med" len="med"/>
+                      <a:tailEnd type="none" w="med" len="med"/>
+                    </a:lnB>
+                    <a:solidFill>
+                      <a:srgbClr val="F3F6F7"/>
+                    </a:solidFill>
+                  </a:tcPr>
+                </a:tc>
+                <a:tc>
+                  <a:txBody>
+                    <a:bodyPr/>
+                    <a:lstStyle/>
+                    <a:p>
+                      <a:pPr algn="r" indent="0" marL="0">
+                        <a:buNone/>
+                      </a:pPr>
+                      <a:r>
+                        <a:rPr lang="en-US" sz="850" dirty="0">
+                          <a:solidFill>
+                            <a:srgbClr val="2B2B2B"/>
+                          </a:solidFill>
+                          <a:latin typeface="맑은 고딕" pitchFamily="34" charset="0"/>
+                          <a:ea typeface="맑은 고딕" pitchFamily="34" charset="-122"/>
+                          <a:cs typeface="맑은 고딕" pitchFamily="34" charset="-120"/>
+                        </a:rPr>
+                        <a:t>-</a:t>
                       </a:r>
                       <a:endParaRPr lang="en-US" sz="850" dirty="0">
                         <a:latin typeface="맑은 고딕" charset="0"/>
@@ -10527,7 +10342,7 @@
                     <a:bodyPr/>
                     <a:lstStyle/>
                     <a:p>
-                      <a:pPr algn="r" indent="0" marL="0">
+                      <a:pPr algn="ctr" indent="0" marL="0">
                         <a:buNone/>
                       </a:pPr>
                       <a:r>
@@ -10590,201 +10405,8 @@
                     </a:solidFill>
                   </a:tcPr>
                 </a:tc>
-                <a:tc>
-                  <a:txBody>
-                    <a:bodyPr/>
-                    <a:lstStyle/>
-                    <a:p>
-                      <a:pPr algn="r" indent="0" marL="0">
-                        <a:buNone/>
-                      </a:pPr>
-                      <a:r>
-                        <a:rPr lang="en-US" sz="850" dirty="0">
-                          <a:solidFill>
-                            <a:srgbClr val="2B2B2B"/>
-                          </a:solidFill>
-                          <a:latin typeface="맑은 고딕" pitchFamily="34" charset="0"/>
-                          <a:ea typeface="맑은 고딕" pitchFamily="34" charset="-122"/>
-                          <a:cs typeface="맑은 고딕" pitchFamily="34" charset="-120"/>
-                        </a:rPr>
-                        <a:t>2026-12-31</a:t>
-                      </a:r>
-                      <a:endParaRPr lang="en-US" sz="850" dirty="0">
-                        <a:latin typeface="맑은 고딕" charset="0"/>
-                        <a:ea typeface="맑은 고딕" charset="0"/>
-                        <a:cs typeface="맑은 고딕" charset="0"/>
-                      </a:endParaRPr>
-                    </a:p>
-                  </a:txBody>
-                  <a:tcPr marL="91440" marR="91440" marT="45720" marB="45720" anchor="ctr">
-                    <a:lnL w="12700" cap="flat" cmpd="sng" algn="ctr">
-                      <a:solidFill>
-                        <a:srgbClr val="CBD5E0"/>
-                      </a:solidFill>
-                      <a:prstDash val="solid"/>
-                      <a:round/>
-                      <a:headEnd type="none" w="med" len="med"/>
-                      <a:tailEnd type="none" w="med" len="med"/>
-                    </a:lnL>
-                    <a:lnR w="12700" cap="flat" cmpd="sng" algn="ctr">
-                      <a:solidFill>
-                        <a:srgbClr val="CBD5E0"/>
-                      </a:solidFill>
-                      <a:prstDash val="solid"/>
-                      <a:round/>
-                      <a:headEnd type="none" w="med" len="med"/>
-                      <a:tailEnd type="none" w="med" len="med"/>
-                    </a:lnR>
-                    <a:lnT w="12700" cap="flat" cmpd="sng" algn="ctr">
-                      <a:solidFill>
-                        <a:srgbClr val="CBD5E0"/>
-                      </a:solidFill>
-                      <a:prstDash val="solid"/>
-                      <a:round/>
-                      <a:headEnd type="none" w="med" len="med"/>
-                      <a:tailEnd type="none" w="med" len="med"/>
-                    </a:lnT>
-                    <a:lnB w="12700" cap="flat" cmpd="sng" algn="ctr">
-                      <a:solidFill>
-                        <a:srgbClr val="CBD5E0"/>
-                      </a:solidFill>
-                      <a:prstDash val="solid"/>
-                      <a:round/>
-                      <a:headEnd type="none" w="med" len="med"/>
-                      <a:tailEnd type="none" w="med" len="med"/>
-                    </a:lnB>
-                    <a:solidFill>
-                      <a:srgbClr val="F3F6F7"/>
-                    </a:solidFill>
-                  </a:tcPr>
-                </a:tc>
-                <a:tc>
-                  <a:txBody>
-                    <a:bodyPr/>
-                    <a:lstStyle/>
-                    <a:p>
-                      <a:pPr algn="ctr" indent="0" marL="0">
-                        <a:buNone/>
-                      </a:pPr>
-                      <a:r>
-                        <a:rPr lang="en-US" sz="850" dirty="0">
-                          <a:solidFill>
-                            <a:srgbClr val="2B2B2B"/>
-                          </a:solidFill>
-                          <a:latin typeface="맑은 고딕" pitchFamily="34" charset="0"/>
-                          <a:ea typeface="맑은 고딕" pitchFamily="34" charset="-122"/>
-                          <a:cs typeface="맑은 고딕" pitchFamily="34" charset="-120"/>
-                        </a:rPr>
-                        <a:t>합의 완료</a:t>
-                      </a:r>
-                      <a:endParaRPr lang="en-US" sz="850" dirty="0">
-                        <a:latin typeface="맑은 고딕" charset="0"/>
-                        <a:ea typeface="맑은 고딕" charset="0"/>
-                        <a:cs typeface="맑은 고딕" charset="0"/>
-                      </a:endParaRPr>
-                    </a:p>
-                  </a:txBody>
-                  <a:tcPr marL="91440" marR="91440" marT="45720" marB="45720" anchor="ctr">
-                    <a:lnL w="12700" cap="flat" cmpd="sng" algn="ctr">
-                      <a:solidFill>
-                        <a:srgbClr val="CBD5E0"/>
-                      </a:solidFill>
-                      <a:prstDash val="solid"/>
-                      <a:round/>
-                      <a:headEnd type="none" w="med" len="med"/>
-                      <a:tailEnd type="none" w="med" len="med"/>
-                    </a:lnL>
-                    <a:lnR w="12700" cap="flat" cmpd="sng" algn="ctr">
-                      <a:solidFill>
-                        <a:srgbClr val="CBD5E0"/>
-                      </a:solidFill>
-                      <a:prstDash val="solid"/>
-                      <a:round/>
-                      <a:headEnd type="none" w="med" len="med"/>
-                      <a:tailEnd type="none" w="med" len="med"/>
-                    </a:lnR>
-                    <a:lnT w="12700" cap="flat" cmpd="sng" algn="ctr">
-                      <a:solidFill>
-                        <a:srgbClr val="CBD5E0"/>
-                      </a:solidFill>
-                      <a:prstDash val="solid"/>
-                      <a:round/>
-                      <a:headEnd type="none" w="med" len="med"/>
-                      <a:tailEnd type="none" w="med" len="med"/>
-                    </a:lnT>
-                    <a:lnB w="12700" cap="flat" cmpd="sng" algn="ctr">
-                      <a:solidFill>
-                        <a:srgbClr val="CBD5E0"/>
-                      </a:solidFill>
-                      <a:prstDash val="solid"/>
-                      <a:round/>
-                      <a:headEnd type="none" w="med" len="med"/>
-                      <a:tailEnd type="none" w="med" len="med"/>
-                    </a:lnB>
-                    <a:solidFill>
-                      <a:srgbClr val="F3F6F7"/>
-                    </a:solidFill>
-                  </a:tcPr>
-                </a:tc>
-                <a:tc>
-                  <a:txBody>
-                    <a:bodyPr/>
-                    <a:lstStyle/>
-                    <a:p>
-                      <a:pPr algn="ctr" indent="0" marL="0">
-                        <a:buNone/>
-                      </a:pPr>
-                      <a:endParaRPr lang="en-US" sz="850" dirty="0">
-                        <a:latin typeface="맑은 고딕" charset="0"/>
-                        <a:ea typeface="맑은 고딕" charset="0"/>
-                        <a:cs typeface="맑은 고딕" charset="0"/>
-                      </a:endParaRPr>
-                    </a:p>
-                  </a:txBody>
-                  <a:tcPr marL="91440" marR="91440" marT="45720" marB="45720" anchor="ctr">
-                    <a:lnL w="12700" cap="flat" cmpd="sng" algn="ctr">
-                      <a:solidFill>
-                        <a:srgbClr val="CBD5E0"/>
-                      </a:solidFill>
-                      <a:prstDash val="solid"/>
-                      <a:round/>
-                      <a:headEnd type="none" w="med" len="med"/>
-                      <a:tailEnd type="none" w="med" len="med"/>
-                    </a:lnL>
-                    <a:lnR w="12700" cap="flat" cmpd="sng" algn="ctr">
-                      <a:solidFill>
-                        <a:srgbClr val="CBD5E0"/>
-                      </a:solidFill>
-                      <a:prstDash val="solid"/>
-                      <a:round/>
-                      <a:headEnd type="none" w="med" len="med"/>
-                      <a:tailEnd type="none" w="med" len="med"/>
-                    </a:lnR>
-                    <a:lnT w="12700" cap="flat" cmpd="sng" algn="ctr">
-                      <a:solidFill>
-                        <a:srgbClr val="CBD5E0"/>
-                      </a:solidFill>
-                      <a:prstDash val="solid"/>
-                      <a:round/>
-                      <a:headEnd type="none" w="med" len="med"/>
-                      <a:tailEnd type="none" w="med" len="med"/>
-                    </a:lnT>
-                    <a:lnB w="12700" cap="flat" cmpd="sng" algn="ctr">
-                      <a:solidFill>
-                        <a:srgbClr val="CBD5E0"/>
-                      </a:solidFill>
-                      <a:prstDash val="solid"/>
-                      <a:round/>
-                      <a:headEnd type="none" w="med" len="med"/>
-                      <a:tailEnd type="none" w="med" len="med"/>
-                    </a:lnB>
-                    <a:solidFill>
-                      <a:srgbClr val="F3F6F7"/>
-                    </a:solidFill>
-                  </a:tcPr>
-                </a:tc>
               </a:tr>
-              <a:tr h="320040">
+              <a:tr h="337625">
                 <a:tc>
                   <a:txBody>
                     <a:bodyPr/>
@@ -11074,7 +10696,143 @@
                           <a:ea typeface="맑은 고딕" pitchFamily="34" charset="-122"/>
                           <a:cs typeface="맑은 고딕" pitchFamily="34" charset="-120"/>
                         </a:rPr>
-                        <a:t>103.7</a:t>
+                        <a:t>-</a:t>
+                      </a:r>
+                      <a:endParaRPr lang="en-US" sz="850" dirty="0">
+                        <a:latin typeface="맑은 고딕" charset="0"/>
+                        <a:ea typeface="맑은 고딕" charset="0"/>
+                        <a:cs typeface="맑은 고딕" charset="0"/>
+                      </a:endParaRPr>
+                    </a:p>
+                  </a:txBody>
+                  <a:tcPr marL="91440" marR="91440" marT="45720" marB="45720" anchor="ctr">
+                    <a:lnL w="12700" cap="flat" cmpd="sng" algn="ctr">
+                      <a:solidFill>
+                        <a:srgbClr val="CBD5E0"/>
+                      </a:solidFill>
+                      <a:prstDash val="solid"/>
+                      <a:round/>
+                      <a:headEnd type="none" w="med" len="med"/>
+                      <a:tailEnd type="none" w="med" len="med"/>
+                    </a:lnL>
+                    <a:lnR w="12700" cap="flat" cmpd="sng" algn="ctr">
+                      <a:solidFill>
+                        <a:srgbClr val="CBD5E0"/>
+                      </a:solidFill>
+                      <a:prstDash val="solid"/>
+                      <a:round/>
+                      <a:headEnd type="none" w="med" len="med"/>
+                      <a:tailEnd type="none" w="med" len="med"/>
+                    </a:lnR>
+                    <a:lnT w="12700" cap="flat" cmpd="sng" algn="ctr">
+                      <a:solidFill>
+                        <a:srgbClr val="CBD5E0"/>
+                      </a:solidFill>
+                      <a:prstDash val="solid"/>
+                      <a:round/>
+                      <a:headEnd type="none" w="med" len="med"/>
+                      <a:tailEnd type="none" w="med" len="med"/>
+                    </a:lnT>
+                    <a:lnB w="12700" cap="flat" cmpd="sng" algn="ctr">
+                      <a:solidFill>
+                        <a:srgbClr val="CBD5E0"/>
+                      </a:solidFill>
+                      <a:prstDash val="solid"/>
+                      <a:round/>
+                      <a:headEnd type="none" w="med" len="med"/>
+                      <a:tailEnd type="none" w="med" len="med"/>
+                    </a:lnB>
+                    <a:solidFill>
+                      <a:srgbClr val="FFFFFF"/>
+                    </a:solidFill>
+                  </a:tcPr>
+                </a:tc>
+                <a:tc>
+                  <a:txBody>
+                    <a:bodyPr/>
+                    <a:lstStyle/>
+                    <a:p>
+                      <a:pPr algn="r" indent="0" marL="0">
+                        <a:buNone/>
+                      </a:pPr>
+                      <a:r>
+                        <a:rPr lang="en-US" sz="850" dirty="0">
+                          <a:solidFill>
+                            <a:srgbClr val="2B2B2B"/>
+                          </a:solidFill>
+                          <a:latin typeface="맑은 고딕" pitchFamily="34" charset="0"/>
+                          <a:ea typeface="맑은 고딕" pitchFamily="34" charset="-122"/>
+                          <a:cs typeface="맑은 고딕" pitchFamily="34" charset="-120"/>
+                        </a:rPr>
+                        <a:t>-</a:t>
+                      </a:r>
+                      <a:endParaRPr lang="en-US" sz="850" dirty="0">
+                        <a:latin typeface="맑은 고딕" charset="0"/>
+                        <a:ea typeface="맑은 고딕" charset="0"/>
+                        <a:cs typeface="맑은 고딕" charset="0"/>
+                      </a:endParaRPr>
+                    </a:p>
+                  </a:txBody>
+                  <a:tcPr marL="91440" marR="91440" marT="45720" marB="45720" anchor="ctr">
+                    <a:lnL w="12700" cap="flat" cmpd="sng" algn="ctr">
+                      <a:solidFill>
+                        <a:srgbClr val="CBD5E0"/>
+                      </a:solidFill>
+                      <a:prstDash val="solid"/>
+                      <a:round/>
+                      <a:headEnd type="none" w="med" len="med"/>
+                      <a:tailEnd type="none" w="med" len="med"/>
+                    </a:lnL>
+                    <a:lnR w="12700" cap="flat" cmpd="sng" algn="ctr">
+                      <a:solidFill>
+                        <a:srgbClr val="CBD5E0"/>
+                      </a:solidFill>
+                      <a:prstDash val="solid"/>
+                      <a:round/>
+                      <a:headEnd type="none" w="med" len="med"/>
+                      <a:tailEnd type="none" w="med" len="med"/>
+                    </a:lnR>
+                    <a:lnT w="12700" cap="flat" cmpd="sng" algn="ctr">
+                      <a:solidFill>
+                        <a:srgbClr val="CBD5E0"/>
+                      </a:solidFill>
+                      <a:prstDash val="solid"/>
+                      <a:round/>
+                      <a:headEnd type="none" w="med" len="med"/>
+                      <a:tailEnd type="none" w="med" len="med"/>
+                    </a:lnT>
+                    <a:lnB w="12700" cap="flat" cmpd="sng" algn="ctr">
+                      <a:solidFill>
+                        <a:srgbClr val="CBD5E0"/>
+                      </a:solidFill>
+                      <a:prstDash val="solid"/>
+                      <a:round/>
+                      <a:headEnd type="none" w="med" len="med"/>
+                      <a:tailEnd type="none" w="med" len="med"/>
+                    </a:lnB>
+                    <a:solidFill>
+                      <a:srgbClr val="FFFFFF"/>
+                    </a:solidFill>
+                  </a:tcPr>
+                </a:tc>
+                <a:tc>
+                  <a:txBody>
+                    <a:bodyPr/>
+                    <a:lstStyle/>
+                    <a:p>
+                      <a:pPr algn="r" indent="0" marL="0">
+                        <a:buNone/>
+                      </a:pPr>
+                      <a:r>
+                        <a:rPr lang="en-US" sz="850" dirty="0">
+                          <a:solidFill>
+                            <a:srgbClr val="2B2B2B"/>
+                          </a:solidFill>
+                          <a:latin typeface="맑은 고딕" pitchFamily="34" charset="0"/>
+                          <a:ea typeface="맑은 고딕" pitchFamily="34" charset="-122"/>
+                          <a:cs typeface="맑은 고딕" pitchFamily="34" charset="-120"/>
+                        </a:rPr>
+                        <a:t>-</a:t>
                       </a:r>
                       <a:endParaRPr lang="en-US" sz="850" dirty="0">
                         <a:latin typeface="맑은 고딕" charset="0"/>
@@ -11198,7 +10956,7 @@
                     <a:bodyPr/>
                     <a:lstStyle/>
                     <a:p>
-                      <a:pPr algn="r" indent="0" marL="0">
+                      <a:pPr algn="ctr" indent="0" marL="0">
                         <a:buNone/>
                       </a:pPr>
                       <a:r>
@@ -11261,201 +11019,8 @@
                     </a:solidFill>
                   </a:tcPr>
                 </a:tc>
-                <a:tc>
-                  <a:txBody>
-                    <a:bodyPr/>
-                    <a:lstStyle/>
-                    <a:p>
-                      <a:pPr algn="r" indent="0" marL="0">
-                        <a:buNone/>
-                      </a:pPr>
-                      <a:r>
-                        <a:rPr lang="en-US" sz="850" dirty="0">
-                          <a:solidFill>
-                            <a:srgbClr val="2B2B2B"/>
-                          </a:solidFill>
-                          <a:latin typeface="맑은 고딕" pitchFamily="34" charset="0"/>
-                          <a:ea typeface="맑은 고딕" pitchFamily="34" charset="-122"/>
-                          <a:cs typeface="맑은 고딕" pitchFamily="34" charset="-120"/>
-                        </a:rPr>
-                        <a:t>2027-09-30</a:t>
-                      </a:r>
-                      <a:endParaRPr lang="en-US" sz="850" dirty="0">
-                        <a:latin typeface="맑은 고딕" charset="0"/>
-                        <a:ea typeface="맑은 고딕" charset="0"/>
-                        <a:cs typeface="맑은 고딕" charset="0"/>
-                      </a:endParaRPr>
-                    </a:p>
-                  </a:txBody>
-                  <a:tcPr marL="91440" marR="91440" marT="45720" marB="45720" anchor="ctr">
-                    <a:lnL w="12700" cap="flat" cmpd="sng" algn="ctr">
-                      <a:solidFill>
-                        <a:srgbClr val="CBD5E0"/>
-                      </a:solidFill>
-                      <a:prstDash val="solid"/>
-                      <a:round/>
-                      <a:headEnd type="none" w="med" len="med"/>
-                      <a:tailEnd type="none" w="med" len="med"/>
-                    </a:lnL>
-                    <a:lnR w="12700" cap="flat" cmpd="sng" algn="ctr">
-                      <a:solidFill>
-                        <a:srgbClr val="CBD5E0"/>
-                      </a:solidFill>
-                      <a:prstDash val="solid"/>
-                      <a:round/>
-                      <a:headEnd type="none" w="med" len="med"/>
-                      <a:tailEnd type="none" w="med" len="med"/>
-                    </a:lnR>
-                    <a:lnT w="12700" cap="flat" cmpd="sng" algn="ctr">
-                      <a:solidFill>
-                        <a:srgbClr val="CBD5E0"/>
-                      </a:solidFill>
-                      <a:prstDash val="solid"/>
-                      <a:round/>
-                      <a:headEnd type="none" w="med" len="med"/>
-                      <a:tailEnd type="none" w="med" len="med"/>
-                    </a:lnT>
-                    <a:lnB w="12700" cap="flat" cmpd="sng" algn="ctr">
-                      <a:solidFill>
-                        <a:srgbClr val="CBD5E0"/>
-                      </a:solidFill>
-                      <a:prstDash val="solid"/>
-                      <a:round/>
-                      <a:headEnd type="none" w="med" len="med"/>
-                      <a:tailEnd type="none" w="med" len="med"/>
-                    </a:lnB>
-                    <a:solidFill>
-                      <a:srgbClr val="FFFFFF"/>
-                    </a:solidFill>
-                  </a:tcPr>
-                </a:tc>
-                <a:tc>
-                  <a:txBody>
-                    <a:bodyPr/>
-                    <a:lstStyle/>
-                    <a:p>
-                      <a:pPr algn="ctr" indent="0" marL="0">
-                        <a:buNone/>
-                      </a:pPr>
-                      <a:r>
-                        <a:rPr lang="en-US" sz="850" dirty="0">
-                          <a:solidFill>
-                            <a:srgbClr val="2B2B2B"/>
-                          </a:solidFill>
-                          <a:latin typeface="맑은 고딕" pitchFamily="34" charset="0"/>
-                          <a:ea typeface="맑은 고딕" pitchFamily="34" charset="-122"/>
-                          <a:cs typeface="맑은 고딕" pitchFamily="34" charset="-120"/>
-                        </a:rPr>
-                        <a:t>미협의</a:t>
-                      </a:r>
-                      <a:endParaRPr lang="en-US" sz="850" dirty="0">
-                        <a:latin typeface="맑은 고딕" charset="0"/>
-                        <a:ea typeface="맑은 고딕" charset="0"/>
-                        <a:cs typeface="맑은 고딕" charset="0"/>
-                      </a:endParaRPr>
-                    </a:p>
-                  </a:txBody>
-                  <a:tcPr marL="91440" marR="91440" marT="45720" marB="45720" anchor="ctr">
-                    <a:lnL w="12700" cap="flat" cmpd="sng" algn="ctr">
-                      <a:solidFill>
-                        <a:srgbClr val="CBD5E0"/>
-                      </a:solidFill>
-                      <a:prstDash val="solid"/>
-                      <a:round/>
-                      <a:headEnd type="none" w="med" len="med"/>
-                      <a:tailEnd type="none" w="med" len="med"/>
-                    </a:lnL>
-                    <a:lnR w="12700" cap="flat" cmpd="sng" algn="ctr">
-                      <a:solidFill>
-                        <a:srgbClr val="CBD5E0"/>
-                      </a:solidFill>
-                      <a:prstDash val="solid"/>
-                      <a:round/>
-                      <a:headEnd type="none" w="med" len="med"/>
-                      <a:tailEnd type="none" w="med" len="med"/>
-                    </a:lnR>
-                    <a:lnT w="12700" cap="flat" cmpd="sng" algn="ctr">
-                      <a:solidFill>
-                        <a:srgbClr val="CBD5E0"/>
-                      </a:solidFill>
-                      <a:prstDash val="solid"/>
-                      <a:round/>
-                      <a:headEnd type="none" w="med" len="med"/>
-                      <a:tailEnd type="none" w="med" len="med"/>
-                    </a:lnT>
-                    <a:lnB w="12700" cap="flat" cmpd="sng" algn="ctr">
-                      <a:solidFill>
-                        <a:srgbClr val="CBD5E0"/>
-                      </a:solidFill>
-                      <a:prstDash val="solid"/>
-                      <a:round/>
-                      <a:headEnd type="none" w="med" len="med"/>
-                      <a:tailEnd type="none" w="med" len="med"/>
-                    </a:lnB>
-                    <a:solidFill>
-                      <a:srgbClr val="FFFFFF"/>
-                    </a:solidFill>
-                  </a:tcPr>
-                </a:tc>
-                <a:tc>
-                  <a:txBody>
-                    <a:bodyPr/>
-                    <a:lstStyle/>
-                    <a:p>
-                      <a:pPr algn="ctr" indent="0" marL="0">
-                        <a:buNone/>
-                      </a:pPr>
-                      <a:endParaRPr lang="en-US" sz="850" dirty="0">
-                        <a:latin typeface="맑은 고딕" charset="0"/>
-                        <a:ea typeface="맑은 고딕" charset="0"/>
-                        <a:cs typeface="맑은 고딕" charset="0"/>
-                      </a:endParaRPr>
-                    </a:p>
-                  </a:txBody>
-                  <a:tcPr marL="91440" marR="91440" marT="45720" marB="45720" anchor="ctr">
-                    <a:lnL w="12700" cap="flat" cmpd="sng" algn="ctr">
-                      <a:solidFill>
-                        <a:srgbClr val="CBD5E0"/>
-                      </a:solidFill>
-                      <a:prstDash val="solid"/>
-                      <a:round/>
-                      <a:headEnd type="none" w="med" len="med"/>
-                      <a:tailEnd type="none" w="med" len="med"/>
-                    </a:lnL>
-                    <a:lnR w="12700" cap="flat" cmpd="sng" algn="ctr">
-                      <a:solidFill>
-                        <a:srgbClr val="CBD5E0"/>
-                      </a:solidFill>
-                      <a:prstDash val="solid"/>
-                      <a:round/>
-                      <a:headEnd type="none" w="med" len="med"/>
-                      <a:tailEnd type="none" w="med" len="med"/>
-                    </a:lnR>
-                    <a:lnT w="12700" cap="flat" cmpd="sng" algn="ctr">
-                      <a:solidFill>
-                        <a:srgbClr val="CBD5E0"/>
-                      </a:solidFill>
-                      <a:prstDash val="solid"/>
-                      <a:round/>
-                      <a:headEnd type="none" w="med" len="med"/>
-                      <a:tailEnd type="none" w="med" len="med"/>
-                    </a:lnT>
-                    <a:lnB w="12700" cap="flat" cmpd="sng" algn="ctr">
-                      <a:solidFill>
-                        <a:srgbClr val="CBD5E0"/>
-                      </a:solidFill>
-                      <a:prstDash val="solid"/>
-                      <a:round/>
-                      <a:headEnd type="none" w="med" len="med"/>
-                      <a:tailEnd type="none" w="med" len="med"/>
-                    </a:lnB>
-                    <a:solidFill>
-                      <a:srgbClr val="FFFFFF"/>
-                    </a:solidFill>
-                  </a:tcPr>
-                </a:tc>
               </a:tr>
-              <a:tr h="320040">
+              <a:tr h="337625">
                 <a:tc>
                   <a:txBody>
                     <a:bodyPr/>
@@ -11745,7 +11310,143 @@
                           <a:ea typeface="맑은 고딕" pitchFamily="34" charset="-122"/>
                           <a:cs typeface="맑은 고딕" pitchFamily="34" charset="-120"/>
                         </a:rPr>
-                        <a:t>93.1</a:t>
+                        <a:t>-</a:t>
+                      </a:r>
+                      <a:endParaRPr lang="en-US" sz="850" dirty="0">
+                        <a:latin typeface="맑은 고딕" charset="0"/>
+                        <a:ea typeface="맑은 고딕" charset="0"/>
+                        <a:cs typeface="맑은 고딕" charset="0"/>
+                      </a:endParaRPr>
+                    </a:p>
+                  </a:txBody>
+                  <a:tcPr marL="91440" marR="91440" marT="45720" marB="45720" anchor="ctr">
+                    <a:lnL w="12700" cap="flat" cmpd="sng" algn="ctr">
+                      <a:solidFill>
+                        <a:srgbClr val="CBD5E0"/>
+                      </a:solidFill>
+                      <a:prstDash val="solid"/>
+                      <a:round/>
+                      <a:headEnd type="none" w="med" len="med"/>
+                      <a:tailEnd type="none" w="med" len="med"/>
+                    </a:lnL>
+                    <a:lnR w="12700" cap="flat" cmpd="sng" algn="ctr">
+                      <a:solidFill>
+                        <a:srgbClr val="CBD5E0"/>
+                      </a:solidFill>
+                      <a:prstDash val="solid"/>
+                      <a:round/>
+                      <a:headEnd type="none" w="med" len="med"/>
+                      <a:tailEnd type="none" w="med" len="med"/>
+                    </a:lnR>
+                    <a:lnT w="12700" cap="flat" cmpd="sng" algn="ctr">
+                      <a:solidFill>
+                        <a:srgbClr val="CBD5E0"/>
+                      </a:solidFill>
+                      <a:prstDash val="solid"/>
+                      <a:round/>
+                      <a:headEnd type="none" w="med" len="med"/>
+                      <a:tailEnd type="none" w="med" len="med"/>
+                    </a:lnT>
+                    <a:lnB w="12700" cap="flat" cmpd="sng" algn="ctr">
+                      <a:solidFill>
+                        <a:srgbClr val="CBD5E0"/>
+                      </a:solidFill>
+                      <a:prstDash val="solid"/>
+                      <a:round/>
+                      <a:headEnd type="none" w="med" len="med"/>
+                      <a:tailEnd type="none" w="med" len="med"/>
+                    </a:lnB>
+                    <a:solidFill>
+                      <a:srgbClr val="F3F6F7"/>
+                    </a:solidFill>
+                  </a:tcPr>
+                </a:tc>
+                <a:tc>
+                  <a:txBody>
+                    <a:bodyPr/>
+                    <a:lstStyle/>
+                    <a:p>
+                      <a:pPr algn="r" indent="0" marL="0">
+                        <a:buNone/>
+                      </a:pPr>
+                      <a:r>
+                        <a:rPr lang="en-US" sz="850" dirty="0">
+                          <a:solidFill>
+                            <a:srgbClr val="2B2B2B"/>
+                          </a:solidFill>
+                          <a:latin typeface="맑은 고딕" pitchFamily="34" charset="0"/>
+                          <a:ea typeface="맑은 고딕" pitchFamily="34" charset="-122"/>
+                          <a:cs typeface="맑은 고딕" pitchFamily="34" charset="-120"/>
+                        </a:rPr>
+                        <a:t>-</a:t>
+                      </a:r>
+                      <a:endParaRPr lang="en-US" sz="850" dirty="0">
+                        <a:latin typeface="맑은 고딕" charset="0"/>
+                        <a:ea typeface="맑은 고딕" charset="0"/>
+                        <a:cs typeface="맑은 고딕" charset="0"/>
+                      </a:endParaRPr>
+                    </a:p>
+                  </a:txBody>
+                  <a:tcPr marL="91440" marR="91440" marT="45720" marB="45720" anchor="ctr">
+                    <a:lnL w="12700" cap="flat" cmpd="sng" algn="ctr">
+                      <a:solidFill>
+                        <a:srgbClr val="CBD5E0"/>
+                      </a:solidFill>
+                      <a:prstDash val="solid"/>
+                      <a:round/>
+                      <a:headEnd type="none" w="med" len="med"/>
+                      <a:tailEnd type="none" w="med" len="med"/>
+                    </a:lnL>
+                    <a:lnR w="12700" cap="flat" cmpd="sng" algn="ctr">
+                      <a:solidFill>
+                        <a:srgbClr val="CBD5E0"/>
+                      </a:solidFill>
+                      <a:prstDash val="solid"/>
+                      <a:round/>
+                      <a:headEnd type="none" w="med" len="med"/>
+                      <a:tailEnd type="none" w="med" len="med"/>
+                    </a:lnR>
+                    <a:lnT w="12700" cap="flat" cmpd="sng" algn="ctr">
+                      <a:solidFill>
+                        <a:srgbClr val="CBD5E0"/>
+                      </a:solidFill>
+                      <a:prstDash val="solid"/>
+                      <a:round/>
+                      <a:headEnd type="none" w="med" len="med"/>
+                      <a:tailEnd type="none" w="med" len="med"/>
+                    </a:lnT>
+                    <a:lnB w="12700" cap="flat" cmpd="sng" algn="ctr">
+                      <a:solidFill>
+                        <a:srgbClr val="CBD5E0"/>
+                      </a:solidFill>
+                      <a:prstDash val="solid"/>
+                      <a:round/>
+                      <a:headEnd type="none" w="med" len="med"/>
+                      <a:tailEnd type="none" w="med" len="med"/>
+                    </a:lnB>
+                    <a:solidFill>
+                      <a:srgbClr val="F3F6F7"/>
+                    </a:solidFill>
+                  </a:tcPr>
+                </a:tc>
+                <a:tc>
+                  <a:txBody>
+                    <a:bodyPr/>
+                    <a:lstStyle/>
+                    <a:p>
+                      <a:pPr algn="r" indent="0" marL="0">
+                        <a:buNone/>
+                      </a:pPr>
+                      <a:r>
+                        <a:rPr lang="en-US" sz="850" dirty="0">
+                          <a:solidFill>
+                            <a:srgbClr val="2B2B2B"/>
+                          </a:solidFill>
+                          <a:latin typeface="맑은 고딕" pitchFamily="34" charset="0"/>
+                          <a:ea typeface="맑은 고딕" pitchFamily="34" charset="-122"/>
+                          <a:cs typeface="맑은 고딕" pitchFamily="34" charset="-120"/>
+                        </a:rPr>
+                        <a:t>-</a:t>
                       </a:r>
                       <a:endParaRPr lang="en-US" sz="850" dirty="0">
                         <a:latin typeface="맑은 고딕" charset="0"/>
@@ -11869,7 +11570,7 @@
                     <a:bodyPr/>
                     <a:lstStyle/>
                     <a:p>
-                      <a:pPr algn="r" indent="0" marL="0">
+                      <a:pPr algn="ctr" indent="0" marL="0">
                         <a:buNone/>
                       </a:pPr>
                       <a:r>
@@ -11932,201 +11633,8 @@
                     </a:solidFill>
                   </a:tcPr>
                 </a:tc>
-                <a:tc>
-                  <a:txBody>
-                    <a:bodyPr/>
-                    <a:lstStyle/>
-                    <a:p>
-                      <a:pPr algn="r" indent="0" marL="0">
-                        <a:buNone/>
-                      </a:pPr>
-                      <a:r>
-                        <a:rPr lang="en-US" sz="850" dirty="0">
-                          <a:solidFill>
-                            <a:srgbClr val="2B2B2B"/>
-                          </a:solidFill>
-                          <a:latin typeface="맑은 고딕" pitchFamily="34" charset="0"/>
-                          <a:ea typeface="맑은 고딕" pitchFamily="34" charset="-122"/>
-                          <a:cs typeface="맑은 고딕" pitchFamily="34" charset="-120"/>
-                        </a:rPr>
-                        <a:t>2026-12-31</a:t>
-                      </a:r>
-                      <a:endParaRPr lang="en-US" sz="850" dirty="0">
-                        <a:latin typeface="맑은 고딕" charset="0"/>
-                        <a:ea typeface="맑은 고딕" charset="0"/>
-                        <a:cs typeface="맑은 고딕" charset="0"/>
-                      </a:endParaRPr>
-                    </a:p>
-                  </a:txBody>
-                  <a:tcPr marL="91440" marR="91440" marT="45720" marB="45720" anchor="ctr">
-                    <a:lnL w="12700" cap="flat" cmpd="sng" algn="ctr">
-                      <a:solidFill>
-                        <a:srgbClr val="CBD5E0"/>
-                      </a:solidFill>
-                      <a:prstDash val="solid"/>
-                      <a:round/>
-                      <a:headEnd type="none" w="med" len="med"/>
-                      <a:tailEnd type="none" w="med" len="med"/>
-                    </a:lnL>
-                    <a:lnR w="12700" cap="flat" cmpd="sng" algn="ctr">
-                      <a:solidFill>
-                        <a:srgbClr val="CBD5E0"/>
-                      </a:solidFill>
-                      <a:prstDash val="solid"/>
-                      <a:round/>
-                      <a:headEnd type="none" w="med" len="med"/>
-                      <a:tailEnd type="none" w="med" len="med"/>
-                    </a:lnR>
-                    <a:lnT w="12700" cap="flat" cmpd="sng" algn="ctr">
-                      <a:solidFill>
-                        <a:srgbClr val="CBD5E0"/>
-                      </a:solidFill>
-                      <a:prstDash val="solid"/>
-                      <a:round/>
-                      <a:headEnd type="none" w="med" len="med"/>
-                      <a:tailEnd type="none" w="med" len="med"/>
-                    </a:lnT>
-                    <a:lnB w="12700" cap="flat" cmpd="sng" algn="ctr">
-                      <a:solidFill>
-                        <a:srgbClr val="CBD5E0"/>
-                      </a:solidFill>
-                      <a:prstDash val="solid"/>
-                      <a:round/>
-                      <a:headEnd type="none" w="med" len="med"/>
-                      <a:tailEnd type="none" w="med" len="med"/>
-                    </a:lnB>
-                    <a:solidFill>
-                      <a:srgbClr val="F3F6F7"/>
-                    </a:solidFill>
-                  </a:tcPr>
-                </a:tc>
-                <a:tc>
-                  <a:txBody>
-                    <a:bodyPr/>
-                    <a:lstStyle/>
-                    <a:p>
-                      <a:pPr algn="ctr" indent="0" marL="0">
-                        <a:buNone/>
-                      </a:pPr>
-                      <a:r>
-                        <a:rPr lang="en-US" sz="850" dirty="0">
-                          <a:solidFill>
-                            <a:srgbClr val="2B2B2B"/>
-                          </a:solidFill>
-                          <a:latin typeface="맑은 고딕" pitchFamily="34" charset="0"/>
-                          <a:ea typeface="맑은 고딕" pitchFamily="34" charset="-122"/>
-                          <a:cs typeface="맑은 고딕" pitchFamily="34" charset="-120"/>
-                        </a:rPr>
-                        <a:t>합의 완료</a:t>
-                      </a:r>
-                      <a:endParaRPr lang="en-US" sz="850" dirty="0">
-                        <a:latin typeface="맑은 고딕" charset="0"/>
-                        <a:ea typeface="맑은 고딕" charset="0"/>
-                        <a:cs typeface="맑은 고딕" charset="0"/>
-                      </a:endParaRPr>
-                    </a:p>
-                  </a:txBody>
-                  <a:tcPr marL="91440" marR="91440" marT="45720" marB="45720" anchor="ctr">
-                    <a:lnL w="12700" cap="flat" cmpd="sng" algn="ctr">
-                      <a:solidFill>
-                        <a:srgbClr val="CBD5E0"/>
-                      </a:solidFill>
-                      <a:prstDash val="solid"/>
-                      <a:round/>
-                      <a:headEnd type="none" w="med" len="med"/>
-                      <a:tailEnd type="none" w="med" len="med"/>
-                    </a:lnL>
-                    <a:lnR w="12700" cap="flat" cmpd="sng" algn="ctr">
-                      <a:solidFill>
-                        <a:srgbClr val="CBD5E0"/>
-                      </a:solidFill>
-                      <a:prstDash val="solid"/>
-                      <a:round/>
-                      <a:headEnd type="none" w="med" len="med"/>
-                      <a:tailEnd type="none" w="med" len="med"/>
-                    </a:lnR>
-                    <a:lnT w="12700" cap="flat" cmpd="sng" algn="ctr">
-                      <a:solidFill>
-                        <a:srgbClr val="CBD5E0"/>
-                      </a:solidFill>
-                      <a:prstDash val="solid"/>
-                      <a:round/>
-                      <a:headEnd type="none" w="med" len="med"/>
-                      <a:tailEnd type="none" w="med" len="med"/>
-                    </a:lnT>
-                    <a:lnB w="12700" cap="flat" cmpd="sng" algn="ctr">
-                      <a:solidFill>
-                        <a:srgbClr val="CBD5E0"/>
-                      </a:solidFill>
-                      <a:prstDash val="solid"/>
-                      <a:round/>
-                      <a:headEnd type="none" w="med" len="med"/>
-                      <a:tailEnd type="none" w="med" len="med"/>
-                    </a:lnB>
-                    <a:solidFill>
-                      <a:srgbClr val="F3F6F7"/>
-                    </a:solidFill>
-                  </a:tcPr>
-                </a:tc>
-                <a:tc>
-                  <a:txBody>
-                    <a:bodyPr/>
-                    <a:lstStyle/>
-                    <a:p>
-                      <a:pPr algn="ctr" indent="0" marL="0">
-                        <a:buNone/>
-                      </a:pPr>
-                      <a:endParaRPr lang="en-US" sz="850" dirty="0">
-                        <a:latin typeface="맑은 고딕" charset="0"/>
-                        <a:ea typeface="맑은 고딕" charset="0"/>
-                        <a:cs typeface="맑은 고딕" charset="0"/>
-                      </a:endParaRPr>
-                    </a:p>
-                  </a:txBody>
-                  <a:tcPr marL="91440" marR="91440" marT="45720" marB="45720" anchor="ctr">
-                    <a:lnL w="12700" cap="flat" cmpd="sng" algn="ctr">
-                      <a:solidFill>
-                        <a:srgbClr val="CBD5E0"/>
-                      </a:solidFill>
-                      <a:prstDash val="solid"/>
-                      <a:round/>
-                      <a:headEnd type="none" w="med" len="med"/>
-                      <a:tailEnd type="none" w="med" len="med"/>
-                    </a:lnL>
-                    <a:lnR w="12700" cap="flat" cmpd="sng" algn="ctr">
-                      <a:solidFill>
-                        <a:srgbClr val="CBD5E0"/>
-                      </a:solidFill>
-                      <a:prstDash val="solid"/>
-                      <a:round/>
-                      <a:headEnd type="none" w="med" len="med"/>
-                      <a:tailEnd type="none" w="med" len="med"/>
-                    </a:lnR>
-                    <a:lnT w="12700" cap="flat" cmpd="sng" algn="ctr">
-                      <a:solidFill>
-                        <a:srgbClr val="CBD5E0"/>
-                      </a:solidFill>
-                      <a:prstDash val="solid"/>
-                      <a:round/>
-                      <a:headEnd type="none" w="med" len="med"/>
-                      <a:tailEnd type="none" w="med" len="med"/>
-                    </a:lnT>
-                    <a:lnB w="12700" cap="flat" cmpd="sng" algn="ctr">
-                      <a:solidFill>
-                        <a:srgbClr val="CBD5E0"/>
-                      </a:solidFill>
-                      <a:prstDash val="solid"/>
-                      <a:round/>
-                      <a:headEnd type="none" w="med" len="med"/>
-                      <a:tailEnd type="none" w="med" len="med"/>
-                    </a:lnB>
-                    <a:solidFill>
-                      <a:srgbClr val="F3F6F7"/>
-                    </a:solidFill>
-                  </a:tcPr>
-                </a:tc>
               </a:tr>
-              <a:tr h="320040">
+              <a:tr h="337625">
                 <a:tc>
                   <a:txBody>
                     <a:bodyPr/>
@@ -12416,7 +11924,143 @@
                           <a:ea typeface="맑은 고딕" pitchFamily="34" charset="-122"/>
                           <a:cs typeface="맑은 고딕" pitchFamily="34" charset="-120"/>
                         </a:rPr>
-                        <a:t>32.0</a:t>
+                        <a:t>-</a:t>
+                      </a:r>
+                      <a:endParaRPr lang="en-US" sz="850" dirty="0">
+                        <a:latin typeface="맑은 고딕" charset="0"/>
+                        <a:ea typeface="맑은 고딕" charset="0"/>
+                        <a:cs typeface="맑은 고딕" charset="0"/>
+                      </a:endParaRPr>
+                    </a:p>
+                  </a:txBody>
+                  <a:tcPr marL="91440" marR="91440" marT="45720" marB="45720" anchor="ctr">
+                    <a:lnL w="12700" cap="flat" cmpd="sng" algn="ctr">
+                      <a:solidFill>
+                        <a:srgbClr val="CBD5E0"/>
+                      </a:solidFill>
+                      <a:prstDash val="solid"/>
+                      <a:round/>
+                      <a:headEnd type="none" w="med" len="med"/>
+                      <a:tailEnd type="none" w="med" len="med"/>
+                    </a:lnL>
+                    <a:lnR w="12700" cap="flat" cmpd="sng" algn="ctr">
+                      <a:solidFill>
+                        <a:srgbClr val="CBD5E0"/>
+                      </a:solidFill>
+                      <a:prstDash val="solid"/>
+                      <a:round/>
+                      <a:headEnd type="none" w="med" len="med"/>
+                      <a:tailEnd type="none" w="med" len="med"/>
+                    </a:lnR>
+                    <a:lnT w="12700" cap="flat" cmpd="sng" algn="ctr">
+                      <a:solidFill>
+                        <a:srgbClr val="CBD5E0"/>
+                      </a:solidFill>
+                      <a:prstDash val="solid"/>
+                      <a:round/>
+                      <a:headEnd type="none" w="med" len="med"/>
+                      <a:tailEnd type="none" w="med" len="med"/>
+                    </a:lnT>
+                    <a:lnB w="12700" cap="flat" cmpd="sng" algn="ctr">
+                      <a:solidFill>
+                        <a:srgbClr val="CBD5E0"/>
+                      </a:solidFill>
+                      <a:prstDash val="solid"/>
+                      <a:round/>
+                      <a:headEnd type="none" w="med" len="med"/>
+                      <a:tailEnd type="none" w="med" len="med"/>
+                    </a:lnB>
+                    <a:solidFill>
+                      <a:srgbClr val="FFFFFF"/>
+                    </a:solidFill>
+                  </a:tcPr>
+                </a:tc>
+                <a:tc>
+                  <a:txBody>
+                    <a:bodyPr/>
+                    <a:lstStyle/>
+                    <a:p>
+                      <a:pPr algn="r" indent="0" marL="0">
+                        <a:buNone/>
+                      </a:pPr>
+                      <a:r>
+                        <a:rPr lang="en-US" sz="850" dirty="0">
+                          <a:solidFill>
+                            <a:srgbClr val="2B2B2B"/>
+                          </a:solidFill>
+                          <a:latin typeface="맑은 고딕" pitchFamily="34" charset="0"/>
+                          <a:ea typeface="맑은 고딕" pitchFamily="34" charset="-122"/>
+                          <a:cs typeface="맑은 고딕" pitchFamily="34" charset="-120"/>
+                        </a:rPr>
+                        <a:t>-</a:t>
+                      </a:r>
+                      <a:endParaRPr lang="en-US" sz="850" dirty="0">
+                        <a:latin typeface="맑은 고딕" charset="0"/>
+                        <a:ea typeface="맑은 고딕" charset="0"/>
+                        <a:cs typeface="맑은 고딕" charset="0"/>
+                      </a:endParaRPr>
+                    </a:p>
+                  </a:txBody>
+                  <a:tcPr marL="91440" marR="91440" marT="45720" marB="45720" anchor="ctr">
+                    <a:lnL w="12700" cap="flat" cmpd="sng" algn="ctr">
+                      <a:solidFill>
+                        <a:srgbClr val="CBD5E0"/>
+                      </a:solidFill>
+                      <a:prstDash val="solid"/>
+                      <a:round/>
+                      <a:headEnd type="none" w="med" len="med"/>
+                      <a:tailEnd type="none" w="med" len="med"/>
+                    </a:lnL>
+                    <a:lnR w="12700" cap="flat" cmpd="sng" algn="ctr">
+                      <a:solidFill>
+                        <a:srgbClr val="CBD5E0"/>
+                      </a:solidFill>
+                      <a:prstDash val="solid"/>
+                      <a:round/>
+                      <a:headEnd type="none" w="med" len="med"/>
+                      <a:tailEnd type="none" w="med" len="med"/>
+                    </a:lnR>
+                    <a:lnT w="12700" cap="flat" cmpd="sng" algn="ctr">
+                      <a:solidFill>
+                        <a:srgbClr val="CBD5E0"/>
+                      </a:solidFill>
+                      <a:prstDash val="solid"/>
+                      <a:round/>
+                      <a:headEnd type="none" w="med" len="med"/>
+                      <a:tailEnd type="none" w="med" len="med"/>
+                    </a:lnT>
+                    <a:lnB w="12700" cap="flat" cmpd="sng" algn="ctr">
+                      <a:solidFill>
+                        <a:srgbClr val="CBD5E0"/>
+                      </a:solidFill>
+                      <a:prstDash val="solid"/>
+                      <a:round/>
+                      <a:headEnd type="none" w="med" len="med"/>
+                      <a:tailEnd type="none" w="med" len="med"/>
+                    </a:lnB>
+                    <a:solidFill>
+                      <a:srgbClr val="FFFFFF"/>
+                    </a:solidFill>
+                  </a:tcPr>
+                </a:tc>
+                <a:tc>
+                  <a:txBody>
+                    <a:bodyPr/>
+                    <a:lstStyle/>
+                    <a:p>
+                      <a:pPr algn="r" indent="0" marL="0">
+                        <a:buNone/>
+                      </a:pPr>
+                      <a:r>
+                        <a:rPr lang="en-US" sz="850" dirty="0">
+                          <a:solidFill>
+                            <a:srgbClr val="2B2B2B"/>
+                          </a:solidFill>
+                          <a:latin typeface="맑은 고딕" pitchFamily="34" charset="0"/>
+                          <a:ea typeface="맑은 고딕" pitchFamily="34" charset="-122"/>
+                          <a:cs typeface="맑은 고딕" pitchFamily="34" charset="-120"/>
+                        </a:rPr>
+                        <a:t>-</a:t>
                       </a:r>
                       <a:endParaRPr lang="en-US" sz="850" dirty="0">
                         <a:latin typeface="맑은 고딕" charset="0"/>
@@ -12540,7 +12184,7 @@
                     <a:bodyPr/>
                     <a:lstStyle/>
                     <a:p>
-                      <a:pPr algn="r" indent="0" marL="0">
+                      <a:pPr algn="ctr" indent="0" marL="0">
                         <a:buNone/>
                       </a:pPr>
                       <a:r>
@@ -12603,201 +12247,8 @@
                     </a:solidFill>
                   </a:tcPr>
                 </a:tc>
-                <a:tc>
-                  <a:txBody>
-                    <a:bodyPr/>
-                    <a:lstStyle/>
-                    <a:p>
-                      <a:pPr algn="r" indent="0" marL="0">
-                        <a:buNone/>
-                      </a:pPr>
-                      <a:r>
-                        <a:rPr lang="en-US" sz="850" dirty="0">
-                          <a:solidFill>
-                            <a:srgbClr val="2B2B2B"/>
-                          </a:solidFill>
-                          <a:latin typeface="맑은 고딕" pitchFamily="34" charset="0"/>
-                          <a:ea typeface="맑은 고딕" pitchFamily="34" charset="-122"/>
-                          <a:cs typeface="맑은 고딕" pitchFamily="34" charset="-120"/>
-                        </a:rPr>
-                        <a:t>2025-02-28</a:t>
-                      </a:r>
-                      <a:endParaRPr lang="en-US" sz="850" dirty="0">
-                        <a:latin typeface="맑은 고딕" charset="0"/>
-                        <a:ea typeface="맑은 고딕" charset="0"/>
-                        <a:cs typeface="맑은 고딕" charset="0"/>
-                      </a:endParaRPr>
-                    </a:p>
-                  </a:txBody>
-                  <a:tcPr marL="91440" marR="91440" marT="45720" marB="45720" anchor="ctr">
-                    <a:lnL w="12700" cap="flat" cmpd="sng" algn="ctr">
-                      <a:solidFill>
-                        <a:srgbClr val="CBD5E0"/>
-                      </a:solidFill>
-                      <a:prstDash val="solid"/>
-                      <a:round/>
-                      <a:headEnd type="none" w="med" len="med"/>
-                      <a:tailEnd type="none" w="med" len="med"/>
-                    </a:lnL>
-                    <a:lnR w="12700" cap="flat" cmpd="sng" algn="ctr">
-                      <a:solidFill>
-                        <a:srgbClr val="CBD5E0"/>
-                      </a:solidFill>
-                      <a:prstDash val="solid"/>
-                      <a:round/>
-                      <a:headEnd type="none" w="med" len="med"/>
-                      <a:tailEnd type="none" w="med" len="med"/>
-                    </a:lnR>
-                    <a:lnT w="12700" cap="flat" cmpd="sng" algn="ctr">
-                      <a:solidFill>
-                        <a:srgbClr val="CBD5E0"/>
-                      </a:solidFill>
-                      <a:prstDash val="solid"/>
-                      <a:round/>
-                      <a:headEnd type="none" w="med" len="med"/>
-                      <a:tailEnd type="none" w="med" len="med"/>
-                    </a:lnT>
-                    <a:lnB w="12700" cap="flat" cmpd="sng" algn="ctr">
-                      <a:solidFill>
-                        <a:srgbClr val="CBD5E0"/>
-                      </a:solidFill>
-                      <a:prstDash val="solid"/>
-                      <a:round/>
-                      <a:headEnd type="none" w="med" len="med"/>
-                      <a:tailEnd type="none" w="med" len="med"/>
-                    </a:lnB>
-                    <a:solidFill>
-                      <a:srgbClr val="FFFFFF"/>
-                    </a:solidFill>
-                  </a:tcPr>
-                </a:tc>
-                <a:tc>
-                  <a:txBody>
-                    <a:bodyPr/>
-                    <a:lstStyle/>
-                    <a:p>
-                      <a:pPr algn="ctr" indent="0" marL="0">
-                        <a:buNone/>
-                      </a:pPr>
-                      <a:r>
-                        <a:rPr lang="en-US" sz="850" dirty="0">
-                          <a:solidFill>
-                            <a:srgbClr val="2B2B2B"/>
-                          </a:solidFill>
-                          <a:latin typeface="맑은 고딕" pitchFamily="34" charset="0"/>
-                          <a:ea typeface="맑은 고딕" pitchFamily="34" charset="-122"/>
-                          <a:cs typeface="맑은 고딕" pitchFamily="34" charset="-120"/>
-                        </a:rPr>
-                        <a:t>만기퇴거</a:t>
-                      </a:r>
-                      <a:endParaRPr lang="en-US" sz="850" dirty="0">
-                        <a:latin typeface="맑은 고딕" charset="0"/>
-                        <a:ea typeface="맑은 고딕" charset="0"/>
-                        <a:cs typeface="맑은 고딕" charset="0"/>
-                      </a:endParaRPr>
-                    </a:p>
-                  </a:txBody>
-                  <a:tcPr marL="91440" marR="91440" marT="45720" marB="45720" anchor="ctr">
-                    <a:lnL w="12700" cap="flat" cmpd="sng" algn="ctr">
-                      <a:solidFill>
-                        <a:srgbClr val="CBD5E0"/>
-                      </a:solidFill>
-                      <a:prstDash val="solid"/>
-                      <a:round/>
-                      <a:headEnd type="none" w="med" len="med"/>
-                      <a:tailEnd type="none" w="med" len="med"/>
-                    </a:lnL>
-                    <a:lnR w="12700" cap="flat" cmpd="sng" algn="ctr">
-                      <a:solidFill>
-                        <a:srgbClr val="CBD5E0"/>
-                      </a:solidFill>
-                      <a:prstDash val="solid"/>
-                      <a:round/>
-                      <a:headEnd type="none" w="med" len="med"/>
-                      <a:tailEnd type="none" w="med" len="med"/>
-                    </a:lnR>
-                    <a:lnT w="12700" cap="flat" cmpd="sng" algn="ctr">
-                      <a:solidFill>
-                        <a:srgbClr val="CBD5E0"/>
-                      </a:solidFill>
-                      <a:prstDash val="solid"/>
-                      <a:round/>
-                      <a:headEnd type="none" w="med" len="med"/>
-                      <a:tailEnd type="none" w="med" len="med"/>
-                    </a:lnT>
-                    <a:lnB w="12700" cap="flat" cmpd="sng" algn="ctr">
-                      <a:solidFill>
-                        <a:srgbClr val="CBD5E0"/>
-                      </a:solidFill>
-                      <a:prstDash val="solid"/>
-                      <a:round/>
-                      <a:headEnd type="none" w="med" len="med"/>
-                      <a:tailEnd type="none" w="med" len="med"/>
-                    </a:lnB>
-                    <a:solidFill>
-                      <a:srgbClr val="FFFFFF"/>
-                    </a:solidFill>
-                  </a:tcPr>
-                </a:tc>
-                <a:tc>
-                  <a:txBody>
-                    <a:bodyPr/>
-                    <a:lstStyle/>
-                    <a:p>
-                      <a:pPr algn="ctr" indent="0" marL="0">
-                        <a:buNone/>
-                      </a:pPr>
-                      <a:endParaRPr lang="en-US" sz="850" dirty="0">
-                        <a:latin typeface="맑은 고딕" charset="0"/>
-                        <a:ea typeface="맑은 고딕" charset="0"/>
-                        <a:cs typeface="맑은 고딕" charset="0"/>
-                      </a:endParaRPr>
-                    </a:p>
-                  </a:txBody>
-                  <a:tcPr marL="91440" marR="91440" marT="45720" marB="45720" anchor="ctr">
-                    <a:lnL w="12700" cap="flat" cmpd="sng" algn="ctr">
-                      <a:solidFill>
-                        <a:srgbClr val="CBD5E0"/>
-                      </a:solidFill>
-                      <a:prstDash val="solid"/>
-                      <a:round/>
-                      <a:headEnd type="none" w="med" len="med"/>
-                      <a:tailEnd type="none" w="med" len="med"/>
-                    </a:lnL>
-                    <a:lnR w="12700" cap="flat" cmpd="sng" algn="ctr">
-                      <a:solidFill>
-                        <a:srgbClr val="CBD5E0"/>
-                      </a:solidFill>
-                      <a:prstDash val="solid"/>
-                      <a:round/>
-                      <a:headEnd type="none" w="med" len="med"/>
-                      <a:tailEnd type="none" w="med" len="med"/>
-                    </a:lnR>
-                    <a:lnT w="12700" cap="flat" cmpd="sng" algn="ctr">
-                      <a:solidFill>
-                        <a:srgbClr val="CBD5E0"/>
-                      </a:solidFill>
-                      <a:prstDash val="solid"/>
-                      <a:round/>
-                      <a:headEnd type="none" w="med" len="med"/>
-                      <a:tailEnd type="none" w="med" len="med"/>
-                    </a:lnT>
-                    <a:lnB w="12700" cap="flat" cmpd="sng" algn="ctr">
-                      <a:solidFill>
-                        <a:srgbClr val="CBD5E0"/>
-                      </a:solidFill>
-                      <a:prstDash val="solid"/>
-                      <a:round/>
-                      <a:headEnd type="none" w="med" len="med"/>
-                      <a:tailEnd type="none" w="med" len="med"/>
-                    </a:lnB>
-                    <a:solidFill>
-                      <a:srgbClr val="FFFFFF"/>
-                    </a:solidFill>
-                  </a:tcPr>
-                </a:tc>
               </a:tr>
-              <a:tr h="320040">
+              <a:tr h="337625">
                 <a:tc>
                   <a:txBody>
                     <a:bodyPr/>
@@ -13087,7 +12538,143 @@
                           <a:ea typeface="맑은 고딕" pitchFamily="34" charset="-122"/>
                           <a:cs typeface="맑은 고딕" pitchFamily="34" charset="-120"/>
                         </a:rPr>
-                        <a:t>266.4</a:t>
+                        <a:t>-</a:t>
+                      </a:r>
+                      <a:endParaRPr lang="en-US" sz="850" dirty="0">
+                        <a:latin typeface="맑은 고딕" charset="0"/>
+                        <a:ea typeface="맑은 고딕" charset="0"/>
+                        <a:cs typeface="맑은 고딕" charset="0"/>
+                      </a:endParaRPr>
+                    </a:p>
+                  </a:txBody>
+                  <a:tcPr marL="91440" marR="91440" marT="45720" marB="45720" anchor="ctr">
+                    <a:lnL w="12700" cap="flat" cmpd="sng" algn="ctr">
+                      <a:solidFill>
+                        <a:srgbClr val="CBD5E0"/>
+                      </a:solidFill>
+                      <a:prstDash val="solid"/>
+                      <a:round/>
+                      <a:headEnd type="none" w="med" len="med"/>
+                      <a:tailEnd type="none" w="med" len="med"/>
+                    </a:lnL>
+                    <a:lnR w="12700" cap="flat" cmpd="sng" algn="ctr">
+                      <a:solidFill>
+                        <a:srgbClr val="CBD5E0"/>
+                      </a:solidFill>
+                      <a:prstDash val="solid"/>
+                      <a:round/>
+                      <a:headEnd type="none" w="med" len="med"/>
+                      <a:tailEnd type="none" w="med" len="med"/>
+                    </a:lnR>
+                    <a:lnT w="12700" cap="flat" cmpd="sng" algn="ctr">
+                      <a:solidFill>
+                        <a:srgbClr val="CBD5E0"/>
+                      </a:solidFill>
+                      <a:prstDash val="solid"/>
+                      <a:round/>
+                      <a:headEnd type="none" w="med" len="med"/>
+                      <a:tailEnd type="none" w="med" len="med"/>
+                    </a:lnT>
+                    <a:lnB w="12700" cap="flat" cmpd="sng" algn="ctr">
+                      <a:solidFill>
+                        <a:srgbClr val="CBD5E0"/>
+                      </a:solidFill>
+                      <a:prstDash val="solid"/>
+                      <a:round/>
+                      <a:headEnd type="none" w="med" len="med"/>
+                      <a:tailEnd type="none" w="med" len="med"/>
+                    </a:lnB>
+                    <a:solidFill>
+                      <a:srgbClr val="F3F6F7"/>
+                    </a:solidFill>
+                  </a:tcPr>
+                </a:tc>
+                <a:tc>
+                  <a:txBody>
+                    <a:bodyPr/>
+                    <a:lstStyle/>
+                    <a:p>
+                      <a:pPr algn="r" indent="0" marL="0">
+                        <a:buNone/>
+                      </a:pPr>
+                      <a:r>
+                        <a:rPr lang="en-US" sz="850" dirty="0">
+                          <a:solidFill>
+                            <a:srgbClr val="2B2B2B"/>
+                          </a:solidFill>
+                          <a:latin typeface="맑은 고딕" pitchFamily="34" charset="0"/>
+                          <a:ea typeface="맑은 고딕" pitchFamily="34" charset="-122"/>
+                          <a:cs typeface="맑은 고딕" pitchFamily="34" charset="-120"/>
+                        </a:rPr>
+                        <a:t>-</a:t>
+                      </a:r>
+                      <a:endParaRPr lang="en-US" sz="850" dirty="0">
+                        <a:latin typeface="맑은 고딕" charset="0"/>
+                        <a:ea typeface="맑은 고딕" charset="0"/>
+                        <a:cs typeface="맑은 고딕" charset="0"/>
+                      </a:endParaRPr>
+                    </a:p>
+                  </a:txBody>
+                  <a:tcPr marL="91440" marR="91440" marT="45720" marB="45720" anchor="ctr">
+                    <a:lnL w="12700" cap="flat" cmpd="sng" algn="ctr">
+                      <a:solidFill>
+                        <a:srgbClr val="CBD5E0"/>
+                      </a:solidFill>
+                      <a:prstDash val="solid"/>
+                      <a:round/>
+                      <a:headEnd type="none" w="med" len="med"/>
+                      <a:tailEnd type="none" w="med" len="med"/>
+                    </a:lnL>
+                    <a:lnR w="12700" cap="flat" cmpd="sng" algn="ctr">
+                      <a:solidFill>
+                        <a:srgbClr val="CBD5E0"/>
+                      </a:solidFill>
+                      <a:prstDash val="solid"/>
+                      <a:round/>
+                      <a:headEnd type="none" w="med" len="med"/>
+                      <a:tailEnd type="none" w="med" len="med"/>
+                    </a:lnR>
+                    <a:lnT w="12700" cap="flat" cmpd="sng" algn="ctr">
+                      <a:solidFill>
+                        <a:srgbClr val="CBD5E0"/>
+                      </a:solidFill>
+                      <a:prstDash val="solid"/>
+                      <a:round/>
+                      <a:headEnd type="none" w="med" len="med"/>
+                      <a:tailEnd type="none" w="med" len="med"/>
+                    </a:lnT>
+                    <a:lnB w="12700" cap="flat" cmpd="sng" algn="ctr">
+                      <a:solidFill>
+                        <a:srgbClr val="CBD5E0"/>
+                      </a:solidFill>
+                      <a:prstDash val="solid"/>
+                      <a:round/>
+                      <a:headEnd type="none" w="med" len="med"/>
+                      <a:tailEnd type="none" w="med" len="med"/>
+                    </a:lnB>
+                    <a:solidFill>
+                      <a:srgbClr val="F3F6F7"/>
+                    </a:solidFill>
+                  </a:tcPr>
+                </a:tc>
+                <a:tc>
+                  <a:txBody>
+                    <a:bodyPr/>
+                    <a:lstStyle/>
+                    <a:p>
+                      <a:pPr algn="r" indent="0" marL="0">
+                        <a:buNone/>
+                      </a:pPr>
+                      <a:r>
+                        <a:rPr lang="en-US" sz="850" dirty="0">
+                          <a:solidFill>
+                            <a:srgbClr val="2B2B2B"/>
+                          </a:solidFill>
+                          <a:latin typeface="맑은 고딕" pitchFamily="34" charset="0"/>
+                          <a:ea typeface="맑은 고딕" pitchFamily="34" charset="-122"/>
+                          <a:cs typeface="맑은 고딕" pitchFamily="34" charset="-120"/>
+                        </a:rPr>
+                        <a:t>-</a:t>
                       </a:r>
                       <a:endParaRPr lang="en-US" sz="850" dirty="0">
                         <a:latin typeface="맑은 고딕" charset="0"/>
@@ -13211,7 +12798,7 @@
                     <a:bodyPr/>
                     <a:lstStyle/>
                     <a:p>
-                      <a:pPr algn="r" indent="0" marL="0">
+                      <a:pPr algn="ctr" indent="0" marL="0">
                         <a:buNone/>
                       </a:pPr>
                       <a:r>
@@ -13274,190 +12861,8 @@
                     </a:solidFill>
                   </a:tcPr>
                 </a:tc>
-                <a:tc>
-                  <a:txBody>
-                    <a:bodyPr/>
-                    <a:lstStyle/>
-                    <a:p>
-                      <a:pPr algn="r" indent="0" marL="0">
-                        <a:buNone/>
-                      </a:pPr>
-                      <a:r>
-                        <a:rPr lang="en-US" sz="850" dirty="0">
-                          <a:solidFill>
-                            <a:srgbClr val="2B2B2B"/>
-                          </a:solidFill>
-                          <a:latin typeface="맑은 고딕" pitchFamily="34" charset="0"/>
-                          <a:ea typeface="맑은 고딕" pitchFamily="34" charset="-122"/>
-                          <a:cs typeface="맑은 고딕" pitchFamily="34" charset="-120"/>
-                        </a:rPr>
-                        <a:t>2026-04-30</a:t>
-                      </a:r>
-                      <a:endParaRPr lang="en-US" sz="850" dirty="0">
-                        <a:latin typeface="맑은 고딕" charset="0"/>
-                        <a:ea typeface="맑은 고딕" charset="0"/>
-                        <a:cs typeface="맑은 고딕" charset="0"/>
-                      </a:endParaRPr>
-                    </a:p>
-                  </a:txBody>
-                  <a:tcPr marL="91440" marR="91440" marT="45720" marB="45720" anchor="ctr">
-                    <a:lnL w="12700" cap="flat" cmpd="sng" algn="ctr">
-                      <a:solidFill>
-                        <a:srgbClr val="CBD5E0"/>
-                      </a:solidFill>
-                      <a:prstDash val="solid"/>
-                      <a:round/>
-                      <a:headEnd type="none" w="med" len="med"/>
-                      <a:tailEnd type="none" w="med" len="med"/>
-                    </a:lnL>
-                    <a:lnR w="12700" cap="flat" cmpd="sng" algn="ctr">
-                      <a:solidFill>
-                        <a:srgbClr val="CBD5E0"/>
-                      </a:solidFill>
-                      <a:prstDash val="solid"/>
-                      <a:round/>
-                      <a:headEnd type="none" w="med" len="med"/>
-                      <a:tailEnd type="none" w="med" len="med"/>
-                    </a:lnR>
-                    <a:lnT w="12700" cap="flat" cmpd="sng" algn="ctr">
-                      <a:solidFill>
-                        <a:srgbClr val="CBD5E0"/>
-                      </a:solidFill>
-                      <a:prstDash val="solid"/>
-                      <a:round/>
-                      <a:headEnd type="none" w="med" len="med"/>
-                      <a:tailEnd type="none" w="med" len="med"/>
-                    </a:lnT>
-                    <a:lnB w="12700" cap="flat" cmpd="sng" algn="ctr">
-                      <a:solidFill>
-                        <a:srgbClr val="CBD5E0"/>
-                      </a:solidFill>
-                      <a:prstDash val="solid"/>
-                      <a:round/>
-                      <a:headEnd type="none" w="med" len="med"/>
-                      <a:tailEnd type="none" w="med" len="med"/>
-                    </a:lnB>
-                    <a:solidFill>
-                      <a:srgbClr val="F3F6F7"/>
-                    </a:solidFill>
-                  </a:tcPr>
-                </a:tc>
-                <a:tc>
-                  <a:txBody>
-                    <a:bodyPr/>
-                    <a:lstStyle/>
-                    <a:p>
-                      <a:pPr algn="ctr" indent="0" marL="0">
-                        <a:buNone/>
-                      </a:pPr>
-                      <a:endParaRPr lang="en-US" sz="850" dirty="0">
-                        <a:latin typeface="맑은 고딕" charset="0"/>
-                        <a:ea typeface="맑은 고딕" charset="0"/>
-                        <a:cs typeface="맑은 고딕" charset="0"/>
-                      </a:endParaRPr>
-                    </a:p>
-                  </a:txBody>
-                  <a:tcPr marL="91440" marR="91440" marT="45720" marB="45720" anchor="ctr">
-                    <a:lnL w="12700" cap="flat" cmpd="sng" algn="ctr">
-                      <a:solidFill>
-                        <a:srgbClr val="CBD5E0"/>
-                      </a:solidFill>
-                      <a:prstDash val="solid"/>
-                      <a:round/>
-                      <a:headEnd type="none" w="med" len="med"/>
-                      <a:tailEnd type="none" w="med" len="med"/>
-                    </a:lnL>
-                    <a:lnR w="12700" cap="flat" cmpd="sng" algn="ctr">
-                      <a:solidFill>
-                        <a:srgbClr val="CBD5E0"/>
-                      </a:solidFill>
-                      <a:prstDash val="solid"/>
-                      <a:round/>
-                      <a:headEnd type="none" w="med" len="med"/>
-                      <a:tailEnd type="none" w="med" len="med"/>
-                    </a:lnR>
-                    <a:lnT w="12700" cap="flat" cmpd="sng" algn="ctr">
-                      <a:solidFill>
-                        <a:srgbClr val="CBD5E0"/>
-                      </a:solidFill>
-                      <a:prstDash val="solid"/>
-                      <a:round/>
-                      <a:headEnd type="none" w="med" len="med"/>
-                      <a:tailEnd type="none" w="med" len="med"/>
-                    </a:lnT>
-                    <a:lnB w="12700" cap="flat" cmpd="sng" algn="ctr">
-                      <a:solidFill>
-                        <a:srgbClr val="CBD5E0"/>
-                      </a:solidFill>
-                      <a:prstDash val="solid"/>
-                      <a:round/>
-                      <a:headEnd type="none" w="med" len="med"/>
-                      <a:tailEnd type="none" w="med" len="med"/>
-                    </a:lnB>
-                    <a:solidFill>
-                      <a:srgbClr val="F3F6F7"/>
-                    </a:solidFill>
-                  </a:tcPr>
-                </a:tc>
-                <a:tc>
-                  <a:txBody>
-                    <a:bodyPr/>
-                    <a:lstStyle/>
-                    <a:p>
-                      <a:pPr algn="ctr" indent="0" marL="0">
-                        <a:buNone/>
-                      </a:pPr>
-                      <a:endParaRPr lang="en-US" sz="850" dirty="0">
-                        <a:latin typeface="맑은 고딕" charset="0"/>
-                        <a:ea typeface="맑은 고딕" charset="0"/>
-                        <a:cs typeface="맑은 고딕" charset="0"/>
-                      </a:endParaRPr>
-                    </a:p>
-                  </a:txBody>
-                  <a:tcPr marL="91440" marR="91440" marT="45720" marB="45720" anchor="ctr">
-                    <a:lnL w="12700" cap="flat" cmpd="sng" algn="ctr">
-                      <a:solidFill>
-                        <a:srgbClr val="CBD5E0"/>
-                      </a:solidFill>
-                      <a:prstDash val="solid"/>
-                      <a:round/>
-                      <a:headEnd type="none" w="med" len="med"/>
-                      <a:tailEnd type="none" w="med" len="med"/>
-                    </a:lnL>
-                    <a:lnR w="12700" cap="flat" cmpd="sng" algn="ctr">
-                      <a:solidFill>
-                        <a:srgbClr val="CBD5E0"/>
-                      </a:solidFill>
-                      <a:prstDash val="solid"/>
-                      <a:round/>
-                      <a:headEnd type="none" w="med" len="med"/>
-                      <a:tailEnd type="none" w="med" len="med"/>
-                    </a:lnR>
-                    <a:lnT w="12700" cap="flat" cmpd="sng" algn="ctr">
-                      <a:solidFill>
-                        <a:srgbClr val="CBD5E0"/>
-                      </a:solidFill>
-                      <a:prstDash val="solid"/>
-                      <a:round/>
-                      <a:headEnd type="none" w="med" len="med"/>
-                      <a:tailEnd type="none" w="med" len="med"/>
-                    </a:lnT>
-                    <a:lnB w="12700" cap="flat" cmpd="sng" algn="ctr">
-                      <a:solidFill>
-                        <a:srgbClr val="CBD5E0"/>
-                      </a:solidFill>
-                      <a:prstDash val="solid"/>
-                      <a:round/>
-                      <a:headEnd type="none" w="med" len="med"/>
-                      <a:tailEnd type="none" w="med" len="med"/>
-                    </a:lnB>
-                    <a:solidFill>
-                      <a:srgbClr val="F3F6F7"/>
-                    </a:solidFill>
-                  </a:tcPr>
-                </a:tc>
               </a:tr>
-              <a:tr h="320040">
+              <a:tr h="337625">
                 <a:tc>
                   <a:txBody>
                     <a:bodyPr/>
@@ -13747,7 +13152,143 @@
                           <a:ea typeface="맑은 고딕" pitchFamily="34" charset="-122"/>
                           <a:cs typeface="맑은 고딕" pitchFamily="34" charset="-120"/>
                         </a:rPr>
-                        <a:t>135.6</a:t>
+                        <a:t>-</a:t>
+                      </a:r>
+                      <a:endParaRPr lang="en-US" sz="850" dirty="0">
+                        <a:latin typeface="맑은 고딕" charset="0"/>
+                        <a:ea typeface="맑은 고딕" charset="0"/>
+                        <a:cs typeface="맑은 고딕" charset="0"/>
+                      </a:endParaRPr>
+                    </a:p>
+                  </a:txBody>
+                  <a:tcPr marL="91440" marR="91440" marT="45720" marB="45720" anchor="ctr">
+                    <a:lnL w="12700" cap="flat" cmpd="sng" algn="ctr">
+                      <a:solidFill>
+                        <a:srgbClr val="CBD5E0"/>
+                      </a:solidFill>
+                      <a:prstDash val="solid"/>
+                      <a:round/>
+                      <a:headEnd type="none" w="med" len="med"/>
+                      <a:tailEnd type="none" w="med" len="med"/>
+                    </a:lnL>
+                    <a:lnR w="12700" cap="flat" cmpd="sng" algn="ctr">
+                      <a:solidFill>
+                        <a:srgbClr val="CBD5E0"/>
+                      </a:solidFill>
+                      <a:prstDash val="solid"/>
+                      <a:round/>
+                      <a:headEnd type="none" w="med" len="med"/>
+                      <a:tailEnd type="none" w="med" len="med"/>
+                    </a:lnR>
+                    <a:lnT w="12700" cap="flat" cmpd="sng" algn="ctr">
+                      <a:solidFill>
+                        <a:srgbClr val="CBD5E0"/>
+                      </a:solidFill>
+                      <a:prstDash val="solid"/>
+                      <a:round/>
+                      <a:headEnd type="none" w="med" len="med"/>
+                      <a:tailEnd type="none" w="med" len="med"/>
+                    </a:lnT>
+                    <a:lnB w="12700" cap="flat" cmpd="sng" algn="ctr">
+                      <a:solidFill>
+                        <a:srgbClr val="CBD5E0"/>
+                      </a:solidFill>
+                      <a:prstDash val="solid"/>
+                      <a:round/>
+                      <a:headEnd type="none" w="med" len="med"/>
+                      <a:tailEnd type="none" w="med" len="med"/>
+                    </a:lnB>
+                    <a:solidFill>
+                      <a:srgbClr val="FFFFFF"/>
+                    </a:solidFill>
+                  </a:tcPr>
+                </a:tc>
+                <a:tc>
+                  <a:txBody>
+                    <a:bodyPr/>
+                    <a:lstStyle/>
+                    <a:p>
+                      <a:pPr algn="r" indent="0" marL="0">
+                        <a:buNone/>
+                      </a:pPr>
+                      <a:r>
+                        <a:rPr lang="en-US" sz="850" dirty="0">
+                          <a:solidFill>
+                            <a:srgbClr val="2B2B2B"/>
+                          </a:solidFill>
+                          <a:latin typeface="맑은 고딕" pitchFamily="34" charset="0"/>
+                          <a:ea typeface="맑은 고딕" pitchFamily="34" charset="-122"/>
+                          <a:cs typeface="맑은 고딕" pitchFamily="34" charset="-120"/>
+                        </a:rPr>
+                        <a:t>-</a:t>
+                      </a:r>
+                      <a:endParaRPr lang="en-US" sz="850" dirty="0">
+                        <a:latin typeface="맑은 고딕" charset="0"/>
+                        <a:ea typeface="맑은 고딕" charset="0"/>
+                        <a:cs typeface="맑은 고딕" charset="0"/>
+                      </a:endParaRPr>
+                    </a:p>
+                  </a:txBody>
+                  <a:tcPr marL="91440" marR="91440" marT="45720" marB="45720" anchor="ctr">
+                    <a:lnL w="12700" cap="flat" cmpd="sng" algn="ctr">
+                      <a:solidFill>
+                        <a:srgbClr val="CBD5E0"/>
+                      </a:solidFill>
+                      <a:prstDash val="solid"/>
+                      <a:round/>
+                      <a:headEnd type="none" w="med" len="med"/>
+                      <a:tailEnd type="none" w="med" len="med"/>
+                    </a:lnL>
+                    <a:lnR w="12700" cap="flat" cmpd="sng" algn="ctr">
+                      <a:solidFill>
+                        <a:srgbClr val="CBD5E0"/>
+                      </a:solidFill>
+                      <a:prstDash val="solid"/>
+                      <a:round/>
+                      <a:headEnd type="none" w="med" len="med"/>
+                      <a:tailEnd type="none" w="med" len="med"/>
+                    </a:lnR>
+                    <a:lnT w="12700" cap="flat" cmpd="sng" algn="ctr">
+                      <a:solidFill>
+                        <a:srgbClr val="CBD5E0"/>
+                      </a:solidFill>
+                      <a:prstDash val="solid"/>
+                      <a:round/>
+                      <a:headEnd type="none" w="med" len="med"/>
+                      <a:tailEnd type="none" w="med" len="med"/>
+                    </a:lnT>
+                    <a:lnB w="12700" cap="flat" cmpd="sng" algn="ctr">
+                      <a:solidFill>
+                        <a:srgbClr val="CBD5E0"/>
+                      </a:solidFill>
+                      <a:prstDash val="solid"/>
+                      <a:round/>
+                      <a:headEnd type="none" w="med" len="med"/>
+                      <a:tailEnd type="none" w="med" len="med"/>
+                    </a:lnB>
+                    <a:solidFill>
+                      <a:srgbClr val="FFFFFF"/>
+                    </a:solidFill>
+                  </a:tcPr>
+                </a:tc>
+                <a:tc>
+                  <a:txBody>
+                    <a:bodyPr/>
+                    <a:lstStyle/>
+                    <a:p>
+                      <a:pPr algn="r" indent="0" marL="0">
+                        <a:buNone/>
+                      </a:pPr>
+                      <a:r>
+                        <a:rPr lang="en-US" sz="850" dirty="0">
+                          <a:solidFill>
+                            <a:srgbClr val="2B2B2B"/>
+                          </a:solidFill>
+                          <a:latin typeface="맑은 고딕" pitchFamily="34" charset="0"/>
+                          <a:ea typeface="맑은 고딕" pitchFamily="34" charset="-122"/>
+                          <a:cs typeface="맑은 고딕" pitchFamily="34" charset="-120"/>
+                        </a:rPr>
+                        <a:t>-</a:t>
                       </a:r>
                       <a:endParaRPr lang="en-US" sz="850" dirty="0">
                         <a:latin typeface="맑은 고딕" charset="0"/>
@@ -13871,6 +13412,348 @@
                     <a:bodyPr/>
                     <a:lstStyle/>
                     <a:p>
+                      <a:pPr algn="ctr" indent="0" marL="0">
+                        <a:buNone/>
+                      </a:pPr>
+                      <a:r>
+                        <a:rPr lang="en-US" sz="850" dirty="0">
+                          <a:solidFill>
+                            <a:srgbClr val="2B2B2B"/>
+                          </a:solidFill>
+                          <a:latin typeface="맑은 고딕" pitchFamily="34" charset="0"/>
+                          <a:ea typeface="맑은 고딕" pitchFamily="34" charset="-122"/>
+                          <a:cs typeface="맑은 고딕" pitchFamily="34" charset="-120"/>
+                        </a:rPr>
+                        <a:t>250</a:t>
+                      </a:r>
+                      <a:endParaRPr lang="en-US" sz="850" dirty="0">
+                        <a:latin typeface="맑은 고딕" charset="0"/>
+                        <a:ea typeface="맑은 고딕" charset="0"/>
+                        <a:cs typeface="맑은 고딕" charset="0"/>
+                      </a:endParaRPr>
+                    </a:p>
+                  </a:txBody>
+                  <a:tcPr marL="91440" marR="91440" marT="45720" marB="45720" anchor="ctr">
+                    <a:lnL w="12700" cap="flat" cmpd="sng" algn="ctr">
+                      <a:solidFill>
+                        <a:srgbClr val="CBD5E0"/>
+                      </a:solidFill>
+                      <a:prstDash val="solid"/>
+                      <a:round/>
+                      <a:headEnd type="none" w="med" len="med"/>
+                      <a:tailEnd type="none" w="med" len="med"/>
+                    </a:lnL>
+                    <a:lnR w="12700" cap="flat" cmpd="sng" algn="ctr">
+                      <a:solidFill>
+                        <a:srgbClr val="CBD5E0"/>
+                      </a:solidFill>
+                      <a:prstDash val="solid"/>
+                      <a:round/>
+                      <a:headEnd type="none" w="med" len="med"/>
+                      <a:tailEnd type="none" w="med" len="med"/>
+                    </a:lnR>
+                    <a:lnT w="12700" cap="flat" cmpd="sng" algn="ctr">
+                      <a:solidFill>
+                        <a:srgbClr val="CBD5E0"/>
+                      </a:solidFill>
+                      <a:prstDash val="solid"/>
+                      <a:round/>
+                      <a:headEnd type="none" w="med" len="med"/>
+                      <a:tailEnd type="none" w="med" len="med"/>
+                    </a:lnT>
+                    <a:lnB w="12700" cap="flat" cmpd="sng" algn="ctr">
+                      <a:solidFill>
+                        <a:srgbClr val="CBD5E0"/>
+                      </a:solidFill>
+                      <a:prstDash val="solid"/>
+                      <a:round/>
+                      <a:headEnd type="none" w="med" len="med"/>
+                      <a:tailEnd type="none" w="med" len="med"/>
+                    </a:lnB>
+                    <a:solidFill>
+                      <a:srgbClr val="FFFFFF"/>
+                    </a:solidFill>
+                  </a:tcPr>
+                </a:tc>
+              </a:tr>
+              <a:tr h="337625">
+                <a:tc>
+                  <a:txBody>
+                    <a:bodyPr/>
+                    <a:lstStyle/>
+                    <a:p>
+                      <a:pPr algn="ctr" indent="0" marL="0">
+                        <a:buNone/>
+                      </a:pPr>
+                      <a:r>
+                        <a:rPr lang="en-US" sz="850" dirty="0">
+                          <a:solidFill>
+                            <a:srgbClr val="2B2B2B"/>
+                          </a:solidFill>
+                          <a:latin typeface="맑은 고딕" pitchFamily="34" charset="0"/>
+                          <a:ea typeface="맑은 고딕" pitchFamily="34" charset="-122"/>
+                          <a:cs typeface="맑은 고딕" pitchFamily="34" charset="-120"/>
+                        </a:rPr>
+                        <a:t>3F-2</a:t>
+                      </a:r>
+                      <a:endParaRPr lang="en-US" sz="850" dirty="0">
+                        <a:latin typeface="맑은 고딕" charset="0"/>
+                        <a:ea typeface="맑은 고딕" charset="0"/>
+                        <a:cs typeface="맑은 고딕" charset="0"/>
+                      </a:endParaRPr>
+                    </a:p>
+                  </a:txBody>
+                  <a:tcPr marL="91440" marR="91440" marT="45720" marB="45720" anchor="ctr">
+                    <a:lnL w="12700" cap="flat" cmpd="sng" algn="ctr">
+                      <a:solidFill>
+                        <a:srgbClr val="CBD5E0"/>
+                      </a:solidFill>
+                      <a:prstDash val="solid"/>
+                      <a:round/>
+                      <a:headEnd type="none" w="med" len="med"/>
+                      <a:tailEnd type="none" w="med" len="med"/>
+                    </a:lnL>
+                    <a:lnR w="12700" cap="flat" cmpd="sng" algn="ctr">
+                      <a:solidFill>
+                        <a:srgbClr val="CBD5E0"/>
+                      </a:solidFill>
+                      <a:prstDash val="solid"/>
+                      <a:round/>
+                      <a:headEnd type="none" w="med" len="med"/>
+                      <a:tailEnd type="none" w="med" len="med"/>
+                    </a:lnR>
+                    <a:lnT w="12700" cap="flat" cmpd="sng" algn="ctr">
+                      <a:solidFill>
+                        <a:srgbClr val="CBD5E0"/>
+                      </a:solidFill>
+                      <a:prstDash val="solid"/>
+                      <a:round/>
+                      <a:headEnd type="none" w="med" len="med"/>
+                      <a:tailEnd type="none" w="med" len="med"/>
+                    </a:lnT>
+                    <a:lnB w="12700" cap="flat" cmpd="sng" algn="ctr">
+                      <a:solidFill>
+                        <a:srgbClr val="CBD5E0"/>
+                      </a:solidFill>
+                      <a:prstDash val="solid"/>
+                      <a:round/>
+                      <a:headEnd type="none" w="med" len="med"/>
+                      <a:tailEnd type="none" w="med" len="med"/>
+                    </a:lnB>
+                    <a:solidFill>
+                      <a:srgbClr val="F3F6F7"/>
+                    </a:solidFill>
+                  </a:tcPr>
+                </a:tc>
+                <a:tc>
+                  <a:txBody>
+                    <a:bodyPr/>
+                    <a:lstStyle/>
+                    <a:p>
+                      <a:pPr algn="ctr" indent="0" marL="0">
+                        <a:buNone/>
+                      </a:pPr>
+                      <a:r>
+                        <a:rPr lang="en-US" sz="850" dirty="0">
+                          <a:solidFill>
+                            <a:srgbClr val="2B2B2B"/>
+                          </a:solidFill>
+                          <a:latin typeface="맑은 고딕" pitchFamily="34" charset="0"/>
+                          <a:ea typeface="맑은 고딕" pitchFamily="34" charset="-122"/>
+                          <a:cs typeface="맑은 고딕" pitchFamily="34" charset="-120"/>
+                        </a:rPr>
+                        <a:t>-</a:t>
+                      </a:r>
+                      <a:endParaRPr lang="en-US" sz="850" dirty="0">
+                        <a:latin typeface="맑은 고딕" charset="0"/>
+                        <a:ea typeface="맑은 고딕" charset="0"/>
+                        <a:cs typeface="맑은 고딕" charset="0"/>
+                      </a:endParaRPr>
+                    </a:p>
+                  </a:txBody>
+                  <a:tcPr marL="91440" marR="91440" marT="45720" marB="45720" anchor="ctr">
+                    <a:lnL w="12700" cap="flat" cmpd="sng" algn="ctr">
+                      <a:solidFill>
+                        <a:srgbClr val="CBD5E0"/>
+                      </a:solidFill>
+                      <a:prstDash val="solid"/>
+                      <a:round/>
+                      <a:headEnd type="none" w="med" len="med"/>
+                      <a:tailEnd type="none" w="med" len="med"/>
+                    </a:lnL>
+                    <a:lnR w="12700" cap="flat" cmpd="sng" algn="ctr">
+                      <a:solidFill>
+                        <a:srgbClr val="CBD5E0"/>
+                      </a:solidFill>
+                      <a:prstDash val="solid"/>
+                      <a:round/>
+                      <a:headEnd type="none" w="med" len="med"/>
+                      <a:tailEnd type="none" w="med" len="med"/>
+                    </a:lnR>
+                    <a:lnT w="12700" cap="flat" cmpd="sng" algn="ctr">
+                      <a:solidFill>
+                        <a:srgbClr val="CBD5E0"/>
+                      </a:solidFill>
+                      <a:prstDash val="solid"/>
+                      <a:round/>
+                      <a:headEnd type="none" w="med" len="med"/>
+                      <a:tailEnd type="none" w="med" len="med"/>
+                    </a:lnT>
+                    <a:lnB w="12700" cap="flat" cmpd="sng" algn="ctr">
+                      <a:solidFill>
+                        <a:srgbClr val="CBD5E0"/>
+                      </a:solidFill>
+                      <a:prstDash val="solid"/>
+                      <a:round/>
+                      <a:headEnd type="none" w="med" len="med"/>
+                      <a:tailEnd type="none" w="med" len="med"/>
+                    </a:lnB>
+                    <a:solidFill>
+                      <a:srgbClr val="F3F6F7"/>
+                    </a:solidFill>
+                  </a:tcPr>
+                </a:tc>
+                <a:tc>
+                  <a:txBody>
+                    <a:bodyPr/>
+                    <a:lstStyle/>
+                    <a:p>
+                      <a:pPr algn="ctr" indent="0" marL="0">
+                        <a:buNone/>
+                      </a:pPr>
+                      <a:r>
+                        <a:rPr lang="en-US" sz="850" dirty="0">
+                          <a:solidFill>
+                            <a:srgbClr val="2B2B2B"/>
+                          </a:solidFill>
+                          <a:latin typeface="맑은 고딕" pitchFamily="34" charset="0"/>
+                          <a:ea typeface="맑은 고딕" pitchFamily="34" charset="-122"/>
+                          <a:cs typeface="맑은 고딕" pitchFamily="34" charset="-120"/>
+                        </a:rPr>
+                        <a:t>의원</a:t>
+                      </a:r>
+                      <a:endParaRPr lang="en-US" sz="850" dirty="0">
+                        <a:latin typeface="맑은 고딕" charset="0"/>
+                        <a:ea typeface="맑은 고딕" charset="0"/>
+                        <a:cs typeface="맑은 고딕" charset="0"/>
+                      </a:endParaRPr>
+                    </a:p>
+                  </a:txBody>
+                  <a:tcPr marL="91440" marR="91440" marT="45720" marB="45720" anchor="ctr">
+                    <a:lnL w="12700" cap="flat" cmpd="sng" algn="ctr">
+                      <a:solidFill>
+                        <a:srgbClr val="CBD5E0"/>
+                      </a:solidFill>
+                      <a:prstDash val="solid"/>
+                      <a:round/>
+                      <a:headEnd type="none" w="med" len="med"/>
+                      <a:tailEnd type="none" w="med" len="med"/>
+                    </a:lnL>
+                    <a:lnR w="12700" cap="flat" cmpd="sng" algn="ctr">
+                      <a:solidFill>
+                        <a:srgbClr val="CBD5E0"/>
+                      </a:solidFill>
+                      <a:prstDash val="solid"/>
+                      <a:round/>
+                      <a:headEnd type="none" w="med" len="med"/>
+                      <a:tailEnd type="none" w="med" len="med"/>
+                    </a:lnR>
+                    <a:lnT w="12700" cap="flat" cmpd="sng" algn="ctr">
+                      <a:solidFill>
+                        <a:srgbClr val="CBD5E0"/>
+                      </a:solidFill>
+                      <a:prstDash val="solid"/>
+                      <a:round/>
+                      <a:headEnd type="none" w="med" len="med"/>
+                      <a:tailEnd type="none" w="med" len="med"/>
+                    </a:lnT>
+                    <a:lnB w="12700" cap="flat" cmpd="sng" algn="ctr">
+                      <a:solidFill>
+                        <a:srgbClr val="CBD5E0"/>
+                      </a:solidFill>
+                      <a:prstDash val="solid"/>
+                      <a:round/>
+                      <a:headEnd type="none" w="med" len="med"/>
+                      <a:tailEnd type="none" w="med" len="med"/>
+                    </a:lnB>
+                    <a:solidFill>
+                      <a:srgbClr val="F3F6F7"/>
+                    </a:solidFill>
+                  </a:tcPr>
+                </a:tc>
+                <a:tc>
+                  <a:txBody>
+                    <a:bodyPr/>
+                    <a:lstStyle/>
+                    <a:p>
+                      <a:pPr algn="ctr" indent="0" marL="0">
+                        <a:buNone/>
+                      </a:pPr>
+                      <a:r>
+                        <a:rPr lang="en-US" sz="850" dirty="0">
+                          <a:solidFill>
+                            <a:srgbClr val="2B2B2B"/>
+                          </a:solidFill>
+                          <a:latin typeface="맑은 고딕" pitchFamily="34" charset="0"/>
+                          <a:ea typeface="맑은 고딕" pitchFamily="34" charset="-122"/>
+                          <a:cs typeface="맑은 고딕" pitchFamily="34" charset="-120"/>
+                        </a:rPr>
+                        <a:t>의원</a:t>
+                      </a:r>
+                      <a:endParaRPr lang="en-US" sz="850" dirty="0">
+                        <a:latin typeface="맑은 고딕" charset="0"/>
+                        <a:ea typeface="맑은 고딕" charset="0"/>
+                        <a:cs typeface="맑은 고딕" charset="0"/>
+                      </a:endParaRPr>
+                    </a:p>
+                  </a:txBody>
+                  <a:tcPr marL="91440" marR="91440" marT="45720" marB="45720" anchor="ctr">
+                    <a:lnL w="12700" cap="flat" cmpd="sng" algn="ctr">
+                      <a:solidFill>
+                        <a:srgbClr val="CBD5E0"/>
+                      </a:solidFill>
+                      <a:prstDash val="solid"/>
+                      <a:round/>
+                      <a:headEnd type="none" w="med" len="med"/>
+                      <a:tailEnd type="none" w="med" len="med"/>
+                    </a:lnL>
+                    <a:lnR w="12700" cap="flat" cmpd="sng" algn="ctr">
+                      <a:solidFill>
+                        <a:srgbClr val="CBD5E0"/>
+                      </a:solidFill>
+                      <a:prstDash val="solid"/>
+                      <a:round/>
+                      <a:headEnd type="none" w="med" len="med"/>
+                      <a:tailEnd type="none" w="med" len="med"/>
+                    </a:lnR>
+                    <a:lnT w="12700" cap="flat" cmpd="sng" algn="ctr">
+                      <a:solidFill>
+                        <a:srgbClr val="CBD5E0"/>
+                      </a:solidFill>
+                      <a:prstDash val="solid"/>
+                      <a:round/>
+                      <a:headEnd type="none" w="med" len="med"/>
+                      <a:tailEnd type="none" w="med" len="med"/>
+                    </a:lnT>
+                    <a:lnB w="12700" cap="flat" cmpd="sng" algn="ctr">
+                      <a:solidFill>
+                        <a:srgbClr val="CBD5E0"/>
+                      </a:solidFill>
+                      <a:prstDash val="solid"/>
+                      <a:round/>
+                      <a:headEnd type="none" w="med" len="med"/>
+                      <a:tailEnd type="none" w="med" len="med"/>
+                    </a:lnB>
+                    <a:solidFill>
+                      <a:srgbClr val="F3F6F7"/>
+                    </a:solidFill>
+                  </a:tcPr>
+                </a:tc>
+                <a:tc>
+                  <a:txBody>
+                    <a:bodyPr/>
+                    <a:lstStyle/>
+                    <a:p>
                       <a:pPr algn="r" indent="0" marL="0">
                         <a:buNone/>
                       </a:pPr>
@@ -13883,7 +13766,553 @@
                           <a:ea typeface="맑은 고딕" pitchFamily="34" charset="-122"/>
                           <a:cs typeface="맑은 고딕" pitchFamily="34" charset="-120"/>
                         </a:rPr>
-                        <a:t>250</a:t>
+                        <a:t>-</a:t>
+                      </a:r>
+                      <a:endParaRPr lang="en-US" sz="850" dirty="0">
+                        <a:latin typeface="맑은 고딕" charset="0"/>
+                        <a:ea typeface="맑은 고딕" charset="0"/>
+                        <a:cs typeface="맑은 고딕" charset="0"/>
+                      </a:endParaRPr>
+                    </a:p>
+                  </a:txBody>
+                  <a:tcPr marL="91440" marR="91440" marT="45720" marB="45720" anchor="ctr">
+                    <a:lnL w="12700" cap="flat" cmpd="sng" algn="ctr">
+                      <a:solidFill>
+                        <a:srgbClr val="CBD5E0"/>
+                      </a:solidFill>
+                      <a:prstDash val="solid"/>
+                      <a:round/>
+                      <a:headEnd type="none" w="med" len="med"/>
+                      <a:tailEnd type="none" w="med" len="med"/>
+                    </a:lnL>
+                    <a:lnR w="12700" cap="flat" cmpd="sng" algn="ctr">
+                      <a:solidFill>
+                        <a:srgbClr val="CBD5E0"/>
+                      </a:solidFill>
+                      <a:prstDash val="solid"/>
+                      <a:round/>
+                      <a:headEnd type="none" w="med" len="med"/>
+                      <a:tailEnd type="none" w="med" len="med"/>
+                    </a:lnR>
+                    <a:lnT w="12700" cap="flat" cmpd="sng" algn="ctr">
+                      <a:solidFill>
+                        <a:srgbClr val="CBD5E0"/>
+                      </a:solidFill>
+                      <a:prstDash val="solid"/>
+                      <a:round/>
+                      <a:headEnd type="none" w="med" len="med"/>
+                      <a:tailEnd type="none" w="med" len="med"/>
+                    </a:lnT>
+                    <a:lnB w="12700" cap="flat" cmpd="sng" algn="ctr">
+                      <a:solidFill>
+                        <a:srgbClr val="CBD5E0"/>
+                      </a:solidFill>
+                      <a:prstDash val="solid"/>
+                      <a:round/>
+                      <a:headEnd type="none" w="med" len="med"/>
+                      <a:tailEnd type="none" w="med" len="med"/>
+                    </a:lnB>
+                    <a:solidFill>
+                      <a:srgbClr val="F3F6F7"/>
+                    </a:solidFill>
+                  </a:tcPr>
+                </a:tc>
+                <a:tc>
+                  <a:txBody>
+                    <a:bodyPr/>
+                    <a:lstStyle/>
+                    <a:p>
+                      <a:pPr algn="r" indent="0" marL="0">
+                        <a:buNone/>
+                      </a:pPr>
+                      <a:r>
+                        <a:rPr lang="en-US" sz="850" dirty="0">
+                          <a:solidFill>
+                            <a:srgbClr val="2B2B2B"/>
+                          </a:solidFill>
+                          <a:latin typeface="맑은 고딕" pitchFamily="34" charset="0"/>
+                          <a:ea typeface="맑은 고딕" pitchFamily="34" charset="-122"/>
+                          <a:cs typeface="맑은 고딕" pitchFamily="34" charset="-120"/>
+                        </a:rPr>
+                        <a:t>-</a:t>
+                      </a:r>
+                      <a:endParaRPr lang="en-US" sz="850" dirty="0">
+                        <a:latin typeface="맑은 고딕" charset="0"/>
+                        <a:ea typeface="맑은 고딕" charset="0"/>
+                        <a:cs typeface="맑은 고딕" charset="0"/>
+                      </a:endParaRPr>
+                    </a:p>
+                  </a:txBody>
+                  <a:tcPr marL="91440" marR="91440" marT="45720" marB="45720" anchor="ctr">
+                    <a:lnL w="12700" cap="flat" cmpd="sng" algn="ctr">
+                      <a:solidFill>
+                        <a:srgbClr val="CBD5E0"/>
+                      </a:solidFill>
+                      <a:prstDash val="solid"/>
+                      <a:round/>
+                      <a:headEnd type="none" w="med" len="med"/>
+                      <a:tailEnd type="none" w="med" len="med"/>
+                    </a:lnL>
+                    <a:lnR w="12700" cap="flat" cmpd="sng" algn="ctr">
+                      <a:solidFill>
+                        <a:srgbClr val="CBD5E0"/>
+                      </a:solidFill>
+                      <a:prstDash val="solid"/>
+                      <a:round/>
+                      <a:headEnd type="none" w="med" len="med"/>
+                      <a:tailEnd type="none" w="med" len="med"/>
+                    </a:lnR>
+                    <a:lnT w="12700" cap="flat" cmpd="sng" algn="ctr">
+                      <a:solidFill>
+                        <a:srgbClr val="CBD5E0"/>
+                      </a:solidFill>
+                      <a:prstDash val="solid"/>
+                      <a:round/>
+                      <a:headEnd type="none" w="med" len="med"/>
+                      <a:tailEnd type="none" w="med" len="med"/>
+                    </a:lnT>
+                    <a:lnB w="12700" cap="flat" cmpd="sng" algn="ctr">
+                      <a:solidFill>
+                        <a:srgbClr val="CBD5E0"/>
+                      </a:solidFill>
+                      <a:prstDash val="solid"/>
+                      <a:round/>
+                      <a:headEnd type="none" w="med" len="med"/>
+                      <a:tailEnd type="none" w="med" len="med"/>
+                    </a:lnB>
+                    <a:solidFill>
+                      <a:srgbClr val="F3F6F7"/>
+                    </a:solidFill>
+                  </a:tcPr>
+                </a:tc>
+                <a:tc>
+                  <a:txBody>
+                    <a:bodyPr/>
+                    <a:lstStyle/>
+                    <a:p>
+                      <a:pPr algn="r" indent="0" marL="0">
+                        <a:buNone/>
+                      </a:pPr>
+                      <a:r>
+                        <a:rPr lang="en-US" sz="850" dirty="0">
+                          <a:solidFill>
+                            <a:srgbClr val="2B2B2B"/>
+                          </a:solidFill>
+                          <a:latin typeface="맑은 고딕" pitchFamily="34" charset="0"/>
+                          <a:ea typeface="맑은 고딕" pitchFamily="34" charset="-122"/>
+                          <a:cs typeface="맑은 고딕" pitchFamily="34" charset="-120"/>
+                        </a:rPr>
+                        <a:t>-</a:t>
+                      </a:r>
+                      <a:endParaRPr lang="en-US" sz="850" dirty="0">
+                        <a:latin typeface="맑은 고딕" charset="0"/>
+                        <a:ea typeface="맑은 고딕" charset="0"/>
+                        <a:cs typeface="맑은 고딕" charset="0"/>
+                      </a:endParaRPr>
+                    </a:p>
+                  </a:txBody>
+                  <a:tcPr marL="91440" marR="91440" marT="45720" marB="45720" anchor="ctr">
+                    <a:lnL w="12700" cap="flat" cmpd="sng" algn="ctr">
+                      <a:solidFill>
+                        <a:srgbClr val="CBD5E0"/>
+                      </a:solidFill>
+                      <a:prstDash val="solid"/>
+                      <a:round/>
+                      <a:headEnd type="none" w="med" len="med"/>
+                      <a:tailEnd type="none" w="med" len="med"/>
+                    </a:lnL>
+                    <a:lnR w="12700" cap="flat" cmpd="sng" algn="ctr">
+                      <a:solidFill>
+                        <a:srgbClr val="CBD5E0"/>
+                      </a:solidFill>
+                      <a:prstDash val="solid"/>
+                      <a:round/>
+                      <a:headEnd type="none" w="med" len="med"/>
+                      <a:tailEnd type="none" w="med" len="med"/>
+                    </a:lnR>
+                    <a:lnT w="12700" cap="flat" cmpd="sng" algn="ctr">
+                      <a:solidFill>
+                        <a:srgbClr val="CBD5E0"/>
+                      </a:solidFill>
+                      <a:prstDash val="solid"/>
+                      <a:round/>
+                      <a:headEnd type="none" w="med" len="med"/>
+                      <a:tailEnd type="none" w="med" len="med"/>
+                    </a:lnT>
+                    <a:lnB w="12700" cap="flat" cmpd="sng" algn="ctr">
+                      <a:solidFill>
+                        <a:srgbClr val="CBD5E0"/>
+                      </a:solidFill>
+                      <a:prstDash val="solid"/>
+                      <a:round/>
+                      <a:headEnd type="none" w="med" len="med"/>
+                      <a:tailEnd type="none" w="med" len="med"/>
+                    </a:lnB>
+                    <a:solidFill>
+                      <a:srgbClr val="F3F6F7"/>
+                    </a:solidFill>
+                  </a:tcPr>
+                </a:tc>
+                <a:tc>
+                  <a:txBody>
+                    <a:bodyPr/>
+                    <a:lstStyle/>
+                    <a:p>
+                      <a:pPr algn="r" indent="0" marL="0">
+                        <a:buNone/>
+                      </a:pPr>
+                      <a:r>
+                        <a:rPr lang="en-US" sz="850" dirty="0">
+                          <a:solidFill>
+                            <a:srgbClr val="2B2B2B"/>
+                          </a:solidFill>
+                          <a:latin typeface="맑은 고딕" pitchFamily="34" charset="0"/>
+                          <a:ea typeface="맑은 고딕" pitchFamily="34" charset="-122"/>
+                          <a:cs typeface="맑은 고딕" pitchFamily="34" charset="-120"/>
+                        </a:rPr>
+                        <a:t>7,000</a:t>
+                      </a:r>
+                      <a:endParaRPr lang="en-US" sz="850" dirty="0">
+                        <a:latin typeface="맑은 고딕" charset="0"/>
+                        <a:ea typeface="맑은 고딕" charset="0"/>
+                        <a:cs typeface="맑은 고딕" charset="0"/>
+                      </a:endParaRPr>
+                    </a:p>
+                  </a:txBody>
+                  <a:tcPr marL="91440" marR="91440" marT="45720" marB="45720" anchor="ctr">
+                    <a:lnL w="12700" cap="flat" cmpd="sng" algn="ctr">
+                      <a:solidFill>
+                        <a:srgbClr val="CBD5E0"/>
+                      </a:solidFill>
+                      <a:prstDash val="solid"/>
+                      <a:round/>
+                      <a:headEnd type="none" w="med" len="med"/>
+                      <a:tailEnd type="none" w="med" len="med"/>
+                    </a:lnL>
+                    <a:lnR w="12700" cap="flat" cmpd="sng" algn="ctr">
+                      <a:solidFill>
+                        <a:srgbClr val="CBD5E0"/>
+                      </a:solidFill>
+                      <a:prstDash val="solid"/>
+                      <a:round/>
+                      <a:headEnd type="none" w="med" len="med"/>
+                      <a:tailEnd type="none" w="med" len="med"/>
+                    </a:lnR>
+                    <a:lnT w="12700" cap="flat" cmpd="sng" algn="ctr">
+                      <a:solidFill>
+                        <a:srgbClr val="CBD5E0"/>
+                      </a:solidFill>
+                      <a:prstDash val="solid"/>
+                      <a:round/>
+                      <a:headEnd type="none" w="med" len="med"/>
+                      <a:tailEnd type="none" w="med" len="med"/>
+                    </a:lnT>
+                    <a:lnB w="12700" cap="flat" cmpd="sng" algn="ctr">
+                      <a:solidFill>
+                        <a:srgbClr val="CBD5E0"/>
+                      </a:solidFill>
+                      <a:prstDash val="solid"/>
+                      <a:round/>
+                      <a:headEnd type="none" w="med" len="med"/>
+                      <a:tailEnd type="none" w="med" len="med"/>
+                    </a:lnB>
+                    <a:solidFill>
+                      <a:srgbClr val="F3F6F7"/>
+                    </a:solidFill>
+                  </a:tcPr>
+                </a:tc>
+                <a:tc>
+                  <a:txBody>
+                    <a:bodyPr/>
+                    <a:lstStyle/>
+                    <a:p>
+                      <a:pPr algn="ctr" indent="0" marL="0">
+                        <a:buNone/>
+                      </a:pPr>
+                      <a:r>
+                        <a:rPr lang="en-US" sz="850" dirty="0">
+                          <a:solidFill>
+                            <a:srgbClr val="2B2B2B"/>
+                          </a:solidFill>
+                          <a:latin typeface="맑은 고딕" pitchFamily="34" charset="0"/>
+                          <a:ea typeface="맑은 고딕" pitchFamily="34" charset="-122"/>
+                          <a:cs typeface="맑은 고딕" pitchFamily="34" charset="-120"/>
+                        </a:rPr>
+                        <a:t>300</a:t>
+                      </a:r>
+                      <a:endParaRPr lang="en-US" sz="850" dirty="0">
+                        <a:latin typeface="맑은 고딕" charset="0"/>
+                        <a:ea typeface="맑은 고딕" charset="0"/>
+                        <a:cs typeface="맑은 고딕" charset="0"/>
+                      </a:endParaRPr>
+                    </a:p>
+                  </a:txBody>
+                  <a:tcPr marL="91440" marR="91440" marT="45720" marB="45720" anchor="ctr">
+                    <a:lnL w="12700" cap="flat" cmpd="sng" algn="ctr">
+                      <a:solidFill>
+                        <a:srgbClr val="CBD5E0"/>
+                      </a:solidFill>
+                      <a:prstDash val="solid"/>
+                      <a:round/>
+                      <a:headEnd type="none" w="med" len="med"/>
+                      <a:tailEnd type="none" w="med" len="med"/>
+                    </a:lnL>
+                    <a:lnR w="12700" cap="flat" cmpd="sng" algn="ctr">
+                      <a:solidFill>
+                        <a:srgbClr val="CBD5E0"/>
+                      </a:solidFill>
+                      <a:prstDash val="solid"/>
+                      <a:round/>
+                      <a:headEnd type="none" w="med" len="med"/>
+                      <a:tailEnd type="none" w="med" len="med"/>
+                    </a:lnR>
+                    <a:lnT w="12700" cap="flat" cmpd="sng" algn="ctr">
+                      <a:solidFill>
+                        <a:srgbClr val="CBD5E0"/>
+                      </a:solidFill>
+                      <a:prstDash val="solid"/>
+                      <a:round/>
+                      <a:headEnd type="none" w="med" len="med"/>
+                      <a:tailEnd type="none" w="med" len="med"/>
+                    </a:lnT>
+                    <a:lnB w="12700" cap="flat" cmpd="sng" algn="ctr">
+                      <a:solidFill>
+                        <a:srgbClr val="CBD5E0"/>
+                      </a:solidFill>
+                      <a:prstDash val="solid"/>
+                      <a:round/>
+                      <a:headEnd type="none" w="med" len="med"/>
+                      <a:tailEnd type="none" w="med" len="med"/>
+                    </a:lnB>
+                    <a:solidFill>
+                      <a:srgbClr val="F3F6F7"/>
+                    </a:solidFill>
+                  </a:tcPr>
+                </a:tc>
+              </a:tr>
+              <a:tr h="337625">
+                <a:tc>
+                  <a:txBody>
+                    <a:bodyPr/>
+                    <a:lstStyle/>
+                    <a:p>
+                      <a:pPr algn="ctr" indent="0" marL="0">
+                        <a:buNone/>
+                      </a:pPr>
+                      <a:r>
+                        <a:rPr lang="en-US" sz="850" dirty="0">
+                          <a:solidFill>
+                            <a:srgbClr val="2B2B2B"/>
+                          </a:solidFill>
+                          <a:latin typeface="맑은 고딕" pitchFamily="34" charset="0"/>
+                          <a:ea typeface="맑은 고딕" pitchFamily="34" charset="-122"/>
+                          <a:cs typeface="맑은 고딕" pitchFamily="34" charset="-120"/>
+                        </a:rPr>
+                        <a:t>4F</a:t>
+                      </a:r>
+                      <a:endParaRPr lang="en-US" sz="850" dirty="0">
+                        <a:latin typeface="맑은 고딕" charset="0"/>
+                        <a:ea typeface="맑은 고딕" charset="0"/>
+                        <a:cs typeface="맑은 고딕" charset="0"/>
+                      </a:endParaRPr>
+                    </a:p>
+                  </a:txBody>
+                  <a:tcPr marL="91440" marR="91440" marT="45720" marB="45720" anchor="ctr">
+                    <a:lnL w="12700" cap="flat" cmpd="sng" algn="ctr">
+                      <a:solidFill>
+                        <a:srgbClr val="CBD5E0"/>
+                      </a:solidFill>
+                      <a:prstDash val="solid"/>
+                      <a:round/>
+                      <a:headEnd type="none" w="med" len="med"/>
+                      <a:tailEnd type="none" w="med" len="med"/>
+                    </a:lnL>
+                    <a:lnR w="12700" cap="flat" cmpd="sng" algn="ctr">
+                      <a:solidFill>
+                        <a:srgbClr val="CBD5E0"/>
+                      </a:solidFill>
+                      <a:prstDash val="solid"/>
+                      <a:round/>
+                      <a:headEnd type="none" w="med" len="med"/>
+                      <a:tailEnd type="none" w="med" len="med"/>
+                    </a:lnR>
+                    <a:lnT w="12700" cap="flat" cmpd="sng" algn="ctr">
+                      <a:solidFill>
+                        <a:srgbClr val="CBD5E0"/>
+                      </a:solidFill>
+                      <a:prstDash val="solid"/>
+                      <a:round/>
+                      <a:headEnd type="none" w="med" len="med"/>
+                      <a:tailEnd type="none" w="med" len="med"/>
+                    </a:lnT>
+                    <a:lnB w="12700" cap="flat" cmpd="sng" algn="ctr">
+                      <a:solidFill>
+                        <a:srgbClr val="CBD5E0"/>
+                      </a:solidFill>
+                      <a:prstDash val="solid"/>
+                      <a:round/>
+                      <a:headEnd type="none" w="med" len="med"/>
+                      <a:tailEnd type="none" w="med" len="med"/>
+                    </a:lnB>
+                    <a:solidFill>
+                      <a:srgbClr val="FFFFFF"/>
+                    </a:solidFill>
+                  </a:tcPr>
+                </a:tc>
+                <a:tc>
+                  <a:txBody>
+                    <a:bodyPr/>
+                    <a:lstStyle/>
+                    <a:p>
+                      <a:pPr algn="ctr" indent="0" marL="0">
+                        <a:buNone/>
+                      </a:pPr>
+                      <a:r>
+                        <a:rPr lang="en-US" sz="850" dirty="0">
+                          <a:solidFill>
+                            <a:srgbClr val="2B2B2B"/>
+                          </a:solidFill>
+                          <a:latin typeface="맑은 고딕" pitchFamily="34" charset="0"/>
+                          <a:ea typeface="맑은 고딕" pitchFamily="34" charset="-122"/>
+                          <a:cs typeface="맑은 고딕" pitchFamily="34" charset="-120"/>
+                        </a:rPr>
+                        <a:t>-</a:t>
+                      </a:r>
+                      <a:endParaRPr lang="en-US" sz="850" dirty="0">
+                        <a:latin typeface="맑은 고딕" charset="0"/>
+                        <a:ea typeface="맑은 고딕" charset="0"/>
+                        <a:cs typeface="맑은 고딕" charset="0"/>
+                      </a:endParaRPr>
+                    </a:p>
+                  </a:txBody>
+                  <a:tcPr marL="91440" marR="91440" marT="45720" marB="45720" anchor="ctr">
+                    <a:lnL w="12700" cap="flat" cmpd="sng" algn="ctr">
+                      <a:solidFill>
+                        <a:srgbClr val="CBD5E0"/>
+                      </a:solidFill>
+                      <a:prstDash val="solid"/>
+                      <a:round/>
+                      <a:headEnd type="none" w="med" len="med"/>
+                      <a:tailEnd type="none" w="med" len="med"/>
+                    </a:lnL>
+                    <a:lnR w="12700" cap="flat" cmpd="sng" algn="ctr">
+                      <a:solidFill>
+                        <a:srgbClr val="CBD5E0"/>
+                      </a:solidFill>
+                      <a:prstDash val="solid"/>
+                      <a:round/>
+                      <a:headEnd type="none" w="med" len="med"/>
+                      <a:tailEnd type="none" w="med" len="med"/>
+                    </a:lnR>
+                    <a:lnT w="12700" cap="flat" cmpd="sng" algn="ctr">
+                      <a:solidFill>
+                        <a:srgbClr val="CBD5E0"/>
+                      </a:solidFill>
+                      <a:prstDash val="solid"/>
+                      <a:round/>
+                      <a:headEnd type="none" w="med" len="med"/>
+                      <a:tailEnd type="none" w="med" len="med"/>
+                    </a:lnT>
+                    <a:lnB w="12700" cap="flat" cmpd="sng" algn="ctr">
+                      <a:solidFill>
+                        <a:srgbClr val="CBD5E0"/>
+                      </a:solidFill>
+                      <a:prstDash val="solid"/>
+                      <a:round/>
+                      <a:headEnd type="none" w="med" len="med"/>
+                      <a:tailEnd type="none" w="med" len="med"/>
+                    </a:lnB>
+                    <a:solidFill>
+                      <a:srgbClr val="FFFFFF"/>
+                    </a:solidFill>
+                  </a:tcPr>
+                </a:tc>
+                <a:tc>
+                  <a:txBody>
+                    <a:bodyPr/>
+                    <a:lstStyle/>
+                    <a:p>
+                      <a:pPr algn="ctr" indent="0" marL="0">
+                        <a:buNone/>
+                      </a:pPr>
+                      <a:r>
+                        <a:rPr lang="en-US" sz="850" dirty="0">
+                          <a:solidFill>
+                            <a:srgbClr val="2B2B2B"/>
+                          </a:solidFill>
+                          <a:latin typeface="맑은 고딕" pitchFamily="34" charset="0"/>
+                          <a:ea typeface="맑은 고딕" pitchFamily="34" charset="-122"/>
+                          <a:cs typeface="맑은 고딕" pitchFamily="34" charset="-120"/>
+                        </a:rPr>
+                        <a:t>사무소</a:t>
+                      </a:r>
+                      <a:endParaRPr lang="en-US" sz="850" dirty="0">
+                        <a:latin typeface="맑은 고딕" charset="0"/>
+                        <a:ea typeface="맑은 고딕" charset="0"/>
+                        <a:cs typeface="맑은 고딕" charset="0"/>
+                      </a:endParaRPr>
+                    </a:p>
+                  </a:txBody>
+                  <a:tcPr marL="91440" marR="91440" marT="45720" marB="45720" anchor="ctr">
+                    <a:lnL w="12700" cap="flat" cmpd="sng" algn="ctr">
+                      <a:solidFill>
+                        <a:srgbClr val="CBD5E0"/>
+                      </a:solidFill>
+                      <a:prstDash val="solid"/>
+                      <a:round/>
+                      <a:headEnd type="none" w="med" len="med"/>
+                      <a:tailEnd type="none" w="med" len="med"/>
+                    </a:lnL>
+                    <a:lnR w="12700" cap="flat" cmpd="sng" algn="ctr">
+                      <a:solidFill>
+                        <a:srgbClr val="CBD5E0"/>
+                      </a:solidFill>
+                      <a:prstDash val="solid"/>
+                      <a:round/>
+                      <a:headEnd type="none" w="med" len="med"/>
+                      <a:tailEnd type="none" w="med" len="med"/>
+                    </a:lnR>
+                    <a:lnT w="12700" cap="flat" cmpd="sng" algn="ctr">
+                      <a:solidFill>
+                        <a:srgbClr val="CBD5E0"/>
+                      </a:solidFill>
+                      <a:prstDash val="solid"/>
+                      <a:round/>
+                      <a:headEnd type="none" w="med" len="med"/>
+                      <a:tailEnd type="none" w="med" len="med"/>
+                    </a:lnT>
+                    <a:lnB w="12700" cap="flat" cmpd="sng" algn="ctr">
+                      <a:solidFill>
+                        <a:srgbClr val="CBD5E0"/>
+                      </a:solidFill>
+                      <a:prstDash val="solid"/>
+                      <a:round/>
+                      <a:headEnd type="none" w="med" len="med"/>
+                      <a:tailEnd type="none" w="med" len="med"/>
+                    </a:lnB>
+                    <a:solidFill>
+                      <a:srgbClr val="FFFFFF"/>
+                    </a:solidFill>
+                  </a:tcPr>
+                </a:tc>
+                <a:tc>
+                  <a:txBody>
+                    <a:bodyPr/>
+                    <a:lstStyle/>
+                    <a:p>
+                      <a:pPr algn="ctr" indent="0" marL="0">
+                        <a:buNone/>
+                      </a:pPr>
+                      <a:r>
+                        <a:rPr lang="en-US" sz="850" dirty="0">
+                          <a:solidFill>
+                            <a:srgbClr val="2B2B2B"/>
+                          </a:solidFill>
+                          <a:latin typeface="맑은 고딕" pitchFamily="34" charset="0"/>
+                          <a:ea typeface="맑은 고딕" pitchFamily="34" charset="-122"/>
+                          <a:cs typeface="맑은 고딕" pitchFamily="34" charset="-120"/>
+                        </a:rPr>
+                        <a:t>사무소</a:t>
                       </a:r>
                       <a:endParaRPr lang="en-US" sz="850" dirty="0">
                         <a:latin typeface="맑은 고딕" charset="0"/>
@@ -14007,9 +14436,20 @@
                     <a:bodyPr/>
                     <a:lstStyle/>
                     <a:p>
-                      <a:pPr algn="ctr" indent="0" marL="0">
+                      <a:pPr algn="r" indent="0" marL="0">
                         <a:buNone/>
                       </a:pPr>
+                      <a:r>
+                        <a:rPr lang="en-US" sz="850" dirty="0">
+                          <a:solidFill>
+                            <a:srgbClr val="2B2B2B"/>
+                          </a:solidFill>
+                          <a:latin typeface="맑은 고딕" pitchFamily="34" charset="0"/>
+                          <a:ea typeface="맑은 고딕" pitchFamily="34" charset="-122"/>
+                          <a:cs typeface="맑은 고딕" pitchFamily="34" charset="-120"/>
+                        </a:rPr>
+                        <a:t>-</a:t>
+                      </a:r>
                       <a:endParaRPr lang="en-US" sz="850" dirty="0">
                         <a:latin typeface="맑은 고딕" charset="0"/>
                         <a:ea typeface="맑은 고딕" charset="0"/>
@@ -14064,9 +14504,20 @@
                     <a:bodyPr/>
                     <a:lstStyle/>
                     <a:p>
-                      <a:pPr algn="ctr" indent="0" marL="0">
+                      <a:pPr algn="r" indent="0" marL="0">
                         <a:buNone/>
                       </a:pPr>
+                      <a:r>
+                        <a:rPr lang="en-US" sz="850" dirty="0">
+                          <a:solidFill>
+                            <a:srgbClr val="2B2B2B"/>
+                          </a:solidFill>
+                          <a:latin typeface="맑은 고딕" pitchFamily="34" charset="0"/>
+                          <a:ea typeface="맑은 고딕" pitchFamily="34" charset="-122"/>
+                          <a:cs typeface="맑은 고딕" pitchFamily="34" charset="-120"/>
+                        </a:rPr>
+                        <a:t>-</a:t>
+                      </a:r>
                       <a:endParaRPr lang="en-US" sz="850" dirty="0">
                         <a:latin typeface="맑은 고딕" charset="0"/>
                         <a:ea typeface="맑은 고딕" charset="0"/>
@@ -14116,8 +14567,74 @@
                     </a:solidFill>
                   </a:tcPr>
                 </a:tc>
-              </a:tr>
-              <a:tr h="320040">
+                <a:tc>
+                  <a:txBody>
+                    <a:bodyPr/>
+                    <a:lstStyle/>
+                    <a:p>
+                      <a:pPr algn="r" indent="0" marL="0">
+                        <a:buNone/>
+                      </a:pPr>
+                      <a:r>
+                        <a:rPr lang="en-US" sz="850" dirty="0">
+                          <a:solidFill>
+                            <a:srgbClr val="2B2B2B"/>
+                          </a:solidFill>
+                          <a:latin typeface="맑은 고딕" pitchFamily="34" charset="0"/>
+                          <a:ea typeface="맑은 고딕" pitchFamily="34" charset="-122"/>
+                          <a:cs typeface="맑은 고딕" pitchFamily="34" charset="-120"/>
+                        </a:rPr>
+                        <a:t>10,000</a:t>
+                      </a:r>
+                      <a:endParaRPr lang="en-US" sz="850" dirty="0">
+                        <a:latin typeface="맑은 고딕" charset="0"/>
+                        <a:ea typeface="맑은 고딕" charset="0"/>
+                        <a:cs typeface="맑은 고딕" charset="0"/>
+                      </a:endParaRPr>
+                    </a:p>
+                  </a:txBody>
+                  <a:tcPr marL="91440" marR="91440" marT="45720" marB="45720" anchor="ctr">
+                    <a:lnL w="12700" cap="flat" cmpd="sng" algn="ctr">
+                      <a:solidFill>
+                        <a:srgbClr val="CBD5E0"/>
+                      </a:solidFill>
+                      <a:prstDash val="solid"/>
+                      <a:round/>
+                      <a:headEnd type="none" w="med" len="med"/>
+                      <a:tailEnd type="none" w="med" len="med"/>
+                    </a:lnL>
+                    <a:lnR w="12700" cap="flat" cmpd="sng" algn="ctr">
+                      <a:solidFill>
+                        <a:srgbClr val="CBD5E0"/>
+                      </a:solidFill>
+                      <a:prstDash val="solid"/>
+                      <a:round/>
+                      <a:headEnd type="none" w="med" len="med"/>
+                      <a:tailEnd type="none" w="med" len="med"/>
+                    </a:lnR>
+                    <a:lnT w="12700" cap="flat" cmpd="sng" algn="ctr">
+                      <a:solidFill>
+                        <a:srgbClr val="CBD5E0"/>
+                      </a:solidFill>
+                      <a:prstDash val="solid"/>
+                      <a:round/>
+                      <a:headEnd type="none" w="med" len="med"/>
+                      <a:tailEnd type="none" w="med" len="med"/>
+                    </a:lnT>
+                    <a:lnB w="12700" cap="flat" cmpd="sng" algn="ctr">
+                      <a:solidFill>
+                        <a:srgbClr val="CBD5E0"/>
+                      </a:solidFill>
+                      <a:prstDash val="solid"/>
+                      <a:round/>
+                      <a:headEnd type="none" w="med" len="med"/>
+                      <a:tailEnd type="none" w="med" len="med"/>
+                    </a:lnB>
+                    <a:solidFill>
+                      <a:srgbClr val="FFFFFF"/>
+                    </a:solidFill>
+                  </a:tcPr>
+                </a:tc>
                 <a:tc>
                   <a:txBody>
                     <a:bodyPr/>
@@ -14135,7 +14652,77 @@
                           <a:ea typeface="맑은 고딕" pitchFamily="34" charset="-122"/>
                           <a:cs typeface="맑은 고딕" pitchFamily="34" charset="-120"/>
                         </a:rPr>
-                        <a:t>3F-2</a:t>
+                        <a:t>400</a:t>
+                      </a:r>
+                      <a:endParaRPr lang="en-US" sz="850" dirty="0">
+                        <a:latin typeface="맑은 고딕" charset="0"/>
+                        <a:ea typeface="맑은 고딕" charset="0"/>
+                        <a:cs typeface="맑은 고딕" charset="0"/>
+                      </a:endParaRPr>
+                    </a:p>
+                  </a:txBody>
+                  <a:tcPr marL="91440" marR="91440" marT="45720" marB="45720" anchor="ctr">
+                    <a:lnL w="12700" cap="flat" cmpd="sng" algn="ctr">
+                      <a:solidFill>
+                        <a:srgbClr val="CBD5E0"/>
+                      </a:solidFill>
+                      <a:prstDash val="solid"/>
+                      <a:round/>
+                      <a:headEnd type="none" w="med" len="med"/>
+                      <a:tailEnd type="none" w="med" len="med"/>
+                    </a:lnL>
+                    <a:lnR w="12700" cap="flat" cmpd="sng" algn="ctr">
+                      <a:solidFill>
+                        <a:srgbClr val="CBD5E0"/>
+                      </a:solidFill>
+                      <a:prstDash val="solid"/>
+                      <a:round/>
+                      <a:headEnd type="none" w="med" len="med"/>
+                      <a:tailEnd type="none" w="med" len="med"/>
+                    </a:lnR>
+                    <a:lnT w="12700" cap="flat" cmpd="sng" algn="ctr">
+                      <a:solidFill>
+                        <a:srgbClr val="CBD5E0"/>
+                      </a:solidFill>
+                      <a:prstDash val="solid"/>
+                      <a:round/>
+                      <a:headEnd type="none" w="med" len="med"/>
+                      <a:tailEnd type="none" w="med" len="med"/>
+                    </a:lnT>
+                    <a:lnB w="12700" cap="flat" cmpd="sng" algn="ctr">
+                      <a:solidFill>
+                        <a:srgbClr val="CBD5E0"/>
+                      </a:solidFill>
+                      <a:prstDash val="solid"/>
+                      <a:round/>
+                      <a:headEnd type="none" w="med" len="med"/>
+                      <a:tailEnd type="none" w="med" len="med"/>
+                    </a:lnB>
+                    <a:solidFill>
+                      <a:srgbClr val="FFFFFF"/>
+                    </a:solidFill>
+                  </a:tcPr>
+                </a:tc>
+              </a:tr>
+              <a:tr h="337625">
+                <a:tc>
+                  <a:txBody>
+                    <a:bodyPr/>
+                    <a:lstStyle/>
+                    <a:p>
+                      <a:pPr algn="ctr" indent="0" marL="0">
+                        <a:buNone/>
+                      </a:pPr>
+                      <a:r>
+                        <a:rPr lang="en-US" sz="850" dirty="0">
+                          <a:solidFill>
+                            <a:srgbClr val="2B2B2B"/>
+                          </a:solidFill>
+                          <a:latin typeface="맑은 고딕" pitchFamily="34" charset="0"/>
+                          <a:ea typeface="맑은 고딕" pitchFamily="34" charset="-122"/>
+                          <a:cs typeface="맑은 고딕" pitchFamily="34" charset="-120"/>
+                        </a:rPr>
+                        <a:t>5F-1</a:t>
                       </a:r>
                       <a:endParaRPr lang="en-US" sz="850" dirty="0">
                         <a:latin typeface="맑은 고딕" charset="0"/>
@@ -14271,7 +14858,7 @@
                           <a:ea typeface="맑은 고딕" pitchFamily="34" charset="-122"/>
                           <a:cs typeface="맑은 고딕" pitchFamily="34" charset="-120"/>
                         </a:rPr>
-                        <a:t>의원</a:t>
+                        <a:t>학원</a:t>
                       </a:r>
                       <a:endParaRPr lang="en-US" sz="850" dirty="0">
                         <a:latin typeface="맑은 고딕" charset="0"/>
@@ -14339,211 +14926,7 @@
                           <a:ea typeface="맑은 고딕" pitchFamily="34" charset="-122"/>
                           <a:cs typeface="맑은 고딕" pitchFamily="34" charset="-120"/>
                         </a:rPr>
-                        <a:t>의원</a:t>
-                      </a:r>
-                      <a:endParaRPr lang="en-US" sz="850" dirty="0">
-                        <a:latin typeface="맑은 고딕" charset="0"/>
-                        <a:ea typeface="맑은 고딕" charset="0"/>
-                        <a:cs typeface="맑은 고딕" charset="0"/>
-                      </a:endParaRPr>
-                    </a:p>
-                  </a:txBody>
-                  <a:tcPr marL="91440" marR="91440" marT="45720" marB="45720" anchor="ctr">
-                    <a:lnL w="12700" cap="flat" cmpd="sng" algn="ctr">
-                      <a:solidFill>
-                        <a:srgbClr val="CBD5E0"/>
-                      </a:solidFill>
-                      <a:prstDash val="solid"/>
-                      <a:round/>
-                      <a:headEnd type="none" w="med" len="med"/>
-                      <a:tailEnd type="none" w="med" len="med"/>
-                    </a:lnL>
-                    <a:lnR w="12700" cap="flat" cmpd="sng" algn="ctr">
-                      <a:solidFill>
-                        <a:srgbClr val="CBD5E0"/>
-                      </a:solidFill>
-                      <a:prstDash val="solid"/>
-                      <a:round/>
-                      <a:headEnd type="none" w="med" len="med"/>
-                      <a:tailEnd type="none" w="med" len="med"/>
-                    </a:lnR>
-                    <a:lnT w="12700" cap="flat" cmpd="sng" algn="ctr">
-                      <a:solidFill>
-                        <a:srgbClr val="CBD5E0"/>
-                      </a:solidFill>
-                      <a:prstDash val="solid"/>
-                      <a:round/>
-                      <a:headEnd type="none" w="med" len="med"/>
-                      <a:tailEnd type="none" w="med" len="med"/>
-                    </a:lnT>
-                    <a:lnB w="12700" cap="flat" cmpd="sng" algn="ctr">
-                      <a:solidFill>
-                        <a:srgbClr val="CBD5E0"/>
-                      </a:solidFill>
-                      <a:prstDash val="solid"/>
-                      <a:round/>
-                      <a:headEnd type="none" w="med" len="med"/>
-                      <a:tailEnd type="none" w="med" len="med"/>
-                    </a:lnB>
-                    <a:solidFill>
-                      <a:srgbClr val="F3F6F7"/>
-                    </a:solidFill>
-                  </a:tcPr>
-                </a:tc>
-                <a:tc>
-                  <a:txBody>
-                    <a:bodyPr/>
-                    <a:lstStyle/>
-                    <a:p>
-                      <a:pPr algn="r" indent="0" marL="0">
-                        <a:buNone/>
-                      </a:pPr>
-                      <a:r>
-                        <a:rPr lang="en-US" sz="850" dirty="0">
-                          <a:solidFill>
-                            <a:srgbClr val="2B2B2B"/>
-                          </a:solidFill>
-                          <a:latin typeface="맑은 고딕" pitchFamily="34" charset="0"/>
-                          <a:ea typeface="맑은 고딕" pitchFamily="34" charset="-122"/>
-                          <a:cs typeface="맑은 고딕" pitchFamily="34" charset="-120"/>
-                        </a:rPr>
-                        <a:t>130.7</a:t>
-                      </a:r>
-                      <a:endParaRPr lang="en-US" sz="850" dirty="0">
-                        <a:latin typeface="맑은 고딕" charset="0"/>
-                        <a:ea typeface="맑은 고딕" charset="0"/>
-                        <a:cs typeface="맑은 고딕" charset="0"/>
-                      </a:endParaRPr>
-                    </a:p>
-                  </a:txBody>
-                  <a:tcPr marL="91440" marR="91440" marT="45720" marB="45720" anchor="ctr">
-                    <a:lnL w="12700" cap="flat" cmpd="sng" algn="ctr">
-                      <a:solidFill>
-                        <a:srgbClr val="CBD5E0"/>
-                      </a:solidFill>
-                      <a:prstDash val="solid"/>
-                      <a:round/>
-                      <a:headEnd type="none" w="med" len="med"/>
-                      <a:tailEnd type="none" w="med" len="med"/>
-                    </a:lnL>
-                    <a:lnR w="12700" cap="flat" cmpd="sng" algn="ctr">
-                      <a:solidFill>
-                        <a:srgbClr val="CBD5E0"/>
-                      </a:solidFill>
-                      <a:prstDash val="solid"/>
-                      <a:round/>
-                      <a:headEnd type="none" w="med" len="med"/>
-                      <a:tailEnd type="none" w="med" len="med"/>
-                    </a:lnR>
-                    <a:lnT w="12700" cap="flat" cmpd="sng" algn="ctr">
-                      <a:solidFill>
-                        <a:srgbClr val="CBD5E0"/>
-                      </a:solidFill>
-                      <a:prstDash val="solid"/>
-                      <a:round/>
-                      <a:headEnd type="none" w="med" len="med"/>
-                      <a:tailEnd type="none" w="med" len="med"/>
-                    </a:lnT>
-                    <a:lnB w="12700" cap="flat" cmpd="sng" algn="ctr">
-                      <a:solidFill>
-                        <a:srgbClr val="CBD5E0"/>
-                      </a:solidFill>
-                      <a:prstDash val="solid"/>
-                      <a:round/>
-                      <a:headEnd type="none" w="med" len="med"/>
-                      <a:tailEnd type="none" w="med" len="med"/>
-                    </a:lnB>
-                    <a:solidFill>
-                      <a:srgbClr val="F3F6F7"/>
-                    </a:solidFill>
-                  </a:tcPr>
-                </a:tc>
-                <a:tc>
-                  <a:txBody>
-                    <a:bodyPr/>
-                    <a:lstStyle/>
-                    <a:p>
-                      <a:pPr algn="r" indent="0" marL="0">
-                        <a:buNone/>
-                      </a:pPr>
-                      <a:r>
-                        <a:rPr lang="en-US" sz="850" dirty="0">
-                          <a:solidFill>
-                            <a:srgbClr val="2B2B2B"/>
-                          </a:solidFill>
-                          <a:latin typeface="맑은 고딕" pitchFamily="34" charset="0"/>
-                          <a:ea typeface="맑은 고딕" pitchFamily="34" charset="-122"/>
-                          <a:cs typeface="맑은 고딕" pitchFamily="34" charset="-120"/>
-                        </a:rPr>
-                        <a:t>7,000</a:t>
-                      </a:r>
-                      <a:endParaRPr lang="en-US" sz="850" dirty="0">
-                        <a:latin typeface="맑은 고딕" charset="0"/>
-                        <a:ea typeface="맑은 고딕" charset="0"/>
-                        <a:cs typeface="맑은 고딕" charset="0"/>
-                      </a:endParaRPr>
-                    </a:p>
-                  </a:txBody>
-                  <a:tcPr marL="91440" marR="91440" marT="45720" marB="45720" anchor="ctr">
-                    <a:lnL w="12700" cap="flat" cmpd="sng" algn="ctr">
-                      <a:solidFill>
-                        <a:srgbClr val="CBD5E0"/>
-                      </a:solidFill>
-                      <a:prstDash val="solid"/>
-                      <a:round/>
-                      <a:headEnd type="none" w="med" len="med"/>
-                      <a:tailEnd type="none" w="med" len="med"/>
-                    </a:lnL>
-                    <a:lnR w="12700" cap="flat" cmpd="sng" algn="ctr">
-                      <a:solidFill>
-                        <a:srgbClr val="CBD5E0"/>
-                      </a:solidFill>
-                      <a:prstDash val="solid"/>
-                      <a:round/>
-                      <a:headEnd type="none" w="med" len="med"/>
-                      <a:tailEnd type="none" w="med" len="med"/>
-                    </a:lnR>
-                    <a:lnT w="12700" cap="flat" cmpd="sng" algn="ctr">
-                      <a:solidFill>
-                        <a:srgbClr val="CBD5E0"/>
-                      </a:solidFill>
-                      <a:prstDash val="solid"/>
-                      <a:round/>
-                      <a:headEnd type="none" w="med" len="med"/>
-                      <a:tailEnd type="none" w="med" len="med"/>
-                    </a:lnT>
-                    <a:lnB w="12700" cap="flat" cmpd="sng" algn="ctr">
-                      <a:solidFill>
-                        <a:srgbClr val="CBD5E0"/>
-                      </a:solidFill>
-                      <a:prstDash val="solid"/>
-                      <a:round/>
-                      <a:headEnd type="none" w="med" len="med"/>
-                      <a:tailEnd type="none" w="med" len="med"/>
-                    </a:lnB>
-                    <a:solidFill>
-                      <a:srgbClr val="F3F6F7"/>
-                    </a:solidFill>
-                  </a:tcPr>
-                </a:tc>
-                <a:tc>
-                  <a:txBody>
-                    <a:bodyPr/>
-                    <a:lstStyle/>
-                    <a:p>
-                      <a:pPr algn="r" indent="0" marL="0">
-                        <a:buNone/>
-                      </a:pPr>
-                      <a:r>
-                        <a:rPr lang="en-US" sz="850" dirty="0">
-                          <a:solidFill>
-                            <a:srgbClr val="2B2B2B"/>
-                          </a:solidFill>
-                          <a:latin typeface="맑은 고딕" pitchFamily="34" charset="0"/>
-                          <a:ea typeface="맑은 고딕" pitchFamily="34" charset="-122"/>
-                          <a:cs typeface="맑은 고딕" pitchFamily="34" charset="-120"/>
-                        </a:rPr>
-                        <a:t>300</a:t>
+                        <a:t>학원</a:t>
                       </a:r>
                       <a:endParaRPr lang="en-US" sz="850" dirty="0">
                         <a:latin typeface="맑은 고딕" charset="0"/>
@@ -14667,9 +15050,20 @@
                     <a:bodyPr/>
                     <a:lstStyle/>
                     <a:p>
-                      <a:pPr algn="ctr" indent="0" marL="0">
+                      <a:pPr algn="r" indent="0" marL="0">
                         <a:buNone/>
                       </a:pPr>
+                      <a:r>
+                        <a:rPr lang="en-US" sz="850" dirty="0">
+                          <a:solidFill>
+                            <a:srgbClr val="2B2B2B"/>
+                          </a:solidFill>
+                          <a:latin typeface="맑은 고딕" pitchFamily="34" charset="0"/>
+                          <a:ea typeface="맑은 고딕" pitchFamily="34" charset="-122"/>
+                          <a:cs typeface="맑은 고딕" pitchFamily="34" charset="-120"/>
+                        </a:rPr>
+                        <a:t>-</a:t>
+                      </a:r>
                       <a:endParaRPr lang="en-US" sz="850" dirty="0">
                         <a:latin typeface="맑은 고딕" charset="0"/>
                         <a:ea typeface="맑은 고딕" charset="0"/>
@@ -14724,9 +15118,20 @@
                     <a:bodyPr/>
                     <a:lstStyle/>
                     <a:p>
-                      <a:pPr algn="ctr" indent="0" marL="0">
+                      <a:pPr algn="r" indent="0" marL="0">
                         <a:buNone/>
                       </a:pPr>
+                      <a:r>
+                        <a:rPr lang="en-US" sz="850" dirty="0">
+                          <a:solidFill>
+                            <a:srgbClr val="2B2B2B"/>
+                          </a:solidFill>
+                          <a:latin typeface="맑은 고딕" pitchFamily="34" charset="0"/>
+                          <a:ea typeface="맑은 고딕" pitchFamily="34" charset="-122"/>
+                          <a:cs typeface="맑은 고딕" pitchFamily="34" charset="-120"/>
+                        </a:rPr>
+                        <a:t>-</a:t>
+                      </a:r>
                       <a:endParaRPr lang="en-US" sz="850" dirty="0">
                         <a:latin typeface="맑은 고딕" charset="0"/>
                         <a:ea typeface="맑은 고딕" charset="0"/>
@@ -14776,8 +15181,74 @@
                     </a:solidFill>
                   </a:tcPr>
                 </a:tc>
-              </a:tr>
-              <a:tr h="320040">
+                <a:tc>
+                  <a:txBody>
+                    <a:bodyPr/>
+                    <a:lstStyle/>
+                    <a:p>
+                      <a:pPr algn="r" indent="0" marL="0">
+                        <a:buNone/>
+                      </a:pPr>
+                      <a:r>
+                        <a:rPr lang="en-US" sz="850" dirty="0">
+                          <a:solidFill>
+                            <a:srgbClr val="2B2B2B"/>
+                          </a:solidFill>
+                          <a:latin typeface="맑은 고딕" pitchFamily="34" charset="0"/>
+                          <a:ea typeface="맑은 고딕" pitchFamily="34" charset="-122"/>
+                          <a:cs typeface="맑은 고딕" pitchFamily="34" charset="-120"/>
+                        </a:rPr>
+                        <a:t>5,000</a:t>
+                      </a:r>
+                      <a:endParaRPr lang="en-US" sz="850" dirty="0">
+                        <a:latin typeface="맑은 고딕" charset="0"/>
+                        <a:ea typeface="맑은 고딕" charset="0"/>
+                        <a:cs typeface="맑은 고딕" charset="0"/>
+                      </a:endParaRPr>
+                    </a:p>
+                  </a:txBody>
+                  <a:tcPr marL="91440" marR="91440" marT="45720" marB="45720" anchor="ctr">
+                    <a:lnL w="12700" cap="flat" cmpd="sng" algn="ctr">
+                      <a:solidFill>
+                        <a:srgbClr val="CBD5E0"/>
+                      </a:solidFill>
+                      <a:prstDash val="solid"/>
+                      <a:round/>
+                      <a:headEnd type="none" w="med" len="med"/>
+                      <a:tailEnd type="none" w="med" len="med"/>
+                    </a:lnL>
+                    <a:lnR w="12700" cap="flat" cmpd="sng" algn="ctr">
+                      <a:solidFill>
+                        <a:srgbClr val="CBD5E0"/>
+                      </a:solidFill>
+                      <a:prstDash val="solid"/>
+                      <a:round/>
+                      <a:headEnd type="none" w="med" len="med"/>
+                      <a:tailEnd type="none" w="med" len="med"/>
+                    </a:lnR>
+                    <a:lnT w="12700" cap="flat" cmpd="sng" algn="ctr">
+                      <a:solidFill>
+                        <a:srgbClr val="CBD5E0"/>
+                      </a:solidFill>
+                      <a:prstDash val="solid"/>
+                      <a:round/>
+                      <a:headEnd type="none" w="med" len="med"/>
+                      <a:tailEnd type="none" w="med" len="med"/>
+                    </a:lnT>
+                    <a:lnB w="12700" cap="flat" cmpd="sng" algn="ctr">
+                      <a:solidFill>
+                        <a:srgbClr val="CBD5E0"/>
+                      </a:solidFill>
+                      <a:prstDash val="solid"/>
+                      <a:round/>
+                      <a:headEnd type="none" w="med" len="med"/>
+                      <a:tailEnd type="none" w="med" len="med"/>
+                    </a:lnB>
+                    <a:solidFill>
+                      <a:srgbClr val="F3F6F7"/>
+                    </a:solidFill>
+                  </a:tcPr>
+                </a:tc>
                 <a:tc>
                   <a:txBody>
                     <a:bodyPr/>
@@ -14795,7 +15266,77 @@
                           <a:ea typeface="맑은 고딕" pitchFamily="34" charset="-122"/>
                           <a:cs typeface="맑은 고딕" pitchFamily="34" charset="-120"/>
                         </a:rPr>
-                        <a:t>4F</a:t>
+                        <a:t>250</a:t>
+                      </a:r>
+                      <a:endParaRPr lang="en-US" sz="850" dirty="0">
+                        <a:latin typeface="맑은 고딕" charset="0"/>
+                        <a:ea typeface="맑은 고딕" charset="0"/>
+                        <a:cs typeface="맑은 고딕" charset="0"/>
+                      </a:endParaRPr>
+                    </a:p>
+                  </a:txBody>
+                  <a:tcPr marL="91440" marR="91440" marT="45720" marB="45720" anchor="ctr">
+                    <a:lnL w="12700" cap="flat" cmpd="sng" algn="ctr">
+                      <a:solidFill>
+                        <a:srgbClr val="CBD5E0"/>
+                      </a:solidFill>
+                      <a:prstDash val="solid"/>
+                      <a:round/>
+                      <a:headEnd type="none" w="med" len="med"/>
+                      <a:tailEnd type="none" w="med" len="med"/>
+                    </a:lnL>
+                    <a:lnR w="12700" cap="flat" cmpd="sng" algn="ctr">
+                      <a:solidFill>
+                        <a:srgbClr val="CBD5E0"/>
+                      </a:solidFill>
+                      <a:prstDash val="solid"/>
+                      <a:round/>
+                      <a:headEnd type="none" w="med" len="med"/>
+                      <a:tailEnd type="none" w="med" len="med"/>
+                    </a:lnR>
+                    <a:lnT w="12700" cap="flat" cmpd="sng" algn="ctr">
+                      <a:solidFill>
+                        <a:srgbClr val="CBD5E0"/>
+                      </a:solidFill>
+                      <a:prstDash val="solid"/>
+                      <a:round/>
+                      <a:headEnd type="none" w="med" len="med"/>
+                      <a:tailEnd type="none" w="med" len="med"/>
+                    </a:lnT>
+                    <a:lnB w="12700" cap="flat" cmpd="sng" algn="ctr">
+                      <a:solidFill>
+                        <a:srgbClr val="CBD5E0"/>
+                      </a:solidFill>
+                      <a:prstDash val="solid"/>
+                      <a:round/>
+                      <a:headEnd type="none" w="med" len="med"/>
+                      <a:tailEnd type="none" w="med" len="med"/>
+                    </a:lnB>
+                    <a:solidFill>
+                      <a:srgbClr val="F3F6F7"/>
+                    </a:solidFill>
+                  </a:tcPr>
+                </a:tc>
+              </a:tr>
+              <a:tr h="337625">
+                <a:tc>
+                  <a:txBody>
+                    <a:bodyPr/>
+                    <a:lstStyle/>
+                    <a:p>
+                      <a:pPr algn="ctr" indent="0" marL="0">
+                        <a:buNone/>
+                      </a:pPr>
+                      <a:r>
+                        <a:rPr lang="en-US" sz="850" dirty="0">
+                          <a:solidFill>
+                            <a:srgbClr val="2B2B2B"/>
+                          </a:solidFill>
+                          <a:latin typeface="맑은 고딕" pitchFamily="34" charset="0"/>
+                          <a:ea typeface="맑은 고딕" pitchFamily="34" charset="-122"/>
+                          <a:cs typeface="맑은 고딕" pitchFamily="34" charset="-120"/>
+                        </a:rPr>
+                        <a:t>5F-2</a:t>
                       </a:r>
                       <a:endParaRPr lang="en-US" sz="850" dirty="0">
                         <a:latin typeface="맑은 고딕" charset="0"/>
@@ -14931,7 +15472,7 @@
                           <a:ea typeface="맑은 고딕" pitchFamily="34" charset="-122"/>
                           <a:cs typeface="맑은 고딕" pitchFamily="34" charset="-120"/>
                         </a:rPr>
-                        <a:t>사무소</a:t>
+                        <a:t>학원</a:t>
                       </a:r>
                       <a:endParaRPr lang="en-US" sz="850" dirty="0">
                         <a:latin typeface="맑은 고딕" charset="0"/>
@@ -14999,211 +15540,7 @@
                           <a:ea typeface="맑은 고딕" pitchFamily="34" charset="-122"/>
                           <a:cs typeface="맑은 고딕" pitchFamily="34" charset="-120"/>
                         </a:rPr>
-                        <a:t>사무소</a:t>
-                      </a:r>
-                      <a:endParaRPr lang="en-US" sz="850" dirty="0">
-                        <a:latin typeface="맑은 고딕" charset="0"/>
-                        <a:ea typeface="맑은 고딕" charset="0"/>
-                        <a:cs typeface="맑은 고딕" charset="0"/>
-                      </a:endParaRPr>
-                    </a:p>
-                  </a:txBody>
-                  <a:tcPr marL="91440" marR="91440" marT="45720" marB="45720" anchor="ctr">
-                    <a:lnL w="12700" cap="flat" cmpd="sng" algn="ctr">
-                      <a:solidFill>
-                        <a:srgbClr val="CBD5E0"/>
-                      </a:solidFill>
-                      <a:prstDash val="solid"/>
-                      <a:round/>
-                      <a:headEnd type="none" w="med" len="med"/>
-                      <a:tailEnd type="none" w="med" len="med"/>
-                    </a:lnL>
-                    <a:lnR w="12700" cap="flat" cmpd="sng" algn="ctr">
-                      <a:solidFill>
-                        <a:srgbClr val="CBD5E0"/>
-                      </a:solidFill>
-                      <a:prstDash val="solid"/>
-                      <a:round/>
-                      <a:headEnd type="none" w="med" len="med"/>
-                      <a:tailEnd type="none" w="med" len="med"/>
-                    </a:lnR>
-                    <a:lnT w="12700" cap="flat" cmpd="sng" algn="ctr">
-                      <a:solidFill>
-                        <a:srgbClr val="CBD5E0"/>
-                      </a:solidFill>
-                      <a:prstDash val="solid"/>
-                      <a:round/>
-                      <a:headEnd type="none" w="med" len="med"/>
-                      <a:tailEnd type="none" w="med" len="med"/>
-                    </a:lnT>
-                    <a:lnB w="12700" cap="flat" cmpd="sng" algn="ctr">
-                      <a:solidFill>
-                        <a:srgbClr val="CBD5E0"/>
-                      </a:solidFill>
-                      <a:prstDash val="solid"/>
-                      <a:round/>
-                      <a:headEnd type="none" w="med" len="med"/>
-                      <a:tailEnd type="none" w="med" len="med"/>
-                    </a:lnB>
-                    <a:solidFill>
-                      <a:srgbClr val="FFFFFF"/>
-                    </a:solidFill>
-                  </a:tcPr>
-                </a:tc>
-                <a:tc>
-                  <a:txBody>
-                    <a:bodyPr/>
-                    <a:lstStyle/>
-                    <a:p>
-                      <a:pPr algn="r" indent="0" marL="0">
-                        <a:buNone/>
-                      </a:pPr>
-                      <a:r>
-                        <a:rPr lang="en-US" sz="850" dirty="0">
-                          <a:solidFill>
-                            <a:srgbClr val="2B2B2B"/>
-                          </a:solidFill>
-                          <a:latin typeface="맑은 고딕" pitchFamily="34" charset="0"/>
-                          <a:ea typeface="맑은 고딕" pitchFamily="34" charset="-122"/>
-                          <a:cs typeface="맑은 고딕" pitchFamily="34" charset="-120"/>
-                        </a:rPr>
-                        <a:t>266.4</a:t>
-                      </a:r>
-                      <a:endParaRPr lang="en-US" sz="850" dirty="0">
-                        <a:latin typeface="맑은 고딕" charset="0"/>
-                        <a:ea typeface="맑은 고딕" charset="0"/>
-                        <a:cs typeface="맑은 고딕" charset="0"/>
-                      </a:endParaRPr>
-                    </a:p>
-                  </a:txBody>
-                  <a:tcPr marL="91440" marR="91440" marT="45720" marB="45720" anchor="ctr">
-                    <a:lnL w="12700" cap="flat" cmpd="sng" algn="ctr">
-                      <a:solidFill>
-                        <a:srgbClr val="CBD5E0"/>
-                      </a:solidFill>
-                      <a:prstDash val="solid"/>
-                      <a:round/>
-                      <a:headEnd type="none" w="med" len="med"/>
-                      <a:tailEnd type="none" w="med" len="med"/>
-                    </a:lnL>
-                    <a:lnR w="12700" cap="flat" cmpd="sng" algn="ctr">
-                      <a:solidFill>
-                        <a:srgbClr val="CBD5E0"/>
-                      </a:solidFill>
-                      <a:prstDash val="solid"/>
-                      <a:round/>
-                      <a:headEnd type="none" w="med" len="med"/>
-                      <a:tailEnd type="none" w="med" len="med"/>
-                    </a:lnR>
-                    <a:lnT w="12700" cap="flat" cmpd="sng" algn="ctr">
-                      <a:solidFill>
-                        <a:srgbClr val="CBD5E0"/>
-                      </a:solidFill>
-                      <a:prstDash val="solid"/>
-                      <a:round/>
-                      <a:headEnd type="none" w="med" len="med"/>
-                      <a:tailEnd type="none" w="med" len="med"/>
-                    </a:lnT>
-                    <a:lnB w="12700" cap="flat" cmpd="sng" algn="ctr">
-                      <a:solidFill>
-                        <a:srgbClr val="CBD5E0"/>
-                      </a:solidFill>
-                      <a:prstDash val="solid"/>
-                      <a:round/>
-                      <a:headEnd type="none" w="med" len="med"/>
-                      <a:tailEnd type="none" w="med" len="med"/>
-                    </a:lnB>
-                    <a:solidFill>
-                      <a:srgbClr val="FFFFFF"/>
-                    </a:solidFill>
-                  </a:tcPr>
-                </a:tc>
-                <a:tc>
-                  <a:txBody>
-                    <a:bodyPr/>
-                    <a:lstStyle/>
-                    <a:p>
-                      <a:pPr algn="r" indent="0" marL="0">
-                        <a:buNone/>
-                      </a:pPr>
-                      <a:r>
-                        <a:rPr lang="en-US" sz="850" dirty="0">
-                          <a:solidFill>
-                            <a:srgbClr val="2B2B2B"/>
-                          </a:solidFill>
-                          <a:latin typeface="맑은 고딕" pitchFamily="34" charset="0"/>
-                          <a:ea typeface="맑은 고딕" pitchFamily="34" charset="-122"/>
-                          <a:cs typeface="맑은 고딕" pitchFamily="34" charset="-120"/>
-                        </a:rPr>
-                        <a:t>10,000</a:t>
-                      </a:r>
-                      <a:endParaRPr lang="en-US" sz="850" dirty="0">
-                        <a:latin typeface="맑은 고딕" charset="0"/>
-                        <a:ea typeface="맑은 고딕" charset="0"/>
-                        <a:cs typeface="맑은 고딕" charset="0"/>
-                      </a:endParaRPr>
-                    </a:p>
-                  </a:txBody>
-                  <a:tcPr marL="91440" marR="91440" marT="45720" marB="45720" anchor="ctr">
-                    <a:lnL w="12700" cap="flat" cmpd="sng" algn="ctr">
-                      <a:solidFill>
-                        <a:srgbClr val="CBD5E0"/>
-                      </a:solidFill>
-                      <a:prstDash val="solid"/>
-                      <a:round/>
-                      <a:headEnd type="none" w="med" len="med"/>
-                      <a:tailEnd type="none" w="med" len="med"/>
-                    </a:lnL>
-                    <a:lnR w="12700" cap="flat" cmpd="sng" algn="ctr">
-                      <a:solidFill>
-                        <a:srgbClr val="CBD5E0"/>
-                      </a:solidFill>
-                      <a:prstDash val="solid"/>
-                      <a:round/>
-                      <a:headEnd type="none" w="med" len="med"/>
-                      <a:tailEnd type="none" w="med" len="med"/>
-                    </a:lnR>
-                    <a:lnT w="12700" cap="flat" cmpd="sng" algn="ctr">
-                      <a:solidFill>
-                        <a:srgbClr val="CBD5E0"/>
-                      </a:solidFill>
-                      <a:prstDash val="solid"/>
-                      <a:round/>
-                      <a:headEnd type="none" w="med" len="med"/>
-                      <a:tailEnd type="none" w="med" len="med"/>
-                    </a:lnT>
-                    <a:lnB w="12700" cap="flat" cmpd="sng" algn="ctr">
-                      <a:solidFill>
-                        <a:srgbClr val="CBD5E0"/>
-                      </a:solidFill>
-                      <a:prstDash val="solid"/>
-                      <a:round/>
-                      <a:headEnd type="none" w="med" len="med"/>
-                      <a:tailEnd type="none" w="med" len="med"/>
-                    </a:lnB>
-                    <a:solidFill>
-                      <a:srgbClr val="FFFFFF"/>
-                    </a:solidFill>
-                  </a:tcPr>
-                </a:tc>
-                <a:tc>
-                  <a:txBody>
-                    <a:bodyPr/>
-                    <a:lstStyle/>
-                    <a:p>
-                      <a:pPr algn="r" indent="0" marL="0">
-                        <a:buNone/>
-                      </a:pPr>
-                      <a:r>
-                        <a:rPr lang="en-US" sz="850" dirty="0">
-                          <a:solidFill>
-                            <a:srgbClr val="2B2B2B"/>
-                          </a:solidFill>
-                          <a:latin typeface="맑은 고딕" pitchFamily="34" charset="0"/>
-                          <a:ea typeface="맑은 고딕" pitchFamily="34" charset="-122"/>
-                          <a:cs typeface="맑은 고딕" pitchFamily="34" charset="-120"/>
-                        </a:rPr>
-                        <a:t>400</a:t>
+                        <a:t>학원</a:t>
                       </a:r>
                       <a:endParaRPr lang="en-US" sz="850" dirty="0">
                         <a:latin typeface="맑은 고딕" charset="0"/>
@@ -15327,191 +15664,7 @@
                     <a:bodyPr/>
                     <a:lstStyle/>
                     <a:p>
-                      <a:pPr algn="ctr" indent="0" marL="0">
-                        <a:buNone/>
-                      </a:pPr>
-                      <a:endParaRPr lang="en-US" sz="850" dirty="0">
-                        <a:latin typeface="맑은 고딕" charset="0"/>
-                        <a:ea typeface="맑은 고딕" charset="0"/>
-                        <a:cs typeface="맑은 고딕" charset="0"/>
-                      </a:endParaRPr>
-                    </a:p>
-                  </a:txBody>
-                  <a:tcPr marL="91440" marR="91440" marT="45720" marB="45720" anchor="ctr">
-                    <a:lnL w="12700" cap="flat" cmpd="sng" algn="ctr">
-                      <a:solidFill>
-                        <a:srgbClr val="CBD5E0"/>
-                      </a:solidFill>
-                      <a:prstDash val="solid"/>
-                      <a:round/>
-                      <a:headEnd type="none" w="med" len="med"/>
-                      <a:tailEnd type="none" w="med" len="med"/>
-                    </a:lnL>
-                    <a:lnR w="12700" cap="flat" cmpd="sng" algn="ctr">
-                      <a:solidFill>
-                        <a:srgbClr val="CBD5E0"/>
-                      </a:solidFill>
-                      <a:prstDash val="solid"/>
-                      <a:round/>
-                      <a:headEnd type="none" w="med" len="med"/>
-                      <a:tailEnd type="none" w="med" len="med"/>
-                    </a:lnR>
-                    <a:lnT w="12700" cap="flat" cmpd="sng" algn="ctr">
-                      <a:solidFill>
-                        <a:srgbClr val="CBD5E0"/>
-                      </a:solidFill>
-                      <a:prstDash val="solid"/>
-                      <a:round/>
-                      <a:headEnd type="none" w="med" len="med"/>
-                      <a:tailEnd type="none" w="med" len="med"/>
-                    </a:lnT>
-                    <a:lnB w="12700" cap="flat" cmpd="sng" algn="ctr">
-                      <a:solidFill>
-                        <a:srgbClr val="CBD5E0"/>
-                      </a:solidFill>
-                      <a:prstDash val="solid"/>
-                      <a:round/>
-                      <a:headEnd type="none" w="med" len="med"/>
-                      <a:tailEnd type="none" w="med" len="med"/>
-                    </a:lnB>
-                    <a:solidFill>
-                      <a:srgbClr val="FFFFFF"/>
-                    </a:solidFill>
-                  </a:tcPr>
-                </a:tc>
-                <a:tc>
-                  <a:txBody>
-                    <a:bodyPr/>
-                    <a:lstStyle/>
-                    <a:p>
-                      <a:pPr algn="ctr" indent="0" marL="0">
-                        <a:buNone/>
-                      </a:pPr>
-                      <a:endParaRPr lang="en-US" sz="850" dirty="0">
-                        <a:latin typeface="맑은 고딕" charset="0"/>
-                        <a:ea typeface="맑은 고딕" charset="0"/>
-                        <a:cs typeface="맑은 고딕" charset="0"/>
-                      </a:endParaRPr>
-                    </a:p>
-                  </a:txBody>
-                  <a:tcPr marL="91440" marR="91440" marT="45720" marB="45720" anchor="ctr">
-                    <a:lnL w="12700" cap="flat" cmpd="sng" algn="ctr">
-                      <a:solidFill>
-                        <a:srgbClr val="CBD5E0"/>
-                      </a:solidFill>
-                      <a:prstDash val="solid"/>
-                      <a:round/>
-                      <a:headEnd type="none" w="med" len="med"/>
-                      <a:tailEnd type="none" w="med" len="med"/>
-                    </a:lnL>
-                    <a:lnR w="12700" cap="flat" cmpd="sng" algn="ctr">
-                      <a:solidFill>
-                        <a:srgbClr val="CBD5E0"/>
-                      </a:solidFill>
-                      <a:prstDash val="solid"/>
-                      <a:round/>
-                      <a:headEnd type="none" w="med" len="med"/>
-                      <a:tailEnd type="none" w="med" len="med"/>
-                    </a:lnR>
-                    <a:lnT w="12700" cap="flat" cmpd="sng" algn="ctr">
-                      <a:solidFill>
-                        <a:srgbClr val="CBD5E0"/>
-                      </a:solidFill>
-                      <a:prstDash val="solid"/>
-                      <a:round/>
-                      <a:headEnd type="none" w="med" len="med"/>
-                      <a:tailEnd type="none" w="med" len="med"/>
-                    </a:lnT>
-                    <a:lnB w="12700" cap="flat" cmpd="sng" algn="ctr">
-                      <a:solidFill>
-                        <a:srgbClr val="CBD5E0"/>
-                      </a:solidFill>
-                      <a:prstDash val="solid"/>
-                      <a:round/>
-                      <a:headEnd type="none" w="med" len="med"/>
-                      <a:tailEnd type="none" w="med" len="med"/>
-                    </a:lnB>
-                    <a:solidFill>
-                      <a:srgbClr val="FFFFFF"/>
-                    </a:solidFill>
-                  </a:tcPr>
-                </a:tc>
-              </a:tr>
-              <a:tr h="320040">
-                <a:tc>
-                  <a:txBody>
-                    <a:bodyPr/>
-                    <a:lstStyle/>
-                    <a:p>
-                      <a:pPr algn="ctr" indent="0" marL="0">
-                        <a:buNone/>
-                      </a:pPr>
-                      <a:r>
-                        <a:rPr lang="en-US" sz="850" dirty="0">
-                          <a:solidFill>
-                            <a:srgbClr val="2B2B2B"/>
-                          </a:solidFill>
-                          <a:latin typeface="맑은 고딕" pitchFamily="34" charset="0"/>
-                          <a:ea typeface="맑은 고딕" pitchFamily="34" charset="-122"/>
-                          <a:cs typeface="맑은 고딕" pitchFamily="34" charset="-120"/>
-                        </a:rPr>
-                        <a:t>5F-1</a:t>
-                      </a:r>
-                      <a:endParaRPr lang="en-US" sz="850" dirty="0">
-                        <a:latin typeface="맑은 고딕" charset="0"/>
-                        <a:ea typeface="맑은 고딕" charset="0"/>
-                        <a:cs typeface="맑은 고딕" charset="0"/>
-                      </a:endParaRPr>
-                    </a:p>
-                  </a:txBody>
-                  <a:tcPr marL="91440" marR="91440" marT="45720" marB="45720" anchor="ctr">
-                    <a:lnL w="12700" cap="flat" cmpd="sng" algn="ctr">
-                      <a:solidFill>
-                        <a:srgbClr val="CBD5E0"/>
-                      </a:solidFill>
-                      <a:prstDash val="solid"/>
-                      <a:round/>
-                      <a:headEnd type="none" w="med" len="med"/>
-                      <a:tailEnd type="none" w="med" len="med"/>
-                    </a:lnL>
-                    <a:lnR w="12700" cap="flat" cmpd="sng" algn="ctr">
-                      <a:solidFill>
-                        <a:srgbClr val="CBD5E0"/>
-                      </a:solidFill>
-                      <a:prstDash val="solid"/>
-                      <a:round/>
-                      <a:headEnd type="none" w="med" len="med"/>
-                      <a:tailEnd type="none" w="med" len="med"/>
-                    </a:lnR>
-                    <a:lnT w="12700" cap="flat" cmpd="sng" algn="ctr">
-                      <a:solidFill>
-                        <a:srgbClr val="CBD5E0"/>
-                      </a:solidFill>
-                      <a:prstDash val="solid"/>
-                      <a:round/>
-                      <a:headEnd type="none" w="med" len="med"/>
-                      <a:tailEnd type="none" w="med" len="med"/>
-                    </a:lnT>
-                    <a:lnB w="12700" cap="flat" cmpd="sng" algn="ctr">
-                      <a:solidFill>
-                        <a:srgbClr val="CBD5E0"/>
-                      </a:solidFill>
-                      <a:prstDash val="solid"/>
-                      <a:round/>
-                      <a:headEnd type="none" w="med" len="med"/>
-                      <a:tailEnd type="none" w="med" len="med"/>
-                    </a:lnB>
-                    <a:solidFill>
-                      <a:srgbClr val="F3F6F7"/>
-                    </a:solidFill>
-                  </a:tcPr>
-                </a:tc>
-                <a:tc>
-                  <a:txBody>
-                    <a:bodyPr/>
-                    <a:lstStyle/>
-                    <a:p>
-                      <a:pPr algn="ctr" indent="0" marL="0">
+                      <a:pPr algn="r" indent="0" marL="0">
                         <a:buNone/>
                       </a:pPr>
                       <a:r>
@@ -15570,143 +15723,7 @@
                       <a:tailEnd type="none" w="med" len="med"/>
                     </a:lnB>
                     <a:solidFill>
-                      <a:srgbClr val="F3F6F7"/>
-                    </a:solidFill>
-                  </a:tcPr>
-                </a:tc>
-                <a:tc>
-                  <a:txBody>
-                    <a:bodyPr/>
-                    <a:lstStyle/>
-                    <a:p>
-                      <a:pPr algn="ctr" indent="0" marL="0">
-                        <a:buNone/>
-                      </a:pPr>
-                      <a:r>
-                        <a:rPr lang="en-US" sz="850" dirty="0">
-                          <a:solidFill>
-                            <a:srgbClr val="2B2B2B"/>
-                          </a:solidFill>
-                          <a:latin typeface="맑은 고딕" pitchFamily="34" charset="0"/>
-                          <a:ea typeface="맑은 고딕" pitchFamily="34" charset="-122"/>
-                          <a:cs typeface="맑은 고딕" pitchFamily="34" charset="-120"/>
-                        </a:rPr>
-                        <a:t>학원</a:t>
-                      </a:r>
-                      <a:endParaRPr lang="en-US" sz="850" dirty="0">
-                        <a:latin typeface="맑은 고딕" charset="0"/>
-                        <a:ea typeface="맑은 고딕" charset="0"/>
-                        <a:cs typeface="맑은 고딕" charset="0"/>
-                      </a:endParaRPr>
-                    </a:p>
-                  </a:txBody>
-                  <a:tcPr marL="91440" marR="91440" marT="45720" marB="45720" anchor="ctr">
-                    <a:lnL w="12700" cap="flat" cmpd="sng" algn="ctr">
-                      <a:solidFill>
-                        <a:srgbClr val="CBD5E0"/>
-                      </a:solidFill>
-                      <a:prstDash val="solid"/>
-                      <a:round/>
-                      <a:headEnd type="none" w="med" len="med"/>
-                      <a:tailEnd type="none" w="med" len="med"/>
-                    </a:lnL>
-                    <a:lnR w="12700" cap="flat" cmpd="sng" algn="ctr">
-                      <a:solidFill>
-                        <a:srgbClr val="CBD5E0"/>
-                      </a:solidFill>
-                      <a:prstDash val="solid"/>
-                      <a:round/>
-                      <a:headEnd type="none" w="med" len="med"/>
-                      <a:tailEnd type="none" w="med" len="med"/>
-                    </a:lnR>
-                    <a:lnT w="12700" cap="flat" cmpd="sng" algn="ctr">
-                      <a:solidFill>
-                        <a:srgbClr val="CBD5E0"/>
-                      </a:solidFill>
-                      <a:prstDash val="solid"/>
-                      <a:round/>
-                      <a:headEnd type="none" w="med" len="med"/>
-                      <a:tailEnd type="none" w="med" len="med"/>
-                    </a:lnT>
-                    <a:lnB w="12700" cap="flat" cmpd="sng" algn="ctr">
-                      <a:solidFill>
-                        <a:srgbClr val="CBD5E0"/>
-                      </a:solidFill>
-                      <a:prstDash val="solid"/>
-                      <a:round/>
-                      <a:headEnd type="none" w="med" len="med"/>
-                      <a:tailEnd type="none" w="med" len="med"/>
-                    </a:lnB>
-                    <a:solidFill>
-                      <a:srgbClr val="F3F6F7"/>
-                    </a:solidFill>
-                  </a:tcPr>
-                </a:tc>
-                <a:tc>
-                  <a:txBody>
-                    <a:bodyPr/>
-                    <a:lstStyle/>
-                    <a:p>
-                      <a:pPr algn="ctr" indent="0" marL="0">
-                        <a:buNone/>
-                      </a:pPr>
-                      <a:r>
-                        <a:rPr lang="en-US" sz="850" dirty="0">
-                          <a:solidFill>
-                            <a:srgbClr val="2B2B2B"/>
-                          </a:solidFill>
-                          <a:latin typeface="맑은 고딕" pitchFamily="34" charset="0"/>
-                          <a:ea typeface="맑은 고딕" pitchFamily="34" charset="-122"/>
-                          <a:cs typeface="맑은 고딕" pitchFamily="34" charset="-120"/>
-                        </a:rPr>
-                        <a:t>학원</a:t>
-                      </a:r>
-                      <a:endParaRPr lang="en-US" sz="850" dirty="0">
-                        <a:latin typeface="맑은 고딕" charset="0"/>
-                        <a:ea typeface="맑은 고딕" charset="0"/>
-                        <a:cs typeface="맑은 고딕" charset="0"/>
-                      </a:endParaRPr>
-                    </a:p>
-                  </a:txBody>
-                  <a:tcPr marL="91440" marR="91440" marT="45720" marB="45720" anchor="ctr">
-                    <a:lnL w="12700" cap="flat" cmpd="sng" algn="ctr">
-                      <a:solidFill>
-                        <a:srgbClr val="CBD5E0"/>
-                      </a:solidFill>
-                      <a:prstDash val="solid"/>
-                      <a:round/>
-                      <a:headEnd type="none" w="med" len="med"/>
-                      <a:tailEnd type="none" w="med" len="med"/>
-                    </a:lnL>
-                    <a:lnR w="12700" cap="flat" cmpd="sng" algn="ctr">
-                      <a:solidFill>
-                        <a:srgbClr val="CBD5E0"/>
-                      </a:solidFill>
-                      <a:prstDash val="solid"/>
-                      <a:round/>
-                      <a:headEnd type="none" w="med" len="med"/>
-                      <a:tailEnd type="none" w="med" len="med"/>
-                    </a:lnR>
-                    <a:lnT w="12700" cap="flat" cmpd="sng" algn="ctr">
-                      <a:solidFill>
-                        <a:srgbClr val="CBD5E0"/>
-                      </a:solidFill>
-                      <a:prstDash val="solid"/>
-                      <a:round/>
-                      <a:headEnd type="none" w="med" len="med"/>
-                      <a:tailEnd type="none" w="med" len="med"/>
-                    </a:lnT>
-                    <a:lnB w="12700" cap="flat" cmpd="sng" algn="ctr">
-                      <a:solidFill>
-                        <a:srgbClr val="CBD5E0"/>
-                      </a:solidFill>
-                      <a:prstDash val="solid"/>
-                      <a:round/>
-                      <a:headEnd type="none" w="med" len="med"/>
-                      <a:tailEnd type="none" w="med" len="med"/>
-                    </a:lnB>
-                    <a:solidFill>
-                      <a:srgbClr val="F3F6F7"/>
+                      <a:srgbClr val="FFFFFF"/>
                     </a:solidFill>
                   </a:tcPr>
                 </a:tc>
@@ -15727,7 +15744,7 @@
                           <a:ea typeface="맑은 고딕" pitchFamily="34" charset="-122"/>
                           <a:cs typeface="맑은 고딕" pitchFamily="34" charset="-120"/>
                         </a:rPr>
-                        <a:t>135.7</a:t>
+                        <a:t>-</a:t>
                       </a:r>
                       <a:endParaRPr lang="en-US" sz="850" dirty="0">
                         <a:latin typeface="맑은 고딕" charset="0"/>
@@ -15774,7 +15791,7 @@
                       <a:tailEnd type="none" w="med" len="med"/>
                     </a:lnB>
                     <a:solidFill>
-                      <a:srgbClr val="F3F6F7"/>
+                      <a:srgbClr val="FFFFFF"/>
                     </a:solidFill>
                   </a:tcPr>
                 </a:tc>
@@ -15842,7 +15859,7 @@
                       <a:tailEnd type="none" w="med" len="med"/>
                     </a:lnB>
                     <a:solidFill>
-                      <a:srgbClr val="F3F6F7"/>
+                      <a:srgbClr val="FFFFFF"/>
                     </a:solidFill>
                   </a:tcPr>
                 </a:tc>
@@ -15851,7 +15868,7 @@
                     <a:bodyPr/>
                     <a:lstStyle/>
                     <a:p>
-                      <a:pPr algn="r" indent="0" marL="0">
+                      <a:pPr algn="ctr" indent="0" marL="0">
                         <a:buNone/>
                       </a:pPr>
                       <a:r>
@@ -15863,7 +15880,259 @@
                           <a:ea typeface="맑은 고딕" pitchFamily="34" charset="-122"/>
                           <a:cs typeface="맑은 고딕" pitchFamily="34" charset="-120"/>
                         </a:rPr>
-                        <a:t>250</a:t>
+                        <a:t>240</a:t>
+                      </a:r>
+                      <a:endParaRPr lang="en-US" sz="850" dirty="0">
+                        <a:latin typeface="맑은 고딕" charset="0"/>
+                        <a:ea typeface="맑은 고딕" charset="0"/>
+                        <a:cs typeface="맑은 고딕" charset="0"/>
+                      </a:endParaRPr>
+                    </a:p>
+                  </a:txBody>
+                  <a:tcPr marL="91440" marR="91440" marT="45720" marB="45720" anchor="ctr">
+                    <a:lnL w="12700" cap="flat" cmpd="sng" algn="ctr">
+                      <a:solidFill>
+                        <a:srgbClr val="CBD5E0"/>
+                      </a:solidFill>
+                      <a:prstDash val="solid"/>
+                      <a:round/>
+                      <a:headEnd type="none" w="med" len="med"/>
+                      <a:tailEnd type="none" w="med" len="med"/>
+                    </a:lnL>
+                    <a:lnR w="12700" cap="flat" cmpd="sng" algn="ctr">
+                      <a:solidFill>
+                        <a:srgbClr val="CBD5E0"/>
+                      </a:solidFill>
+                      <a:prstDash val="solid"/>
+                      <a:round/>
+                      <a:headEnd type="none" w="med" len="med"/>
+                      <a:tailEnd type="none" w="med" len="med"/>
+                    </a:lnR>
+                    <a:lnT w="12700" cap="flat" cmpd="sng" algn="ctr">
+                      <a:solidFill>
+                        <a:srgbClr val="CBD5E0"/>
+                      </a:solidFill>
+                      <a:prstDash val="solid"/>
+                      <a:round/>
+                      <a:headEnd type="none" w="med" len="med"/>
+                      <a:tailEnd type="none" w="med" len="med"/>
+                    </a:lnT>
+                    <a:lnB w="12700" cap="flat" cmpd="sng" algn="ctr">
+                      <a:solidFill>
+                        <a:srgbClr val="CBD5E0"/>
+                      </a:solidFill>
+                      <a:prstDash val="solid"/>
+                      <a:round/>
+                      <a:headEnd type="none" w="med" len="med"/>
+                      <a:tailEnd type="none" w="med" len="med"/>
+                    </a:lnB>
+                    <a:solidFill>
+                      <a:srgbClr val="FFFFFF"/>
+                    </a:solidFill>
+                  </a:tcPr>
+                </a:tc>
+              </a:tr>
+              <a:tr h="337625">
+                <a:tc>
+                  <a:txBody>
+                    <a:bodyPr/>
+                    <a:lstStyle/>
+                    <a:p>
+                      <a:pPr algn="ctr" indent="0" marL="0">
+                        <a:buNone/>
+                      </a:pPr>
+                      <a:r>
+                        <a:rPr lang="en-US" sz="850" dirty="0">
+                          <a:solidFill>
+                            <a:srgbClr val="2B2B2B"/>
+                          </a:solidFill>
+                          <a:latin typeface="맑은 고딕" pitchFamily="34" charset="0"/>
+                          <a:ea typeface="맑은 고딕" pitchFamily="34" charset="-122"/>
+                          <a:cs typeface="맑은 고딕" pitchFamily="34" charset="-120"/>
+                        </a:rPr>
+                        <a:t>합계</a:t>
+                      </a:r>
+                      <a:endParaRPr lang="en-US" sz="850" dirty="0">
+                        <a:latin typeface="맑은 고딕" charset="0"/>
+                        <a:ea typeface="맑은 고딕" charset="0"/>
+                        <a:cs typeface="맑은 고딕" charset="0"/>
+                      </a:endParaRPr>
+                    </a:p>
+                  </a:txBody>
+                  <a:tcPr marL="91440" marR="91440" marT="45720" marB="45720" anchor="ctr">
+                    <a:lnL w="12700" cap="flat" cmpd="sng" algn="ctr">
+                      <a:solidFill>
+                        <a:srgbClr val="CBD5E0"/>
+                      </a:solidFill>
+                      <a:prstDash val="solid"/>
+                      <a:round/>
+                      <a:headEnd type="none" w="med" len="med"/>
+                      <a:tailEnd type="none" w="med" len="med"/>
+                    </a:lnL>
+                    <a:lnR w="12700" cap="flat" cmpd="sng" algn="ctr">
+                      <a:solidFill>
+                        <a:srgbClr val="CBD5E0"/>
+                      </a:solidFill>
+                      <a:prstDash val="solid"/>
+                      <a:round/>
+                      <a:headEnd type="none" w="med" len="med"/>
+                      <a:tailEnd type="none" w="med" len="med"/>
+                    </a:lnR>
+                    <a:lnT w="12700" cap="flat" cmpd="sng" algn="ctr">
+                      <a:solidFill>
+                        <a:srgbClr val="CBD5E0"/>
+                      </a:solidFill>
+                      <a:prstDash val="solid"/>
+                      <a:round/>
+                      <a:headEnd type="none" w="med" len="med"/>
+                      <a:tailEnd type="none" w="med" len="med"/>
+                    </a:lnT>
+                    <a:lnB w="12700" cap="flat" cmpd="sng" algn="ctr">
+                      <a:solidFill>
+                        <a:srgbClr val="CBD5E0"/>
+                      </a:solidFill>
+                      <a:prstDash val="solid"/>
+                      <a:round/>
+                      <a:headEnd type="none" w="med" len="med"/>
+                      <a:tailEnd type="none" w="med" len="med"/>
+                    </a:lnB>
+                    <a:solidFill>
+                      <a:srgbClr val="F3F6F7"/>
+                    </a:solidFill>
+                  </a:tcPr>
+                </a:tc>
+                <a:tc>
+                  <a:txBody>
+                    <a:bodyPr/>
+                    <a:lstStyle/>
+                    <a:p>
+                      <a:pPr algn="ctr" indent="0" marL="0">
+                        <a:buNone/>
+                      </a:pPr>
+                      <a:endParaRPr lang="en-US" sz="850" dirty="0">
+                        <a:latin typeface="맑은 고딕" charset="0"/>
+                        <a:ea typeface="맑은 고딕" charset="0"/>
+                        <a:cs typeface="맑은 고딕" charset="0"/>
+                      </a:endParaRPr>
+                    </a:p>
+                  </a:txBody>
+                  <a:tcPr marL="91440" marR="91440" marT="45720" marB="45720" anchor="ctr">
+                    <a:lnL w="12700" cap="flat" cmpd="sng" algn="ctr">
+                      <a:solidFill>
+                        <a:srgbClr val="CBD5E0"/>
+                      </a:solidFill>
+                      <a:prstDash val="solid"/>
+                      <a:round/>
+                      <a:headEnd type="none" w="med" len="med"/>
+                      <a:tailEnd type="none" w="med" len="med"/>
+                    </a:lnL>
+                    <a:lnR w="12700" cap="flat" cmpd="sng" algn="ctr">
+                      <a:solidFill>
+                        <a:srgbClr val="CBD5E0"/>
+                      </a:solidFill>
+                      <a:prstDash val="solid"/>
+                      <a:round/>
+                      <a:headEnd type="none" w="med" len="med"/>
+                      <a:tailEnd type="none" w="med" len="med"/>
+                    </a:lnR>
+                    <a:lnT w="12700" cap="flat" cmpd="sng" algn="ctr">
+                      <a:solidFill>
+                        <a:srgbClr val="CBD5E0"/>
+                      </a:solidFill>
+                      <a:prstDash val="solid"/>
+                      <a:round/>
+                      <a:headEnd type="none" w="med" len="med"/>
+                      <a:tailEnd type="none" w="med" len="med"/>
+                    </a:lnT>
+                    <a:lnB w="12700" cap="flat" cmpd="sng" algn="ctr">
+                      <a:solidFill>
+                        <a:srgbClr val="CBD5E0"/>
+                      </a:solidFill>
+                      <a:prstDash val="solid"/>
+                      <a:round/>
+                      <a:headEnd type="none" w="med" len="med"/>
+                      <a:tailEnd type="none" w="med" len="med"/>
+                    </a:lnB>
+                    <a:solidFill>
+                      <a:srgbClr val="F3F6F7"/>
+                    </a:solidFill>
+                  </a:tcPr>
+                </a:tc>
+                <a:tc>
+                  <a:txBody>
+                    <a:bodyPr/>
+                    <a:lstStyle/>
+                    <a:p>
+                      <a:pPr algn="ctr" indent="0" marL="0">
+                        <a:buNone/>
+                      </a:pPr>
+                      <a:endParaRPr lang="en-US" sz="850" dirty="0">
+                        <a:latin typeface="맑은 고딕" charset="0"/>
+                        <a:ea typeface="맑은 고딕" charset="0"/>
+                        <a:cs typeface="맑은 고딕" charset="0"/>
+                      </a:endParaRPr>
+                    </a:p>
+                  </a:txBody>
+                  <a:tcPr marL="91440" marR="91440" marT="45720" marB="45720" anchor="ctr">
+                    <a:lnL w="12700" cap="flat" cmpd="sng" algn="ctr">
+                      <a:solidFill>
+                        <a:srgbClr val="CBD5E0"/>
+                      </a:solidFill>
+                      <a:prstDash val="solid"/>
+                      <a:round/>
+                      <a:headEnd type="none" w="med" len="med"/>
+                      <a:tailEnd type="none" w="med" len="med"/>
+                    </a:lnL>
+                    <a:lnR w="12700" cap="flat" cmpd="sng" algn="ctr">
+                      <a:solidFill>
+                        <a:srgbClr val="CBD5E0"/>
+                      </a:solidFill>
+                      <a:prstDash val="solid"/>
+                      <a:round/>
+                      <a:headEnd type="none" w="med" len="med"/>
+                      <a:tailEnd type="none" w="med" len="med"/>
+                    </a:lnR>
+                    <a:lnT w="12700" cap="flat" cmpd="sng" algn="ctr">
+                      <a:solidFill>
+                        <a:srgbClr val="CBD5E0"/>
+                      </a:solidFill>
+                      <a:prstDash val="solid"/>
+                      <a:round/>
+                      <a:headEnd type="none" w="med" len="med"/>
+                      <a:tailEnd type="none" w="med" len="med"/>
+                    </a:lnT>
+                    <a:lnB w="12700" cap="flat" cmpd="sng" algn="ctr">
+                      <a:solidFill>
+                        <a:srgbClr val="CBD5E0"/>
+                      </a:solidFill>
+                      <a:prstDash val="solid"/>
+                      <a:round/>
+                      <a:headEnd type="none" w="med" len="med"/>
+                      <a:tailEnd type="none" w="med" len="med"/>
+                    </a:lnB>
+                    <a:solidFill>
+                      <a:srgbClr val="F3F6F7"/>
+                    </a:solidFill>
+                  </a:tcPr>
+                </a:tc>
+                <a:tc>
+                  <a:txBody>
+                    <a:bodyPr/>
+                    <a:lstStyle/>
+                    <a:p>
+                      <a:pPr algn="ctr" indent="0" marL="0">
+                        <a:buNone/>
+                      </a:pPr>
+                      <a:r>
+                        <a:rPr lang="en-US" sz="850" dirty="0">
+                          <a:solidFill>
+                            <a:srgbClr val="2B2B2B"/>
+                          </a:solidFill>
+                          <a:latin typeface="맑은 고딕" pitchFamily="34" charset="0"/>
+                          <a:ea typeface="맑은 고딕" pitchFamily="34" charset="-122"/>
+                          <a:cs typeface="맑은 고딕" pitchFamily="34" charset="-120"/>
+                        </a:rPr>
+                        <a:t>11개 호실</a:t>
                       </a:r>
                       <a:endParaRPr lang="en-US" sz="850" dirty="0">
                         <a:latin typeface="맑은 고딕" charset="0"/>
@@ -15987,9 +16256,156 @@
                     <a:bodyPr/>
                     <a:lstStyle/>
                     <a:p>
-                      <a:pPr algn="ctr" indent="0" marL="0">
+                      <a:pPr algn="r" indent="0" marL="0">
                         <a:buNone/>
                       </a:pPr>
+                      <a:r>
+                        <a:rPr lang="en-US" sz="850" dirty="0">
+                          <a:solidFill>
+                            <a:srgbClr val="2B2B2B"/>
+                          </a:solidFill>
+                          <a:latin typeface="맑은 고딕" pitchFamily="34" charset="0"/>
+                          <a:ea typeface="맑은 고딕" pitchFamily="34" charset="-122"/>
+                          <a:cs typeface="맑은 고딕" pitchFamily="34" charset="-120"/>
+                        </a:rPr>
+                        <a:t>-</a:t>
+                      </a:r>
+                      <a:endParaRPr lang="en-US" sz="850" dirty="0">
+                        <a:latin typeface="맑은 고딕" charset="0"/>
+                        <a:ea typeface="맑은 고딕" charset="0"/>
+                        <a:cs typeface="맑은 고딕" charset="0"/>
+                      </a:endParaRPr>
+                    </a:p>
+                  </a:txBody>
+                  <a:tcPr marL="91440" marR="91440" marT="45720" marB="45720" anchor="ctr">
+                    <a:lnL w="12700" cap="flat" cmpd="sng" algn="ctr">
+                      <a:solidFill>
+                        <a:srgbClr val="CBD5E0"/>
+                      </a:solidFill>
+                      <a:prstDash val="solid"/>
+                      <a:round/>
+                      <a:headEnd type="none" w="med" len="med"/>
+                      <a:tailEnd type="none" w="med" len="med"/>
+                    </a:lnL>
+                    <a:lnR w="12700" cap="flat" cmpd="sng" algn="ctr">
+                      <a:solidFill>
+                        <a:srgbClr val="CBD5E0"/>
+                      </a:solidFill>
+                      <a:prstDash val="solid"/>
+                      <a:round/>
+                      <a:headEnd type="none" w="med" len="med"/>
+                      <a:tailEnd type="none" w="med" len="med"/>
+                    </a:lnR>
+                    <a:lnT w="12700" cap="flat" cmpd="sng" algn="ctr">
+                      <a:solidFill>
+                        <a:srgbClr val="CBD5E0"/>
+                      </a:solidFill>
+                      <a:prstDash val="solid"/>
+                      <a:round/>
+                      <a:headEnd type="none" w="med" len="med"/>
+                      <a:tailEnd type="none" w="med" len="med"/>
+                    </a:lnT>
+                    <a:lnB w="12700" cap="flat" cmpd="sng" algn="ctr">
+                      <a:solidFill>
+                        <a:srgbClr val="CBD5E0"/>
+                      </a:solidFill>
+                      <a:prstDash val="solid"/>
+                      <a:round/>
+                      <a:headEnd type="none" w="med" len="med"/>
+                      <a:tailEnd type="none" w="med" len="med"/>
+                    </a:lnB>
+                    <a:solidFill>
+                      <a:srgbClr val="F3F6F7"/>
+                    </a:solidFill>
+                  </a:tcPr>
+                </a:tc>
+                <a:tc>
+                  <a:txBody>
+                    <a:bodyPr/>
+                    <a:lstStyle/>
+                    <a:p>
+                      <a:pPr algn="r" indent="0" marL="0">
+                        <a:buNone/>
+                      </a:pPr>
+                      <a:r>
+                        <a:rPr lang="en-US" sz="850" dirty="0">
+                          <a:solidFill>
+                            <a:srgbClr val="2B2B2B"/>
+                          </a:solidFill>
+                          <a:latin typeface="맑은 고딕" pitchFamily="34" charset="0"/>
+                          <a:ea typeface="맑은 고딕" pitchFamily="34" charset="-122"/>
+                          <a:cs typeface="맑은 고딕" pitchFamily="34" charset="-120"/>
+                        </a:rPr>
+                        <a:t>-</a:t>
+                      </a:r>
+                      <a:endParaRPr lang="en-US" sz="850" dirty="0">
+                        <a:latin typeface="맑은 고딕" charset="0"/>
+                        <a:ea typeface="맑은 고딕" charset="0"/>
+                        <a:cs typeface="맑은 고딕" charset="0"/>
+                      </a:endParaRPr>
+                    </a:p>
+                  </a:txBody>
+                  <a:tcPr marL="91440" marR="91440" marT="45720" marB="45720" anchor="ctr">
+                    <a:lnL w="12700" cap="flat" cmpd="sng" algn="ctr">
+                      <a:solidFill>
+                        <a:srgbClr val="CBD5E0"/>
+                      </a:solidFill>
+                      <a:prstDash val="solid"/>
+                      <a:round/>
+                      <a:headEnd type="none" w="med" len="med"/>
+                      <a:tailEnd type="none" w="med" len="med"/>
+                    </a:lnL>
+                    <a:lnR w="12700" cap="flat" cmpd="sng" algn="ctr">
+                      <a:solidFill>
+                        <a:srgbClr val="CBD5E0"/>
+                      </a:solidFill>
+                      <a:prstDash val="solid"/>
+                      <a:round/>
+                      <a:headEnd type="none" w="med" len="med"/>
+                      <a:tailEnd type="none" w="med" len="med"/>
+                    </a:lnR>
+                    <a:lnT w="12700" cap="flat" cmpd="sng" algn="ctr">
+                      <a:solidFill>
+                        <a:srgbClr val="CBD5E0"/>
+                      </a:solidFill>
+                      <a:prstDash val="solid"/>
+                      <a:round/>
+                      <a:headEnd type="none" w="med" len="med"/>
+                      <a:tailEnd type="none" w="med" len="med"/>
+                    </a:lnT>
+                    <a:lnB w="12700" cap="flat" cmpd="sng" algn="ctr">
+                      <a:solidFill>
+                        <a:srgbClr val="CBD5E0"/>
+                      </a:solidFill>
+                      <a:prstDash val="solid"/>
+                      <a:round/>
+                      <a:headEnd type="none" w="med" len="med"/>
+                      <a:tailEnd type="none" w="med" len="med"/>
+                    </a:lnB>
+                    <a:solidFill>
+                      <a:srgbClr val="F3F6F7"/>
+                    </a:solidFill>
+                  </a:tcPr>
+                </a:tc>
+                <a:tc>
+                  <a:txBody>
+                    <a:bodyPr/>
+                    <a:lstStyle/>
+                    <a:p>
+                      <a:pPr algn="r" indent="0" marL="0">
+                        <a:buNone/>
+                      </a:pPr>
+                      <a:r>
+                        <a:rPr lang="en-US" sz="850" dirty="0">
+                          <a:solidFill>
+                            <a:srgbClr val="2B2B2B"/>
+                          </a:solidFill>
+                          <a:latin typeface="맑은 고딕" pitchFamily="34" charset="0"/>
+                          <a:ea typeface="맑은 고딕" pitchFamily="34" charset="-122"/>
+                          <a:cs typeface="맑은 고딕" pitchFamily="34" charset="-120"/>
+                        </a:rPr>
+                        <a:t>103,000</a:t>
+                      </a:r>
                       <a:endParaRPr lang="en-US" sz="850" dirty="0">
                         <a:latin typeface="맑은 고딕" charset="0"/>
                         <a:ea typeface="맑은 고딕" charset="0"/>
@@ -16047,6 +16463,17 @@
                       <a:pPr algn="ctr" indent="0" marL="0">
                         <a:buNone/>
                       </a:pPr>
+                      <a:r>
+                        <a:rPr lang="en-US" sz="850" dirty="0">
+                          <a:solidFill>
+                            <a:srgbClr val="2B2B2B"/>
+                          </a:solidFill>
+                          <a:latin typeface="맑은 고딕" pitchFamily="34" charset="0"/>
+                          <a:ea typeface="맑은 고딕" pitchFamily="34" charset="-122"/>
+                          <a:cs typeface="맑은 고딕" pitchFamily="34" charset="-120"/>
+                        </a:rPr>
+                        <a:t>3,335</a:t>
+                      </a:r>
                       <a:endParaRPr lang="en-US" sz="850" dirty="0">
                         <a:latin typeface="맑은 고딕" charset="0"/>
                         <a:ea typeface="맑은 고딕" charset="0"/>
@@ -16103,46 +16530,7 @@
       </p:graphicFrame>
       <p:sp>
         <p:nvSpPr>
-          <p:cNvPr id="55" name="Text 52"/>
-          <p:cNvSpPr/>
-          <p:nvPr/>
-        </p:nvSpPr>
-        <p:spPr>
-          <a:xfrm>
-            <a:off x="3749040" y="5257800"/>
-            <a:ext cx="6805879" cy="182880"/>
-          </a:xfrm>
-          <a:prstGeom prst="rect">
-            <a:avLst/>
-          </a:prstGeom>
-          <a:noFill/>
-          <a:ln/>
-        </p:spPr>
-        <p:txBody>
-          <a:bodyPr wrap="square" rtlCol="0" anchor="ctr"/>
-          <a:lstStyle/>
-          <a:p>
-            <a:pPr algn="r" indent="0" marL="0">
-              <a:buNone/>
-            </a:pPr>
-            <a:r>
-              <a:rPr lang="en-US" sz="900" dirty="0">
-                <a:solidFill>
-                  <a:srgbClr val="7A8794"/>
-                </a:solidFill>
-                <a:latin typeface="맑은 고딕" pitchFamily="34" charset="0"/>
-                <a:ea typeface="맑은 고딕" pitchFamily="34" charset="-122"/>
-                <a:cs typeface="맑은 고딕" pitchFamily="34" charset="-120"/>
-              </a:rPr>
-              <a:t>(전체 12건 중 10건 표시)</a:t>
-            </a:r>
-            <a:endParaRPr lang="en-US" sz="900" dirty="0"/>
-          </a:p>
-        </p:txBody>
-      </p:sp>
-      <p:sp>
-        <p:nvSpPr>
-          <p:cNvPr id="56" name="Text 53"/>
+          <p:cNvPr id="42" name="Text 39"/>
           <p:cNvSpPr/>
           <p:nvPr/>
         </p:nvSpPr>
@@ -16181,7 +16569,7 @@
       </p:sp>
       <p:sp>
         <p:nvSpPr>
-          <p:cNvPr id="57" name="Text 54"/>
+          <p:cNvPr id="43" name="Text 40"/>
           <p:cNvSpPr/>
           <p:nvPr/>
         </p:nvSpPr>
@@ -16396,231 +16784,11 @@
         <p:spPr>
           <a:xfrm>
             <a:off x="502920" y="1371600"/>
-            <a:ext cx="11057839" cy="1188720"/>
+            <a:ext cx="11057839" cy="4389120"/>
           </a:xfrm>
           <a:prstGeom prst="roundRect">
             <a:avLst>
-              <a:gd name="adj" fmla="val 6154"/>
-            </a:avLst>
-          </a:prstGeom>
-          <a:solidFill>
-            <a:srgbClr val="F7FAFC"/>
-          </a:solidFill>
-          <a:ln w="9525">
-            <a:solidFill>
-              <a:srgbClr val="CBD5E0"/>
-            </a:solidFill>
-            <a:prstDash val="solid"/>
-          </a:ln>
-        </p:spPr>
-      </p:sp>
-      <p:sp>
-        <p:nvSpPr>
-          <p:cNvPr id="7" name="Text 5"/>
-          <p:cNvSpPr/>
-          <p:nvPr/>
-        </p:nvSpPr>
-        <p:spPr>
-          <a:xfrm>
-            <a:off x="868680" y="1508760"/>
-            <a:ext cx="3200400" cy="822960"/>
-          </a:xfrm>
-          <a:prstGeom prst="rect">
-            <a:avLst/>
-          </a:prstGeom>
-          <a:noFill/>
-          <a:ln/>
-        </p:spPr>
-        <p:txBody>
-          <a:bodyPr wrap="square" rtlCol="0" anchor="ctr"/>
-          <a:lstStyle/>
-          <a:p>
-            <a:pPr indent="0" marL="0">
-              <a:buNone/>
-            </a:pPr>
-            <a:r>
-              <a:rPr lang="en-US" sz="1600" b="1" dirty="0">
-                <a:solidFill>
-                  <a:srgbClr val="132A3A"/>
-                </a:solidFill>
-                <a:latin typeface="맑은 고딕" pitchFamily="34" charset="0"/>
-                <a:ea typeface="맑은 고딕" pitchFamily="34" charset="-122"/>
-                <a:cs typeface="맑은 고딕" pitchFamily="34" charset="-120"/>
-              </a:rPr>
-              <a:t>표면 임대수익률  =</a:t>
-            </a:r>
-            <a:endParaRPr lang="en-US" sz="1600" dirty="0"/>
-          </a:p>
-        </p:txBody>
-      </p:sp>
-      <p:sp>
-        <p:nvSpPr>
-          <p:cNvPr id="8" name="Text 6"/>
-          <p:cNvSpPr/>
-          <p:nvPr/>
-        </p:nvSpPr>
-        <p:spPr>
-          <a:xfrm>
-            <a:off x="4343400" y="1508760"/>
-            <a:ext cx="4572000" cy="365760"/>
-          </a:xfrm>
-          <a:prstGeom prst="rect">
-            <a:avLst/>
-          </a:prstGeom>
-          <a:noFill/>
-          <a:ln/>
-        </p:spPr>
-        <p:txBody>
-          <a:bodyPr wrap="square" rtlCol="0" anchor="b"/>
-          <a:lstStyle/>
-          <a:p>
-            <a:pPr algn="ctr" indent="0" marL="0">
-              <a:buNone/>
-            </a:pPr>
-            <a:r>
-              <a:rPr lang="en-US" sz="1300" b="1" dirty="0">
-                <a:solidFill>
-                  <a:srgbClr val="132A3A"/>
-                </a:solidFill>
-                <a:latin typeface="맑은 고딕" pitchFamily="34" charset="0"/>
-                <a:ea typeface="맑은 고딕" pitchFamily="34" charset="-122"/>
-                <a:cs typeface="맑은 고딕" pitchFamily="34" charset="-120"/>
-              </a:rPr>
-              <a:t>연간 임대료 합계 (관리비 제외)</a:t>
-            </a:r>
-            <a:endParaRPr lang="en-US" sz="1300" dirty="0"/>
-          </a:p>
-        </p:txBody>
-      </p:sp>
-      <p:sp>
-        <p:nvSpPr>
-          <p:cNvPr id="9" name="Shape 7"/>
-          <p:cNvSpPr/>
-          <p:nvPr/>
-        </p:nvSpPr>
-        <p:spPr>
-          <a:xfrm>
-            <a:off x="4526280" y="1920240"/>
-            <a:ext cx="4206240" cy="0"/>
-          </a:xfrm>
-          <a:prstGeom prst="line">
-            <a:avLst/>
-          </a:prstGeom>
-          <a:noFill/>
-          <a:ln w="25400">
-            <a:solidFill>
-              <a:srgbClr val="B8860B"/>
-            </a:solidFill>
-            <a:prstDash val="solid"/>
-          </a:ln>
-        </p:spPr>
-      </p:sp>
-      <p:sp>
-        <p:nvSpPr>
-          <p:cNvPr id="10" name="Text 8"/>
-          <p:cNvSpPr/>
-          <p:nvPr/>
-        </p:nvSpPr>
-        <p:spPr>
-          <a:xfrm>
-            <a:off x="4343400" y="1965960"/>
-            <a:ext cx="4572000" cy="365760"/>
-          </a:xfrm>
-          <a:prstGeom prst="rect">
-            <a:avLst/>
-          </a:prstGeom>
-          <a:noFill/>
-          <a:ln/>
-        </p:spPr>
-        <p:txBody>
-          <a:bodyPr wrap="square" rtlCol="0" anchor="t"/>
-          <a:lstStyle/>
-          <a:p>
-            <a:pPr algn="ctr" indent="0" marL="0">
-              <a:buNone/>
-            </a:pPr>
-            <a:r>
-              <a:rPr lang="en-US" sz="1300" b="1" dirty="0">
-                <a:solidFill>
-                  <a:srgbClr val="132A3A"/>
-                </a:solidFill>
-                <a:latin typeface="맑은 고딕" pitchFamily="34" charset="0"/>
-                <a:ea typeface="맑은 고딕" pitchFamily="34" charset="-122"/>
-                <a:cs typeface="맑은 고딕" pitchFamily="34" charset="-120"/>
-              </a:rPr>
-              <a:t>매매가  −  승계 보증금 합계</a:t>
-            </a:r>
-            <a:endParaRPr lang="en-US" sz="1300" dirty="0"/>
-          </a:p>
-        </p:txBody>
-      </p:sp>
-      <p:sp>
-        <p:nvSpPr>
-          <p:cNvPr id="11" name="Text 9"/>
-          <p:cNvSpPr/>
-          <p:nvPr/>
-        </p:nvSpPr>
-        <p:spPr>
-          <a:xfrm>
-            <a:off x="8726119" y="1508760"/>
-            <a:ext cx="2697480" cy="822960"/>
-          </a:xfrm>
-          <a:prstGeom prst="rect">
-            <a:avLst/>
-          </a:prstGeom>
-          <a:noFill/>
-          <a:ln/>
-        </p:spPr>
-        <p:txBody>
-          <a:bodyPr wrap="square" rtlCol="0" anchor="ctr"/>
-          <a:lstStyle/>
-          <a:p>
-            <a:pPr algn="r" indent="0" marL="0">
-              <a:buNone/>
-            </a:pPr>
-            <a:r>
-              <a:rPr lang="en-US" sz="1100" b="1" dirty="0">
-                <a:solidFill>
-                  <a:srgbClr val="B8860B"/>
-                </a:solidFill>
-                <a:latin typeface="맑은 고딕" pitchFamily="34" charset="0"/>
-                <a:ea typeface="맑은 고딕" pitchFamily="34" charset="-122"/>
-                <a:cs typeface="맑은 고딕" pitchFamily="34" charset="-120"/>
-              </a:rPr>
-              <a:t>4.0억원</a:t>
-            </a:r>
-            <a:pPr algn="r" indent="0" marL="0">
-              <a:buNone/>
-            </a:pPr>
-            <a:r>
-              <a:rPr lang="en-US" sz="1100" dirty="0">
-                <a:solidFill>
-                  <a:srgbClr val="5B6B73"/>
-                </a:solidFill>
-                <a:latin typeface="맑은 고딕" pitchFamily="34" charset="0"/>
-                <a:ea typeface="맑은 고딕" pitchFamily="34" charset="-122"/>
-                <a:cs typeface="맑은 고딕" pitchFamily="34" charset="-120"/>
-              </a:rPr>
-              <a:t> ÷ (242.3억원 − 10.3억원)</a:t>
-            </a:r>
-            <a:endParaRPr lang="en-US" sz="1100" dirty="0"/>
-          </a:p>
-        </p:txBody>
-      </p:sp>
-      <p:sp>
-        <p:nvSpPr>
-          <p:cNvPr id="12" name="Shape 10"/>
-          <p:cNvSpPr/>
-          <p:nvPr/>
-        </p:nvSpPr>
-        <p:spPr>
-          <a:xfrm>
-            <a:off x="502920" y="2834640"/>
-            <a:ext cx="11057839" cy="3063240"/>
-          </a:xfrm>
-          <a:prstGeom prst="roundRect">
-            <a:avLst>
-              <a:gd name="adj" fmla="val 2388"/>
+              <a:gd name="adj" fmla="val 1667"/>
             </a:avLst>
           </a:prstGeom>
           <a:solidFill>
@@ -16636,36 +16804,36 @@
       </p:sp>
       <p:sp>
         <p:nvSpPr>
-          <p:cNvPr id="13" name="Shape 11"/>
-          <p:cNvSpPr/>
-          <p:nvPr/>
-        </p:nvSpPr>
-        <p:spPr>
-          <a:xfrm>
-            <a:off x="685800" y="3017520"/>
-            <a:ext cx="1280160" cy="329184"/>
+          <p:cNvPr id="7" name="Shape 5"/>
+          <p:cNvSpPr/>
+          <p:nvPr/>
+        </p:nvSpPr>
+        <p:spPr>
+          <a:xfrm>
+            <a:off x="731520" y="1600200"/>
+            <a:ext cx="10600639" cy="1005840"/>
           </a:xfrm>
           <a:prstGeom prst="roundRect">
             <a:avLst>
-              <a:gd name="adj" fmla="val 11111"/>
+              <a:gd name="adj" fmla="val 7273"/>
             </a:avLst>
           </a:prstGeom>
           <a:solidFill>
-            <a:srgbClr val="F3F6F7"/>
+            <a:srgbClr val="132A3A"/>
           </a:solidFill>
           <a:ln/>
         </p:spPr>
       </p:sp>
       <p:sp>
         <p:nvSpPr>
-          <p:cNvPr id="14" name="Text 12"/>
-          <p:cNvSpPr/>
-          <p:nvPr/>
-        </p:nvSpPr>
-        <p:spPr>
-          <a:xfrm>
-            <a:off x="685800" y="3017520"/>
-            <a:ext cx="1280160" cy="329184"/>
+          <p:cNvPr id="8" name="Text 6"/>
+          <p:cNvSpPr/>
+          <p:nvPr/>
+        </p:nvSpPr>
+        <p:spPr>
+          <a:xfrm>
+            <a:off x="960120" y="1600200"/>
+            <a:ext cx="2286000" cy="1005840"/>
           </a:xfrm>
           <a:prstGeom prst="rect">
             <a:avLst/>
@@ -16677,34 +16845,73 @@
           <a:bodyPr wrap="square" rtlCol="0" anchor="ctr"/>
           <a:lstStyle/>
           <a:p>
-            <a:pPr algn="ctr" indent="0" marL="0">
+            <a:pPr indent="0" marL="0">
               <a:buNone/>
             </a:pPr>
             <a:r>
-              <a:rPr lang="en-US" sz="1000" b="1" dirty="0">
+              <a:rPr lang="en-US" sz="1600" b="1" dirty="0">
                 <a:solidFill>
-                  <a:srgbClr val="132A3A"/>
+                  <a:srgbClr val="FFFFFF"/>
                 </a:solidFill>
                 <a:latin typeface="맑은 고딕" pitchFamily="34" charset="0"/>
                 <a:ea typeface="맑은 고딕" pitchFamily="34" charset="-122"/>
                 <a:cs typeface="맑은 고딕" pitchFamily="34" charset="-120"/>
               </a:rPr>
-              <a:t>As-Is (현재)</a:t>
-            </a:r>
-            <a:endParaRPr lang="en-US" sz="1000" dirty="0"/>
-          </a:p>
-        </p:txBody>
-      </p:sp>
-      <p:sp>
-        <p:nvSpPr>
-          <p:cNvPr id="15" name="Text 13"/>
-          <p:cNvSpPr/>
-          <p:nvPr/>
-        </p:nvSpPr>
-        <p:spPr>
-          <a:xfrm>
-            <a:off x="777240" y="3520440"/>
-            <a:ext cx="2743200" cy="402336"/>
+              <a:t>수익률</a:t>
+            </a:r>
+            <a:endParaRPr lang="en-US" sz="1600" dirty="0"/>
+          </a:p>
+        </p:txBody>
+      </p:sp>
+      <p:sp>
+        <p:nvSpPr>
+          <p:cNvPr id="9" name="Text 7"/>
+          <p:cNvSpPr/>
+          <p:nvPr/>
+        </p:nvSpPr>
+        <p:spPr>
+          <a:xfrm>
+            <a:off x="8360359" y="1600200"/>
+            <a:ext cx="2743200" cy="1005840"/>
+          </a:xfrm>
+          <a:prstGeom prst="rect">
+            <a:avLst/>
+          </a:prstGeom>
+          <a:noFill/>
+          <a:ln/>
+        </p:spPr>
+        <p:txBody>
+          <a:bodyPr wrap="square" rtlCol="0" anchor="ctr"/>
+          <a:lstStyle/>
+          <a:p>
+            <a:pPr algn="r" indent="0" marL="0">
+              <a:buNone/>
+            </a:pPr>
+            <a:r>
+              <a:rPr lang="en-US" sz="2800" b="1" dirty="0">
+                <a:solidFill>
+                  <a:srgbClr val="B8860B"/>
+                </a:solidFill>
+                <a:latin typeface="Arial" pitchFamily="34" charset="0"/>
+                <a:ea typeface="Arial" pitchFamily="34" charset="-122"/>
+                <a:cs typeface="Arial" pitchFamily="34" charset="-120"/>
+              </a:rPr>
+              <a:t>1.73%</a:t>
+            </a:r>
+            <a:endParaRPr lang="en-US" sz="2800" dirty="0"/>
+          </a:p>
+        </p:txBody>
+      </p:sp>
+      <p:sp>
+        <p:nvSpPr>
+          <p:cNvPr id="10" name="Text 8"/>
+          <p:cNvSpPr/>
+          <p:nvPr/>
+        </p:nvSpPr>
+        <p:spPr>
+          <a:xfrm>
+            <a:off x="822960" y="2834640"/>
+            <a:ext cx="2743200" cy="347472"/>
           </a:xfrm>
           <a:prstGeom prst="rect">
             <a:avLst/>
@@ -16728,7 +16935,7 @@
                 <a:ea typeface="맑은 고딕" pitchFamily="34" charset="-122"/>
                 <a:cs typeface="맑은 고딕" pitchFamily="34" charset="-120"/>
               </a:rPr>
-              <a:t>연간 임대료</a:t>
+              <a:t>연간 임대수입</a:t>
             </a:r>
             <a:endParaRPr lang="en-US" sz="1100" dirty="0"/>
           </a:p>
@@ -16736,14 +16943,14 @@
       </p:sp>
       <p:sp>
         <p:nvSpPr>
-          <p:cNvPr id="16" name="Text 14"/>
-          <p:cNvSpPr/>
-          <p:nvPr/>
-        </p:nvSpPr>
-        <p:spPr>
-          <a:xfrm>
-            <a:off x="9457639" y="3520440"/>
-            <a:ext cx="1828800" cy="402336"/>
+          <p:cNvPr id="11" name="Text 9"/>
+          <p:cNvSpPr/>
+          <p:nvPr/>
+        </p:nvSpPr>
+        <p:spPr>
+          <a:xfrm>
+            <a:off x="9000439" y="2834640"/>
+            <a:ext cx="2194560" cy="347472"/>
           </a:xfrm>
           <a:prstGeom prst="rect">
             <a:avLst/>
@@ -16759,7 +16966,7 @@
               <a:buNone/>
             </a:pPr>
             <a:r>
-              <a:rPr lang="en-US" sz="1200" b="1" dirty="0">
+              <a:rPr lang="en-US" sz="1200" dirty="0">
                 <a:solidFill>
                   <a:srgbClr val="132A3A"/>
                 </a:solidFill>
@@ -16775,14 +16982,37 @@
       </p:sp>
       <p:sp>
         <p:nvSpPr>
-          <p:cNvPr id="17" name="Text 15"/>
-          <p:cNvSpPr/>
-          <p:nvPr/>
-        </p:nvSpPr>
-        <p:spPr>
-          <a:xfrm>
-            <a:off x="777240" y="3922776"/>
-            <a:ext cx="2743200" cy="402336"/>
+          <p:cNvPr id="12" name="Shape 10"/>
+          <p:cNvSpPr/>
+          <p:nvPr/>
+        </p:nvSpPr>
+        <p:spPr>
+          <a:xfrm>
+            <a:off x="731520" y="3182112"/>
+            <a:ext cx="10600639" cy="0"/>
+          </a:xfrm>
+          <a:prstGeom prst="line">
+            <a:avLst/>
+          </a:prstGeom>
+          <a:noFill/>
+          <a:ln w="6350">
+            <a:solidFill>
+              <a:srgbClr val="E8E8E8"/>
+            </a:solidFill>
+            <a:prstDash val="solid"/>
+          </a:ln>
+        </p:spPr>
+      </p:sp>
+      <p:sp>
+        <p:nvSpPr>
+          <p:cNvPr id="13" name="Text 11"/>
+          <p:cNvSpPr/>
+          <p:nvPr/>
+        </p:nvSpPr>
+        <p:spPr>
+          <a:xfrm>
+            <a:off x="822960" y="3182112"/>
+            <a:ext cx="2743200" cy="347472"/>
           </a:xfrm>
           <a:prstGeom prst="rect">
             <a:avLst/>
@@ -16814,14 +17044,14 @@
       </p:sp>
       <p:sp>
         <p:nvSpPr>
-          <p:cNvPr id="18" name="Text 16"/>
-          <p:cNvSpPr/>
-          <p:nvPr/>
-        </p:nvSpPr>
-        <p:spPr>
-          <a:xfrm>
-            <a:off x="9457639" y="3922776"/>
-            <a:ext cx="1828800" cy="402336"/>
+          <p:cNvPr id="14" name="Text 12"/>
+          <p:cNvSpPr/>
+          <p:nvPr/>
+        </p:nvSpPr>
+        <p:spPr>
+          <a:xfrm>
+            <a:off x="9000439" y="3182112"/>
+            <a:ext cx="2194560" cy="347472"/>
           </a:xfrm>
           <a:prstGeom prst="rect">
             <a:avLst/>
@@ -16837,7 +17067,7 @@
               <a:buNone/>
             </a:pPr>
             <a:r>
-              <a:rPr lang="en-US" sz="1200" b="1" dirty="0">
+              <a:rPr lang="en-US" sz="1200" dirty="0">
                 <a:solidFill>
                   <a:srgbClr val="132A3A"/>
                 </a:solidFill>
@@ -16853,14 +17083,37 @@
       </p:sp>
       <p:sp>
         <p:nvSpPr>
-          <p:cNvPr id="19" name="Text 17"/>
-          <p:cNvSpPr/>
-          <p:nvPr/>
-        </p:nvSpPr>
-        <p:spPr>
-          <a:xfrm>
-            <a:off x="777240" y="4325112"/>
-            <a:ext cx="2743200" cy="402336"/>
+          <p:cNvPr id="15" name="Shape 13"/>
+          <p:cNvSpPr/>
+          <p:nvPr/>
+        </p:nvSpPr>
+        <p:spPr>
+          <a:xfrm>
+            <a:off x="731520" y="3529584"/>
+            <a:ext cx="10600639" cy="0"/>
+          </a:xfrm>
+          <a:prstGeom prst="line">
+            <a:avLst/>
+          </a:prstGeom>
+          <a:noFill/>
+          <a:ln w="6350">
+            <a:solidFill>
+              <a:srgbClr val="E8E8E8"/>
+            </a:solidFill>
+            <a:prstDash val="solid"/>
+          </a:ln>
+        </p:spPr>
+      </p:sp>
+      <p:sp>
+        <p:nvSpPr>
+          <p:cNvPr id="16" name="Text 14"/>
+          <p:cNvSpPr/>
+          <p:nvPr/>
+        </p:nvSpPr>
+        <p:spPr>
+          <a:xfrm>
+            <a:off x="822960" y="3529584"/>
+            <a:ext cx="2743200" cy="347472"/>
           </a:xfrm>
           <a:prstGeom prst="rect">
             <a:avLst/>
@@ -16892,14 +17145,14 @@
       </p:sp>
       <p:sp>
         <p:nvSpPr>
-          <p:cNvPr id="20" name="Text 18"/>
-          <p:cNvSpPr/>
-          <p:nvPr/>
-        </p:nvSpPr>
-        <p:spPr>
-          <a:xfrm>
-            <a:off x="9457639" y="4325112"/>
-            <a:ext cx="1828800" cy="402336"/>
+          <p:cNvPr id="17" name="Text 15"/>
+          <p:cNvSpPr/>
+          <p:nvPr/>
+        </p:nvSpPr>
+        <p:spPr>
+          <a:xfrm>
+            <a:off x="9000439" y="3529584"/>
+            <a:ext cx="2194560" cy="347472"/>
           </a:xfrm>
           <a:prstGeom prst="rect">
             <a:avLst/>
@@ -16915,7 +17168,7 @@
               <a:buNone/>
             </a:pPr>
             <a:r>
-              <a:rPr lang="en-US" sz="1200" b="1" dirty="0">
+              <a:rPr lang="en-US" sz="1200" dirty="0">
                 <a:solidFill>
                   <a:srgbClr val="132A3A"/>
                 </a:solidFill>
@@ -16931,36 +17184,37 @@
       </p:sp>
       <p:sp>
         <p:nvSpPr>
-          <p:cNvPr id="21" name="Shape 19"/>
-          <p:cNvSpPr/>
-          <p:nvPr/>
-        </p:nvSpPr>
-        <p:spPr>
-          <a:xfrm>
-            <a:off x="685800" y="4837176"/>
-            <a:ext cx="10692079" cy="594360"/>
-          </a:xfrm>
-          <a:prstGeom prst="roundRect">
-            <a:avLst>
-              <a:gd name="adj" fmla="val 9231"/>
-            </a:avLst>
-          </a:prstGeom>
-          <a:solidFill>
-            <a:srgbClr val="132A3A"/>
-          </a:solidFill>
-          <a:ln/>
-        </p:spPr>
-      </p:sp>
-      <p:sp>
-        <p:nvSpPr>
-          <p:cNvPr id="22" name="Text 20"/>
-          <p:cNvSpPr/>
-          <p:nvPr/>
-        </p:nvSpPr>
-        <p:spPr>
-          <a:xfrm>
-            <a:off x="868680" y="4837176"/>
-            <a:ext cx="2286000" cy="594360"/>
+          <p:cNvPr id="18" name="Shape 16"/>
+          <p:cNvSpPr/>
+          <p:nvPr/>
+        </p:nvSpPr>
+        <p:spPr>
+          <a:xfrm>
+            <a:off x="731520" y="3877056"/>
+            <a:ext cx="10600639" cy="0"/>
+          </a:xfrm>
+          <a:prstGeom prst="line">
+            <a:avLst/>
+          </a:prstGeom>
+          <a:noFill/>
+          <a:ln w="6350">
+            <a:solidFill>
+              <a:srgbClr val="E8E8E8"/>
+            </a:solidFill>
+            <a:prstDash val="solid"/>
+          </a:ln>
+        </p:spPr>
+      </p:sp>
+      <p:sp>
+        <p:nvSpPr>
+          <p:cNvPr id="19" name="Text 17"/>
+          <p:cNvSpPr/>
+          <p:nvPr/>
+        </p:nvSpPr>
+        <p:spPr>
+          <a:xfrm>
+            <a:off x="822960" y="3877056"/>
+            <a:ext cx="2743200" cy="347472"/>
           </a:xfrm>
           <a:prstGeom prst="rect">
             <a:avLst/>
@@ -16976,30 +17230,30 @@
               <a:buNone/>
             </a:pPr>
             <a:r>
-              <a:rPr lang="en-US" sz="1200" b="1" dirty="0">
+              <a:rPr lang="en-US" sz="1100" dirty="0">
                 <a:solidFill>
-                  <a:srgbClr val="FFFFFF"/>
+                  <a:srgbClr val="5B6B73"/>
                 </a:solidFill>
                 <a:latin typeface="맑은 고딕" pitchFamily="34" charset="0"/>
                 <a:ea typeface="맑은 고딕" pitchFamily="34" charset="-122"/>
                 <a:cs typeface="맑은 고딕" pitchFamily="34" charset="-120"/>
               </a:rPr>
-              <a:t>Cap Rate</a:t>
-            </a:r>
-            <a:endParaRPr lang="en-US" sz="1200" dirty="0"/>
-          </a:p>
-        </p:txBody>
-      </p:sp>
-      <p:sp>
-        <p:nvSpPr>
-          <p:cNvPr id="23" name="Text 21"/>
-          <p:cNvSpPr/>
-          <p:nvPr/>
-        </p:nvSpPr>
-        <p:spPr>
-          <a:xfrm>
-            <a:off x="9183319" y="4837176"/>
-            <a:ext cx="2011680" cy="594360"/>
+              <a:t>순투자금 (매매가 − 보증금)</a:t>
+            </a:r>
+            <a:endParaRPr lang="en-US" sz="1100" dirty="0"/>
+          </a:p>
+        </p:txBody>
+      </p:sp>
+      <p:sp>
+        <p:nvSpPr>
+          <p:cNvPr id="20" name="Text 18"/>
+          <p:cNvSpPr/>
+          <p:nvPr/>
+        </p:nvSpPr>
+        <p:spPr>
+          <a:xfrm>
+            <a:off x="9000439" y="3877056"/>
+            <a:ext cx="2194560" cy="347472"/>
           </a:xfrm>
           <a:prstGeom prst="rect">
             <a:avLst/>
@@ -17015,23 +17269,170 @@
               <a:buNone/>
             </a:pPr>
             <a:r>
-              <a:rPr lang="en-US" sz="2200" b="1" dirty="0">
+              <a:rPr lang="en-US" sz="1200" b="1" dirty="0">
                 <a:solidFill>
-                  <a:srgbClr val="FFFFFF"/>
+                  <a:srgbClr val="B8860B"/>
                 </a:solidFill>
                 <a:latin typeface="Arial" pitchFamily="34" charset="0"/>
                 <a:ea typeface="Arial" pitchFamily="34" charset="-122"/>
                 <a:cs typeface="Arial" pitchFamily="34" charset="-120"/>
               </a:rPr>
-              <a:t>1.73%</a:t>
-            </a:r>
-            <a:endParaRPr lang="en-US" sz="2200" dirty="0"/>
-          </a:p>
-        </p:txBody>
+              <a:t>232.0억원</a:t>
+            </a:r>
+            <a:endParaRPr lang="en-US" sz="1200" dirty="0"/>
+          </a:p>
+        </p:txBody>
+      </p:sp>
+      <p:sp>
+        <p:nvSpPr>
+          <p:cNvPr id="21" name="Shape 19"/>
+          <p:cNvSpPr/>
+          <p:nvPr/>
+        </p:nvSpPr>
+        <p:spPr>
+          <a:xfrm>
+            <a:off x="731520" y="4224528"/>
+            <a:ext cx="10600639" cy="0"/>
+          </a:xfrm>
+          <a:prstGeom prst="line">
+            <a:avLst/>
+          </a:prstGeom>
+          <a:noFill/>
+          <a:ln w="6350">
+            <a:solidFill>
+              <a:srgbClr val="E8E8E8"/>
+            </a:solidFill>
+            <a:prstDash val="solid"/>
+          </a:ln>
+        </p:spPr>
+      </p:sp>
+      <p:sp>
+        <p:nvSpPr>
+          <p:cNvPr id="22" name="Shape 20"/>
+          <p:cNvSpPr/>
+          <p:nvPr/>
+        </p:nvSpPr>
+        <p:spPr>
+          <a:xfrm>
+            <a:off x="502920" y="5897880"/>
+            <a:ext cx="11057839" cy="438912"/>
+          </a:xfrm>
+          <a:prstGeom prst="roundRect">
+            <a:avLst>
+              <a:gd name="adj" fmla="val 12500"/>
+            </a:avLst>
+          </a:prstGeom>
+          <a:solidFill>
+            <a:srgbClr val="E8F4F8"/>
+          </a:solidFill>
+          <a:ln/>
+        </p:spPr>
+      </p:sp>
+      <p:sp>
+        <p:nvSpPr>
+          <p:cNvPr id="23" name="Shape 21"/>
+          <p:cNvSpPr/>
+          <p:nvPr/>
+        </p:nvSpPr>
+        <p:spPr>
+          <a:xfrm>
+            <a:off x="502920" y="5952744"/>
+            <a:ext cx="36576" cy="329184"/>
+          </a:xfrm>
+          <a:prstGeom prst="rect">
+            <a:avLst/>
+          </a:prstGeom>
+          <a:solidFill>
+            <a:srgbClr val="2E6E82"/>
+          </a:solidFill>
+          <a:ln/>
+        </p:spPr>
       </p:sp>
       <p:sp>
         <p:nvSpPr>
           <p:cNvPr id="24" name="Text 22"/>
+          <p:cNvSpPr/>
+          <p:nvPr/>
+        </p:nvSpPr>
+        <p:spPr>
+          <a:xfrm>
+            <a:off x="649224" y="5989320"/>
+            <a:ext cx="10801807" cy="201168"/>
+          </a:xfrm>
+          <a:prstGeom prst="rect">
+            <a:avLst/>
+          </a:prstGeom>
+          <a:noFill/>
+          <a:ln/>
+        </p:spPr>
+        <p:txBody>
+          <a:bodyPr wrap="square" lIns="0" tIns="0" rIns="0" bIns="0" rtlCol="0" anchor="ctr"/>
+          <a:lstStyle/>
+          <a:p>
+            <a:pPr indent="0" marL="0">
+              <a:buNone/>
+            </a:pPr>
+            <a:r>
+              <a:rPr lang="en-US" sz="1050" b="1" dirty="0">
+                <a:solidFill>
+                  <a:srgbClr val="2E6E82"/>
+                </a:solidFill>
+                <a:latin typeface="맑은 고딕" pitchFamily="34" charset="0"/>
+                <a:ea typeface="맑은 고딕" pitchFamily="34" charset="-122"/>
+                <a:cs typeface="맑은 고딕" pitchFamily="34" charset="-120"/>
+              </a:rPr>
+              <a:t>투자 판단 참고</a:t>
+            </a:r>
+            <a:endParaRPr lang="en-US" sz="1050" dirty="0"/>
+          </a:p>
+        </p:txBody>
+      </p:sp>
+      <p:sp>
+        <p:nvSpPr>
+          <p:cNvPr id="25" name="Text 23"/>
+          <p:cNvSpPr/>
+          <p:nvPr/>
+        </p:nvSpPr>
+        <p:spPr>
+          <a:xfrm>
+            <a:off x="649224" y="6190488"/>
+            <a:ext cx="10801807" cy="109728"/>
+          </a:xfrm>
+          <a:prstGeom prst="rect">
+            <a:avLst/>
+          </a:prstGeom>
+          <a:noFill/>
+          <a:ln/>
+        </p:spPr>
+        <p:txBody>
+          <a:bodyPr wrap="square" lIns="0" tIns="0" rIns="0" bIns="0" rtlCol="0" anchor="t"/>
+          <a:lstStyle/>
+          <a:p>
+            <a:pPr marL="342900" indent="-342900">
+              <a:lnSpc>
+                <a:spcPct val="108000"/>
+              </a:lnSpc>
+              <a:buSzPct val="100000"/>
+              <a:buChar char="•"/>
+            </a:pPr>
+            <a:r>
+              <a:rPr lang="en-US" sz="980" dirty="0">
+                <a:solidFill>
+                  <a:srgbClr val="2B2B2B"/>
+                </a:solidFill>
+                <a:latin typeface="맑은 고딕" pitchFamily="34" charset="0"/>
+                <a:ea typeface="맑은 고딕" pitchFamily="34" charset="-122"/>
+                <a:cs typeface="맑은 고딕" pitchFamily="34" charset="-120"/>
+              </a:rPr>
+              <a:t>수익률 1.7%는 시장 평균 하회 — 토지가치 상승 또는 리모델링 후 임대료 증대 가능성 검토 필요</a:t>
+            </a:r>
+            <a:endParaRPr lang="en-US" sz="980" dirty="0"/>
+          </a:p>
+        </p:txBody>
+      </p:sp>
+      <p:sp>
+        <p:nvSpPr>
+          <p:cNvPr id="26" name="Text 24"/>
           <p:cNvSpPr/>
           <p:nvPr/>
         </p:nvSpPr>
@@ -17070,7 +17471,7 @@
       </p:sp>
       <p:sp>
         <p:nvSpPr>
-          <p:cNvPr id="25" name="Text 23"/>
+          <p:cNvPr id="27" name="Text 25"/>
           <p:cNvSpPr/>
           <p:nvPr/>
         </p:nvSpPr>
